--- a/PPT/未来智造（AI Agent）工程师训练营结题海报模板.pptx
+++ b/PPT/未来智造（AI Agent）工程师训练营结题海报模板.pptx
@@ -5,33 +5,26 @@
     <p:sldMasterId id="2147483648" r:id="rId1"/>
   </p:sldMasterIdLst>
   <p:sldIdLst>
-    <p:sldId id="256" r:id="rId3"/>
+    <p:sldId id="256" r:id="rId2"/>
   </p:sldIdLst>
   <p:sldSz cx="15113000" cy="21374100"/>
   <p:notesSz cx="6858000" cy="9144000"/>
   <p:embeddedFontLst>
     <p:embeddedFont>
-      <p:font typeface="字由点字典黑 1 Bold" panose="00020600040101010101" charset="-122"/>
-      <p:regular r:id="rId7"/>
+      <p:font typeface="阿里巴巴普惠体 Medium" panose="02010600030101010101" charset="-122"/>
+      <p:regular r:id="rId3"/>
     </p:embeddedFont>
     <p:embeddedFont>
-      <p:font typeface="阿里巴巴普惠体 Medium" panose="00020600040101010101" charset="-122"/>
-      <p:regular r:id="rId8"/>
+      <p:font typeface="黑体" panose="02010609060101010101" pitchFamily="49" charset="-122"/>
+      <p:regular r:id="rId4"/>
     </p:embeddedFont>
     <p:embeddedFont>
-      <p:font typeface="字由点字典黑 2 Bold" panose="00020600040101010101" charset="-122"/>
-      <p:regular r:id="rId9"/>
+      <p:font typeface="字由点字典黑 1 Bold" panose="02010600030101010101" charset="-122"/>
+      <p:regular r:id="rId5"/>
     </p:embeddedFont>
     <p:embeddedFont>
-      <p:font typeface="字由点字典黑 2 Medium Italics" panose="00020600040101010101" charset="-122"/>
-      <p:regular r:id="rId10"/>
-    </p:embeddedFont>
-    <p:embeddedFont>
-      <p:font typeface="Calibri" panose="020F0502020204030204" charset="0"/>
-      <p:regular r:id="rId11"/>
-      <p:bold r:id="rId12"/>
-      <p:italic r:id="rId13"/>
-      <p:boldItalic r:id="rId14"/>
+      <p:font typeface="字由点字典黑 2 Bold" panose="02010600030101010101" charset="-122"/>
+      <p:regular r:id="rId6"/>
     </p:embeddedFont>
   </p:embeddedFontLst>
   <p:defaultTextStyle>
@@ -186,10 +179,9 @@
           <a:lstStyle/>
           <a:p>
             <a:r>
-              <a:rPr lang="en-US" smtClean="0"/>
+              <a:rPr lang="en-US"/>
               <a:t>Click to edit Master title style</a:t>
             </a:r>
-            <a:endParaRPr lang="en-US"/>
           </a:p>
         </p:txBody>
       </p:sp>
@@ -305,10 +297,9 @@
           </a:lstStyle>
           <a:p>
             <a:r>
-              <a:rPr lang="en-US" smtClean="0"/>
+              <a:rPr lang="en-US"/>
               <a:t>Click to edit Master subtitle style</a:t>
             </a:r>
-            <a:endParaRPr lang="en-US"/>
           </a:p>
         </p:txBody>
       </p:sp>
@@ -329,6 +320,7 @@
           <a:p>
             <a:fld id="{1D8BD707-D9CF-40AE-B4C6-C98DA3205C09}" type="datetimeFigureOut">
               <a:rPr lang="en-US" smtClean="0"/>
+              <a:t>7/13/2026</a:t>
             </a:fld>
             <a:endParaRPr lang="en-US"/>
           </a:p>
@@ -370,6 +362,7 @@
           <a:p>
             <a:fld id="{B6F15528-21DE-4FAA-801E-634DDDAF4B2B}" type="slidenum">
               <a:rPr lang="en-US" smtClean="0"/>
+              <a:t>‹#›</a:t>
             </a:fld>
             <a:endParaRPr lang="en-US"/>
           </a:p>
@@ -416,10 +409,9 @@
           <a:lstStyle/>
           <a:p>
             <a:r>
-              <a:rPr lang="en-US" smtClean="0"/>
+              <a:rPr lang="en-US"/>
               <a:t>Click to edit Master title style</a:t>
             </a:r>
-            <a:endParaRPr lang="en-US"/>
           </a:p>
         </p:txBody>
       </p:sp>
@@ -440,42 +432,37 @@
           <a:p>
             <a:pPr lvl="0"/>
             <a:r>
-              <a:rPr lang="en-US" smtClean="0"/>
+              <a:rPr lang="en-US"/>
               <a:t>Click to edit Master text styles</a:t>
             </a:r>
-            <a:endParaRPr lang="en-US" smtClean="0"/>
           </a:p>
           <a:p>
             <a:pPr lvl="1"/>
             <a:r>
-              <a:rPr lang="en-US" smtClean="0"/>
+              <a:rPr lang="en-US"/>
               <a:t>Second level</a:t>
             </a:r>
-            <a:endParaRPr lang="en-US" smtClean="0"/>
           </a:p>
           <a:p>
             <a:pPr lvl="2"/>
             <a:r>
-              <a:rPr lang="en-US" smtClean="0"/>
+              <a:rPr lang="en-US"/>
               <a:t>Third level</a:t>
             </a:r>
-            <a:endParaRPr lang="en-US" smtClean="0"/>
           </a:p>
           <a:p>
             <a:pPr lvl="3"/>
             <a:r>
-              <a:rPr lang="en-US" smtClean="0"/>
+              <a:rPr lang="en-US"/>
               <a:t>Fourth level</a:t>
             </a:r>
-            <a:endParaRPr lang="en-US" smtClean="0"/>
           </a:p>
           <a:p>
             <a:pPr lvl="4"/>
             <a:r>
-              <a:rPr lang="en-US" smtClean="0"/>
+              <a:rPr lang="en-US"/>
               <a:t>Fifth level</a:t>
             </a:r>
-            <a:endParaRPr lang="en-US"/>
           </a:p>
         </p:txBody>
       </p:sp>
@@ -496,6 +483,7 @@
           <a:p>
             <a:fld id="{1D8BD707-D9CF-40AE-B4C6-C98DA3205C09}" type="datetimeFigureOut">
               <a:rPr lang="en-US" smtClean="0"/>
+              <a:t>7/13/2026</a:t>
             </a:fld>
             <a:endParaRPr lang="en-US"/>
           </a:p>
@@ -537,6 +525,7 @@
           <a:p>
             <a:fld id="{B6F15528-21DE-4FAA-801E-634DDDAF4B2B}" type="slidenum">
               <a:rPr lang="en-US" smtClean="0"/>
+              <a:t>‹#›</a:t>
             </a:fld>
             <a:endParaRPr lang="en-US"/>
           </a:p>
@@ -588,10 +577,9 @@
           <a:lstStyle/>
           <a:p>
             <a:r>
-              <a:rPr lang="en-US" smtClean="0"/>
+              <a:rPr lang="en-US"/>
               <a:t>Click to edit Master title style</a:t>
             </a:r>
-            <a:endParaRPr lang="en-US"/>
           </a:p>
         </p:txBody>
       </p:sp>
@@ -617,42 +605,37 @@
           <a:p>
             <a:pPr lvl="0"/>
             <a:r>
-              <a:rPr lang="en-US" smtClean="0"/>
+              <a:rPr lang="en-US"/>
               <a:t>Click to edit Master text styles</a:t>
             </a:r>
-            <a:endParaRPr lang="en-US" smtClean="0"/>
           </a:p>
           <a:p>
             <a:pPr lvl="1"/>
             <a:r>
-              <a:rPr lang="en-US" smtClean="0"/>
+              <a:rPr lang="en-US"/>
               <a:t>Second level</a:t>
             </a:r>
-            <a:endParaRPr lang="en-US" smtClean="0"/>
           </a:p>
           <a:p>
             <a:pPr lvl="2"/>
             <a:r>
-              <a:rPr lang="en-US" smtClean="0"/>
+              <a:rPr lang="en-US"/>
               <a:t>Third level</a:t>
             </a:r>
-            <a:endParaRPr lang="en-US" smtClean="0"/>
           </a:p>
           <a:p>
             <a:pPr lvl="3"/>
             <a:r>
-              <a:rPr lang="en-US" smtClean="0"/>
+              <a:rPr lang="en-US"/>
               <a:t>Fourth level</a:t>
             </a:r>
-            <a:endParaRPr lang="en-US" smtClean="0"/>
           </a:p>
           <a:p>
             <a:pPr lvl="4"/>
             <a:r>
-              <a:rPr lang="en-US" smtClean="0"/>
+              <a:rPr lang="en-US"/>
               <a:t>Fifth level</a:t>
             </a:r>
-            <a:endParaRPr lang="en-US"/>
           </a:p>
         </p:txBody>
       </p:sp>
@@ -673,6 +656,7 @@
           <a:p>
             <a:fld id="{1D8BD707-D9CF-40AE-B4C6-C98DA3205C09}" type="datetimeFigureOut">
               <a:rPr lang="en-US" smtClean="0"/>
+              <a:t>7/13/2026</a:t>
             </a:fld>
             <a:endParaRPr lang="en-US"/>
           </a:p>
@@ -714,6 +698,7 @@
           <a:p>
             <a:fld id="{B6F15528-21DE-4FAA-801E-634DDDAF4B2B}" type="slidenum">
               <a:rPr lang="en-US" smtClean="0"/>
+              <a:t>‹#›</a:t>
             </a:fld>
             <a:endParaRPr lang="en-US"/>
           </a:p>
@@ -760,10 +745,9 @@
           <a:lstStyle/>
           <a:p>
             <a:r>
-              <a:rPr lang="en-US" smtClean="0"/>
+              <a:rPr lang="en-US"/>
               <a:t>Click to edit Master title style</a:t>
             </a:r>
-            <a:endParaRPr lang="en-US"/>
           </a:p>
         </p:txBody>
       </p:sp>
@@ -784,42 +768,37 @@
           <a:p>
             <a:pPr lvl="0"/>
             <a:r>
-              <a:rPr lang="en-US" smtClean="0"/>
+              <a:rPr lang="en-US"/>
               <a:t>Click to edit Master text styles</a:t>
             </a:r>
-            <a:endParaRPr lang="en-US" smtClean="0"/>
           </a:p>
           <a:p>
             <a:pPr lvl="1"/>
             <a:r>
-              <a:rPr lang="en-US" smtClean="0"/>
+              <a:rPr lang="en-US"/>
               <a:t>Second level</a:t>
             </a:r>
-            <a:endParaRPr lang="en-US" smtClean="0"/>
           </a:p>
           <a:p>
             <a:pPr lvl="2"/>
             <a:r>
-              <a:rPr lang="en-US" smtClean="0"/>
+              <a:rPr lang="en-US"/>
               <a:t>Third level</a:t>
             </a:r>
-            <a:endParaRPr lang="en-US" smtClean="0"/>
           </a:p>
           <a:p>
             <a:pPr lvl="3"/>
             <a:r>
-              <a:rPr lang="en-US" smtClean="0"/>
+              <a:rPr lang="en-US"/>
               <a:t>Fourth level</a:t>
             </a:r>
-            <a:endParaRPr lang="en-US" smtClean="0"/>
           </a:p>
           <a:p>
             <a:pPr lvl="4"/>
             <a:r>
-              <a:rPr lang="en-US" smtClean="0"/>
+              <a:rPr lang="en-US"/>
               <a:t>Fifth level</a:t>
             </a:r>
-            <a:endParaRPr lang="en-US"/>
           </a:p>
         </p:txBody>
       </p:sp>
@@ -840,6 +819,7 @@
           <a:p>
             <a:fld id="{1D8BD707-D9CF-40AE-B4C6-C98DA3205C09}" type="datetimeFigureOut">
               <a:rPr lang="en-US" smtClean="0"/>
+              <a:t>7/13/2026</a:t>
             </a:fld>
             <a:endParaRPr lang="en-US"/>
           </a:p>
@@ -881,6 +861,7 @@
           <a:p>
             <a:fld id="{B6F15528-21DE-4FAA-801E-634DDDAF4B2B}" type="slidenum">
               <a:rPr lang="en-US" smtClean="0"/>
+              <a:t>‹#›</a:t>
             </a:fld>
             <a:endParaRPr lang="en-US"/>
           </a:p>
@@ -936,10 +917,9 @@
           </a:lstStyle>
           <a:p>
             <a:r>
-              <a:rPr lang="en-US" smtClean="0"/>
+              <a:rPr lang="en-US"/>
               <a:t>Click to edit Master title style</a:t>
             </a:r>
-            <a:endParaRPr lang="en-US"/>
           </a:p>
         </p:txBody>
       </p:sp>
@@ -1056,10 +1036,9 @@
           <a:p>
             <a:pPr lvl="0"/>
             <a:r>
-              <a:rPr lang="en-US" smtClean="0"/>
+              <a:rPr lang="en-US"/>
               <a:t>Click to edit Master text styles</a:t>
             </a:r>
-            <a:endParaRPr lang="en-US" smtClean="0"/>
           </a:p>
         </p:txBody>
       </p:sp>
@@ -1080,6 +1059,7 @@
           <a:p>
             <a:fld id="{1D8BD707-D9CF-40AE-B4C6-C98DA3205C09}" type="datetimeFigureOut">
               <a:rPr lang="en-US" smtClean="0"/>
+              <a:t>7/13/2026</a:t>
             </a:fld>
             <a:endParaRPr lang="en-US"/>
           </a:p>
@@ -1121,6 +1101,7 @@
           <a:p>
             <a:fld id="{B6F15528-21DE-4FAA-801E-634DDDAF4B2B}" type="slidenum">
               <a:rPr lang="en-US" smtClean="0"/>
+              <a:t>‹#›</a:t>
             </a:fld>
             <a:endParaRPr lang="en-US"/>
           </a:p>
@@ -1167,10 +1148,9 @@
           <a:lstStyle/>
           <a:p>
             <a:r>
-              <a:rPr lang="en-US" smtClean="0"/>
+              <a:rPr lang="en-US"/>
               <a:t>Click to edit Master title style</a:t>
             </a:r>
-            <a:endParaRPr lang="en-US"/>
           </a:p>
         </p:txBody>
       </p:sp>
@@ -1224,42 +1204,37 @@
           <a:p>
             <a:pPr lvl="0"/>
             <a:r>
-              <a:rPr lang="en-US" smtClean="0"/>
+              <a:rPr lang="en-US"/>
               <a:t>Click to edit Master text styles</a:t>
             </a:r>
-            <a:endParaRPr lang="en-US" smtClean="0"/>
           </a:p>
           <a:p>
             <a:pPr lvl="1"/>
             <a:r>
-              <a:rPr lang="en-US" smtClean="0"/>
+              <a:rPr lang="en-US"/>
               <a:t>Second level</a:t>
             </a:r>
-            <a:endParaRPr lang="en-US" smtClean="0"/>
           </a:p>
           <a:p>
             <a:pPr lvl="2"/>
             <a:r>
-              <a:rPr lang="en-US" smtClean="0"/>
+              <a:rPr lang="en-US"/>
               <a:t>Third level</a:t>
             </a:r>
-            <a:endParaRPr lang="en-US" smtClean="0"/>
           </a:p>
           <a:p>
             <a:pPr lvl="3"/>
             <a:r>
-              <a:rPr lang="en-US" smtClean="0"/>
+              <a:rPr lang="en-US"/>
               <a:t>Fourth level</a:t>
             </a:r>
-            <a:endParaRPr lang="en-US" smtClean="0"/>
           </a:p>
           <a:p>
             <a:pPr lvl="4"/>
             <a:r>
-              <a:rPr lang="en-US" smtClean="0"/>
+              <a:rPr lang="en-US"/>
               <a:t>Fifth level</a:t>
             </a:r>
-            <a:endParaRPr lang="en-US"/>
           </a:p>
         </p:txBody>
       </p:sp>
@@ -1313,42 +1288,37 @@
           <a:p>
             <a:pPr lvl="0"/>
             <a:r>
-              <a:rPr lang="en-US" smtClean="0"/>
+              <a:rPr lang="en-US"/>
               <a:t>Click to edit Master text styles</a:t>
             </a:r>
-            <a:endParaRPr lang="en-US" smtClean="0"/>
           </a:p>
           <a:p>
             <a:pPr lvl="1"/>
             <a:r>
-              <a:rPr lang="en-US" smtClean="0"/>
+              <a:rPr lang="en-US"/>
               <a:t>Second level</a:t>
             </a:r>
-            <a:endParaRPr lang="en-US" smtClean="0"/>
           </a:p>
           <a:p>
             <a:pPr lvl="2"/>
             <a:r>
-              <a:rPr lang="en-US" smtClean="0"/>
+              <a:rPr lang="en-US"/>
               <a:t>Third level</a:t>
             </a:r>
-            <a:endParaRPr lang="en-US" smtClean="0"/>
           </a:p>
           <a:p>
             <a:pPr lvl="3"/>
             <a:r>
-              <a:rPr lang="en-US" smtClean="0"/>
+              <a:rPr lang="en-US"/>
               <a:t>Fourth level</a:t>
             </a:r>
-            <a:endParaRPr lang="en-US" smtClean="0"/>
           </a:p>
           <a:p>
             <a:pPr lvl="4"/>
             <a:r>
-              <a:rPr lang="en-US" smtClean="0"/>
+              <a:rPr lang="en-US"/>
               <a:t>Fifth level</a:t>
             </a:r>
-            <a:endParaRPr lang="en-US"/>
           </a:p>
         </p:txBody>
       </p:sp>
@@ -1369,6 +1339,7 @@
           <a:p>
             <a:fld id="{1D8BD707-D9CF-40AE-B4C6-C98DA3205C09}" type="datetimeFigureOut">
               <a:rPr lang="en-US" smtClean="0"/>
+              <a:t>7/13/2026</a:t>
             </a:fld>
             <a:endParaRPr lang="en-US"/>
           </a:p>
@@ -1410,6 +1381,7 @@
           <a:p>
             <a:fld id="{B6F15528-21DE-4FAA-801E-634DDDAF4B2B}" type="slidenum">
               <a:rPr lang="en-US" smtClean="0"/>
+              <a:t>‹#›</a:t>
             </a:fld>
             <a:endParaRPr lang="en-US"/>
           </a:p>
@@ -1460,10 +1432,9 @@
           </a:lstStyle>
           <a:p>
             <a:r>
-              <a:rPr lang="en-US" smtClean="0"/>
+              <a:rPr lang="en-US"/>
               <a:t>Click to edit Master title style</a:t>
             </a:r>
-            <a:endParaRPr lang="en-US"/>
           </a:p>
         </p:txBody>
       </p:sp>
@@ -1526,10 +1497,9 @@
           <a:p>
             <a:pPr lvl="0"/>
             <a:r>
-              <a:rPr lang="en-US" smtClean="0"/>
+              <a:rPr lang="en-US"/>
               <a:t>Click to edit Master text styles</a:t>
             </a:r>
-            <a:endParaRPr lang="en-US" smtClean="0"/>
           </a:p>
         </p:txBody>
       </p:sp>
@@ -1583,42 +1553,37 @@
           <a:p>
             <a:pPr lvl="0"/>
             <a:r>
-              <a:rPr lang="en-US" smtClean="0"/>
+              <a:rPr lang="en-US"/>
               <a:t>Click to edit Master text styles</a:t>
             </a:r>
-            <a:endParaRPr lang="en-US" smtClean="0"/>
           </a:p>
           <a:p>
             <a:pPr lvl="1"/>
             <a:r>
-              <a:rPr lang="en-US" smtClean="0"/>
+              <a:rPr lang="en-US"/>
               <a:t>Second level</a:t>
             </a:r>
-            <a:endParaRPr lang="en-US" smtClean="0"/>
           </a:p>
           <a:p>
             <a:pPr lvl="2"/>
             <a:r>
-              <a:rPr lang="en-US" smtClean="0"/>
+              <a:rPr lang="en-US"/>
               <a:t>Third level</a:t>
             </a:r>
-            <a:endParaRPr lang="en-US" smtClean="0"/>
           </a:p>
           <a:p>
             <a:pPr lvl="3"/>
             <a:r>
-              <a:rPr lang="en-US" smtClean="0"/>
+              <a:rPr lang="en-US"/>
               <a:t>Fourth level</a:t>
             </a:r>
-            <a:endParaRPr lang="en-US" smtClean="0"/>
           </a:p>
           <a:p>
             <a:pPr lvl="4"/>
             <a:r>
-              <a:rPr lang="en-US" smtClean="0"/>
+              <a:rPr lang="en-US"/>
               <a:t>Fifth level</a:t>
             </a:r>
-            <a:endParaRPr lang="en-US"/>
           </a:p>
         </p:txBody>
       </p:sp>
@@ -1681,10 +1646,9 @@
           <a:p>
             <a:pPr lvl="0"/>
             <a:r>
-              <a:rPr lang="en-US" smtClean="0"/>
+              <a:rPr lang="en-US"/>
               <a:t>Click to edit Master text styles</a:t>
             </a:r>
-            <a:endParaRPr lang="en-US" smtClean="0"/>
           </a:p>
         </p:txBody>
       </p:sp>
@@ -1738,42 +1702,37 @@
           <a:p>
             <a:pPr lvl="0"/>
             <a:r>
-              <a:rPr lang="en-US" smtClean="0"/>
+              <a:rPr lang="en-US"/>
               <a:t>Click to edit Master text styles</a:t>
             </a:r>
-            <a:endParaRPr lang="en-US" smtClean="0"/>
           </a:p>
           <a:p>
             <a:pPr lvl="1"/>
             <a:r>
-              <a:rPr lang="en-US" smtClean="0"/>
+              <a:rPr lang="en-US"/>
               <a:t>Second level</a:t>
             </a:r>
-            <a:endParaRPr lang="en-US" smtClean="0"/>
           </a:p>
           <a:p>
             <a:pPr lvl="2"/>
             <a:r>
-              <a:rPr lang="en-US" smtClean="0"/>
+              <a:rPr lang="en-US"/>
               <a:t>Third level</a:t>
             </a:r>
-            <a:endParaRPr lang="en-US" smtClean="0"/>
           </a:p>
           <a:p>
             <a:pPr lvl="3"/>
             <a:r>
-              <a:rPr lang="en-US" smtClean="0"/>
+              <a:rPr lang="en-US"/>
               <a:t>Fourth level</a:t>
             </a:r>
-            <a:endParaRPr lang="en-US" smtClean="0"/>
           </a:p>
           <a:p>
             <a:pPr lvl="4"/>
             <a:r>
-              <a:rPr lang="en-US" smtClean="0"/>
+              <a:rPr lang="en-US"/>
               <a:t>Fifth level</a:t>
             </a:r>
-            <a:endParaRPr lang="en-US"/>
           </a:p>
         </p:txBody>
       </p:sp>
@@ -1794,6 +1753,7 @@
           <a:p>
             <a:fld id="{1D8BD707-D9CF-40AE-B4C6-C98DA3205C09}" type="datetimeFigureOut">
               <a:rPr lang="en-US" smtClean="0"/>
+              <a:t>7/13/2026</a:t>
             </a:fld>
             <a:endParaRPr lang="en-US"/>
           </a:p>
@@ -1835,6 +1795,7 @@
           <a:p>
             <a:fld id="{B6F15528-21DE-4FAA-801E-634DDDAF4B2B}" type="slidenum">
               <a:rPr lang="en-US" smtClean="0"/>
+              <a:t>‹#›</a:t>
             </a:fld>
             <a:endParaRPr lang="en-US"/>
           </a:p>
@@ -1881,10 +1842,9 @@
           <a:lstStyle/>
           <a:p>
             <a:r>
-              <a:rPr lang="en-US" smtClean="0"/>
+              <a:rPr lang="en-US"/>
               <a:t>Click to edit Master title style</a:t>
             </a:r>
-            <a:endParaRPr lang="en-US"/>
           </a:p>
         </p:txBody>
       </p:sp>
@@ -1905,6 +1865,7 @@
           <a:p>
             <a:fld id="{1D8BD707-D9CF-40AE-B4C6-C98DA3205C09}" type="datetimeFigureOut">
               <a:rPr lang="en-US" smtClean="0"/>
+              <a:t>7/13/2026</a:t>
             </a:fld>
             <a:endParaRPr lang="en-US"/>
           </a:p>
@@ -1946,6 +1907,7 @@
           <a:p>
             <a:fld id="{B6F15528-21DE-4FAA-801E-634DDDAF4B2B}" type="slidenum">
               <a:rPr lang="en-US" smtClean="0"/>
+              <a:t>‹#›</a:t>
             </a:fld>
             <a:endParaRPr lang="en-US"/>
           </a:p>
@@ -1993,6 +1955,7 @@
           <a:p>
             <a:fld id="{1D8BD707-D9CF-40AE-B4C6-C98DA3205C09}" type="datetimeFigureOut">
               <a:rPr lang="en-US" smtClean="0"/>
+              <a:t>7/13/2026</a:t>
             </a:fld>
             <a:endParaRPr lang="en-US"/>
           </a:p>
@@ -2034,6 +1997,7 @@
           <a:p>
             <a:fld id="{B6F15528-21DE-4FAA-801E-634DDDAF4B2B}" type="slidenum">
               <a:rPr lang="en-US" smtClean="0"/>
+              <a:t>‹#›</a:t>
             </a:fld>
             <a:endParaRPr lang="en-US"/>
           </a:p>
@@ -2089,10 +2053,9 @@
           </a:lstStyle>
           <a:p>
             <a:r>
-              <a:rPr lang="en-US" smtClean="0"/>
+              <a:rPr lang="en-US"/>
               <a:t>Click to edit Master title style</a:t>
             </a:r>
-            <a:endParaRPr lang="en-US"/>
           </a:p>
         </p:txBody>
       </p:sp>
@@ -2146,42 +2109,37 @@
           <a:p>
             <a:pPr lvl="0"/>
             <a:r>
-              <a:rPr lang="en-US" smtClean="0"/>
+              <a:rPr lang="en-US"/>
               <a:t>Click to edit Master text styles</a:t>
             </a:r>
-            <a:endParaRPr lang="en-US" smtClean="0"/>
           </a:p>
           <a:p>
             <a:pPr lvl="1"/>
             <a:r>
-              <a:rPr lang="en-US" smtClean="0"/>
+              <a:rPr lang="en-US"/>
               <a:t>Second level</a:t>
             </a:r>
-            <a:endParaRPr lang="en-US" smtClean="0"/>
           </a:p>
           <a:p>
             <a:pPr lvl="2"/>
             <a:r>
-              <a:rPr lang="en-US" smtClean="0"/>
+              <a:rPr lang="en-US"/>
               <a:t>Third level</a:t>
             </a:r>
-            <a:endParaRPr lang="en-US" smtClean="0"/>
           </a:p>
           <a:p>
             <a:pPr lvl="3"/>
             <a:r>
-              <a:rPr lang="en-US" smtClean="0"/>
+              <a:rPr lang="en-US"/>
               <a:t>Fourth level</a:t>
             </a:r>
-            <a:endParaRPr lang="en-US" smtClean="0"/>
           </a:p>
           <a:p>
             <a:pPr lvl="4"/>
             <a:r>
-              <a:rPr lang="en-US" smtClean="0"/>
+              <a:rPr lang="en-US"/>
               <a:t>Fifth level</a:t>
             </a:r>
-            <a:endParaRPr lang="en-US"/>
           </a:p>
         </p:txBody>
       </p:sp>
@@ -2244,10 +2202,9 @@
           <a:p>
             <a:pPr lvl="0"/>
             <a:r>
-              <a:rPr lang="en-US" smtClean="0"/>
+              <a:rPr lang="en-US"/>
               <a:t>Click to edit Master text styles</a:t>
             </a:r>
-            <a:endParaRPr lang="en-US" smtClean="0"/>
           </a:p>
         </p:txBody>
       </p:sp>
@@ -2268,6 +2225,7 @@
           <a:p>
             <a:fld id="{1D8BD707-D9CF-40AE-B4C6-C98DA3205C09}" type="datetimeFigureOut">
               <a:rPr lang="en-US" smtClean="0"/>
+              <a:t>7/13/2026</a:t>
             </a:fld>
             <a:endParaRPr lang="en-US"/>
           </a:p>
@@ -2309,6 +2267,7 @@
           <a:p>
             <a:fld id="{B6F15528-21DE-4FAA-801E-634DDDAF4B2B}" type="slidenum">
               <a:rPr lang="en-US" smtClean="0"/>
+              <a:t>‹#›</a:t>
             </a:fld>
             <a:endParaRPr lang="en-US"/>
           </a:p>
@@ -2364,10 +2323,9 @@
           </a:lstStyle>
           <a:p>
             <a:r>
-              <a:rPr lang="en-US" smtClean="0"/>
+              <a:rPr lang="en-US"/>
               <a:t>Click to edit Master title style</a:t>
             </a:r>
-            <a:endParaRPr lang="en-US"/>
           </a:p>
         </p:txBody>
       </p:sp>
@@ -2491,10 +2449,9 @@
           <a:p>
             <a:pPr lvl="0"/>
             <a:r>
-              <a:rPr lang="en-US" smtClean="0"/>
+              <a:rPr lang="en-US"/>
               <a:t>Click to edit Master text styles</a:t>
             </a:r>
-            <a:endParaRPr lang="en-US" smtClean="0"/>
           </a:p>
         </p:txBody>
       </p:sp>
@@ -2515,6 +2472,7 @@
           <a:p>
             <a:fld id="{1D8BD707-D9CF-40AE-B4C6-C98DA3205C09}" type="datetimeFigureOut">
               <a:rPr lang="en-US" smtClean="0"/>
+              <a:t>7/13/2026</a:t>
             </a:fld>
             <a:endParaRPr lang="en-US"/>
           </a:p>
@@ -2556,6 +2514,7 @@
           <a:p>
             <a:fld id="{B6F15528-21DE-4FAA-801E-634DDDAF4B2B}" type="slidenum">
               <a:rPr lang="en-US" smtClean="0"/>
+              <a:t>‹#›</a:t>
             </a:fld>
             <a:endParaRPr lang="en-US"/>
           </a:p>
@@ -2617,10 +2576,9 @@
           <a:lstStyle/>
           <a:p>
             <a:r>
-              <a:rPr lang="en-US" smtClean="0"/>
+              <a:rPr lang="en-US"/>
               <a:t>Click to edit Master title style</a:t>
             </a:r>
-            <a:endParaRPr lang="en-US"/>
           </a:p>
         </p:txBody>
       </p:sp>
@@ -2651,42 +2609,37 @@
           <a:p>
             <a:pPr lvl="0"/>
             <a:r>
-              <a:rPr lang="en-US" smtClean="0"/>
+              <a:rPr lang="en-US"/>
               <a:t>Click to edit Master text styles</a:t>
             </a:r>
-            <a:endParaRPr lang="en-US" smtClean="0"/>
           </a:p>
           <a:p>
             <a:pPr lvl="1"/>
             <a:r>
-              <a:rPr lang="en-US" smtClean="0"/>
+              <a:rPr lang="en-US"/>
               <a:t>Second level</a:t>
             </a:r>
-            <a:endParaRPr lang="en-US" smtClean="0"/>
           </a:p>
           <a:p>
             <a:pPr lvl="2"/>
             <a:r>
-              <a:rPr lang="en-US" smtClean="0"/>
+              <a:rPr lang="en-US"/>
               <a:t>Third level</a:t>
             </a:r>
-            <a:endParaRPr lang="en-US" smtClean="0"/>
           </a:p>
           <a:p>
             <a:pPr lvl="3"/>
             <a:r>
-              <a:rPr lang="en-US" smtClean="0"/>
+              <a:rPr lang="en-US"/>
               <a:t>Fourth level</a:t>
             </a:r>
-            <a:endParaRPr lang="en-US" smtClean="0"/>
           </a:p>
           <a:p>
             <a:pPr lvl="4"/>
             <a:r>
-              <a:rPr lang="en-US" smtClean="0"/>
+              <a:rPr lang="en-US"/>
               <a:t>Fifth level</a:t>
             </a:r>
-            <a:endParaRPr lang="en-US"/>
           </a:p>
         </p:txBody>
       </p:sp>
@@ -2725,6 +2678,7 @@
           <a:p>
             <a:fld id="{1D8BD707-D9CF-40AE-B4C6-C98DA3205C09}" type="datetimeFigureOut">
               <a:rPr lang="en-US" smtClean="0"/>
+              <a:t>7/13/2026</a:t>
             </a:fld>
             <a:endParaRPr lang="en-US"/>
           </a:p>
@@ -2802,6 +2756,7 @@
           <a:p>
             <a:fld id="{B6F15528-21DE-4FAA-801E-634DDDAF4B2B}" type="slidenum">
               <a:rPr lang="en-US" smtClean="0"/>
+              <a:t>‹#›</a:t>
             </a:fld>
             <a:endParaRPr lang="en-US"/>
           </a:p>
@@ -3108,7 +3063,7 @@
           <p:nvPr/>
         </p:nvGrpSpPr>
         <p:grpSpPr>
-          <a:xfrm rot="0">
+          <a:xfrm>
             <a:off x="360684" y="20496454"/>
             <a:ext cx="14398631" cy="615197"/>
             <a:chOff x="0" y="0"/>
@@ -3176,6 +3131,13 @@
               <a:miter/>
             </a:ln>
           </p:spPr>
+          <p:txBody>
+            <a:bodyPr/>
+            <a:lstStyle/>
+            <a:p>
+              <a:endParaRPr lang="zh-CN" altLang="en-US"/>
+            </a:p>
+          </p:txBody>
         </p:sp>
         <p:sp>
           <p:nvSpPr>
@@ -3204,6 +3166,7 @@
                   <a:spcPct val="0"/>
                 </a:spcBef>
               </a:pPr>
+              <a:endParaRPr/>
             </a:p>
           </p:txBody>
         </p:sp>
@@ -3215,7 +3178,7 @@
           <p:nvPr/>
         </p:nvGrpSpPr>
         <p:grpSpPr>
-          <a:xfrm rot="0">
+          <a:xfrm>
             <a:off x="359854" y="5418194"/>
             <a:ext cx="4517474" cy="5731690"/>
             <a:chOff x="0" y="0"/>
@@ -3266,6 +3229,13 @@
               <a:miter/>
             </a:ln>
           </p:spPr>
+          <p:txBody>
+            <a:bodyPr/>
+            <a:lstStyle/>
+            <a:p>
+              <a:endParaRPr lang="zh-CN" altLang="en-US"/>
+            </a:p>
+          </p:txBody>
         </p:sp>
         <p:sp>
           <p:nvSpPr>
@@ -3294,6 +3264,7 @@
                   <a:spcPct val="0"/>
                 </a:spcBef>
               </a:pPr>
+              <a:endParaRPr/>
             </a:p>
           </p:txBody>
         </p:sp>
@@ -3305,7 +3276,7 @@
           <p:nvPr/>
         </p:nvGrpSpPr>
         <p:grpSpPr>
-          <a:xfrm rot="0">
+          <a:xfrm>
             <a:off x="5086861" y="5402517"/>
             <a:ext cx="4698705" cy="5731690"/>
             <a:chOff x="0" y="0"/>
@@ -3356,6 +3327,13 @@
               <a:miter/>
             </a:ln>
           </p:spPr>
+          <p:txBody>
+            <a:bodyPr/>
+            <a:lstStyle/>
+            <a:p>
+              <a:endParaRPr lang="zh-CN" altLang="en-US"/>
+            </a:p>
+          </p:txBody>
         </p:sp>
         <p:sp>
           <p:nvSpPr>
@@ -3384,6 +3362,7 @@
                   <a:spcPct val="0"/>
                 </a:spcBef>
               </a:pPr>
+              <a:endParaRPr/>
             </a:p>
           </p:txBody>
         </p:sp>
@@ -3395,7 +3374,7 @@
           <p:nvPr/>
         </p:nvGrpSpPr>
         <p:grpSpPr>
-          <a:xfrm rot="0">
+          <a:xfrm>
             <a:off x="-31750" y="-2490470"/>
             <a:ext cx="15145385" cy="4709160"/>
             <a:chOff x="0" y="0"/>
@@ -3458,6 +3437,13 @@
               <a:lin ang="0"/>
             </a:gradFill>
           </p:spPr>
+          <p:txBody>
+            <a:bodyPr/>
+            <a:lstStyle/>
+            <a:p>
+              <a:endParaRPr lang="zh-CN" altLang="en-US"/>
+            </a:p>
+          </p:txBody>
         </p:sp>
         <p:sp>
           <p:nvSpPr>
@@ -3483,6 +3469,7 @@
                   <a:spcPts val="2880"/>
                 </a:lnSpc>
               </a:pPr>
+              <a:endParaRPr/>
             </a:p>
           </p:txBody>
         </p:sp>
@@ -3526,7 +3513,7 @@
             </a:pathLst>
           </a:custGeom>
           <a:blipFill>
-            <a:blip r:embed="rId1">
+            <a:blip r:embed="rId2">
               <a:alphaModFix amt="23000"/>
             </a:blip>
             <a:stretch>
@@ -3534,6 +3521,13 @@
             </a:stretch>
           </a:blipFill>
         </p:spPr>
+        <p:txBody>
+          <a:bodyPr/>
+          <a:lstStyle/>
+          <a:p>
+            <a:endParaRPr lang="zh-CN" altLang="en-US"/>
+          </a:p>
+        </p:txBody>
       </p:sp>
       <p:grpSp>
         <p:nvGrpSpPr>
@@ -3542,7 +3536,7 @@
           <p:nvPr/>
         </p:nvGrpSpPr>
         <p:grpSpPr>
-          <a:xfrm rot="0">
+          <a:xfrm>
             <a:off x="9981806" y="11372332"/>
             <a:ext cx="4777509" cy="8895522"/>
             <a:chOff x="0" y="0"/>
@@ -3593,6 +3587,13 @@
               <a:miter/>
             </a:ln>
           </p:spPr>
+          <p:txBody>
+            <a:bodyPr/>
+            <a:lstStyle/>
+            <a:p>
+              <a:endParaRPr lang="zh-CN" altLang="en-US"/>
+            </a:p>
+          </p:txBody>
         </p:sp>
         <p:sp>
           <p:nvSpPr>
@@ -3618,6 +3619,7 @@
                   <a:spcPts val="3675"/>
                 </a:lnSpc>
               </a:pPr>
+              <a:endParaRPr/>
             </a:p>
           </p:txBody>
         </p:sp>
@@ -3629,7 +3631,7 @@
           <p:nvPr/>
         </p:nvGrpSpPr>
         <p:grpSpPr>
-          <a:xfrm rot="0">
+          <a:xfrm>
             <a:off x="9981806" y="11368959"/>
             <a:ext cx="4785288" cy="632625"/>
             <a:chOff x="0" y="0"/>
@@ -3692,6 +3694,13 @@
               <a:lin ang="0"/>
             </a:gradFill>
           </p:spPr>
+          <p:txBody>
+            <a:bodyPr/>
+            <a:lstStyle/>
+            <a:p>
+              <a:endParaRPr lang="zh-CN" altLang="en-US"/>
+            </a:p>
+          </p:txBody>
         </p:sp>
         <p:sp>
           <p:nvSpPr>
@@ -3717,6 +3726,7 @@
                   <a:spcPts val="3675"/>
                 </a:lnSpc>
               </a:pPr>
+              <a:endParaRPr/>
             </a:p>
           </p:txBody>
         </p:sp>
@@ -3728,7 +3738,7 @@
           <p:nvPr/>
         </p:nvGrpSpPr>
         <p:grpSpPr>
-          <a:xfrm rot="0">
+          <a:xfrm>
             <a:off x="360684" y="2753207"/>
             <a:ext cx="14398631" cy="2430235"/>
             <a:chOff x="0" y="0"/>
@@ -3779,6 +3789,13 @@
               <a:miter/>
             </a:ln>
           </p:spPr>
+          <p:txBody>
+            <a:bodyPr/>
+            <a:lstStyle/>
+            <a:p>
+              <a:endParaRPr lang="zh-CN" altLang="en-US"/>
+            </a:p>
+          </p:txBody>
         </p:sp>
         <p:sp>
           <p:nvSpPr>
@@ -3804,6 +3821,7 @@
                   <a:spcPts val="3675"/>
                 </a:lnSpc>
               </a:pPr>
+              <a:endParaRPr/>
             </a:p>
           </p:txBody>
         </p:sp>
@@ -3815,7 +3833,7 @@
           <p:nvPr/>
         </p:nvGrpSpPr>
         <p:grpSpPr>
-          <a:xfrm rot="0">
+          <a:xfrm>
             <a:off x="360684" y="2753207"/>
             <a:ext cx="14398631" cy="576539"/>
             <a:chOff x="0" y="0"/>
@@ -3878,6 +3896,13 @@
               <a:lin ang="0"/>
             </a:gradFill>
           </p:spPr>
+          <p:txBody>
+            <a:bodyPr/>
+            <a:lstStyle/>
+            <a:p>
+              <a:endParaRPr lang="zh-CN" altLang="en-US"/>
+            </a:p>
+          </p:txBody>
         </p:sp>
         <p:sp>
           <p:nvSpPr>
@@ -3903,6 +3928,7 @@
                   <a:spcPts val="3675"/>
                 </a:lnSpc>
               </a:pPr>
+              <a:endParaRPr/>
             </a:p>
           </p:txBody>
         </p:sp>
@@ -3914,7 +3940,7 @@
           <p:nvPr/>
         </p:nvGrpSpPr>
         <p:grpSpPr>
-          <a:xfrm rot="0">
+          <a:xfrm>
             <a:off x="361837" y="5418194"/>
             <a:ext cx="4513509" cy="603360"/>
             <a:chOff x="0" y="0"/>
@@ -3977,6 +4003,13 @@
               <a:lin ang="0"/>
             </a:gradFill>
           </p:spPr>
+          <p:txBody>
+            <a:bodyPr/>
+            <a:lstStyle/>
+            <a:p>
+              <a:endParaRPr lang="zh-CN" altLang="en-US"/>
+            </a:p>
+          </p:txBody>
         </p:sp>
         <p:sp>
           <p:nvSpPr>
@@ -4002,6 +4035,7 @@
                   <a:spcPts val="3675"/>
                 </a:lnSpc>
               </a:pPr>
+              <a:endParaRPr/>
             </a:p>
           </p:txBody>
         </p:sp>
@@ -4013,7 +4047,7 @@
           <p:nvPr/>
         </p:nvGrpSpPr>
         <p:grpSpPr>
-          <a:xfrm rot="0">
+          <a:xfrm>
             <a:off x="359854" y="11368959"/>
             <a:ext cx="9458883" cy="8898896"/>
             <a:chOff x="0" y="0"/>
@@ -4064,6 +4098,13 @@
               <a:miter/>
             </a:ln>
           </p:spPr>
+          <p:txBody>
+            <a:bodyPr/>
+            <a:lstStyle/>
+            <a:p>
+              <a:endParaRPr lang="zh-CN" altLang="en-US"/>
+            </a:p>
+          </p:txBody>
         </p:sp>
         <p:sp>
           <p:nvSpPr>
@@ -4092,6 +4133,7 @@
                   <a:spcPct val="0"/>
                 </a:spcBef>
               </a:pPr>
+              <a:endParaRPr/>
             </a:p>
           </p:txBody>
         </p:sp>
@@ -4105,7 +4147,7 @@
           <p:nvPr/>
         </p:nvPicPr>
         <p:blipFill>
-          <a:blip r:embed="rId2"/>
+          <a:blip r:embed="rId3"/>
           <a:stretch>
             <a:fillRect/>
           </a:stretch>
@@ -4127,7 +4169,7 @@
           <p:nvPr/>
         </p:nvGrpSpPr>
         <p:grpSpPr>
-          <a:xfrm rot="0">
+          <a:xfrm>
             <a:off x="5086861" y="5402517"/>
             <a:ext cx="4699849" cy="619036"/>
             <a:chOff x="0" y="0"/>
@@ -4190,6 +4232,13 @@
               <a:lin ang="0"/>
             </a:gradFill>
           </p:spPr>
+          <p:txBody>
+            <a:bodyPr/>
+            <a:lstStyle/>
+            <a:p>
+              <a:endParaRPr lang="zh-CN" altLang="en-US"/>
+            </a:p>
+          </p:txBody>
         </p:sp>
         <p:sp>
           <p:nvSpPr>
@@ -4215,6 +4264,7 @@
                   <a:spcPts val="3675"/>
                 </a:lnSpc>
               </a:pPr>
+              <a:endParaRPr/>
             </a:p>
           </p:txBody>
         </p:sp>
@@ -4226,7 +4276,7 @@
           <p:nvPr/>
         </p:nvGrpSpPr>
         <p:grpSpPr>
-          <a:xfrm rot="0">
+          <a:xfrm>
             <a:off x="9981806" y="5418194"/>
             <a:ext cx="4777509" cy="5716013"/>
             <a:chOff x="0" y="0"/>
@@ -4277,6 +4327,13 @@
               <a:miter/>
             </a:ln>
           </p:spPr>
+          <p:txBody>
+            <a:bodyPr/>
+            <a:lstStyle/>
+            <a:p>
+              <a:endParaRPr lang="zh-CN" altLang="en-US"/>
+            </a:p>
+          </p:txBody>
         </p:sp>
         <p:sp>
           <p:nvSpPr>
@@ -4305,6 +4362,7 @@
                   <a:spcPct val="0"/>
                 </a:spcBef>
               </a:pPr>
+              <a:endParaRPr/>
             </a:p>
           </p:txBody>
         </p:sp>
@@ -4348,7 +4406,7 @@
             </a:pathLst>
           </a:custGeom>
           <a:blipFill>
-            <a:blip r:embed="rId3"/>
+            <a:blip r:embed="rId4"/>
             <a:stretch>
               <a:fillRect l="-2281" t="-707" b="-16449"/>
             </a:stretch>
@@ -4359,6 +4417,13 @@
             <a:miter/>
           </a:ln>
         </p:spPr>
+        <p:txBody>
+          <a:bodyPr/>
+          <a:lstStyle/>
+          <a:p>
+            <a:endParaRPr lang="zh-CN" altLang="en-US"/>
+          </a:p>
+        </p:txBody>
       </p:sp>
       <p:sp>
         <p:nvSpPr>
@@ -4399,7 +4464,7 @@
             </a:pathLst>
           </a:custGeom>
           <a:blipFill>
-            <a:blip r:embed="rId4"/>
+            <a:blip r:embed="rId5"/>
             <a:stretch>
               <a:fillRect t="-85158" b="-46520"/>
             </a:stretch>
@@ -4410,6 +4475,13 @@
             <a:miter/>
           </a:ln>
         </p:spPr>
+        <p:txBody>
+          <a:bodyPr/>
+          <a:lstStyle/>
+          <a:p>
+            <a:endParaRPr lang="zh-CN" altLang="en-US"/>
+          </a:p>
+        </p:txBody>
       </p:sp>
       <p:grpSp>
         <p:nvGrpSpPr>
@@ -4418,7 +4490,7 @@
           <p:nvPr/>
         </p:nvGrpSpPr>
         <p:grpSpPr>
-          <a:xfrm rot="0">
+          <a:xfrm>
             <a:off x="359854" y="11368959"/>
             <a:ext cx="9454013" cy="632625"/>
             <a:chOff x="0" y="0"/>
@@ -4481,6 +4553,13 @@
               <a:lin ang="0"/>
             </a:gradFill>
           </p:spPr>
+          <p:txBody>
+            <a:bodyPr/>
+            <a:lstStyle/>
+            <a:p>
+              <a:endParaRPr lang="zh-CN" altLang="en-US"/>
+            </a:p>
+          </p:txBody>
         </p:sp>
         <p:sp>
           <p:nvSpPr>
@@ -4506,6 +4585,7 @@
                   <a:spcPts val="3675"/>
                 </a:lnSpc>
               </a:pPr>
+              <a:endParaRPr/>
             </a:p>
           </p:txBody>
         </p:sp>
@@ -4517,7 +4597,7 @@
           <p:nvPr/>
         </p:nvGrpSpPr>
         <p:grpSpPr>
-          <a:xfrm rot="0">
+          <a:xfrm>
             <a:off x="752605" y="16242455"/>
             <a:ext cx="362428" cy="362428"/>
             <a:chOff x="0" y="0"/>
@@ -4531,7 +4611,7 @@
             <p:nvPr/>
           </p:nvGrpSpPr>
           <p:grpSpPr>
-            <a:xfrm rot="0">
+            <a:xfrm>
               <a:off x="0" y="0"/>
               <a:ext cx="483237" cy="483237"/>
               <a:chOff x="0" y="0"/>
@@ -4605,6 +4685,13 @@
                 <a:lin ang="0"/>
               </a:gradFill>
             </p:spPr>
+            <p:txBody>
+              <a:bodyPr/>
+              <a:lstStyle/>
+              <a:p>
+                <a:endParaRPr lang="zh-CN" altLang="en-US"/>
+              </a:p>
+            </p:txBody>
           </p:sp>
           <p:sp>
             <p:nvSpPr>
@@ -4630,6 +4717,7 @@
                     <a:spcPts val="2940"/>
                   </a:lnSpc>
                 </a:pPr>
+                <a:endParaRPr/>
               </a:p>
             </p:txBody>
           </p:sp>
@@ -4675,15 +4763,6 @@
                 </a:rPr>
                 <a:t>01</a:t>
               </a:r>
-              <a:endParaRPr lang="en-US" sz="1735">
-                <a:solidFill>
-                  <a:srgbClr val="FFFFFF"/>
-                </a:solidFill>
-                <a:latin typeface="字由点字典黑 1 Bold" panose="00020600040101010101" charset="-122"/>
-                <a:ea typeface="字由点字典黑 1 Bold" panose="00020600040101010101" charset="-122"/>
-                <a:cs typeface="字由点字典黑 1 Bold" panose="00020600040101010101" charset="-122"/>
-                <a:sym typeface="字由点字典黑 1 Bold" panose="00020600040101010101" charset="-122"/>
-              </a:endParaRPr>
             </a:p>
           </p:txBody>
         </p:sp>
@@ -4695,7 +4774,7 @@
           <p:nvPr/>
         </p:nvGrpSpPr>
         <p:grpSpPr>
-          <a:xfrm rot="0">
+          <a:xfrm>
             <a:off x="752605" y="17268694"/>
             <a:ext cx="362428" cy="362428"/>
             <a:chOff x="0" y="0"/>
@@ -4709,7 +4788,7 @@
             <p:nvPr/>
           </p:nvGrpSpPr>
           <p:grpSpPr>
-            <a:xfrm rot="0">
+            <a:xfrm>
               <a:off x="0" y="0"/>
               <a:ext cx="483237" cy="483237"/>
               <a:chOff x="0" y="0"/>
@@ -4783,6 +4862,13 @@
                 <a:lin ang="0"/>
               </a:gradFill>
             </p:spPr>
+            <p:txBody>
+              <a:bodyPr/>
+              <a:lstStyle/>
+              <a:p>
+                <a:endParaRPr lang="zh-CN" altLang="en-US"/>
+              </a:p>
+            </p:txBody>
           </p:sp>
           <p:sp>
             <p:nvSpPr>
@@ -4808,6 +4894,7 @@
                     <a:spcPts val="2940"/>
                   </a:lnSpc>
                 </a:pPr>
+                <a:endParaRPr/>
               </a:p>
             </p:txBody>
           </p:sp>
@@ -4853,15 +4940,6 @@
                 </a:rPr>
                 <a:t>02</a:t>
               </a:r>
-              <a:endParaRPr lang="en-US" sz="1735">
-                <a:solidFill>
-                  <a:srgbClr val="FFFFFF"/>
-                </a:solidFill>
-                <a:latin typeface="字由点字典黑 1 Bold" panose="00020600040101010101" charset="-122"/>
-                <a:ea typeface="字由点字典黑 1 Bold" panose="00020600040101010101" charset="-122"/>
-                <a:cs typeface="字由点字典黑 1 Bold" panose="00020600040101010101" charset="-122"/>
-                <a:sym typeface="字由点字典黑 1 Bold" panose="00020600040101010101" charset="-122"/>
-              </a:endParaRPr>
             </a:p>
           </p:txBody>
         </p:sp>
@@ -4905,12 +4983,19 @@
             </a:pathLst>
           </a:custGeom>
           <a:blipFill>
-            <a:blip r:embed="rId5"/>
+            <a:blip r:embed="rId6"/>
             <a:stretch>
               <a:fillRect/>
             </a:stretch>
           </a:blipFill>
         </p:spPr>
+        <p:txBody>
+          <a:bodyPr/>
+          <a:lstStyle/>
+          <a:p>
+            <a:endParaRPr lang="zh-CN" altLang="en-US"/>
+          </a:p>
+        </p:txBody>
       </p:sp>
       <p:grpSp>
         <p:nvGrpSpPr>
@@ -4919,7 +5004,7 @@
           <p:nvPr/>
         </p:nvGrpSpPr>
         <p:grpSpPr>
-          <a:xfrm rot="0">
+          <a:xfrm>
             <a:off x="752605" y="18482658"/>
             <a:ext cx="362428" cy="362428"/>
             <a:chOff x="0" y="0"/>
@@ -4933,7 +5018,7 @@
             <p:nvPr/>
           </p:nvGrpSpPr>
           <p:grpSpPr>
-            <a:xfrm rot="0">
+            <a:xfrm>
               <a:off x="0" y="0"/>
               <a:ext cx="483237" cy="483237"/>
               <a:chOff x="0" y="0"/>
@@ -5007,6 +5092,13 @@
                 <a:lin ang="0"/>
               </a:gradFill>
             </p:spPr>
+            <p:txBody>
+              <a:bodyPr/>
+              <a:lstStyle/>
+              <a:p>
+                <a:endParaRPr lang="zh-CN" altLang="en-US"/>
+              </a:p>
+            </p:txBody>
           </p:sp>
           <p:sp>
             <p:nvSpPr>
@@ -5032,6 +5124,7 @@
                     <a:spcPts val="2940"/>
                   </a:lnSpc>
                 </a:pPr>
+                <a:endParaRPr/>
               </a:p>
             </p:txBody>
           </p:sp>
@@ -5077,15 +5170,6 @@
                 </a:rPr>
                 <a:t>01</a:t>
               </a:r>
-              <a:endParaRPr lang="en-US" sz="1735">
-                <a:solidFill>
-                  <a:srgbClr val="FFFFFF"/>
-                </a:solidFill>
-                <a:latin typeface="字由点字典黑 1 Bold" panose="00020600040101010101" charset="-122"/>
-                <a:ea typeface="字由点字典黑 1 Bold" panose="00020600040101010101" charset="-122"/>
-                <a:cs typeface="字由点字典黑 1 Bold" panose="00020600040101010101" charset="-122"/>
-                <a:sym typeface="字由点字典黑 1 Bold" panose="00020600040101010101" charset="-122"/>
-              </a:endParaRPr>
             </a:p>
           </p:txBody>
         </p:sp>
@@ -5097,7 +5181,7 @@
           <p:nvPr/>
         </p:nvGrpSpPr>
         <p:grpSpPr>
-          <a:xfrm rot="0">
+          <a:xfrm>
             <a:off x="752605" y="19359436"/>
             <a:ext cx="362428" cy="362428"/>
             <a:chOff x="0" y="0"/>
@@ -5111,7 +5195,7 @@
             <p:nvPr/>
           </p:nvGrpSpPr>
           <p:grpSpPr>
-            <a:xfrm rot="0">
+            <a:xfrm>
               <a:off x="0" y="0"/>
               <a:ext cx="483237" cy="483237"/>
               <a:chOff x="0" y="0"/>
@@ -5185,6 +5269,13 @@
                 <a:lin ang="0"/>
               </a:gradFill>
             </p:spPr>
+            <p:txBody>
+              <a:bodyPr/>
+              <a:lstStyle/>
+              <a:p>
+                <a:endParaRPr lang="zh-CN" altLang="en-US"/>
+              </a:p>
+            </p:txBody>
           </p:sp>
           <p:sp>
             <p:nvSpPr>
@@ -5210,6 +5301,7 @@
                     <a:spcPts val="2940"/>
                   </a:lnSpc>
                 </a:pPr>
+                <a:endParaRPr/>
               </a:p>
             </p:txBody>
           </p:sp>
@@ -5255,15 +5347,6 @@
                 </a:rPr>
                 <a:t>02</a:t>
               </a:r>
-              <a:endParaRPr lang="en-US" sz="1735">
-                <a:solidFill>
-                  <a:srgbClr val="FFFFFF"/>
-                </a:solidFill>
-                <a:latin typeface="字由点字典黑 1 Bold" panose="00020600040101010101" charset="-122"/>
-                <a:ea typeface="字由点字典黑 1 Bold" panose="00020600040101010101" charset="-122"/>
-                <a:cs typeface="字由点字典黑 1 Bold" panose="00020600040101010101" charset="-122"/>
-                <a:sym typeface="字由点字典黑 1 Bold" panose="00020600040101010101" charset="-122"/>
-              </a:endParaRPr>
             </a:p>
           </p:txBody>
         </p:sp>
@@ -5276,26 +5359,50 @@
         </p:nvSpPr>
         <p:spPr>
           <a:xfrm>
-            <a:off x="380050" y="943675"/>
-            <a:ext cx="9094961" cy="946150"/>
+            <a:off x="124355" y="1136633"/>
+            <a:ext cx="9433817" cy="934487"/>
           </a:xfrm>
           <a:prstGeom prst="rect">
             <a:avLst/>
           </a:prstGeom>
         </p:spPr>
         <p:txBody>
-          <a:bodyPr lIns="0" tIns="0" rIns="0" bIns="0" rtlCol="0" anchor="t">
+          <a:bodyPr wrap="square" lIns="0" tIns="0" rIns="0" bIns="0" rtlCol="0" anchor="t">
             <a:spAutoFit/>
           </a:bodyPr>
           <a:lstStyle/>
           <a:p>
-            <a:pPr algn="l">
+            <a:pPr>
               <a:lnSpc>
                 <a:spcPts val="8000"/>
               </a:lnSpc>
             </a:pPr>
             <a:r>
-              <a:rPr lang="en-US" sz="5000" b="1" spc="330">
+              <a:rPr lang="zh-CN" altLang="en-US" sz="5000" b="1" spc="330" dirty="0">
+                <a:solidFill>
+                  <a:srgbClr val="FFFFFF"/>
+                </a:solidFill>
+                <a:latin typeface="黑体" panose="02010609060101010101" pitchFamily="49" charset="-122"/>
+                <a:ea typeface="黑体" panose="02010609060101010101" pitchFamily="49" charset="-122"/>
+                <a:cs typeface="阿里巴巴普惠体 Medium" panose="00020600040101010101" charset="-122"/>
+                <a:sym typeface="阿里巴巴普惠体 Medium" panose="00020600040101010101" charset="-122"/>
+              </a:rPr>
+              <a:t>生物医学文献智能分析</a:t>
+            </a:r>
+            <a:r>
+              <a:rPr lang="en-US" altLang="zh-CN" sz="5000" b="1" spc="330" dirty="0">
+                <a:solidFill>
+                  <a:srgbClr val="FFFFFF"/>
+                </a:solidFill>
+                <a:latin typeface="Times New Roman" panose="02020603050405020304" pitchFamily="18" charset="0"/>
+                <a:ea typeface="黑体" panose="02010609060101010101" pitchFamily="49" charset="-122"/>
+                <a:cs typeface="Times New Roman" panose="02020603050405020304" pitchFamily="18" charset="0"/>
+                <a:sym typeface="阿里巴巴普惠体 Medium" panose="00020600040101010101" charset="-122"/>
+              </a:rPr>
+              <a:t>Agent</a:t>
+            </a:r>
+            <a:r>
+              <a:rPr lang="zh-CN" altLang="en-US" sz="5000" b="1" spc="330" dirty="0">
                 <a:solidFill>
                   <a:srgbClr val="FFFFFF"/>
                 </a:solidFill>
@@ -5304,9 +5411,9 @@
                 <a:cs typeface="阿里巴巴普惠体 Medium" panose="00020600040101010101" charset="-122"/>
                 <a:sym typeface="阿里巴巴普惠体 Medium" panose="00020600040101010101" charset="-122"/>
               </a:rPr>
-              <a:t>xxx:xxxxxxx【项目全称】</a:t>
-            </a:r>
-            <a:endParaRPr lang="en-US" sz="5000" b="1" spc="330">
+              <a:t> </a:t>
+            </a:r>
+            <a:endParaRPr lang="en-US" sz="5000" b="1" spc="330" dirty="0">
               <a:solidFill>
                 <a:srgbClr val="FFFFFF"/>
               </a:solidFill>
@@ -5356,15 +5463,6 @@
               </a:rPr>
               <a:t>参考文献</a:t>
             </a:r>
-            <a:endParaRPr lang="en-US" sz="1800" spc="-27">
-              <a:solidFill>
-                <a:srgbClr val="000000"/>
-              </a:solidFill>
-              <a:latin typeface="字由点字典黑 2 Bold" panose="00020600040101010101" charset="-122"/>
-              <a:ea typeface="字由点字典黑 2 Bold" panose="00020600040101010101" charset="-122"/>
-              <a:cs typeface="字由点字典黑 2 Bold" panose="00020600040101010101" charset="-122"/>
-              <a:sym typeface="字由点字典黑 2 Bold" panose="00020600040101010101" charset="-122"/>
-            </a:endParaRPr>
           </a:p>
         </p:txBody>
       </p:sp>
@@ -5406,15 +5504,6 @@
               </a:rPr>
               <a:t>列出项目主要参考的论文、技术文档、开源项目、数据集、模型或相关资料。</a:t>
             </a:r>
-            <a:endParaRPr lang="en-US" sz="1400">
-              <a:solidFill>
-                <a:srgbClr val="000000"/>
-              </a:solidFill>
-              <a:latin typeface="字由点字典黑 2 Light" panose="00020600040101010101" charset="-122"/>
-              <a:ea typeface="字由点字典黑 2 Light" panose="00020600040101010101" charset="-122"/>
-              <a:cs typeface="字由点字典黑 2 Light" panose="00020600040101010101" charset="-122"/>
-              <a:sym typeface="字由点字典黑 2 Light" panose="00020600040101010101" charset="-122"/>
-            </a:endParaRPr>
           </a:p>
         </p:txBody>
       </p:sp>
@@ -5456,15 +5545,6 @@
               </a:rPr>
               <a:t>总结</a:t>
             </a:r>
-            <a:endParaRPr lang="en-US" sz="1800" spc="-27">
-              <a:solidFill>
-                <a:srgbClr val="000000"/>
-              </a:solidFill>
-              <a:latin typeface="字由点字典黑 2 Bold" panose="00020600040101010101" charset="-122"/>
-              <a:ea typeface="字由点字典黑 2 Bold" panose="00020600040101010101" charset="-122"/>
-              <a:cs typeface="字由点字典黑 2 Bold" panose="00020600040101010101" charset="-122"/>
-              <a:sym typeface="字由点字典黑 2 Bold" panose="00020600040101010101" charset="-122"/>
-            </a:endParaRPr>
           </a:p>
         </p:txBody>
       </p:sp>
@@ -5506,15 +5586,6 @@
               </a:rPr>
               <a:t>概括项目完成情况、主要成果、实践价值与项目亮点。</a:t>
             </a:r>
-            <a:endParaRPr lang="en-US" sz="1400">
-              <a:solidFill>
-                <a:srgbClr val="000000"/>
-              </a:solidFill>
-              <a:latin typeface="字由点字典黑 2 Light" panose="00020600040101010101" charset="-122"/>
-              <a:ea typeface="字由点字典黑 2 Light" panose="00020600040101010101" charset="-122"/>
-              <a:cs typeface="字由点字典黑 2 Light" panose="00020600040101010101" charset="-122"/>
-              <a:sym typeface="字由点字典黑 2 Light" panose="00020600040101010101" charset="-122"/>
-            </a:endParaRPr>
           </a:p>
         </p:txBody>
       </p:sp>
@@ -5556,15 +5627,6 @@
               </a:rPr>
               <a:t>Github 主页：</a:t>
             </a:r>
-            <a:endParaRPr lang="en-US" sz="1800">
-              <a:solidFill>
-                <a:srgbClr val="FFFFFF"/>
-              </a:solidFill>
-              <a:latin typeface="字由点字典黑 1" panose="00020600040101010101" charset="-122"/>
-              <a:ea typeface="字由点字典黑 1" panose="00020600040101010101" charset="-122"/>
-              <a:cs typeface="字由点字典黑 1" panose="00020600040101010101" charset="-122"/>
-              <a:sym typeface="字由点字典黑 1" panose="00020600040101010101" charset="-122"/>
-            </a:endParaRPr>
           </a:p>
         </p:txBody>
       </p:sp>
@@ -5577,7 +5639,7 @@
         <p:spPr>
           <a:xfrm>
             <a:off x="555520" y="2789188"/>
-            <a:ext cx="5710202" cy="435783"/>
+            <a:ext cx="5710202" cy="421269"/>
           </a:xfrm>
           <a:prstGeom prst="rect">
             <a:avLst/>
@@ -5595,38 +5657,41 @@
               </a:lnSpc>
             </a:pPr>
             <a:r>
-              <a:rPr lang="en-US" sz="2295" spc="-34">
+              <a:rPr lang="en-US" sz="2295" spc="-34" dirty="0" err="1">
                 <a:solidFill>
                   <a:srgbClr val="FFFFFF"/>
                 </a:solidFill>
-                <a:latin typeface="字由点字典黑 2 Bold" panose="00020600040101010101" charset="-122"/>
-                <a:ea typeface="字由点字典黑 2 Bold" panose="00020600040101010101" charset="-122"/>
+                <a:latin typeface="黑体" panose="02010609060101010101" pitchFamily="49" charset="-122"/>
+                <a:ea typeface="黑体" panose="02010609060101010101" pitchFamily="49" charset="-122"/>
                 <a:cs typeface="字由点字典黑 2 Bold" panose="00020600040101010101" charset="-122"/>
                 <a:sym typeface="字由点字典黑 2 Bold" panose="00020600040101010101" charset="-122"/>
               </a:rPr>
-              <a:t>项目</a:t>
-            </a:r>
-            <a:r>
-              <a:rPr lang="en-US" sz="2295" spc="-34">
+              <a:t>项目简介</a:t>
+            </a:r>
+            <a:r>
+              <a:rPr lang="en-US" sz="2295" spc="-34" dirty="0">
                 <a:solidFill>
                   <a:srgbClr val="FFFFFF"/>
                 </a:solidFill>
-                <a:latin typeface="字由点字典黑 2 Bold" panose="00020600040101010101" charset="-122"/>
-                <a:ea typeface="字由点字典黑 2 Bold" panose="00020600040101010101" charset="-122"/>
+                <a:latin typeface="黑体" panose="02010609060101010101" pitchFamily="49" charset="-122"/>
+                <a:ea typeface="黑体" panose="02010609060101010101" pitchFamily="49" charset="-122"/>
                 <a:cs typeface="字由点字典黑 2 Bold" panose="00020600040101010101" charset="-122"/>
                 <a:sym typeface="字由点字典黑 2 Bold" panose="00020600040101010101" charset="-122"/>
               </a:rPr>
-              <a:t>简介 Abstract</a:t>
-            </a:r>
-            <a:endParaRPr lang="en-US" sz="2295" spc="-34">
-              <a:solidFill>
-                <a:srgbClr val="FFFFFF"/>
-              </a:solidFill>
-              <a:latin typeface="字由点字典黑 2 Bold" panose="00020600040101010101" charset="-122"/>
-              <a:ea typeface="字由点字典黑 2 Bold" panose="00020600040101010101" charset="-122"/>
-              <a:cs typeface="字由点字典黑 2 Bold" panose="00020600040101010101" charset="-122"/>
-              <a:sym typeface="字由点字典黑 2 Bold" panose="00020600040101010101" charset="-122"/>
-            </a:endParaRPr>
+              <a:t> </a:t>
+            </a:r>
+            <a:r>
+              <a:rPr lang="en-US" sz="2295" spc="-34" dirty="0">
+                <a:solidFill>
+                  <a:srgbClr val="FFFFFF"/>
+                </a:solidFill>
+                <a:latin typeface="Times New Roman" panose="02020603050405020304" pitchFamily="18" charset="0"/>
+                <a:ea typeface="黑体" panose="02010609060101010101" pitchFamily="49" charset="-122"/>
+                <a:cs typeface="Times New Roman" panose="02020603050405020304" pitchFamily="18" charset="0"/>
+                <a:sym typeface="字由点字典黑 2 Bold" panose="00020600040101010101" charset="-122"/>
+              </a:rPr>
+              <a:t>Abstract</a:t>
+            </a:r>
           </a:p>
         </p:txBody>
       </p:sp>
@@ -5639,41 +5704,377 @@
         <p:spPr>
           <a:xfrm>
             <a:off x="555520" y="3476944"/>
-            <a:ext cx="13943760" cy="271779"/>
+            <a:ext cx="14239980" cy="1382814"/>
           </a:xfrm>
           <a:prstGeom prst="rect">
             <a:avLst/>
           </a:prstGeom>
         </p:spPr>
         <p:txBody>
-          <a:bodyPr lIns="0" tIns="0" rIns="0" bIns="0" rtlCol="0" anchor="t">
+          <a:bodyPr wrap="square" lIns="0" tIns="0" rIns="0" bIns="0" rtlCol="0" anchor="t">
             <a:spAutoFit/>
           </a:bodyPr>
           <a:lstStyle/>
           <a:p>
-            <a:pPr marL="0" lvl="0" indent="0" algn="just">
+            <a:pPr lvl="0" algn="just">
               <a:lnSpc>
                 <a:spcPts val="2240"/>
               </a:lnSpc>
             </a:pPr>
             <a:r>
-              <a:rPr lang="en-US" sz="1400">
+              <a:rPr lang="en-US" altLang="zh-CN" sz="1400" dirty="0">
                 <a:solidFill>
                   <a:srgbClr val="000000"/>
                 </a:solidFill>
-                <a:latin typeface="字由点字典黑 2 Light" panose="00020600040101010101" charset="-122"/>
+                <a:latin typeface="黑体" panose="02010609060101010101" pitchFamily="49" charset="-122"/>
                 <a:ea typeface="字由点字典黑 2 Light" panose="00020600040101010101" charset="-122"/>
                 <a:cs typeface="字由点字典黑 2 Light" panose="00020600040101010101" charset="-122"/>
                 <a:sym typeface="字由点字典黑 2 Light" panose="00020600040101010101" charset="-122"/>
               </a:rPr>
-              <a:t>简要介绍项目的核心内容，包括项目目标、主要功能、解决的问题、技术路线及创新点，并概括项目的实际应用价值。</a:t>
-            </a:r>
-            <a:endParaRPr lang="en-US" sz="1400">
+              <a:t>	</a:t>
+            </a:r>
+            <a:r>
+              <a:rPr lang="zh-CN" altLang="en-US" sz="1400" dirty="0">
+                <a:solidFill>
+                  <a:srgbClr val="000000"/>
+                </a:solidFill>
+                <a:latin typeface="黑体" panose="02010609060101010101" pitchFamily="49" charset="-122"/>
+                <a:ea typeface="字由点字典黑 2 Light" panose="00020600040101010101" charset="-122"/>
+                <a:cs typeface="字由点字典黑 2 Light" panose="00020600040101010101" charset="-122"/>
+                <a:sym typeface="字由点字典黑 2 Light" panose="00020600040101010101" charset="-122"/>
+              </a:rPr>
+              <a:t>这</a:t>
+            </a:r>
+            <a:r>
+              <a:rPr lang="zh-CN" altLang="en-US" sz="1400" dirty="0">
+                <a:solidFill>
+                  <a:srgbClr val="000000"/>
+                </a:solidFill>
+                <a:latin typeface="黑体" panose="02010609060101010101" pitchFamily="49" charset="-122"/>
+                <a:ea typeface="黑体" panose="02010609060101010101" pitchFamily="49" charset="-122"/>
+                <a:cs typeface="字由点字典黑 2 Light" panose="00020600040101010101" charset="-122"/>
+                <a:sym typeface="字由点字典黑 2 Light" panose="00020600040101010101" charset="-122"/>
+              </a:rPr>
+              <a:t>是一款面向生物医学领域的</a:t>
+            </a:r>
+            <a:r>
+              <a:rPr lang="en-US" altLang="zh-CN" sz="1400" dirty="0">
+                <a:solidFill>
+                  <a:srgbClr val="000000"/>
+                </a:solidFill>
+                <a:latin typeface="Times New Roman" panose="02020603050405020304" pitchFamily="18" charset="0"/>
+                <a:ea typeface="黑体" panose="02010609060101010101" pitchFamily="49" charset="-122"/>
+                <a:cs typeface="Times New Roman" panose="02020603050405020304" pitchFamily="18" charset="0"/>
+                <a:sym typeface="字由点字典黑 2 Light" panose="00020600040101010101" charset="-122"/>
+              </a:rPr>
+              <a:t>AI Agent</a:t>
+            </a:r>
+            <a:r>
+              <a:rPr lang="zh-CN" altLang="en-US" sz="1400" dirty="0">
+                <a:solidFill>
+                  <a:srgbClr val="000000"/>
+                </a:solidFill>
+                <a:latin typeface="黑体" panose="02010609060101010101" pitchFamily="49" charset="-122"/>
+                <a:ea typeface="黑体" panose="02010609060101010101" pitchFamily="49" charset="-122"/>
+                <a:cs typeface="字由点字典黑 2 Light" panose="00020600040101010101" charset="-122"/>
+                <a:sym typeface="字由点字典黑 2 Light" panose="00020600040101010101" charset="-122"/>
+              </a:rPr>
+              <a:t>文献智能分析系统。针对科研人员在</a:t>
+            </a:r>
+            <a:r>
+              <a:rPr lang="en-US" altLang="zh-CN" sz="1400" dirty="0">
+                <a:solidFill>
+                  <a:srgbClr val="000000"/>
+                </a:solidFill>
+                <a:latin typeface="Times New Roman" panose="02020603050405020304" pitchFamily="18" charset="0"/>
+                <a:ea typeface="黑体" panose="02010609060101010101" pitchFamily="49" charset="-122"/>
+                <a:cs typeface="Times New Roman" panose="02020603050405020304" pitchFamily="18" charset="0"/>
+                <a:sym typeface="字由点字典黑 2 Light" panose="00020600040101010101" charset="-122"/>
+              </a:rPr>
+              <a:t>PubMed</a:t>
+            </a:r>
+            <a:r>
+              <a:rPr lang="zh-CN" altLang="en-US" sz="1400" dirty="0">
+                <a:solidFill>
+                  <a:srgbClr val="000000"/>
+                </a:solidFill>
+                <a:latin typeface="黑体" panose="02010609060101010101" pitchFamily="49" charset="-122"/>
+                <a:ea typeface="黑体" panose="02010609060101010101" pitchFamily="49" charset="-122"/>
+                <a:cs typeface="字由点字典黑 2 Light" panose="00020600040101010101" charset="-122"/>
+                <a:sym typeface="字由点字典黑 2 Light" panose="00020600040101010101" charset="-122"/>
+              </a:rPr>
+              <a:t>文献检索、精读与跨文献对比中面临的效率瓶颈，本项目基于</a:t>
+            </a:r>
+            <a:r>
+              <a:rPr lang="en-US" altLang="zh-CN" sz="1400" dirty="0" err="1">
+                <a:solidFill>
+                  <a:srgbClr val="000000"/>
+                </a:solidFill>
+                <a:latin typeface="Times New Roman" panose="02020603050405020304" pitchFamily="18" charset="0"/>
+                <a:ea typeface="黑体" panose="02010609060101010101" pitchFamily="49" charset="-122"/>
+                <a:cs typeface="Times New Roman" panose="02020603050405020304" pitchFamily="18" charset="0"/>
+                <a:sym typeface="字由点字典黑 2 Light" panose="00020600040101010101" charset="-122"/>
+              </a:rPr>
+              <a:t>LangGraph</a:t>
+            </a:r>
+            <a:r>
+              <a:rPr lang="zh-CN" altLang="en-US" sz="1400" dirty="0">
+                <a:solidFill>
+                  <a:srgbClr val="000000"/>
+                </a:solidFill>
+                <a:latin typeface="黑体" panose="02010609060101010101" pitchFamily="49" charset="-122"/>
+                <a:ea typeface="黑体" panose="02010609060101010101" pitchFamily="49" charset="-122"/>
+                <a:cs typeface="字由点字典黑 2 Light" panose="00020600040101010101" charset="-122"/>
+                <a:sym typeface="字由点字典黑 2 Light" panose="00020600040101010101" charset="-122"/>
+              </a:rPr>
+              <a:t>多智能体框架，构建了“规划</a:t>
+            </a:r>
+            <a:r>
+              <a:rPr lang="en-US" altLang="zh-CN" sz="1400" dirty="0">
+                <a:solidFill>
+                  <a:srgbClr val="000000"/>
+                </a:solidFill>
+                <a:latin typeface="黑体" panose="02010609060101010101" pitchFamily="49" charset="-122"/>
+                <a:ea typeface="黑体" panose="02010609060101010101" pitchFamily="49" charset="-122"/>
+                <a:cs typeface="字由点字典黑 2 Light" panose="00020600040101010101" charset="-122"/>
+                <a:sym typeface="字由点字典黑 2 Light" panose="00020600040101010101" charset="-122"/>
+              </a:rPr>
+              <a:t>—</a:t>
+            </a:r>
+            <a:r>
+              <a:rPr lang="zh-CN" altLang="en-US" sz="1400" dirty="0">
+                <a:solidFill>
+                  <a:srgbClr val="000000"/>
+                </a:solidFill>
+                <a:latin typeface="黑体" panose="02010609060101010101" pitchFamily="49" charset="-122"/>
+                <a:ea typeface="黑体" panose="02010609060101010101" pitchFamily="49" charset="-122"/>
+                <a:cs typeface="字由点字典黑 2 Light" panose="00020600040101010101" charset="-122"/>
+                <a:sym typeface="字由点字典黑 2 Light" panose="00020600040101010101" charset="-122"/>
+              </a:rPr>
+              <a:t>检索</a:t>
+            </a:r>
+            <a:r>
+              <a:rPr lang="en-US" altLang="zh-CN" sz="1400" dirty="0">
+                <a:solidFill>
+                  <a:srgbClr val="000000"/>
+                </a:solidFill>
+                <a:latin typeface="黑体" panose="02010609060101010101" pitchFamily="49" charset="-122"/>
+                <a:ea typeface="黑体" panose="02010609060101010101" pitchFamily="49" charset="-122"/>
+                <a:cs typeface="字由点字典黑 2 Light" panose="00020600040101010101" charset="-122"/>
+                <a:sym typeface="字由点字典黑 2 Light" panose="00020600040101010101" charset="-122"/>
+              </a:rPr>
+              <a:t>—</a:t>
+            </a:r>
+            <a:r>
+              <a:rPr lang="zh-CN" altLang="en-US" sz="1400" dirty="0">
+                <a:solidFill>
+                  <a:srgbClr val="000000"/>
+                </a:solidFill>
+                <a:latin typeface="黑体" panose="02010609060101010101" pitchFamily="49" charset="-122"/>
+                <a:ea typeface="黑体" panose="02010609060101010101" pitchFamily="49" charset="-122"/>
+                <a:cs typeface="字由点字典黑 2 Light" panose="00020600040101010101" charset="-122"/>
+                <a:sym typeface="字由点字典黑 2 Light" panose="00020600040101010101" charset="-122"/>
+              </a:rPr>
+              <a:t>解析</a:t>
+            </a:r>
+            <a:r>
+              <a:rPr lang="en-US" altLang="zh-CN" sz="1400" dirty="0">
+                <a:solidFill>
+                  <a:srgbClr val="000000"/>
+                </a:solidFill>
+                <a:latin typeface="黑体" panose="02010609060101010101" pitchFamily="49" charset="-122"/>
+                <a:ea typeface="黑体" panose="02010609060101010101" pitchFamily="49" charset="-122"/>
+                <a:cs typeface="字由点字典黑 2 Light" panose="00020600040101010101" charset="-122"/>
+                <a:sym typeface="字由点字典黑 2 Light" panose="00020600040101010101" charset="-122"/>
+              </a:rPr>
+              <a:t>—</a:t>
+            </a:r>
+            <a:r>
+              <a:rPr lang="zh-CN" altLang="en-US" sz="1400" dirty="0">
+                <a:solidFill>
+                  <a:srgbClr val="000000"/>
+                </a:solidFill>
+                <a:latin typeface="黑体" panose="02010609060101010101" pitchFamily="49" charset="-122"/>
+                <a:ea typeface="黑体" panose="02010609060101010101" pitchFamily="49" charset="-122"/>
+                <a:cs typeface="字由点字典黑 2 Light" panose="00020600040101010101" charset="-122"/>
+                <a:sym typeface="字由点字典黑 2 Light" panose="00020600040101010101" charset="-122"/>
+              </a:rPr>
+              <a:t>对比</a:t>
+            </a:r>
+            <a:r>
+              <a:rPr lang="en-US" altLang="zh-CN" sz="1400" dirty="0">
+                <a:solidFill>
+                  <a:srgbClr val="000000"/>
+                </a:solidFill>
+                <a:latin typeface="黑体" panose="02010609060101010101" pitchFamily="49" charset="-122"/>
+                <a:ea typeface="黑体" panose="02010609060101010101" pitchFamily="49" charset="-122"/>
+                <a:cs typeface="字由点字典黑 2 Light" panose="00020600040101010101" charset="-122"/>
+                <a:sym typeface="字由点字典黑 2 Light" panose="00020600040101010101" charset="-122"/>
+              </a:rPr>
+              <a:t>—</a:t>
+            </a:r>
+            <a:r>
+              <a:rPr lang="zh-CN" altLang="en-US" sz="1400" dirty="0">
+                <a:solidFill>
+                  <a:srgbClr val="000000"/>
+                </a:solidFill>
+                <a:latin typeface="黑体" panose="02010609060101010101" pitchFamily="49" charset="-122"/>
+                <a:ea typeface="黑体" panose="02010609060101010101" pitchFamily="49" charset="-122"/>
+                <a:cs typeface="字由点字典黑 2 Light" panose="00020600040101010101" charset="-122"/>
+                <a:sym typeface="字由点字典黑 2 Light" panose="00020600040101010101" charset="-122"/>
+              </a:rPr>
+              <a:t>报告”五阶段自动化工作流。用户仅需输入自然语言研究问题，</a:t>
+            </a:r>
+            <a:r>
+              <a:rPr lang="en-US" altLang="zh-CN" sz="1400" dirty="0">
+                <a:solidFill>
+                  <a:srgbClr val="000000"/>
+                </a:solidFill>
+                <a:latin typeface="Times New Roman" panose="02020603050405020304" pitchFamily="18" charset="0"/>
+                <a:ea typeface="黑体" panose="02010609060101010101" pitchFamily="49" charset="-122"/>
+                <a:cs typeface="Times New Roman" panose="02020603050405020304" pitchFamily="18" charset="0"/>
+                <a:sym typeface="字由点字典黑 2 Light" panose="00020600040101010101" charset="-122"/>
+              </a:rPr>
+              <a:t>Agent</a:t>
+            </a:r>
+            <a:r>
+              <a:rPr lang="zh-CN" altLang="en-US" sz="1400" dirty="0">
+                <a:solidFill>
+                  <a:srgbClr val="000000"/>
+                </a:solidFill>
+                <a:latin typeface="黑体" panose="02010609060101010101" pitchFamily="49" charset="-122"/>
+                <a:ea typeface="黑体" panose="02010609060101010101" pitchFamily="49" charset="-122"/>
+                <a:cs typeface="字由点字典黑 2 Light" panose="00020600040101010101" charset="-122"/>
+                <a:sym typeface="字由点字典黑 2 Light" panose="00020600040101010101" charset="-122"/>
+              </a:rPr>
+              <a:t>即可自动拆解任务、构建</a:t>
+            </a:r>
+            <a:r>
+              <a:rPr lang="en-US" altLang="zh-CN" sz="1400" dirty="0">
+                <a:solidFill>
+                  <a:srgbClr val="000000"/>
+                </a:solidFill>
+                <a:latin typeface="Times New Roman" panose="02020603050405020304" pitchFamily="18" charset="0"/>
+                <a:ea typeface="黑体" panose="02010609060101010101" pitchFamily="49" charset="-122"/>
+                <a:cs typeface="Times New Roman" panose="02020603050405020304" pitchFamily="18" charset="0"/>
+                <a:sym typeface="字由点字典黑 2 Light" panose="00020600040101010101" charset="-122"/>
+              </a:rPr>
+              <a:t>PubMed</a:t>
+            </a:r>
+            <a:r>
+              <a:rPr lang="zh-CN" altLang="en-US" sz="1400" dirty="0">
+                <a:solidFill>
+                  <a:srgbClr val="000000"/>
+                </a:solidFill>
+                <a:latin typeface="黑体" panose="02010609060101010101" pitchFamily="49" charset="-122"/>
+                <a:ea typeface="黑体" panose="02010609060101010101" pitchFamily="49" charset="-122"/>
+                <a:cs typeface="字由点字典黑 2 Light" panose="00020600040101010101" charset="-122"/>
+                <a:sym typeface="字由点字典黑 2 Light" panose="00020600040101010101" charset="-122"/>
+              </a:rPr>
+              <a:t>检索式、对检索到的文献逐篇提取</a:t>
+            </a:r>
+            <a:r>
+              <a:rPr lang="en-US" altLang="zh-CN" sz="1400" dirty="0">
+                <a:solidFill>
+                  <a:srgbClr val="000000"/>
+                </a:solidFill>
+                <a:latin typeface="黑体" panose="02010609060101010101" pitchFamily="49" charset="-122"/>
+                <a:ea typeface="黑体" panose="02010609060101010101" pitchFamily="49" charset="-122"/>
+                <a:cs typeface="字由点字典黑 2 Light" panose="00020600040101010101" charset="-122"/>
+                <a:sym typeface="字由点字典黑 2 Light" panose="00020600040101010101" charset="-122"/>
+              </a:rPr>
+              <a:t>17</a:t>
+            </a:r>
+            <a:r>
+              <a:rPr lang="zh-CN" altLang="en-US" sz="1400" dirty="0">
+                <a:solidFill>
+                  <a:srgbClr val="000000"/>
+                </a:solidFill>
+                <a:latin typeface="黑体" panose="02010609060101010101" pitchFamily="49" charset="-122"/>
+                <a:ea typeface="黑体" panose="02010609060101010101" pitchFamily="49" charset="-122"/>
+                <a:cs typeface="字由点字典黑 2 Light" panose="00020600040101010101" charset="-122"/>
+                <a:sym typeface="字由点字典黑 2 Light" panose="00020600040101010101" charset="-122"/>
+              </a:rPr>
+              <a:t>个结构化字段，并完成跨文献对比分析，最终生成来源可溯（标注</a:t>
+            </a:r>
+            <a:r>
+              <a:rPr lang="en-US" altLang="zh-CN" sz="1400" dirty="0">
+                <a:solidFill>
+                  <a:srgbClr val="000000"/>
+                </a:solidFill>
+                <a:latin typeface="Times New Roman" panose="02020603050405020304" pitchFamily="18" charset="0"/>
+                <a:ea typeface="黑体" panose="02010609060101010101" pitchFamily="49" charset="-122"/>
+                <a:cs typeface="Times New Roman" panose="02020603050405020304" pitchFamily="18" charset="0"/>
+                <a:sym typeface="字由点字典黑 2 Light" panose="00020600040101010101" charset="-122"/>
+              </a:rPr>
+              <a:t>PMID</a:t>
+            </a:r>
+            <a:r>
+              <a:rPr lang="zh-CN" altLang="en-US" sz="1400" dirty="0">
+                <a:solidFill>
+                  <a:srgbClr val="000000"/>
+                </a:solidFill>
+                <a:latin typeface="黑体" panose="02010609060101010101" pitchFamily="49" charset="-122"/>
+                <a:ea typeface="黑体" panose="02010609060101010101" pitchFamily="49" charset="-122"/>
+                <a:cs typeface="字由点字典黑 2 Light" panose="00020600040101010101" charset="-122"/>
+                <a:sym typeface="字由点字典黑 2 Light" panose="00020600040101010101" charset="-122"/>
+              </a:rPr>
+              <a:t>）的结构化文献综述报告。系统创新性地采用“先结构化、后对比”策略，内建生物医学术语验证引擎与文献质量评分机制，并通过</a:t>
+            </a:r>
+            <a:r>
+              <a:rPr lang="en-US" altLang="zh-CN" sz="1400" dirty="0">
+                <a:solidFill>
+                  <a:srgbClr val="000000"/>
+                </a:solidFill>
+                <a:latin typeface="Times New Roman" panose="02020603050405020304" pitchFamily="18" charset="0"/>
+                <a:ea typeface="黑体" panose="02010609060101010101" pitchFamily="49" charset="-122"/>
+                <a:cs typeface="Times New Roman" panose="02020603050405020304" pitchFamily="18" charset="0"/>
+                <a:sym typeface="字由点字典黑 2 Light" panose="00020600040101010101" charset="-122"/>
+              </a:rPr>
+              <a:t>SSE</a:t>
+            </a:r>
+            <a:r>
+              <a:rPr lang="zh-CN" altLang="en-US" sz="1400" dirty="0">
+                <a:solidFill>
+                  <a:srgbClr val="000000"/>
+                </a:solidFill>
+                <a:latin typeface="黑体" panose="02010609060101010101" pitchFamily="49" charset="-122"/>
+                <a:ea typeface="黑体" panose="02010609060101010101" pitchFamily="49" charset="-122"/>
+                <a:cs typeface="字由点字典黑 2 Light" panose="00020600040101010101" charset="-122"/>
+                <a:sym typeface="字由点字典黑 2 Light" panose="00020600040101010101" charset="-122"/>
+              </a:rPr>
+              <a:t>实时流式输出</a:t>
+            </a:r>
+            <a:r>
+              <a:rPr lang="en-US" altLang="zh-CN" sz="1400" dirty="0">
+                <a:solidFill>
+                  <a:srgbClr val="000000"/>
+                </a:solidFill>
+                <a:latin typeface="Times New Roman" panose="02020603050405020304" pitchFamily="18" charset="0"/>
+                <a:ea typeface="黑体" panose="02010609060101010101" pitchFamily="49" charset="-122"/>
+                <a:cs typeface="Times New Roman" panose="02020603050405020304" pitchFamily="18" charset="0"/>
+                <a:sym typeface="字由点字典黑 2 Light" panose="00020600040101010101" charset="-122"/>
+              </a:rPr>
+              <a:t>Agent</a:t>
+            </a:r>
+            <a:r>
+              <a:rPr lang="zh-CN" altLang="en-US" sz="1400" dirty="0">
+                <a:solidFill>
+                  <a:srgbClr val="000000"/>
+                </a:solidFill>
+                <a:latin typeface="黑体" panose="02010609060101010101" pitchFamily="49" charset="-122"/>
+                <a:ea typeface="黑体" panose="02010609060101010101" pitchFamily="49" charset="-122"/>
+                <a:cs typeface="字由点字典黑 2 Light" panose="00020600040101010101" charset="-122"/>
+                <a:sym typeface="字由点字典黑 2 Light" panose="00020600040101010101" charset="-122"/>
+              </a:rPr>
+              <a:t>执行过程，实现了全流程透明可查的“白盒化”交互体验。项目直面生物医学科研中“全文阅读成本高、关键信息难定位、跨文献对比效率低”三大痛点，为科研人员提供了一站式的文献智能分析工具。</a:t>
+            </a:r>
+            <a:endParaRPr lang="en-US" sz="1400" dirty="0">
               <a:solidFill>
                 <a:srgbClr val="000000"/>
               </a:solidFill>
-              <a:latin typeface="字由点字典黑 2 Light" panose="00020600040101010101" charset="-122"/>
-              <a:ea typeface="字由点字典黑 2 Light" panose="00020600040101010101" charset="-122"/>
+              <a:latin typeface="黑体" panose="02010609060101010101" pitchFamily="49" charset="-122"/>
+              <a:ea typeface="黑体" panose="02010609060101010101" pitchFamily="49" charset="-122"/>
               <a:cs typeface="字由点字典黑 2 Light" panose="00020600040101010101" charset="-122"/>
               <a:sym typeface="字由点字典黑 2 Light" panose="00020600040101010101" charset="-122"/>
             </a:endParaRPr>
@@ -5687,11 +6088,11 @@
           <p:nvPr/>
         </p:nvGrpSpPr>
         <p:grpSpPr>
-          <a:xfrm rot="0">
-            <a:off x="484545" y="6188241"/>
-            <a:ext cx="4240621" cy="975612"/>
-            <a:chOff x="0" y="0"/>
-            <a:chExt cx="5654162" cy="1300816"/>
+          <a:xfrm>
+            <a:off x="484545" y="6131091"/>
+            <a:ext cx="4240621" cy="1032763"/>
+            <a:chOff x="0" y="-76200"/>
+            <a:chExt cx="5654162" cy="1377017"/>
           </a:xfrm>
         </p:grpSpPr>
         <p:sp>
@@ -5732,15 +6133,6 @@
                 </a:rPr>
                 <a:t>选题背景及意义</a:t>
               </a:r>
-              <a:endParaRPr lang="en-US" sz="1800" spc="-27">
-                <a:solidFill>
-                  <a:srgbClr val="000000"/>
-                </a:solidFill>
-                <a:latin typeface="字由点字典黑 2 Bold" panose="00020600040101010101" charset="-122"/>
-                <a:ea typeface="字由点字典黑 2 Bold" panose="00020600040101010101" charset="-122"/>
-                <a:cs typeface="字由点字典黑 2 Bold" panose="00020600040101010101" charset="-122"/>
-                <a:sym typeface="字由点字典黑 2 Bold" panose="00020600040101010101" charset="-122"/>
-              </a:endParaRPr>
             </a:p>
           </p:txBody>
         </p:sp>
@@ -5771,7 +6163,7 @@
                 </a:lnSpc>
               </a:pPr>
               <a:r>
-                <a:rPr lang="en-US" sz="1400">
+                <a:rPr lang="en-US" sz="1400" dirty="0" err="1">
                   <a:solidFill>
                     <a:srgbClr val="000000"/>
                   </a:solidFill>
@@ -5780,17 +6172,20 @@
                   <a:cs typeface="字由点字典黑 2 Light" panose="00020600040101010101" charset="-122"/>
                   <a:sym typeface="字由点字典黑 2 Light" panose="00020600040101010101" charset="-122"/>
                 </a:rPr>
-                <a:t>说明项目选题的背景、现实需求或应用痛点，阐述开展本项目的必要性与意义。</a:t>
+                <a:t>说明项目选题的背景、现实需求或应用痛点，阐述开展本项目的必要性与意义</a:t>
               </a:r>
-              <a:endParaRPr lang="en-US" sz="1400">
-                <a:solidFill>
-                  <a:srgbClr val="000000"/>
-                </a:solidFill>
-                <a:latin typeface="字由点字典黑 2 Light" panose="00020600040101010101" charset="-122"/>
-                <a:ea typeface="字由点字典黑 2 Light" panose="00020600040101010101" charset="-122"/>
-                <a:cs typeface="字由点字典黑 2 Light" panose="00020600040101010101" charset="-122"/>
-                <a:sym typeface="字由点字典黑 2 Light" panose="00020600040101010101" charset="-122"/>
-              </a:endParaRPr>
+              <a:r>
+                <a:rPr lang="en-US" sz="1400" dirty="0">
+                  <a:solidFill>
+                    <a:srgbClr val="000000"/>
+                  </a:solidFill>
+                  <a:latin typeface="字由点字典黑 2 Light" panose="00020600040101010101" charset="-122"/>
+                  <a:ea typeface="字由点字典黑 2 Light" panose="00020600040101010101" charset="-122"/>
+                  <a:cs typeface="字由点字典黑 2 Light" panose="00020600040101010101" charset="-122"/>
+                  <a:sym typeface="字由点字典黑 2 Light" panose="00020600040101010101" charset="-122"/>
+                </a:rPr>
+                <a:t>。</a:t>
+              </a:r>
             </a:p>
           </p:txBody>
         </p:sp>
@@ -5833,15 +6228,6 @@
               </a:rPr>
               <a:t>【消融实验等图表】</a:t>
             </a:r>
-            <a:endParaRPr lang="en-US" sz="1400">
-              <a:solidFill>
-                <a:srgbClr val="000000"/>
-              </a:solidFill>
-              <a:latin typeface="字由点字典黑 2 Light" panose="00020600040101010101" charset="-122"/>
-              <a:ea typeface="字由点字典黑 2 Light" panose="00020600040101010101" charset="-122"/>
-              <a:cs typeface="字由点字典黑 2 Light" panose="00020600040101010101" charset="-122"/>
-              <a:sym typeface="字由点字典黑 2 Light" panose="00020600040101010101" charset="-122"/>
-            </a:endParaRPr>
           </a:p>
         </p:txBody>
       </p:sp>
@@ -5852,7 +6238,7 @@
           <p:nvPr/>
         </p:nvGrpSpPr>
         <p:grpSpPr>
-          <a:xfrm rot="0">
+          <a:xfrm>
             <a:off x="484545" y="8347811"/>
             <a:ext cx="4170620" cy="685417"/>
             <a:chOff x="0" y="0"/>
@@ -5897,15 +6283,6 @@
                 </a:rPr>
                 <a:t>应用场景</a:t>
               </a:r>
-              <a:endParaRPr lang="en-US" sz="1700" spc="-25">
-                <a:solidFill>
-                  <a:srgbClr val="000000"/>
-                </a:solidFill>
-                <a:latin typeface="字由点字典黑 2 Bold" panose="00020600040101010101" charset="-122"/>
-                <a:ea typeface="字由点字典黑 2 Bold" panose="00020600040101010101" charset="-122"/>
-                <a:cs typeface="字由点字典黑 2 Bold" panose="00020600040101010101" charset="-122"/>
-                <a:sym typeface="字由点字典黑 2 Bold" panose="00020600040101010101" charset="-122"/>
-              </a:endParaRPr>
             </a:p>
           </p:txBody>
         </p:sp>
@@ -5947,15 +6324,6 @@
                 </a:rPr>
                 <a:t>项目适用的具体场景、目标用户或潜在应用方向。</a:t>
               </a:r>
-              <a:endParaRPr lang="en-US" sz="1400">
-                <a:solidFill>
-                  <a:srgbClr val="000000"/>
-                </a:solidFill>
-                <a:latin typeface="字由点字典黑 2 Light" panose="00020600040101010101" charset="-122"/>
-                <a:ea typeface="字由点字典黑 2 Light" panose="00020600040101010101" charset="-122"/>
-                <a:cs typeface="字由点字典黑 2 Light" panose="00020600040101010101" charset="-122"/>
-                <a:sym typeface="字由点字典黑 2 Light" panose="00020600040101010101" charset="-122"/>
-              </a:endParaRPr>
             </a:p>
           </p:txBody>
         </p:sp>
@@ -5969,7 +6337,7 @@
         <p:spPr>
           <a:xfrm>
             <a:off x="380050" y="398085"/>
-            <a:ext cx="10971087" cy="393700"/>
+            <a:ext cx="10971087" cy="364780"/>
           </a:xfrm>
           <a:prstGeom prst="rect">
             <a:avLst/>
@@ -5987,23 +6355,119 @@
               </a:lnSpc>
             </a:pPr>
             <a:r>
-              <a:rPr lang="en-US" sz="2000" i="1" spc="86">
+              <a:rPr lang="en-US" sz="2000" i="1" spc="86" dirty="0" err="1">
                 <a:solidFill>
                   <a:srgbClr val="FFFFFF"/>
                 </a:solidFill>
-                <a:latin typeface="字由点字典黑 2 Medium Italics" panose="00020600040101010101" charset="-122"/>
-                <a:ea typeface="字由点字典黑 2 Medium Italics" panose="00020600040101010101" charset="-122"/>
+                <a:latin typeface="黑体" panose="02010609060101010101" pitchFamily="49" charset="-122"/>
+                <a:ea typeface="黑体" panose="02010609060101010101" pitchFamily="49" charset="-122"/>
                 <a:cs typeface="字由点字典黑 2 Medium Italics" panose="00020600040101010101" charset="-122"/>
                 <a:sym typeface="字由点字典黑 2 Medium Italics" panose="00020600040101010101" charset="-122"/>
               </a:rPr>
-              <a:t>复旦大学“未来智造（AI Agent）工程师训练营”结题</a:t>
-            </a:r>
-            <a:endParaRPr lang="en-US" sz="2000" i="1" spc="86">
+              <a:t>复旦大学</a:t>
+            </a:r>
+            <a:r>
+              <a:rPr lang="en-US" sz="2000" i="1" spc="86" dirty="0">
+                <a:solidFill>
+                  <a:srgbClr val="FFFFFF"/>
+                </a:solidFill>
+                <a:latin typeface="黑体" panose="02010609060101010101" pitchFamily="49" charset="-122"/>
+                <a:ea typeface="黑体" panose="02010609060101010101" pitchFamily="49" charset="-122"/>
+                <a:cs typeface="字由点字典黑 2 Medium Italics" panose="00020600040101010101" charset="-122"/>
+                <a:sym typeface="字由点字典黑 2 Medium Italics" panose="00020600040101010101" charset="-122"/>
+              </a:rPr>
+              <a:t>“ </a:t>
+            </a:r>
+            <a:r>
+              <a:rPr lang="en-US" sz="2000" i="1" spc="86" dirty="0" err="1">
+                <a:solidFill>
+                  <a:srgbClr val="FFFFFF"/>
+                </a:solidFill>
+                <a:latin typeface="黑体" panose="02010609060101010101" pitchFamily="49" charset="-122"/>
+                <a:ea typeface="黑体" panose="02010609060101010101" pitchFamily="49" charset="-122"/>
+                <a:cs typeface="字由点字典黑 2 Medium Italics" panose="00020600040101010101" charset="-122"/>
+                <a:sym typeface="字由点字典黑 2 Medium Italics" panose="00020600040101010101" charset="-122"/>
+              </a:rPr>
+              <a:t>未来智造（</a:t>
+            </a:r>
+            <a:r>
+              <a:rPr lang="en-US" sz="2000" i="1" spc="86" dirty="0" err="1">
+                <a:solidFill>
+                  <a:srgbClr val="FFFFFF"/>
+                </a:solidFill>
+                <a:latin typeface="Times New Roman" panose="02020603050405020304" pitchFamily="18" charset="0"/>
+                <a:ea typeface="黑体" panose="02010609060101010101" pitchFamily="49" charset="-122"/>
+                <a:cs typeface="Times New Roman" panose="02020603050405020304" pitchFamily="18" charset="0"/>
+                <a:sym typeface="字由点字典黑 2 Medium Italics" panose="00020600040101010101" charset="-122"/>
+              </a:rPr>
+              <a:t>AI</a:t>
+            </a:r>
+            <a:r>
+              <a:rPr lang="en-US" sz="2000" i="1" spc="86" dirty="0">
+                <a:solidFill>
+                  <a:srgbClr val="FFFFFF"/>
+                </a:solidFill>
+                <a:latin typeface="Times New Roman" panose="02020603050405020304" pitchFamily="18" charset="0"/>
+                <a:ea typeface="黑体" panose="02010609060101010101" pitchFamily="49" charset="-122"/>
+                <a:cs typeface="Times New Roman" panose="02020603050405020304" pitchFamily="18" charset="0"/>
+                <a:sym typeface="字由点字典黑 2 Medium Italics" panose="00020600040101010101" charset="-122"/>
+              </a:rPr>
+              <a:t> </a:t>
+            </a:r>
+            <a:r>
+              <a:rPr lang="en-US" sz="2000" i="1" spc="86" dirty="0" err="1">
+                <a:solidFill>
+                  <a:srgbClr val="FFFFFF"/>
+                </a:solidFill>
+                <a:latin typeface="Times New Roman" panose="02020603050405020304" pitchFamily="18" charset="0"/>
+                <a:ea typeface="黑体" panose="02010609060101010101" pitchFamily="49" charset="-122"/>
+                <a:cs typeface="Times New Roman" panose="02020603050405020304" pitchFamily="18" charset="0"/>
+                <a:sym typeface="字由点字典黑 2 Medium Italics" panose="00020600040101010101" charset="-122"/>
+              </a:rPr>
+              <a:t>Agent</a:t>
+            </a:r>
+            <a:r>
+              <a:rPr lang="en-US" sz="2000" i="1" spc="86" dirty="0" err="1">
+                <a:solidFill>
+                  <a:srgbClr val="FFFFFF"/>
+                </a:solidFill>
+                <a:latin typeface="黑体" panose="02010609060101010101" pitchFamily="49" charset="-122"/>
+                <a:ea typeface="黑体" panose="02010609060101010101" pitchFamily="49" charset="-122"/>
+                <a:cs typeface="字由点字典黑 2 Medium Italics" panose="00020600040101010101" charset="-122"/>
+                <a:sym typeface="字由点字典黑 2 Medium Italics" panose="00020600040101010101" charset="-122"/>
+              </a:rPr>
+              <a:t>）工程师训练营</a:t>
+            </a:r>
+            <a:r>
+              <a:rPr lang="en-US" sz="2000" i="1" spc="86" dirty="0">
+                <a:solidFill>
+                  <a:srgbClr val="FFFFFF"/>
+                </a:solidFill>
+                <a:latin typeface="黑体" panose="02010609060101010101" pitchFamily="49" charset="-122"/>
+                <a:ea typeface="黑体" panose="02010609060101010101" pitchFamily="49" charset="-122"/>
+                <a:cs typeface="字由点字典黑 2 Medium Italics" panose="00020600040101010101" charset="-122"/>
+                <a:sym typeface="字由点字典黑 2 Medium Italics" panose="00020600040101010101" charset="-122"/>
+              </a:rPr>
+              <a:t>” </a:t>
+            </a:r>
+            <a:r>
+              <a:rPr lang="en-US" sz="2000" i="1" spc="86" dirty="0" err="1">
+                <a:solidFill>
+                  <a:srgbClr val="FFFFFF"/>
+                </a:solidFill>
+                <a:latin typeface="黑体" panose="02010609060101010101" pitchFamily="49" charset="-122"/>
+                <a:ea typeface="黑体" panose="02010609060101010101" pitchFamily="49" charset="-122"/>
+                <a:cs typeface="字由点字典黑 2 Medium Italics" panose="00020600040101010101" charset="-122"/>
+                <a:sym typeface="字由点字典黑 2 Medium Italics" panose="00020600040101010101" charset="-122"/>
+              </a:rPr>
+              <a:t>结题</a:t>
+            </a:r>
+            <a:endParaRPr lang="en-US" sz="2000" i="1" spc="86" dirty="0">
               <a:solidFill>
                 <a:srgbClr val="FFFFFF"/>
               </a:solidFill>
-              <a:latin typeface="字由点字典黑 2 Medium Italics" panose="00020600040101010101" charset="-122"/>
-              <a:ea typeface="字由点字典黑 2 Medium Italics" panose="00020600040101010101" charset="-122"/>
+              <a:latin typeface="黑体" panose="02010609060101010101" pitchFamily="49" charset="-122"/>
+              <a:ea typeface="黑体" panose="02010609060101010101" pitchFamily="49" charset="-122"/>
               <a:cs typeface="字由点字典黑 2 Medium Italics" panose="00020600040101010101" charset="-122"/>
               <a:sym typeface="字由点字典黑 2 Medium Italics" panose="00020600040101010101" charset="-122"/>
             </a:endParaRPr>
@@ -6017,7 +6481,7 @@
           <p:nvPr/>
         </p:nvGrpSpPr>
         <p:grpSpPr>
-          <a:xfrm rot="0">
+          <a:xfrm>
             <a:off x="5230470" y="6188241"/>
             <a:ext cx="4412630" cy="975612"/>
             <a:chOff x="0" y="0"/>
@@ -6062,15 +6526,6 @@
                 </a:rPr>
                 <a:t>数据来源</a:t>
               </a:r>
-              <a:endParaRPr lang="en-US" sz="1800" spc="-27">
-                <a:solidFill>
-                  <a:srgbClr val="000000"/>
-                </a:solidFill>
-                <a:latin typeface="字由点字典黑 2 Bold" panose="00020600040101010101" charset="-122"/>
-                <a:ea typeface="字由点字典黑 2 Bold" panose="00020600040101010101" charset="-122"/>
-                <a:cs typeface="字由点字典黑 2 Bold" panose="00020600040101010101" charset="-122"/>
-                <a:sym typeface="字由点字典黑 2 Bold" panose="00020600040101010101" charset="-122"/>
-              </a:endParaRPr>
             </a:p>
           </p:txBody>
         </p:sp>
@@ -6112,15 +6567,6 @@
                 </a:rPr>
                 <a:t>项目所使用的数据、知识库、文档、接口或其他信息来源，并简要说明数据的获取与处理方式。</a:t>
               </a:r>
-              <a:endParaRPr lang="en-US" sz="1400">
-                <a:solidFill>
-                  <a:srgbClr val="000000"/>
-                </a:solidFill>
-                <a:latin typeface="字由点字典黑 2 Light" panose="00020600040101010101" charset="-122"/>
-                <a:ea typeface="字由点字典黑 2 Light" panose="00020600040101010101" charset="-122"/>
-                <a:cs typeface="字由点字典黑 2 Light" panose="00020600040101010101" charset="-122"/>
-                <a:sym typeface="字由点字典黑 2 Light" panose="00020600040101010101" charset="-122"/>
-              </a:endParaRPr>
             </a:p>
           </p:txBody>
         </p:sp>
@@ -6132,7 +6578,7 @@
           <p:nvPr/>
         </p:nvGrpSpPr>
         <p:grpSpPr>
-          <a:xfrm rot="0">
+          <a:xfrm>
             <a:off x="5230470" y="8332135"/>
             <a:ext cx="4412630" cy="975612"/>
             <a:chOff x="0" y="0"/>
@@ -6177,15 +6623,6 @@
                 </a:rPr>
                 <a:t>研究工具</a:t>
               </a:r>
-              <a:endParaRPr lang="en-US" sz="1800" spc="-27">
-                <a:solidFill>
-                  <a:srgbClr val="000000"/>
-                </a:solidFill>
-                <a:latin typeface="字由点字典黑 2 Bold" panose="00020600040101010101" charset="-122"/>
-                <a:ea typeface="字由点字典黑 2 Bold" panose="00020600040101010101" charset="-122"/>
-                <a:cs typeface="字由点字典黑 2 Bold" panose="00020600040101010101" charset="-122"/>
-                <a:sym typeface="字由点字典黑 2 Bold" panose="00020600040101010101" charset="-122"/>
-              </a:endParaRPr>
             </a:p>
           </p:txBody>
         </p:sp>
@@ -6227,15 +6664,6 @@
                 </a:rPr>
                 <a:t>介绍 Agent 开发和实现过程中使用的主要工具、平台、模型、框架等。</a:t>
               </a:r>
-              <a:endParaRPr lang="en-US" sz="1400">
-                <a:solidFill>
-                  <a:srgbClr val="000000"/>
-                </a:solidFill>
-                <a:latin typeface="字由点字典黑 2 Light" panose="00020600040101010101" charset="-122"/>
-                <a:ea typeface="字由点字典黑 2 Light" panose="00020600040101010101" charset="-122"/>
-                <a:cs typeface="字由点字典黑 2 Light" panose="00020600040101010101" charset="-122"/>
-                <a:sym typeface="字由点字典黑 2 Light" panose="00020600040101010101" charset="-122"/>
-              </a:endParaRPr>
             </a:p>
           </p:txBody>
         </p:sp>
@@ -6278,15 +6706,6 @@
               </a:rPr>
               <a:t>引言 Introduction</a:t>
             </a:r>
-            <a:endParaRPr lang="en-US" sz="2295" spc="-34">
-              <a:solidFill>
-                <a:srgbClr val="FFFFFF"/>
-              </a:solidFill>
-              <a:latin typeface="字由点字典黑 2 Bold" panose="00020600040101010101" charset="-122"/>
-              <a:ea typeface="字由点字典黑 2 Bold" panose="00020600040101010101" charset="-122"/>
-              <a:cs typeface="字由点字典黑 2 Bold" panose="00020600040101010101" charset="-122"/>
-              <a:sym typeface="字由点字典黑 2 Bold" panose="00020600040101010101" charset="-122"/>
-            </a:endParaRPr>
           </a:p>
         </p:txBody>
       </p:sp>
@@ -6328,15 +6747,6 @@
               </a:rPr>
               <a:t>工具 Tools</a:t>
             </a:r>
-            <a:endParaRPr lang="en-US" sz="2295" spc="-34">
-              <a:solidFill>
-                <a:srgbClr val="FFFFFF"/>
-              </a:solidFill>
-              <a:latin typeface="字由点字典黑 2 Bold" panose="00020600040101010101" charset="-122"/>
-              <a:ea typeface="字由点字典黑 2 Bold" panose="00020600040101010101" charset="-122"/>
-              <a:cs typeface="字由点字典黑 2 Bold" panose="00020600040101010101" charset="-122"/>
-              <a:sym typeface="字由点字典黑 2 Bold" panose="00020600040101010101" charset="-122"/>
-            </a:endParaRPr>
           </a:p>
         </p:txBody>
       </p:sp>
@@ -6378,15 +6788,6 @@
               </a:rPr>
               <a:t>总结 Conclusion</a:t>
             </a:r>
-            <a:endParaRPr lang="en-US" sz="2295" spc="-34">
-              <a:solidFill>
-                <a:srgbClr val="FFFFFF"/>
-              </a:solidFill>
-              <a:latin typeface="字由点字典黑 2 Bold" panose="00020600040101010101" charset="-122"/>
-              <a:ea typeface="字由点字典黑 2 Bold" panose="00020600040101010101" charset="-122"/>
-              <a:cs typeface="字由点字典黑 2 Bold" panose="00020600040101010101" charset="-122"/>
-              <a:sym typeface="字由点字典黑 2 Bold" panose="00020600040101010101" charset="-122"/>
-            </a:endParaRPr>
           </a:p>
         </p:txBody>
       </p:sp>
@@ -6428,6 +6829,479 @@
               </a:rPr>
               <a:t>【项目 demo1】</a:t>
             </a:r>
+          </a:p>
+        </p:txBody>
+      </p:sp>
+      <p:sp>
+        <p:nvSpPr>
+          <p:cNvPr id="92" name="TextBox 92"/>
+          <p:cNvSpPr txBox="1"/>
+          <p:nvPr/>
+        </p:nvSpPr>
+        <p:spPr>
+          <a:xfrm>
+            <a:off x="10557534" y="10692712"/>
+            <a:ext cx="3366019" cy="271780"/>
+          </a:xfrm>
+          <a:prstGeom prst="rect">
+            <a:avLst/>
+          </a:prstGeom>
+        </p:spPr>
+        <p:txBody>
+          <a:bodyPr lIns="0" tIns="0" rIns="0" bIns="0" rtlCol="0" anchor="t">
+            <a:spAutoFit/>
+          </a:bodyPr>
+          <a:lstStyle/>
+          <a:p>
+            <a:pPr marL="0" lvl="0" indent="0" algn="ctr">
+              <a:lnSpc>
+                <a:spcPts val="2240"/>
+              </a:lnSpc>
+            </a:pPr>
+            <a:r>
+              <a:rPr lang="en-US" sz="1400">
+                <a:solidFill>
+                  <a:srgbClr val="000000"/>
+                </a:solidFill>
+                <a:latin typeface="字由点字典黑 2 Light" panose="00020600040101010101" charset="-122"/>
+                <a:ea typeface="字由点字典黑 2 Light" panose="00020600040101010101" charset="-122"/>
+                <a:cs typeface="字由点字典黑 2 Light" panose="00020600040101010101" charset="-122"/>
+                <a:sym typeface="字由点字典黑 2 Light" panose="00020600040101010101" charset="-122"/>
+              </a:rPr>
+              <a:t>【项目demo2】</a:t>
+            </a:r>
+          </a:p>
+        </p:txBody>
+      </p:sp>
+      <p:sp>
+        <p:nvSpPr>
+          <p:cNvPr id="93" name="TextBox 93"/>
+          <p:cNvSpPr txBox="1"/>
+          <p:nvPr/>
+        </p:nvSpPr>
+        <p:spPr>
+          <a:xfrm>
+            <a:off x="555520" y="11432451"/>
+            <a:ext cx="8481153" cy="435783"/>
+          </a:xfrm>
+          <a:prstGeom prst="rect">
+            <a:avLst/>
+          </a:prstGeom>
+        </p:spPr>
+        <p:txBody>
+          <a:bodyPr lIns="0" tIns="0" rIns="0" bIns="0" rtlCol="0" anchor="t">
+            <a:spAutoFit/>
+          </a:bodyPr>
+          <a:lstStyle/>
+          <a:p>
+            <a:pPr marL="0" lvl="0" indent="0" algn="l">
+              <a:lnSpc>
+                <a:spcPts val="3675"/>
+              </a:lnSpc>
+            </a:pPr>
+            <a:r>
+              <a:rPr lang="en-US" sz="2295" spc="-34">
+                <a:solidFill>
+                  <a:srgbClr val="FFFFFF"/>
+                </a:solidFill>
+                <a:latin typeface="字由点字典黑 2 Bold" panose="00020600040101010101" charset="-122"/>
+                <a:ea typeface="字由点字典黑 2 Bold" panose="00020600040101010101" charset="-122"/>
+                <a:cs typeface="字由点字典黑 2 Bold" panose="00020600040101010101" charset="-122"/>
+                <a:sym typeface="字由点字典黑 2 Bold" panose="00020600040101010101" charset="-122"/>
+              </a:rPr>
+              <a:t>研究方法与实验 Methods &amp; Experiments</a:t>
+            </a:r>
+          </a:p>
+        </p:txBody>
+      </p:sp>
+      <p:sp>
+        <p:nvSpPr>
+          <p:cNvPr id="94" name="TextBox 94"/>
+          <p:cNvSpPr txBox="1"/>
+          <p:nvPr/>
+        </p:nvSpPr>
+        <p:spPr>
+          <a:xfrm>
+            <a:off x="1262981" y="16222835"/>
+            <a:ext cx="8361455" cy="271780"/>
+          </a:xfrm>
+          <a:prstGeom prst="rect">
+            <a:avLst/>
+          </a:prstGeom>
+        </p:spPr>
+        <p:txBody>
+          <a:bodyPr lIns="0" tIns="0" rIns="0" bIns="0" rtlCol="0" anchor="t">
+            <a:spAutoFit/>
+          </a:bodyPr>
+          <a:lstStyle/>
+          <a:p>
+            <a:pPr marL="0" lvl="0" indent="0" algn="just">
+              <a:lnSpc>
+                <a:spcPts val="2240"/>
+              </a:lnSpc>
+            </a:pPr>
+            <a:r>
+              <a:rPr lang="en-US" sz="1400">
+                <a:solidFill>
+                  <a:srgbClr val="000000"/>
+                </a:solidFill>
+                <a:latin typeface="字由点字典黑 2 Light" panose="00020600040101010101" charset="-122"/>
+                <a:ea typeface="字由点字典黑 2 Light" panose="00020600040101010101" charset="-122"/>
+                <a:cs typeface="字由点字典黑 2 Light" panose="00020600040101010101" charset="-122"/>
+                <a:sym typeface="字由点字典黑 2 Light" panose="00020600040101010101" charset="-122"/>
+              </a:rPr>
+              <a:t>【项目方法1】简要说明项目的整体技术思路、系统架构或 Agent 工作流程。</a:t>
+            </a:r>
+          </a:p>
+        </p:txBody>
+      </p:sp>
+      <p:sp>
+        <p:nvSpPr>
+          <p:cNvPr id="95" name="TextBox 95"/>
+          <p:cNvSpPr txBox="1"/>
+          <p:nvPr/>
+        </p:nvSpPr>
+        <p:spPr>
+          <a:xfrm>
+            <a:off x="1262981" y="17178128"/>
+            <a:ext cx="7884809" cy="271780"/>
+          </a:xfrm>
+          <a:prstGeom prst="rect">
+            <a:avLst/>
+          </a:prstGeom>
+        </p:spPr>
+        <p:txBody>
+          <a:bodyPr lIns="0" tIns="0" rIns="0" bIns="0" rtlCol="0" anchor="t">
+            <a:spAutoFit/>
+          </a:bodyPr>
+          <a:lstStyle/>
+          <a:p>
+            <a:pPr marL="0" lvl="0" indent="0" algn="just">
+              <a:lnSpc>
+                <a:spcPts val="2240"/>
+              </a:lnSpc>
+            </a:pPr>
+            <a:r>
+              <a:rPr lang="en-US" sz="1400">
+                <a:solidFill>
+                  <a:srgbClr val="000000"/>
+                </a:solidFill>
+                <a:latin typeface="字由点字典黑 2 Light" panose="00020600040101010101" charset="-122"/>
+                <a:ea typeface="字由点字典黑 2 Light" panose="00020600040101010101" charset="-122"/>
+                <a:cs typeface="字由点字典黑 2 Light" panose="00020600040101010101" charset="-122"/>
+                <a:sym typeface="字由点字典黑 2 Light" panose="00020600040101010101" charset="-122"/>
+              </a:rPr>
+              <a:t>【项目方法2】简要说明项目中的关键模块、核心算法、工具调用方式或创新设计。</a:t>
+            </a:r>
+          </a:p>
+        </p:txBody>
+      </p:sp>
+      <p:sp>
+        <p:nvSpPr>
+          <p:cNvPr id="96" name="TextBox 96"/>
+          <p:cNvSpPr txBox="1"/>
+          <p:nvPr/>
+        </p:nvSpPr>
+        <p:spPr>
+          <a:xfrm>
+            <a:off x="9663039" y="1544681"/>
+            <a:ext cx="5512002" cy="351058"/>
+          </a:xfrm>
+          <a:prstGeom prst="rect">
+            <a:avLst/>
+          </a:prstGeom>
+        </p:spPr>
+        <p:txBody>
+          <a:bodyPr wrap="square" lIns="0" tIns="0" rIns="0" bIns="0" rtlCol="0" anchor="t">
+            <a:spAutoFit/>
+          </a:bodyPr>
+          <a:lstStyle/>
+          <a:p>
+            <a:pPr algn="l">
+              <a:lnSpc>
+                <a:spcPts val="3200"/>
+              </a:lnSpc>
+            </a:pPr>
+            <a:r>
+              <a:rPr lang="zh-CN" altLang="en-US" sz="2000" b="1" spc="132" dirty="0">
+                <a:solidFill>
+                  <a:srgbClr val="FFFFFF"/>
+                </a:solidFill>
+                <a:latin typeface="黑体" panose="02010609060101010101" pitchFamily="49" charset="-122"/>
+                <a:ea typeface="黑体" panose="02010609060101010101" pitchFamily="49" charset="-122"/>
+                <a:cs typeface="阿里巴巴普惠体 Medium" panose="00020600040101010101" charset="-122"/>
+                <a:sym typeface="阿里巴巴普惠体 Medium" panose="00020600040101010101" charset="-122"/>
+              </a:rPr>
+              <a:t>彭希瑞 徐包原 钱逸峰 松格拉 康熙 夏庭浩</a:t>
+            </a:r>
+            <a:endParaRPr lang="en-US" sz="2000" b="1" spc="132" dirty="0">
+              <a:solidFill>
+                <a:srgbClr val="FFFFFF"/>
+              </a:solidFill>
+              <a:latin typeface="黑体" panose="02010609060101010101" pitchFamily="49" charset="-122"/>
+              <a:ea typeface="黑体" panose="02010609060101010101" pitchFamily="49" charset="-122"/>
+              <a:cs typeface="阿里巴巴普惠体 Medium" panose="00020600040101010101" charset="-122"/>
+              <a:sym typeface="阿里巴巴普惠体 Medium" panose="00020600040101010101" charset="-122"/>
+            </a:endParaRPr>
+          </a:p>
+        </p:txBody>
+      </p:sp>
+      <p:sp>
+        <p:nvSpPr>
+          <p:cNvPr id="97" name="TextBox 97"/>
+          <p:cNvSpPr txBox="1"/>
+          <p:nvPr/>
+        </p:nvSpPr>
+        <p:spPr>
+          <a:xfrm>
+            <a:off x="4518571" y="20602123"/>
+            <a:ext cx="3624341" cy="337185"/>
+          </a:xfrm>
+          <a:prstGeom prst="rect">
+            <a:avLst/>
+          </a:prstGeom>
+        </p:spPr>
+        <p:txBody>
+          <a:bodyPr lIns="0" tIns="0" rIns="0" bIns="0" rtlCol="0" anchor="t">
+            <a:spAutoFit/>
+          </a:bodyPr>
+          <a:lstStyle/>
+          <a:p>
+            <a:pPr marL="0" lvl="0" indent="0" algn="l">
+              <a:lnSpc>
+                <a:spcPts val="2880"/>
+              </a:lnSpc>
+            </a:pPr>
+            <a:r>
+              <a:rPr lang="en-US" sz="1800">
+                <a:solidFill>
+                  <a:srgbClr val="FFFFFF"/>
+                </a:solidFill>
+                <a:latin typeface="字由点字典黑 1" panose="00020600040101010101" charset="-122"/>
+                <a:ea typeface="字由点字典黑 1" panose="00020600040101010101" charset="-122"/>
+                <a:cs typeface="字由点字典黑 1" panose="00020600040101010101" charset="-122"/>
+                <a:sym typeface="字由点字典黑 1" panose="00020600040101010101" charset="-122"/>
+              </a:rPr>
+              <a:t>项目网站 / 论文链接（如有）：</a:t>
+            </a:r>
+          </a:p>
+        </p:txBody>
+      </p:sp>
+      <p:sp>
+        <p:nvSpPr>
+          <p:cNvPr id="99" name="TextBox 99"/>
+          <p:cNvSpPr txBox="1"/>
+          <p:nvPr/>
+        </p:nvSpPr>
+        <p:spPr>
+          <a:xfrm>
+            <a:off x="1152552" y="15041890"/>
+            <a:ext cx="3366019" cy="271780"/>
+          </a:xfrm>
+          <a:prstGeom prst="rect">
+            <a:avLst/>
+          </a:prstGeom>
+        </p:spPr>
+        <p:txBody>
+          <a:bodyPr lIns="0" tIns="0" rIns="0" bIns="0" rtlCol="0" anchor="t">
+            <a:spAutoFit/>
+          </a:bodyPr>
+          <a:lstStyle/>
+          <a:p>
+            <a:pPr marL="0" lvl="0" indent="0" algn="ctr">
+              <a:lnSpc>
+                <a:spcPts val="2240"/>
+              </a:lnSpc>
+            </a:pPr>
+            <a:r>
+              <a:rPr lang="en-US" sz="1400">
+                <a:solidFill>
+                  <a:srgbClr val="000000"/>
+                </a:solidFill>
+                <a:latin typeface="字由点字典黑 2 Light" panose="00020600040101010101" charset="-122"/>
+                <a:ea typeface="字由点字典黑 2 Light" panose="00020600040101010101" charset="-122"/>
+                <a:cs typeface="字由点字典黑 2 Light" panose="00020600040101010101" charset="-122"/>
+                <a:sym typeface="字由点字典黑 2 Light" panose="00020600040101010101" charset="-122"/>
+              </a:rPr>
+              <a:t>【流程图】</a:t>
+            </a:r>
+          </a:p>
+        </p:txBody>
+      </p:sp>
+      <p:sp>
+        <p:nvSpPr>
+          <p:cNvPr id="100" name="TextBox 100"/>
+          <p:cNvSpPr txBox="1"/>
+          <p:nvPr/>
+        </p:nvSpPr>
+        <p:spPr>
+          <a:xfrm>
+            <a:off x="752605" y="15704674"/>
+            <a:ext cx="933624" cy="346711"/>
+          </a:xfrm>
+          <a:prstGeom prst="rect">
+            <a:avLst/>
+          </a:prstGeom>
+        </p:spPr>
+        <p:txBody>
+          <a:bodyPr lIns="0" tIns="0" rIns="0" bIns="0" rtlCol="0" anchor="t">
+            <a:spAutoFit/>
+          </a:bodyPr>
+          <a:lstStyle/>
+          <a:p>
+            <a:pPr algn="l">
+              <a:lnSpc>
+                <a:spcPts val="2880"/>
+              </a:lnSpc>
+              <a:spcBef>
+                <a:spcPct val="0"/>
+              </a:spcBef>
+            </a:pPr>
+            <a:r>
+              <a:rPr lang="en-US" sz="1800" spc="-26">
+                <a:solidFill>
+                  <a:srgbClr val="000000"/>
+                </a:solidFill>
+                <a:latin typeface="字由点字典黑 2 Bold" panose="00020600040101010101" charset="-122"/>
+                <a:ea typeface="字由点字典黑 2 Bold" panose="00020600040101010101" charset="-122"/>
+                <a:cs typeface="字由点字典黑 2 Bold" panose="00020600040101010101" charset="-122"/>
+                <a:sym typeface="字由点字典黑 2 Bold" panose="00020600040101010101" charset="-122"/>
+              </a:rPr>
+              <a:t>项目方法</a:t>
+            </a:r>
+          </a:p>
+        </p:txBody>
+      </p:sp>
+      <p:sp>
+        <p:nvSpPr>
+          <p:cNvPr id="101" name="TextBox 101"/>
+          <p:cNvSpPr txBox="1"/>
+          <p:nvPr/>
+        </p:nvSpPr>
+        <p:spPr>
+          <a:xfrm>
+            <a:off x="752605" y="17888297"/>
+            <a:ext cx="933624" cy="346711"/>
+          </a:xfrm>
+          <a:prstGeom prst="rect">
+            <a:avLst/>
+          </a:prstGeom>
+        </p:spPr>
+        <p:txBody>
+          <a:bodyPr lIns="0" tIns="0" rIns="0" bIns="0" rtlCol="0" anchor="t">
+            <a:spAutoFit/>
+          </a:bodyPr>
+          <a:lstStyle/>
+          <a:p>
+            <a:pPr algn="l">
+              <a:lnSpc>
+                <a:spcPts val="2880"/>
+              </a:lnSpc>
+              <a:spcBef>
+                <a:spcPct val="0"/>
+              </a:spcBef>
+            </a:pPr>
+            <a:r>
+              <a:rPr lang="en-US" sz="1800" spc="-26">
+                <a:solidFill>
+                  <a:srgbClr val="000000"/>
+                </a:solidFill>
+                <a:latin typeface="字由点字典黑 2 Bold" panose="00020600040101010101" charset="-122"/>
+                <a:ea typeface="字由点字典黑 2 Bold" panose="00020600040101010101" charset="-122"/>
+                <a:cs typeface="字由点字典黑 2 Bold" panose="00020600040101010101" charset="-122"/>
+                <a:sym typeface="字由点字典黑 2 Bold" panose="00020600040101010101" charset="-122"/>
+              </a:rPr>
+              <a:t>实验验证</a:t>
+            </a:r>
+          </a:p>
+        </p:txBody>
+      </p:sp>
+      <p:sp>
+        <p:nvSpPr>
+          <p:cNvPr id="102" name="TextBox 102"/>
+          <p:cNvSpPr txBox="1"/>
+          <p:nvPr/>
+        </p:nvSpPr>
+        <p:spPr>
+          <a:xfrm>
+            <a:off x="1262981" y="18463037"/>
+            <a:ext cx="8361455" cy="271780"/>
+          </a:xfrm>
+          <a:prstGeom prst="rect">
+            <a:avLst/>
+          </a:prstGeom>
+        </p:spPr>
+        <p:txBody>
+          <a:bodyPr lIns="0" tIns="0" rIns="0" bIns="0" rtlCol="0" anchor="t">
+            <a:spAutoFit/>
+          </a:bodyPr>
+          <a:lstStyle/>
+          <a:p>
+            <a:pPr marL="0" lvl="0" indent="0" algn="just">
+              <a:lnSpc>
+                <a:spcPts val="2240"/>
+              </a:lnSpc>
+            </a:pPr>
+            <a:r>
+              <a:rPr lang="en-US" sz="1400">
+                <a:solidFill>
+                  <a:srgbClr val="000000"/>
+                </a:solidFill>
+                <a:latin typeface="字由点字典黑 2 Light" panose="00020600040101010101" charset="-122"/>
+                <a:ea typeface="字由点字典黑 2 Light" panose="00020600040101010101" charset="-122"/>
+                <a:cs typeface="字由点字典黑 2 Light" panose="00020600040101010101" charset="-122"/>
+                <a:sym typeface="字由点字典黑 2 Light" panose="00020600040101010101" charset="-122"/>
+              </a:rPr>
+              <a:t>【实验验证1】说明项目功能测试、案例验证或系统运行效果的主要内容。</a:t>
+            </a:r>
+          </a:p>
+        </p:txBody>
+      </p:sp>
+      <p:sp>
+        <p:nvSpPr>
+          <p:cNvPr id="103" name="TextBox 103"/>
+          <p:cNvSpPr txBox="1"/>
+          <p:nvPr/>
+        </p:nvSpPr>
+        <p:spPr>
+          <a:xfrm>
+            <a:off x="1262981" y="19339815"/>
+            <a:ext cx="8380119" cy="548005"/>
+          </a:xfrm>
+          <a:prstGeom prst="rect">
+            <a:avLst/>
+          </a:prstGeom>
+        </p:spPr>
+        <p:txBody>
+          <a:bodyPr lIns="0" tIns="0" rIns="0" bIns="0" rtlCol="0" anchor="t">
+            <a:spAutoFit/>
+          </a:bodyPr>
+          <a:lstStyle/>
+          <a:p>
+            <a:pPr algn="just">
+              <a:lnSpc>
+                <a:spcPts val="2240"/>
+              </a:lnSpc>
+            </a:pPr>
+            <a:r>
+              <a:rPr lang="en-US" sz="1400">
+                <a:solidFill>
+                  <a:srgbClr val="000000"/>
+                </a:solidFill>
+                <a:latin typeface="字由点字典黑 2 Light" panose="00020600040101010101" charset="-122"/>
+                <a:ea typeface="字由点字典黑 2 Light" panose="00020600040101010101" charset="-122"/>
+                <a:cs typeface="字由点字典黑 2 Light" panose="00020600040101010101" charset="-122"/>
+                <a:sym typeface="字由点字典黑 2 Light" panose="00020600040101010101" charset="-122"/>
+              </a:rPr>
+              <a:t>【实验验证2】说明项目效果评估方式、对比实验、用户反馈或结果分析。</a:t>
+            </a:r>
+          </a:p>
+          <a:p>
+            <a:pPr marL="0" lvl="0" indent="0" algn="just">
+              <a:lnSpc>
+                <a:spcPts val="2240"/>
+              </a:lnSpc>
+            </a:pPr>
             <a:endParaRPr lang="en-US" sz="1400">
               <a:solidFill>
                 <a:srgbClr val="000000"/>
@@ -6442,622 +7316,6 @@
       </p:sp>
       <p:sp>
         <p:nvSpPr>
-          <p:cNvPr id="92" name="TextBox 92"/>
-          <p:cNvSpPr txBox="1"/>
-          <p:nvPr/>
-        </p:nvSpPr>
-        <p:spPr>
-          <a:xfrm>
-            <a:off x="10557534" y="10692712"/>
-            <a:ext cx="3366019" cy="271780"/>
-          </a:xfrm>
-          <a:prstGeom prst="rect">
-            <a:avLst/>
-          </a:prstGeom>
-        </p:spPr>
-        <p:txBody>
-          <a:bodyPr lIns="0" tIns="0" rIns="0" bIns="0" rtlCol="0" anchor="t">
-            <a:spAutoFit/>
-          </a:bodyPr>
-          <a:lstStyle/>
-          <a:p>
-            <a:pPr marL="0" lvl="0" indent="0" algn="ctr">
-              <a:lnSpc>
-                <a:spcPts val="2240"/>
-              </a:lnSpc>
-            </a:pPr>
-            <a:r>
-              <a:rPr lang="en-US" sz="1400">
-                <a:solidFill>
-                  <a:srgbClr val="000000"/>
-                </a:solidFill>
-                <a:latin typeface="字由点字典黑 2 Light" panose="00020600040101010101" charset="-122"/>
-                <a:ea typeface="字由点字典黑 2 Light" panose="00020600040101010101" charset="-122"/>
-                <a:cs typeface="字由点字典黑 2 Light" panose="00020600040101010101" charset="-122"/>
-                <a:sym typeface="字由点字典黑 2 Light" panose="00020600040101010101" charset="-122"/>
-              </a:rPr>
-              <a:t>【项目demo2】</a:t>
-            </a:r>
-            <a:endParaRPr lang="en-US" sz="1400">
-              <a:solidFill>
-                <a:srgbClr val="000000"/>
-              </a:solidFill>
-              <a:latin typeface="字由点字典黑 2 Light" panose="00020600040101010101" charset="-122"/>
-              <a:ea typeface="字由点字典黑 2 Light" panose="00020600040101010101" charset="-122"/>
-              <a:cs typeface="字由点字典黑 2 Light" panose="00020600040101010101" charset="-122"/>
-              <a:sym typeface="字由点字典黑 2 Light" panose="00020600040101010101" charset="-122"/>
-            </a:endParaRPr>
-          </a:p>
-        </p:txBody>
-      </p:sp>
-      <p:sp>
-        <p:nvSpPr>
-          <p:cNvPr id="93" name="TextBox 93"/>
-          <p:cNvSpPr txBox="1"/>
-          <p:nvPr/>
-        </p:nvSpPr>
-        <p:spPr>
-          <a:xfrm>
-            <a:off x="555520" y="11432451"/>
-            <a:ext cx="8481153" cy="435783"/>
-          </a:xfrm>
-          <a:prstGeom prst="rect">
-            <a:avLst/>
-          </a:prstGeom>
-        </p:spPr>
-        <p:txBody>
-          <a:bodyPr lIns="0" tIns="0" rIns="0" bIns="0" rtlCol="0" anchor="t">
-            <a:spAutoFit/>
-          </a:bodyPr>
-          <a:lstStyle/>
-          <a:p>
-            <a:pPr marL="0" lvl="0" indent="0" algn="l">
-              <a:lnSpc>
-                <a:spcPts val="3675"/>
-              </a:lnSpc>
-            </a:pPr>
-            <a:r>
-              <a:rPr lang="en-US" sz="2295" spc="-34">
-                <a:solidFill>
-                  <a:srgbClr val="FFFFFF"/>
-                </a:solidFill>
-                <a:latin typeface="字由点字典黑 2 Bold" panose="00020600040101010101" charset="-122"/>
-                <a:ea typeface="字由点字典黑 2 Bold" panose="00020600040101010101" charset="-122"/>
-                <a:cs typeface="字由点字典黑 2 Bold" panose="00020600040101010101" charset="-122"/>
-                <a:sym typeface="字由点字典黑 2 Bold" panose="00020600040101010101" charset="-122"/>
-              </a:rPr>
-              <a:t>研究方法与实验 Methods &amp; Experiments</a:t>
-            </a:r>
-            <a:endParaRPr lang="en-US" sz="2295" spc="-34">
-              <a:solidFill>
-                <a:srgbClr val="FFFFFF"/>
-              </a:solidFill>
-              <a:latin typeface="字由点字典黑 2 Bold" panose="00020600040101010101" charset="-122"/>
-              <a:ea typeface="字由点字典黑 2 Bold" panose="00020600040101010101" charset="-122"/>
-              <a:cs typeface="字由点字典黑 2 Bold" panose="00020600040101010101" charset="-122"/>
-              <a:sym typeface="字由点字典黑 2 Bold" panose="00020600040101010101" charset="-122"/>
-            </a:endParaRPr>
-          </a:p>
-        </p:txBody>
-      </p:sp>
-      <p:sp>
-        <p:nvSpPr>
-          <p:cNvPr id="94" name="TextBox 94"/>
-          <p:cNvSpPr txBox="1"/>
-          <p:nvPr/>
-        </p:nvSpPr>
-        <p:spPr>
-          <a:xfrm>
-            <a:off x="1262981" y="16222835"/>
-            <a:ext cx="8361455" cy="271780"/>
-          </a:xfrm>
-          <a:prstGeom prst="rect">
-            <a:avLst/>
-          </a:prstGeom>
-        </p:spPr>
-        <p:txBody>
-          <a:bodyPr lIns="0" tIns="0" rIns="0" bIns="0" rtlCol="0" anchor="t">
-            <a:spAutoFit/>
-          </a:bodyPr>
-          <a:lstStyle/>
-          <a:p>
-            <a:pPr marL="0" lvl="0" indent="0" algn="just">
-              <a:lnSpc>
-                <a:spcPts val="2240"/>
-              </a:lnSpc>
-            </a:pPr>
-            <a:r>
-              <a:rPr lang="en-US" sz="1400">
-                <a:solidFill>
-                  <a:srgbClr val="000000"/>
-                </a:solidFill>
-                <a:latin typeface="字由点字典黑 2 Light" panose="00020600040101010101" charset="-122"/>
-                <a:ea typeface="字由点字典黑 2 Light" panose="00020600040101010101" charset="-122"/>
-                <a:cs typeface="字由点字典黑 2 Light" panose="00020600040101010101" charset="-122"/>
-                <a:sym typeface="字由点字典黑 2 Light" panose="00020600040101010101" charset="-122"/>
-              </a:rPr>
-              <a:t>【项目方法1】简要说明项目的整体技术思路、系统架构或 Agent 工作流程。</a:t>
-            </a:r>
-            <a:endParaRPr lang="en-US" sz="1400">
-              <a:solidFill>
-                <a:srgbClr val="000000"/>
-              </a:solidFill>
-              <a:latin typeface="字由点字典黑 2 Light" panose="00020600040101010101" charset="-122"/>
-              <a:ea typeface="字由点字典黑 2 Light" panose="00020600040101010101" charset="-122"/>
-              <a:cs typeface="字由点字典黑 2 Light" panose="00020600040101010101" charset="-122"/>
-              <a:sym typeface="字由点字典黑 2 Light" panose="00020600040101010101" charset="-122"/>
-            </a:endParaRPr>
-          </a:p>
-        </p:txBody>
-      </p:sp>
-      <p:sp>
-        <p:nvSpPr>
-          <p:cNvPr id="95" name="TextBox 95"/>
-          <p:cNvSpPr txBox="1"/>
-          <p:nvPr/>
-        </p:nvSpPr>
-        <p:spPr>
-          <a:xfrm>
-            <a:off x="1262981" y="17178128"/>
-            <a:ext cx="7884809" cy="271780"/>
-          </a:xfrm>
-          <a:prstGeom prst="rect">
-            <a:avLst/>
-          </a:prstGeom>
-        </p:spPr>
-        <p:txBody>
-          <a:bodyPr lIns="0" tIns="0" rIns="0" bIns="0" rtlCol="0" anchor="t">
-            <a:spAutoFit/>
-          </a:bodyPr>
-          <a:lstStyle/>
-          <a:p>
-            <a:pPr marL="0" lvl="0" indent="0" algn="just">
-              <a:lnSpc>
-                <a:spcPts val="2240"/>
-              </a:lnSpc>
-            </a:pPr>
-            <a:r>
-              <a:rPr lang="en-US" sz="1400">
-                <a:solidFill>
-                  <a:srgbClr val="000000"/>
-                </a:solidFill>
-                <a:latin typeface="字由点字典黑 2 Light" panose="00020600040101010101" charset="-122"/>
-                <a:ea typeface="字由点字典黑 2 Light" panose="00020600040101010101" charset="-122"/>
-                <a:cs typeface="字由点字典黑 2 Light" panose="00020600040101010101" charset="-122"/>
-                <a:sym typeface="字由点字典黑 2 Light" panose="00020600040101010101" charset="-122"/>
-              </a:rPr>
-              <a:t>【项目方法2】简要说明项目中的关键模块、核心算法、工具调用方式或创新设计。</a:t>
-            </a:r>
-            <a:endParaRPr lang="en-US" sz="1400">
-              <a:solidFill>
-                <a:srgbClr val="000000"/>
-              </a:solidFill>
-              <a:latin typeface="字由点字典黑 2 Light" panose="00020600040101010101" charset="-122"/>
-              <a:ea typeface="字由点字典黑 2 Light" panose="00020600040101010101" charset="-122"/>
-              <a:cs typeface="字由点字典黑 2 Light" panose="00020600040101010101" charset="-122"/>
-              <a:sym typeface="字由点字典黑 2 Light" panose="00020600040101010101" charset="-122"/>
-            </a:endParaRPr>
-          </a:p>
-        </p:txBody>
-      </p:sp>
-      <p:sp>
-        <p:nvSpPr>
-          <p:cNvPr id="96" name="TextBox 96"/>
-          <p:cNvSpPr txBox="1"/>
-          <p:nvPr/>
-        </p:nvSpPr>
-        <p:spPr>
-          <a:xfrm>
-            <a:off x="9624435" y="1505650"/>
-            <a:ext cx="5512002" cy="384175"/>
-          </a:xfrm>
-          <a:prstGeom prst="rect">
-            <a:avLst/>
-          </a:prstGeom>
-        </p:spPr>
-        <p:txBody>
-          <a:bodyPr lIns="0" tIns="0" rIns="0" bIns="0" rtlCol="0" anchor="t">
-            <a:spAutoFit/>
-          </a:bodyPr>
-          <a:lstStyle/>
-          <a:p>
-            <a:pPr algn="l">
-              <a:lnSpc>
-                <a:spcPts val="3200"/>
-              </a:lnSpc>
-            </a:pPr>
-            <a:r>
-              <a:rPr lang="en-US" sz="2000" b="1" spc="132">
-                <a:solidFill>
-                  <a:srgbClr val="FFFFFF"/>
-                </a:solidFill>
-                <a:latin typeface="阿里巴巴普惠体 Medium" panose="00020600040101010101" charset="-122"/>
-                <a:ea typeface="阿里巴巴普惠体 Medium" panose="00020600040101010101" charset="-122"/>
-                <a:cs typeface="阿里巴巴普惠体 Medium" panose="00020600040101010101" charset="-122"/>
-                <a:sym typeface="阿里巴巴普惠体 Medium" panose="00020600040101010101" charset="-122"/>
-              </a:rPr>
-              <a:t>xxx  xxx  xxx  xxx  xxx  xxx【项目成员】</a:t>
-            </a:r>
-            <a:endParaRPr lang="en-US" sz="2000" b="1" spc="132">
-              <a:solidFill>
-                <a:srgbClr val="FFFFFF"/>
-              </a:solidFill>
-              <a:latin typeface="阿里巴巴普惠体 Medium" panose="00020600040101010101" charset="-122"/>
-              <a:ea typeface="阿里巴巴普惠体 Medium" panose="00020600040101010101" charset="-122"/>
-              <a:cs typeface="阿里巴巴普惠体 Medium" panose="00020600040101010101" charset="-122"/>
-              <a:sym typeface="阿里巴巴普惠体 Medium" panose="00020600040101010101" charset="-122"/>
-            </a:endParaRPr>
-          </a:p>
-        </p:txBody>
-      </p:sp>
-      <p:sp>
-        <p:nvSpPr>
-          <p:cNvPr id="97" name="TextBox 97"/>
-          <p:cNvSpPr txBox="1"/>
-          <p:nvPr/>
-        </p:nvSpPr>
-        <p:spPr>
-          <a:xfrm>
-            <a:off x="4518571" y="20602123"/>
-            <a:ext cx="3624341" cy="337185"/>
-          </a:xfrm>
-          <a:prstGeom prst="rect">
-            <a:avLst/>
-          </a:prstGeom>
-        </p:spPr>
-        <p:txBody>
-          <a:bodyPr lIns="0" tIns="0" rIns="0" bIns="0" rtlCol="0" anchor="t">
-            <a:spAutoFit/>
-          </a:bodyPr>
-          <a:lstStyle/>
-          <a:p>
-            <a:pPr marL="0" lvl="0" indent="0" algn="l">
-              <a:lnSpc>
-                <a:spcPts val="2880"/>
-              </a:lnSpc>
-            </a:pPr>
-            <a:r>
-              <a:rPr lang="en-US" sz="1800">
-                <a:solidFill>
-                  <a:srgbClr val="FFFFFF"/>
-                </a:solidFill>
-                <a:latin typeface="字由点字典黑 1" panose="00020600040101010101" charset="-122"/>
-                <a:ea typeface="字由点字典黑 1" panose="00020600040101010101" charset="-122"/>
-                <a:cs typeface="字由点字典黑 1" panose="00020600040101010101" charset="-122"/>
-                <a:sym typeface="字由点字典黑 1" panose="00020600040101010101" charset="-122"/>
-              </a:rPr>
-              <a:t>项目网站 / 论文链接（如有）：</a:t>
-            </a:r>
-            <a:endParaRPr lang="en-US" sz="1800">
-              <a:solidFill>
-                <a:srgbClr val="FFFFFF"/>
-              </a:solidFill>
-              <a:latin typeface="字由点字典黑 1" panose="00020600040101010101" charset="-122"/>
-              <a:ea typeface="字由点字典黑 1" panose="00020600040101010101" charset="-122"/>
-              <a:cs typeface="字由点字典黑 1" panose="00020600040101010101" charset="-122"/>
-              <a:sym typeface="字由点字典黑 1" panose="00020600040101010101" charset="-122"/>
-            </a:endParaRPr>
-          </a:p>
-        </p:txBody>
-      </p:sp>
-      <p:sp>
-        <p:nvSpPr>
-          <p:cNvPr id="98" name="TextBox 98"/>
-          <p:cNvSpPr txBox="1"/>
-          <p:nvPr/>
-        </p:nvSpPr>
-        <p:spPr>
-          <a:xfrm>
-            <a:off x="215854" y="2259176"/>
-            <a:ext cx="8773608" cy="370206"/>
-          </a:xfrm>
-          <a:prstGeom prst="rect">
-            <a:avLst/>
-          </a:prstGeom>
-        </p:spPr>
-        <p:txBody>
-          <a:bodyPr lIns="0" tIns="0" rIns="0" bIns="0" rtlCol="0" anchor="t">
-            <a:spAutoFit/>
-          </a:bodyPr>
-          <a:lstStyle/>
-          <a:p>
-            <a:pPr algn="l">
-              <a:lnSpc>
-                <a:spcPts val="3040"/>
-              </a:lnSpc>
-              <a:spcBef>
-                <a:spcPct val="0"/>
-              </a:spcBef>
-            </a:pPr>
-            <a:r>
-              <a:rPr lang="en-US" sz="1900" spc="-28">
-                <a:solidFill>
-                  <a:srgbClr val="FF3131"/>
-                </a:solidFill>
-                <a:latin typeface="字由点字典黑 2 Bold" panose="00020600040101010101" charset="-122"/>
-                <a:ea typeface="字由点字典黑 2 Bold" panose="00020600040101010101" charset="-122"/>
-                <a:cs typeface="字由点字典黑 2 Bold" panose="00020600040101010101" charset="-122"/>
-                <a:sym typeface="字由点字典黑 2 Bold" panose="00020600040101010101" charset="-122"/>
-              </a:rPr>
-              <a:t>【以下排版/内容等仅供参考，均可自由调整、删减、美化】（提交时本句删除）</a:t>
-            </a:r>
-            <a:endParaRPr lang="en-US" sz="1900" spc="-28">
-              <a:solidFill>
-                <a:srgbClr val="FF3131"/>
-              </a:solidFill>
-              <a:latin typeface="字由点字典黑 2 Bold" panose="00020600040101010101" charset="-122"/>
-              <a:ea typeface="字由点字典黑 2 Bold" panose="00020600040101010101" charset="-122"/>
-              <a:cs typeface="字由点字典黑 2 Bold" panose="00020600040101010101" charset="-122"/>
-              <a:sym typeface="字由点字典黑 2 Bold" panose="00020600040101010101" charset="-122"/>
-            </a:endParaRPr>
-          </a:p>
-        </p:txBody>
-      </p:sp>
-      <p:sp>
-        <p:nvSpPr>
-          <p:cNvPr id="99" name="TextBox 99"/>
-          <p:cNvSpPr txBox="1"/>
-          <p:nvPr/>
-        </p:nvSpPr>
-        <p:spPr>
-          <a:xfrm>
-            <a:off x="1152552" y="15041890"/>
-            <a:ext cx="3366019" cy="271780"/>
-          </a:xfrm>
-          <a:prstGeom prst="rect">
-            <a:avLst/>
-          </a:prstGeom>
-        </p:spPr>
-        <p:txBody>
-          <a:bodyPr lIns="0" tIns="0" rIns="0" bIns="0" rtlCol="0" anchor="t">
-            <a:spAutoFit/>
-          </a:bodyPr>
-          <a:lstStyle/>
-          <a:p>
-            <a:pPr marL="0" lvl="0" indent="0" algn="ctr">
-              <a:lnSpc>
-                <a:spcPts val="2240"/>
-              </a:lnSpc>
-            </a:pPr>
-            <a:r>
-              <a:rPr lang="en-US" sz="1400">
-                <a:solidFill>
-                  <a:srgbClr val="000000"/>
-                </a:solidFill>
-                <a:latin typeface="字由点字典黑 2 Light" panose="00020600040101010101" charset="-122"/>
-                <a:ea typeface="字由点字典黑 2 Light" panose="00020600040101010101" charset="-122"/>
-                <a:cs typeface="字由点字典黑 2 Light" panose="00020600040101010101" charset="-122"/>
-                <a:sym typeface="字由点字典黑 2 Light" panose="00020600040101010101" charset="-122"/>
-              </a:rPr>
-              <a:t>【流程图】</a:t>
-            </a:r>
-            <a:endParaRPr lang="en-US" sz="1400">
-              <a:solidFill>
-                <a:srgbClr val="000000"/>
-              </a:solidFill>
-              <a:latin typeface="字由点字典黑 2 Light" panose="00020600040101010101" charset="-122"/>
-              <a:ea typeface="字由点字典黑 2 Light" panose="00020600040101010101" charset="-122"/>
-              <a:cs typeface="字由点字典黑 2 Light" panose="00020600040101010101" charset="-122"/>
-              <a:sym typeface="字由点字典黑 2 Light" panose="00020600040101010101" charset="-122"/>
-            </a:endParaRPr>
-          </a:p>
-        </p:txBody>
-      </p:sp>
-      <p:sp>
-        <p:nvSpPr>
-          <p:cNvPr id="100" name="TextBox 100"/>
-          <p:cNvSpPr txBox="1"/>
-          <p:nvPr/>
-        </p:nvSpPr>
-        <p:spPr>
-          <a:xfrm>
-            <a:off x="752605" y="15704674"/>
-            <a:ext cx="933624" cy="346711"/>
-          </a:xfrm>
-          <a:prstGeom prst="rect">
-            <a:avLst/>
-          </a:prstGeom>
-        </p:spPr>
-        <p:txBody>
-          <a:bodyPr lIns="0" tIns="0" rIns="0" bIns="0" rtlCol="0" anchor="t">
-            <a:spAutoFit/>
-          </a:bodyPr>
-          <a:lstStyle/>
-          <a:p>
-            <a:pPr algn="l">
-              <a:lnSpc>
-                <a:spcPts val="2880"/>
-              </a:lnSpc>
-              <a:spcBef>
-                <a:spcPct val="0"/>
-              </a:spcBef>
-            </a:pPr>
-            <a:r>
-              <a:rPr lang="en-US" sz="1800" spc="-26">
-                <a:solidFill>
-                  <a:srgbClr val="000000"/>
-                </a:solidFill>
-                <a:latin typeface="字由点字典黑 2 Bold" panose="00020600040101010101" charset="-122"/>
-                <a:ea typeface="字由点字典黑 2 Bold" panose="00020600040101010101" charset="-122"/>
-                <a:cs typeface="字由点字典黑 2 Bold" panose="00020600040101010101" charset="-122"/>
-                <a:sym typeface="字由点字典黑 2 Bold" panose="00020600040101010101" charset="-122"/>
-              </a:rPr>
-              <a:t>项目方法</a:t>
-            </a:r>
-            <a:endParaRPr lang="en-US" sz="1800" spc="-26">
-              <a:solidFill>
-                <a:srgbClr val="000000"/>
-              </a:solidFill>
-              <a:latin typeface="字由点字典黑 2 Bold" panose="00020600040101010101" charset="-122"/>
-              <a:ea typeface="字由点字典黑 2 Bold" panose="00020600040101010101" charset="-122"/>
-              <a:cs typeface="字由点字典黑 2 Bold" panose="00020600040101010101" charset="-122"/>
-              <a:sym typeface="字由点字典黑 2 Bold" panose="00020600040101010101" charset="-122"/>
-            </a:endParaRPr>
-          </a:p>
-        </p:txBody>
-      </p:sp>
-      <p:sp>
-        <p:nvSpPr>
-          <p:cNvPr id="101" name="TextBox 101"/>
-          <p:cNvSpPr txBox="1"/>
-          <p:nvPr/>
-        </p:nvSpPr>
-        <p:spPr>
-          <a:xfrm>
-            <a:off x="752605" y="17888297"/>
-            <a:ext cx="933624" cy="346711"/>
-          </a:xfrm>
-          <a:prstGeom prst="rect">
-            <a:avLst/>
-          </a:prstGeom>
-        </p:spPr>
-        <p:txBody>
-          <a:bodyPr lIns="0" tIns="0" rIns="0" bIns="0" rtlCol="0" anchor="t">
-            <a:spAutoFit/>
-          </a:bodyPr>
-          <a:lstStyle/>
-          <a:p>
-            <a:pPr algn="l">
-              <a:lnSpc>
-                <a:spcPts val="2880"/>
-              </a:lnSpc>
-              <a:spcBef>
-                <a:spcPct val="0"/>
-              </a:spcBef>
-            </a:pPr>
-            <a:r>
-              <a:rPr lang="en-US" sz="1800" spc="-26">
-                <a:solidFill>
-                  <a:srgbClr val="000000"/>
-                </a:solidFill>
-                <a:latin typeface="字由点字典黑 2 Bold" panose="00020600040101010101" charset="-122"/>
-                <a:ea typeface="字由点字典黑 2 Bold" panose="00020600040101010101" charset="-122"/>
-                <a:cs typeface="字由点字典黑 2 Bold" panose="00020600040101010101" charset="-122"/>
-                <a:sym typeface="字由点字典黑 2 Bold" panose="00020600040101010101" charset="-122"/>
-              </a:rPr>
-              <a:t>实验验证</a:t>
-            </a:r>
-            <a:endParaRPr lang="en-US" sz="1800" spc="-26">
-              <a:solidFill>
-                <a:srgbClr val="000000"/>
-              </a:solidFill>
-              <a:latin typeface="字由点字典黑 2 Bold" panose="00020600040101010101" charset="-122"/>
-              <a:ea typeface="字由点字典黑 2 Bold" panose="00020600040101010101" charset="-122"/>
-              <a:cs typeface="字由点字典黑 2 Bold" panose="00020600040101010101" charset="-122"/>
-              <a:sym typeface="字由点字典黑 2 Bold" panose="00020600040101010101" charset="-122"/>
-            </a:endParaRPr>
-          </a:p>
-        </p:txBody>
-      </p:sp>
-      <p:sp>
-        <p:nvSpPr>
-          <p:cNvPr id="102" name="TextBox 102"/>
-          <p:cNvSpPr txBox="1"/>
-          <p:nvPr/>
-        </p:nvSpPr>
-        <p:spPr>
-          <a:xfrm>
-            <a:off x="1262981" y="18463037"/>
-            <a:ext cx="8361455" cy="271780"/>
-          </a:xfrm>
-          <a:prstGeom prst="rect">
-            <a:avLst/>
-          </a:prstGeom>
-        </p:spPr>
-        <p:txBody>
-          <a:bodyPr lIns="0" tIns="0" rIns="0" bIns="0" rtlCol="0" anchor="t">
-            <a:spAutoFit/>
-          </a:bodyPr>
-          <a:lstStyle/>
-          <a:p>
-            <a:pPr marL="0" lvl="0" indent="0" algn="just">
-              <a:lnSpc>
-                <a:spcPts val="2240"/>
-              </a:lnSpc>
-            </a:pPr>
-            <a:r>
-              <a:rPr lang="en-US" sz="1400">
-                <a:solidFill>
-                  <a:srgbClr val="000000"/>
-                </a:solidFill>
-                <a:latin typeface="字由点字典黑 2 Light" panose="00020600040101010101" charset="-122"/>
-                <a:ea typeface="字由点字典黑 2 Light" panose="00020600040101010101" charset="-122"/>
-                <a:cs typeface="字由点字典黑 2 Light" panose="00020600040101010101" charset="-122"/>
-                <a:sym typeface="字由点字典黑 2 Light" panose="00020600040101010101" charset="-122"/>
-              </a:rPr>
-              <a:t>【实验验证1】说明项目功能测试、案例验证或系统运行效果的主要内容。</a:t>
-            </a:r>
-            <a:endParaRPr lang="en-US" sz="1400">
-              <a:solidFill>
-                <a:srgbClr val="000000"/>
-              </a:solidFill>
-              <a:latin typeface="字由点字典黑 2 Light" panose="00020600040101010101" charset="-122"/>
-              <a:ea typeface="字由点字典黑 2 Light" panose="00020600040101010101" charset="-122"/>
-              <a:cs typeface="字由点字典黑 2 Light" panose="00020600040101010101" charset="-122"/>
-              <a:sym typeface="字由点字典黑 2 Light" panose="00020600040101010101" charset="-122"/>
-            </a:endParaRPr>
-          </a:p>
-        </p:txBody>
-      </p:sp>
-      <p:sp>
-        <p:nvSpPr>
-          <p:cNvPr id="103" name="TextBox 103"/>
-          <p:cNvSpPr txBox="1"/>
-          <p:nvPr/>
-        </p:nvSpPr>
-        <p:spPr>
-          <a:xfrm>
-            <a:off x="1262981" y="19339815"/>
-            <a:ext cx="8380119" cy="548005"/>
-          </a:xfrm>
-          <a:prstGeom prst="rect">
-            <a:avLst/>
-          </a:prstGeom>
-        </p:spPr>
-        <p:txBody>
-          <a:bodyPr lIns="0" tIns="0" rIns="0" bIns="0" rtlCol="0" anchor="t">
-            <a:spAutoFit/>
-          </a:bodyPr>
-          <a:lstStyle/>
-          <a:p>
-            <a:pPr algn="just">
-              <a:lnSpc>
-                <a:spcPts val="2240"/>
-              </a:lnSpc>
-            </a:pPr>
-            <a:r>
-              <a:rPr lang="en-US" sz="1400">
-                <a:solidFill>
-                  <a:srgbClr val="000000"/>
-                </a:solidFill>
-                <a:latin typeface="字由点字典黑 2 Light" panose="00020600040101010101" charset="-122"/>
-                <a:ea typeface="字由点字典黑 2 Light" panose="00020600040101010101" charset="-122"/>
-                <a:cs typeface="字由点字典黑 2 Light" panose="00020600040101010101" charset="-122"/>
-                <a:sym typeface="字由点字典黑 2 Light" panose="00020600040101010101" charset="-122"/>
-              </a:rPr>
-              <a:t>【实验验证2】说明项目效果评估方式、对比实验、用户反馈或结果分析。</a:t>
-            </a:r>
-            <a:endParaRPr lang="en-US" sz="1400">
-              <a:solidFill>
-                <a:srgbClr val="000000"/>
-              </a:solidFill>
-              <a:latin typeface="字由点字典黑 2 Light" panose="00020600040101010101" charset="-122"/>
-              <a:ea typeface="字由点字典黑 2 Light" panose="00020600040101010101" charset="-122"/>
-              <a:cs typeface="字由点字典黑 2 Light" panose="00020600040101010101" charset="-122"/>
-              <a:sym typeface="字由点字典黑 2 Light" panose="00020600040101010101" charset="-122"/>
-            </a:endParaRPr>
-          </a:p>
-          <a:p>
-            <a:pPr marL="0" lvl="0" indent="0" algn="just">
-              <a:lnSpc>
-                <a:spcPts val="2240"/>
-              </a:lnSpc>
-            </a:pPr>
-          </a:p>
-        </p:txBody>
-      </p:sp>
-      <p:sp>
-        <p:nvSpPr>
           <p:cNvPr id="104" name="TextBox 104"/>
           <p:cNvSpPr txBox="1"/>
           <p:nvPr/>
@@ -7097,15 +7355,6 @@
               </a:rPr>
               <a:t>未来改进</a:t>
             </a:r>
-            <a:endParaRPr lang="en-US" sz="1800">
-              <a:solidFill>
-                <a:srgbClr val="000000"/>
-              </a:solidFill>
-              <a:latin typeface="字由点字典黑 2 Bold" panose="00020600040101010101" charset="-122"/>
-              <a:ea typeface="字由点字典黑 2 Bold" panose="00020600040101010101" charset="-122"/>
-              <a:cs typeface="字由点字典黑 2 Bold" panose="00020600040101010101" charset="-122"/>
-              <a:sym typeface="字由点字典黑 2 Bold" panose="00020600040101010101" charset="-122"/>
-            </a:endParaRPr>
           </a:p>
         </p:txBody>
       </p:sp>
@@ -7147,15 +7396,6 @@
               </a:rPr>
               <a:t>说明项目仍可优化的方向，如功能完善、性能提升、场景拓展、用户体验优化等。</a:t>
             </a:r>
-            <a:endParaRPr lang="en-US" sz="1400">
-              <a:solidFill>
-                <a:srgbClr val="000000"/>
-              </a:solidFill>
-              <a:latin typeface="字由点字典黑 2 Light" panose="00020600040101010101" charset="-122"/>
-              <a:ea typeface="字由点字典黑 2 Light" panose="00020600040101010101" charset="-122"/>
-              <a:cs typeface="字由点字典黑 2 Light" panose="00020600040101010101" charset="-122"/>
-              <a:sym typeface="字由点字典黑 2 Light" panose="00020600040101010101" charset="-122"/>
-            </a:endParaRPr>
           </a:p>
         </p:txBody>
       </p:sp>
@@ -7445,6 +7685,8 @@
       </a:bgFillStyleLst>
     </a:fmtScheme>
   </a:themeElements>
+  <a:objectDefaults/>
+  <a:extraClrSchemeLst/>
   <a:extLst>
     <a:ext uri="{05A4C25C-085E-4340-85A3-A5531E510DB2}">
       <thm15:themeFamily xmlns:thm15="http://schemas.microsoft.com/office/thememl/2012/main" name="Office Theme" id="{62F939B6-93AF-4DB8-9C6B-D6C7DFDC589F}" vid="{4A3C46E8-61CC-4603-A589-7422A47A8E4A}"/>

--- a/PPT/未来智造（AI Agent）工程师训练营结题海报模板.pptx
+++ b/PPT/未来智造（AI Agent）工程师训练营结题海报模板.pptx
@@ -4,6 +4,9 @@
   <p:sldMasterIdLst>
     <p:sldMasterId id="2147483648" r:id="rId1"/>
   </p:sldMasterIdLst>
+  <p:notesMasterIdLst>
+    <p:notesMasterId r:id="rId3"/>
+  </p:notesMasterIdLst>
   <p:sldIdLst>
     <p:sldId id="256" r:id="rId2"/>
   </p:sldIdLst>
@@ -11,20 +14,17 @@
   <p:notesSz cx="6858000" cy="9144000"/>
   <p:embeddedFontLst>
     <p:embeddedFont>
-      <p:font typeface="阿里巴巴普惠体 Medium" panose="02010600030101010101" charset="-122"/>
-      <p:regular r:id="rId3"/>
+      <p:font typeface="字由点字典黑 2 Bold" panose="02010600030101010101" charset="-122"/>
+      <p:regular r:id="rId4"/>
+    </p:embeddedFont>
+    <p:embeddedFont>
+      <p:font typeface="等线" panose="02010600030101010101" pitchFamily="2" charset="-122"/>
+      <p:regular r:id="rId5"/>
+      <p:bold r:id="rId6"/>
     </p:embeddedFont>
     <p:embeddedFont>
       <p:font typeface="黑体" panose="02010609060101010101" pitchFamily="49" charset="-122"/>
-      <p:regular r:id="rId4"/>
-    </p:embeddedFont>
-    <p:embeddedFont>
-      <p:font typeface="字由点字典黑 1 Bold" panose="02010600030101010101" charset="-122"/>
-      <p:regular r:id="rId5"/>
-    </p:embeddedFont>
-    <p:embeddedFont>
-      <p:font typeface="字由点字典黑 2 Bold" panose="02010600030101010101" charset="-122"/>
-      <p:regular r:id="rId6"/>
+      <p:regular r:id="rId7"/>
     </p:embeddedFont>
   </p:embeddedFontLst>
   <p:defaultTextStyle>
@@ -139,6 +139,463 @@
     </p:ext>
   </p:extLst>
 </p:presentation>
+</file>
+
+<file path=ppt/notesMasters/notesMaster1.xml><?xml version="1.0" encoding="utf-8"?>
+<p:notesMaster xmlns:a="http://schemas.openxmlformats.org/drawingml/2006/main" xmlns:r="http://schemas.openxmlformats.org/officeDocument/2006/relationships" xmlns:p="http://schemas.openxmlformats.org/presentationml/2006/main">
+  <p:cSld>
+    <p:bg>
+      <p:bgRef idx="1001">
+        <a:schemeClr val="bg1"/>
+      </p:bgRef>
+    </p:bg>
+    <p:spTree>
+      <p:nvGrpSpPr>
+        <p:cNvPr id="1" name=""/>
+        <p:cNvGrpSpPr/>
+        <p:nvPr/>
+      </p:nvGrpSpPr>
+      <p:grpSpPr>
+        <a:xfrm>
+          <a:off x="0" y="0"/>
+          <a:ext cx="0" cy="0"/>
+          <a:chOff x="0" y="0"/>
+          <a:chExt cx="0" cy="0"/>
+        </a:xfrm>
+      </p:grpSpPr>
+      <p:sp>
+        <p:nvSpPr>
+          <p:cNvPr id="2" name="页眉占位符 1"/>
+          <p:cNvSpPr>
+            <a:spLocks noGrp="1"/>
+          </p:cNvSpPr>
+          <p:nvPr>
+            <p:ph type="hdr" sz="quarter"/>
+          </p:nvPr>
+        </p:nvSpPr>
+        <p:spPr>
+          <a:xfrm>
+            <a:off x="0" y="0"/>
+            <a:ext cx="2971800" cy="458788"/>
+          </a:xfrm>
+          <a:prstGeom prst="rect">
+            <a:avLst/>
+          </a:prstGeom>
+        </p:spPr>
+        <p:txBody>
+          <a:bodyPr vert="horz" lIns="91440" tIns="45720" rIns="91440" bIns="45720" rtlCol="0"/>
+          <a:lstStyle>
+            <a:lvl1pPr algn="l">
+              <a:defRPr sz="1200"/>
+            </a:lvl1pPr>
+          </a:lstStyle>
+          <a:p>
+            <a:endParaRPr lang="zh-CN" altLang="en-US"/>
+          </a:p>
+        </p:txBody>
+      </p:sp>
+      <p:sp>
+        <p:nvSpPr>
+          <p:cNvPr id="3" name="日期占位符 2"/>
+          <p:cNvSpPr>
+            <a:spLocks noGrp="1"/>
+          </p:cNvSpPr>
+          <p:nvPr>
+            <p:ph type="dt" idx="1"/>
+          </p:nvPr>
+        </p:nvSpPr>
+        <p:spPr>
+          <a:xfrm>
+            <a:off x="3884613" y="0"/>
+            <a:ext cx="2971800" cy="458788"/>
+          </a:xfrm>
+          <a:prstGeom prst="rect">
+            <a:avLst/>
+          </a:prstGeom>
+        </p:spPr>
+        <p:txBody>
+          <a:bodyPr vert="horz" lIns="91440" tIns="45720" rIns="91440" bIns="45720" rtlCol="0"/>
+          <a:lstStyle>
+            <a:lvl1pPr algn="r">
+              <a:defRPr sz="1200"/>
+            </a:lvl1pPr>
+          </a:lstStyle>
+          <a:p>
+            <a:fld id="{1BE70504-C888-4880-8F5B-315269C5EDB7}" type="datetimeFigureOut">
+              <a:rPr lang="zh-CN" altLang="en-US" smtClean="0"/>
+              <a:t>2026/7/13</a:t>
+            </a:fld>
+            <a:endParaRPr lang="zh-CN" altLang="en-US"/>
+          </a:p>
+        </p:txBody>
+      </p:sp>
+      <p:sp>
+        <p:nvSpPr>
+          <p:cNvPr id="4" name="幻灯片图像占位符 3"/>
+          <p:cNvSpPr>
+            <a:spLocks noGrp="1" noRot="1" noChangeAspect="1"/>
+          </p:cNvSpPr>
+          <p:nvPr>
+            <p:ph type="sldImg" idx="2"/>
+          </p:nvPr>
+        </p:nvSpPr>
+        <p:spPr>
+          <a:xfrm>
+            <a:off x="2338388" y="1143000"/>
+            <a:ext cx="2181225" cy="3086100"/>
+          </a:xfrm>
+          <a:prstGeom prst="rect">
+            <a:avLst/>
+          </a:prstGeom>
+          <a:noFill/>
+          <a:ln w="12700">
+            <a:solidFill>
+              <a:prstClr val="black"/>
+            </a:solidFill>
+          </a:ln>
+        </p:spPr>
+        <p:txBody>
+          <a:bodyPr vert="horz" lIns="91440" tIns="45720" rIns="91440" bIns="45720" rtlCol="0" anchor="ctr"/>
+          <a:lstStyle/>
+          <a:p>
+            <a:endParaRPr lang="zh-CN" altLang="en-US"/>
+          </a:p>
+        </p:txBody>
+      </p:sp>
+      <p:sp>
+        <p:nvSpPr>
+          <p:cNvPr id="5" name="备注占位符 4"/>
+          <p:cNvSpPr>
+            <a:spLocks noGrp="1"/>
+          </p:cNvSpPr>
+          <p:nvPr>
+            <p:ph type="body" sz="quarter" idx="3"/>
+          </p:nvPr>
+        </p:nvSpPr>
+        <p:spPr>
+          <a:xfrm>
+            <a:off x="685800" y="4400550"/>
+            <a:ext cx="5486400" cy="3600450"/>
+          </a:xfrm>
+          <a:prstGeom prst="rect">
+            <a:avLst/>
+          </a:prstGeom>
+        </p:spPr>
+        <p:txBody>
+          <a:bodyPr vert="horz" lIns="91440" tIns="45720" rIns="91440" bIns="45720" rtlCol="0"/>
+          <a:lstStyle/>
+          <a:p>
+            <a:pPr lvl="0"/>
+            <a:r>
+              <a:rPr lang="zh-CN" altLang="en-US"/>
+              <a:t>单击此处编辑母版文本样式</a:t>
+            </a:r>
+          </a:p>
+          <a:p>
+            <a:pPr lvl="1"/>
+            <a:r>
+              <a:rPr lang="zh-CN" altLang="en-US"/>
+              <a:t>二级</a:t>
+            </a:r>
+          </a:p>
+          <a:p>
+            <a:pPr lvl="2"/>
+            <a:r>
+              <a:rPr lang="zh-CN" altLang="en-US"/>
+              <a:t>三级</a:t>
+            </a:r>
+          </a:p>
+          <a:p>
+            <a:pPr lvl="3"/>
+            <a:r>
+              <a:rPr lang="zh-CN" altLang="en-US"/>
+              <a:t>四级</a:t>
+            </a:r>
+          </a:p>
+          <a:p>
+            <a:pPr lvl="4"/>
+            <a:r>
+              <a:rPr lang="zh-CN" altLang="en-US"/>
+              <a:t>五级</a:t>
+            </a:r>
+          </a:p>
+        </p:txBody>
+      </p:sp>
+      <p:sp>
+        <p:nvSpPr>
+          <p:cNvPr id="6" name="页脚占位符 5"/>
+          <p:cNvSpPr>
+            <a:spLocks noGrp="1"/>
+          </p:cNvSpPr>
+          <p:nvPr>
+            <p:ph type="ftr" sz="quarter" idx="4"/>
+          </p:nvPr>
+        </p:nvSpPr>
+        <p:spPr>
+          <a:xfrm>
+            <a:off x="0" y="8685213"/>
+            <a:ext cx="2971800" cy="458787"/>
+          </a:xfrm>
+          <a:prstGeom prst="rect">
+            <a:avLst/>
+          </a:prstGeom>
+        </p:spPr>
+        <p:txBody>
+          <a:bodyPr vert="horz" lIns="91440" tIns="45720" rIns="91440" bIns="45720" rtlCol="0" anchor="b"/>
+          <a:lstStyle>
+            <a:lvl1pPr algn="l">
+              <a:defRPr sz="1200"/>
+            </a:lvl1pPr>
+          </a:lstStyle>
+          <a:p>
+            <a:endParaRPr lang="zh-CN" altLang="en-US"/>
+          </a:p>
+        </p:txBody>
+      </p:sp>
+      <p:sp>
+        <p:nvSpPr>
+          <p:cNvPr id="7" name="灯片编号占位符 6"/>
+          <p:cNvSpPr>
+            <a:spLocks noGrp="1"/>
+          </p:cNvSpPr>
+          <p:nvPr>
+            <p:ph type="sldNum" sz="quarter" idx="5"/>
+          </p:nvPr>
+        </p:nvSpPr>
+        <p:spPr>
+          <a:xfrm>
+            <a:off x="3884613" y="8685213"/>
+            <a:ext cx="2971800" cy="458787"/>
+          </a:xfrm>
+          <a:prstGeom prst="rect">
+            <a:avLst/>
+          </a:prstGeom>
+        </p:spPr>
+        <p:txBody>
+          <a:bodyPr vert="horz" lIns="91440" tIns="45720" rIns="91440" bIns="45720" rtlCol="0" anchor="b"/>
+          <a:lstStyle>
+            <a:lvl1pPr algn="r">
+              <a:defRPr sz="1200"/>
+            </a:lvl1pPr>
+          </a:lstStyle>
+          <a:p>
+            <a:fld id="{6426B732-490D-4B7C-841A-7C903040A337}" type="slidenum">
+              <a:rPr lang="zh-CN" altLang="en-US" smtClean="0"/>
+              <a:t>‹#›</a:t>
+            </a:fld>
+            <a:endParaRPr lang="zh-CN" altLang="en-US"/>
+          </a:p>
+        </p:txBody>
+      </p:sp>
+    </p:spTree>
+    <p:extLst>
+      <p:ext uri="{BB962C8B-B14F-4D97-AF65-F5344CB8AC3E}">
+        <p14:creationId xmlns:p14="http://schemas.microsoft.com/office/powerpoint/2010/main" val="932689152"/>
+      </p:ext>
+    </p:extLst>
+  </p:cSld>
+  <p:clrMap bg1="lt1" tx1="dk1" bg2="lt2" tx2="dk2" accent1="accent1" accent2="accent2" accent3="accent3" accent4="accent4" accent5="accent5" accent6="accent6" hlink="hlink" folHlink="folHlink"/>
+  <p:notesStyle>
+    <a:lvl1pPr marL="0" algn="l" defTabSz="914400" rtl="0" eaLnBrk="1" latinLnBrk="0" hangingPunct="1">
+      <a:defRPr sz="1200" kern="1200">
+        <a:solidFill>
+          <a:schemeClr val="tx1"/>
+        </a:solidFill>
+        <a:latin typeface="+mn-lt"/>
+        <a:ea typeface="+mn-ea"/>
+        <a:cs typeface="+mn-cs"/>
+      </a:defRPr>
+    </a:lvl1pPr>
+    <a:lvl2pPr marL="457200" algn="l" defTabSz="914400" rtl="0" eaLnBrk="1" latinLnBrk="0" hangingPunct="1">
+      <a:defRPr sz="1200" kern="1200">
+        <a:solidFill>
+          <a:schemeClr val="tx1"/>
+        </a:solidFill>
+        <a:latin typeface="+mn-lt"/>
+        <a:ea typeface="+mn-ea"/>
+        <a:cs typeface="+mn-cs"/>
+      </a:defRPr>
+    </a:lvl2pPr>
+    <a:lvl3pPr marL="914400" algn="l" defTabSz="914400" rtl="0" eaLnBrk="1" latinLnBrk="0" hangingPunct="1">
+      <a:defRPr sz="1200" kern="1200">
+        <a:solidFill>
+          <a:schemeClr val="tx1"/>
+        </a:solidFill>
+        <a:latin typeface="+mn-lt"/>
+        <a:ea typeface="+mn-ea"/>
+        <a:cs typeface="+mn-cs"/>
+      </a:defRPr>
+    </a:lvl3pPr>
+    <a:lvl4pPr marL="1371600" algn="l" defTabSz="914400" rtl="0" eaLnBrk="1" latinLnBrk="0" hangingPunct="1">
+      <a:defRPr sz="1200" kern="1200">
+        <a:solidFill>
+          <a:schemeClr val="tx1"/>
+        </a:solidFill>
+        <a:latin typeface="+mn-lt"/>
+        <a:ea typeface="+mn-ea"/>
+        <a:cs typeface="+mn-cs"/>
+      </a:defRPr>
+    </a:lvl4pPr>
+    <a:lvl5pPr marL="1828800" algn="l" defTabSz="914400" rtl="0" eaLnBrk="1" latinLnBrk="0" hangingPunct="1">
+      <a:defRPr sz="1200" kern="1200">
+        <a:solidFill>
+          <a:schemeClr val="tx1"/>
+        </a:solidFill>
+        <a:latin typeface="+mn-lt"/>
+        <a:ea typeface="+mn-ea"/>
+        <a:cs typeface="+mn-cs"/>
+      </a:defRPr>
+    </a:lvl5pPr>
+    <a:lvl6pPr marL="2286000" algn="l" defTabSz="914400" rtl="0" eaLnBrk="1" latinLnBrk="0" hangingPunct="1">
+      <a:defRPr sz="1200" kern="1200">
+        <a:solidFill>
+          <a:schemeClr val="tx1"/>
+        </a:solidFill>
+        <a:latin typeface="+mn-lt"/>
+        <a:ea typeface="+mn-ea"/>
+        <a:cs typeface="+mn-cs"/>
+      </a:defRPr>
+    </a:lvl6pPr>
+    <a:lvl7pPr marL="2743200" algn="l" defTabSz="914400" rtl="0" eaLnBrk="1" latinLnBrk="0" hangingPunct="1">
+      <a:defRPr sz="1200" kern="1200">
+        <a:solidFill>
+          <a:schemeClr val="tx1"/>
+        </a:solidFill>
+        <a:latin typeface="+mn-lt"/>
+        <a:ea typeface="+mn-ea"/>
+        <a:cs typeface="+mn-cs"/>
+      </a:defRPr>
+    </a:lvl7pPr>
+    <a:lvl8pPr marL="3200400" algn="l" defTabSz="914400" rtl="0" eaLnBrk="1" latinLnBrk="0" hangingPunct="1">
+      <a:defRPr sz="1200" kern="1200">
+        <a:solidFill>
+          <a:schemeClr val="tx1"/>
+        </a:solidFill>
+        <a:latin typeface="+mn-lt"/>
+        <a:ea typeface="+mn-ea"/>
+        <a:cs typeface="+mn-cs"/>
+      </a:defRPr>
+    </a:lvl8pPr>
+    <a:lvl9pPr marL="3657600" algn="l" defTabSz="914400" rtl="0" eaLnBrk="1" latinLnBrk="0" hangingPunct="1">
+      <a:defRPr sz="1200" kern="1200">
+        <a:solidFill>
+          <a:schemeClr val="tx1"/>
+        </a:solidFill>
+        <a:latin typeface="+mn-lt"/>
+        <a:ea typeface="+mn-ea"/>
+        <a:cs typeface="+mn-cs"/>
+      </a:defRPr>
+    </a:lvl9pPr>
+  </p:notesStyle>
+</p:notesMaster>
+</file>
+
+<file path=ppt/notesSlides/notesSlide1.xml><?xml version="1.0" encoding="utf-8"?>
+<p:notes xmlns:a="http://schemas.openxmlformats.org/drawingml/2006/main" xmlns:r="http://schemas.openxmlformats.org/officeDocument/2006/relationships" xmlns:p="http://schemas.openxmlformats.org/presentationml/2006/main">
+  <p:cSld>
+    <p:spTree>
+      <p:nvGrpSpPr>
+        <p:cNvPr id="1" name=""/>
+        <p:cNvGrpSpPr/>
+        <p:nvPr/>
+      </p:nvGrpSpPr>
+      <p:grpSpPr>
+        <a:xfrm>
+          <a:off x="0" y="0"/>
+          <a:ext cx="0" cy="0"/>
+          <a:chOff x="0" y="0"/>
+          <a:chExt cx="0" cy="0"/>
+        </a:xfrm>
+      </p:grpSpPr>
+      <p:sp>
+        <p:nvSpPr>
+          <p:cNvPr id="2" name="幻灯片图像占位符 1"/>
+          <p:cNvSpPr>
+            <a:spLocks noGrp="1" noRot="1" noChangeAspect="1"/>
+          </p:cNvSpPr>
+          <p:nvPr>
+            <p:ph type="sldImg"/>
+          </p:nvPr>
+        </p:nvSpPr>
+        <p:spPr/>
+      </p:sp>
+      <p:sp>
+        <p:nvSpPr>
+          <p:cNvPr id="3" name="备注占位符 2"/>
+          <p:cNvSpPr>
+            <a:spLocks noGrp="1"/>
+          </p:cNvSpPr>
+          <p:nvPr>
+            <p:ph type="body" idx="1"/>
+          </p:nvPr>
+        </p:nvSpPr>
+        <p:spPr/>
+        <p:txBody>
+          <a:bodyPr/>
+          <a:lstStyle/>
+          <a:p>
+            <a:pPr marL="0" marR="0" lvl="0" indent="0" algn="l" defTabSz="914400" rtl="0" eaLnBrk="1" fontAlgn="auto" latinLnBrk="0" hangingPunct="1">
+              <a:lnSpc>
+                <a:spcPct val="100000"/>
+              </a:lnSpc>
+              <a:spcBef>
+                <a:spcPts val="0"/>
+              </a:spcBef>
+              <a:spcAft>
+                <a:spcPts val="0"/>
+              </a:spcAft>
+              <a:buClrTx/>
+              <a:buSzTx/>
+              <a:buFontTx/>
+              <a:buNone/>
+              <a:tabLst/>
+              <a:defRPr/>
+            </a:pPr>
+            <a:r>
+              <a:rPr lang="en-US" altLang="zh-CN" dirty="0"/>
+              <a:t>P:planner   S:search  R:review_search   A:parse  C:compare  T:report  E:review_results</a:t>
+            </a:r>
+            <a:endParaRPr lang="zh-CN" altLang="en-US" dirty="0"/>
+          </a:p>
+          <a:p>
+            <a:endParaRPr lang="zh-CN" altLang="en-US" dirty="0"/>
+          </a:p>
+        </p:txBody>
+      </p:sp>
+      <p:sp>
+        <p:nvSpPr>
+          <p:cNvPr id="4" name="灯片编号占位符 3"/>
+          <p:cNvSpPr>
+            <a:spLocks noGrp="1"/>
+          </p:cNvSpPr>
+          <p:nvPr>
+            <p:ph type="sldNum" sz="quarter" idx="5"/>
+          </p:nvPr>
+        </p:nvSpPr>
+        <p:spPr/>
+        <p:txBody>
+          <a:bodyPr/>
+          <a:lstStyle/>
+          <a:p>
+            <a:fld id="{6426B732-490D-4B7C-841A-7C903040A337}" type="slidenum">
+              <a:rPr lang="zh-CN" altLang="en-US" smtClean="0"/>
+              <a:t>1</a:t>
+            </a:fld>
+            <a:endParaRPr lang="zh-CN" altLang="en-US"/>
+          </a:p>
+        </p:txBody>
+      </p:sp>
+    </p:spTree>
+    <p:extLst>
+      <p:ext uri="{BB962C8B-B14F-4D97-AF65-F5344CB8AC3E}">
+        <p14:creationId xmlns:p14="http://schemas.microsoft.com/office/powerpoint/2010/main" val="3204237280"/>
+      </p:ext>
+    </p:extLst>
+  </p:cSld>
+  <p:clrMapOvr>
+    <a:masterClrMapping/>
+  </p:clrMapOvr>
+</p:notes>
 </file>
 
 <file path=ppt/slideLayouts/slideLayout1.xml><?xml version="1.0" encoding="utf-8"?>
@@ -3277,7 +3734,7 @@
         </p:nvGrpSpPr>
         <p:grpSpPr>
           <a:xfrm>
-            <a:off x="5086861" y="5402517"/>
+            <a:off x="5070442" y="5402517"/>
             <a:ext cx="4698705" cy="5731690"/>
             <a:chOff x="0" y="0"/>
             <a:chExt cx="943632" cy="1151085"/>
@@ -3513,7 +3970,7 @@
             </a:pathLst>
           </a:custGeom>
           <a:blipFill>
-            <a:blip r:embed="rId2">
+            <a:blip r:embed="rId3">
               <a:alphaModFix amt="23000"/>
             </a:blip>
             <a:stretch>
@@ -4102,7 +4559,7 @@
             <a:bodyPr/>
             <a:lstStyle/>
             <a:p>
-              <a:endParaRPr lang="zh-CN" altLang="en-US"/>
+              <a:endParaRPr lang="zh-CN" altLang="en-US" dirty="0"/>
             </a:p>
           </p:txBody>
         </p:sp>
@@ -4138,30 +4595,6 @@
           </p:txBody>
         </p:sp>
       </p:grpSp>
-      <p:pic>
-        <p:nvPicPr>
-          <p:cNvPr id="33" name="Picture 33"/>
-          <p:cNvPicPr>
-            <a:picLocks noChangeAspect="1"/>
-          </p:cNvPicPr>
-          <p:nvPr/>
-        </p:nvPicPr>
-        <p:blipFill>
-          <a:blip r:embed="rId3"/>
-          <a:stretch>
-            <a:fillRect/>
-          </a:stretch>
-        </p:blipFill>
-        <p:spPr>
-          <a:xfrm>
-            <a:off x="4876110" y="11916877"/>
-            <a:ext cx="5016982" cy="3486733"/>
-          </a:xfrm>
-          <a:prstGeom prst="rect">
-            <a:avLst/>
-          </a:prstGeom>
-        </p:spPr>
-      </p:pic>
       <p:grpSp>
         <p:nvGrpSpPr>
           <p:cNvPr id="34" name="Group 34"/>
@@ -4367,122 +4800,6 @@
           </p:txBody>
         </p:sp>
       </p:grpSp>
-      <p:sp>
-        <p:nvSpPr>
-          <p:cNvPr id="40" name="Freeform 40"/>
-          <p:cNvSpPr/>
-          <p:nvPr/>
-        </p:nvSpPr>
-        <p:spPr>
-          <a:xfrm>
-            <a:off x="10397396" y="5712035"/>
-            <a:ext cx="3825759" cy="2229450"/>
-          </a:xfrm>
-          <a:custGeom>
-            <a:avLst/>
-            <a:gdLst/>
-            <a:ahLst/>
-            <a:cxnLst/>
-            <a:rect l="l" t="t" r="r" b="b"/>
-            <a:pathLst>
-              <a:path w="3825759" h="2229450">
-                <a:moveTo>
-                  <a:pt x="0" y="0"/>
-                </a:moveTo>
-                <a:lnTo>
-                  <a:pt x="3825759" y="0"/>
-                </a:lnTo>
-                <a:lnTo>
-                  <a:pt x="3825759" y="2229450"/>
-                </a:lnTo>
-                <a:lnTo>
-                  <a:pt x="0" y="2229450"/>
-                </a:lnTo>
-                <a:lnTo>
-                  <a:pt x="0" y="0"/>
-                </a:lnTo>
-                <a:close/>
-              </a:path>
-            </a:pathLst>
-          </a:custGeom>
-          <a:blipFill>
-            <a:blip r:embed="rId4"/>
-            <a:stretch>
-              <a:fillRect l="-2281" t="-707" b="-16449"/>
-            </a:stretch>
-          </a:blipFill>
-          <a:ln cap="sq">
-            <a:noFill/>
-            <a:prstDash val="solid"/>
-            <a:miter/>
-          </a:ln>
-        </p:spPr>
-        <p:txBody>
-          <a:bodyPr/>
-          <a:lstStyle/>
-          <a:p>
-            <a:endParaRPr lang="zh-CN" altLang="en-US"/>
-          </a:p>
-        </p:txBody>
-      </p:sp>
-      <p:sp>
-        <p:nvSpPr>
-          <p:cNvPr id="41" name="Freeform 41"/>
-          <p:cNvSpPr/>
-          <p:nvPr/>
-        </p:nvSpPr>
-        <p:spPr>
-          <a:xfrm>
-            <a:off x="10397396" y="8496401"/>
-            <a:ext cx="3825759" cy="2187175"/>
-          </a:xfrm>
-          <a:custGeom>
-            <a:avLst/>
-            <a:gdLst/>
-            <a:ahLst/>
-            <a:cxnLst/>
-            <a:rect l="l" t="t" r="r" b="b"/>
-            <a:pathLst>
-              <a:path w="3825759" h="2187175">
-                <a:moveTo>
-                  <a:pt x="0" y="0"/>
-                </a:moveTo>
-                <a:lnTo>
-                  <a:pt x="3825759" y="0"/>
-                </a:lnTo>
-                <a:lnTo>
-                  <a:pt x="3825759" y="2187175"/>
-                </a:lnTo>
-                <a:lnTo>
-                  <a:pt x="0" y="2187175"/>
-                </a:lnTo>
-                <a:lnTo>
-                  <a:pt x="0" y="0"/>
-                </a:lnTo>
-                <a:close/>
-              </a:path>
-            </a:pathLst>
-          </a:custGeom>
-          <a:blipFill>
-            <a:blip r:embed="rId5"/>
-            <a:stretch>
-              <a:fillRect t="-85158" b="-46520"/>
-            </a:stretch>
-          </a:blipFill>
-          <a:ln cap="sq">
-            <a:noFill/>
-            <a:prstDash val="solid"/>
-            <a:miter/>
-          </a:ln>
-        </p:spPr>
-        <p:txBody>
-          <a:bodyPr/>
-          <a:lstStyle/>
-          <a:p>
-            <a:endParaRPr lang="zh-CN" altLang="en-US"/>
-          </a:p>
-        </p:txBody>
-      </p:sp>
       <p:grpSp>
         <p:nvGrpSpPr>
           <p:cNvPr id="42" name="Group 42"/>
@@ -4598,7 +4915,7 @@
         </p:nvGrpSpPr>
         <p:grpSpPr>
           <a:xfrm>
-            <a:off x="752605" y="16242455"/>
+            <a:off x="527219" y="14813014"/>
             <a:ext cx="362428" cy="362428"/>
             <a:chOff x="0" y="0"/>
             <a:chExt cx="483237" cy="483237"/>
@@ -4731,7 +5048,7 @@
           <p:spPr>
             <a:xfrm>
               <a:off x="0" y="37161"/>
-              <a:ext cx="483237" cy="380341"/>
+              <a:ext cx="483237" cy="357876"/>
             </a:xfrm>
             <a:prstGeom prst="rect">
               <a:avLst/>
@@ -4752,12 +5069,12 @@
                 </a:spcBef>
               </a:pPr>
               <a:r>
-                <a:rPr lang="en-US" sz="1735">
+                <a:rPr lang="en-US" sz="1735" dirty="0">
                   <a:solidFill>
                     <a:srgbClr val="FFFFFF"/>
                   </a:solidFill>
-                  <a:latin typeface="字由点字典黑 1 Bold" panose="00020600040101010101" charset="-122"/>
-                  <a:ea typeface="字由点字典黑 1 Bold" panose="00020600040101010101" charset="-122"/>
+                  <a:latin typeface="黑体" panose="02010609060101010101" pitchFamily="49" charset="-122"/>
+                  <a:ea typeface="黑体" panose="02010609060101010101" pitchFamily="49" charset="-122"/>
                   <a:cs typeface="字由点字典黑 1 Bold" panose="00020600040101010101" charset="-122"/>
                   <a:sym typeface="字由点字典黑 1 Bold" panose="00020600040101010101" charset="-122"/>
                 </a:rPr>
@@ -4775,7 +5092,7 @@
         </p:nvGrpSpPr>
         <p:grpSpPr>
           <a:xfrm>
-            <a:off x="752605" y="17268694"/>
+            <a:off x="484545" y="15745489"/>
             <a:ext cx="362428" cy="362428"/>
             <a:chOff x="0" y="0"/>
             <a:chExt cx="483237" cy="483237"/>
@@ -4908,7 +5225,7 @@
           <p:spPr>
             <a:xfrm>
               <a:off x="0" y="37161"/>
-              <a:ext cx="483237" cy="380341"/>
+              <a:ext cx="483237" cy="357876"/>
             </a:xfrm>
             <a:prstGeom prst="rect">
               <a:avLst/>
@@ -4929,419 +5246,12 @@
                 </a:spcBef>
               </a:pPr>
               <a:r>
-                <a:rPr lang="en-US" sz="1735">
+                <a:rPr lang="en-US" sz="1735" dirty="0">
                   <a:solidFill>
                     <a:srgbClr val="FFFFFF"/>
                   </a:solidFill>
-                  <a:latin typeface="字由点字典黑 1 Bold" panose="00020600040101010101" charset="-122"/>
-                  <a:ea typeface="字由点字典黑 1 Bold" panose="00020600040101010101" charset="-122"/>
-                  <a:cs typeface="字由点字典黑 1 Bold" panose="00020600040101010101" charset="-122"/>
-                  <a:sym typeface="字由点字典黑 1 Bold" panose="00020600040101010101" charset="-122"/>
-                </a:rPr>
-                <a:t>02</a:t>
-              </a:r>
-            </a:p>
-          </p:txBody>
-        </p:sp>
-      </p:grpSp>
-      <p:sp>
-        <p:nvSpPr>
-          <p:cNvPr id="55" name="Freeform 55"/>
-          <p:cNvSpPr/>
-          <p:nvPr/>
-        </p:nvSpPr>
-        <p:spPr>
-          <a:xfrm>
-            <a:off x="993336" y="12379626"/>
-            <a:ext cx="3847928" cy="2563682"/>
-          </a:xfrm>
-          <a:custGeom>
-            <a:avLst/>
-            <a:gdLst/>
-            <a:ahLst/>
-            <a:cxnLst/>
-            <a:rect l="l" t="t" r="r" b="b"/>
-            <a:pathLst>
-              <a:path w="3847928" h="2563682">
-                <a:moveTo>
-                  <a:pt x="0" y="0"/>
-                </a:moveTo>
-                <a:lnTo>
-                  <a:pt x="3847928" y="0"/>
-                </a:lnTo>
-                <a:lnTo>
-                  <a:pt x="3847928" y="2563682"/>
-                </a:lnTo>
-                <a:lnTo>
-                  <a:pt x="0" y="2563682"/>
-                </a:lnTo>
-                <a:lnTo>
-                  <a:pt x="0" y="0"/>
-                </a:lnTo>
-                <a:close/>
-              </a:path>
-            </a:pathLst>
-          </a:custGeom>
-          <a:blipFill>
-            <a:blip r:embed="rId6"/>
-            <a:stretch>
-              <a:fillRect/>
-            </a:stretch>
-          </a:blipFill>
-        </p:spPr>
-        <p:txBody>
-          <a:bodyPr/>
-          <a:lstStyle/>
-          <a:p>
-            <a:endParaRPr lang="zh-CN" altLang="en-US"/>
-          </a:p>
-        </p:txBody>
-      </p:sp>
-      <p:grpSp>
-        <p:nvGrpSpPr>
-          <p:cNvPr id="56" name="Group 56"/>
-          <p:cNvGrpSpPr/>
-          <p:nvPr/>
-        </p:nvGrpSpPr>
-        <p:grpSpPr>
-          <a:xfrm>
-            <a:off x="752605" y="18482658"/>
-            <a:ext cx="362428" cy="362428"/>
-            <a:chOff x="0" y="0"/>
-            <a:chExt cx="483237" cy="483237"/>
-          </a:xfrm>
-        </p:grpSpPr>
-        <p:grpSp>
-          <p:nvGrpSpPr>
-            <p:cNvPr id="57" name="Group 57"/>
-            <p:cNvGrpSpPr/>
-            <p:nvPr/>
-          </p:nvGrpSpPr>
-          <p:grpSpPr>
-            <a:xfrm>
-              <a:off x="0" y="0"/>
-              <a:ext cx="483237" cy="483237"/>
-              <a:chOff x="0" y="0"/>
-              <a:chExt cx="812800" cy="812800"/>
-            </a:xfrm>
-          </p:grpSpPr>
-          <p:sp>
-            <p:nvSpPr>
-              <p:cNvPr id="58" name="Freeform 58"/>
-              <p:cNvSpPr/>
-              <p:nvPr/>
-            </p:nvSpPr>
-            <p:spPr>
-              <a:xfrm>
-                <a:off x="0" y="0"/>
-                <a:ext cx="812800" cy="812800"/>
-              </a:xfrm>
-              <a:custGeom>
-                <a:avLst/>
-                <a:gdLst/>
-                <a:ahLst/>
-                <a:cxnLst/>
-                <a:rect l="l" t="t" r="r" b="b"/>
-                <a:pathLst>
-                  <a:path w="812800" h="812800">
-                    <a:moveTo>
-                      <a:pt x="406400" y="0"/>
-                    </a:moveTo>
-                    <a:cubicBezTo>
-                      <a:pt x="181951" y="0"/>
-                      <a:pt x="0" y="181951"/>
-                      <a:pt x="0" y="406400"/>
-                    </a:cubicBezTo>
-                    <a:cubicBezTo>
-                      <a:pt x="0" y="630849"/>
-                      <a:pt x="181951" y="812800"/>
-                      <a:pt x="406400" y="812800"/>
-                    </a:cubicBezTo>
-                    <a:cubicBezTo>
-                      <a:pt x="630849" y="812800"/>
-                      <a:pt x="812800" y="630849"/>
-                      <a:pt x="812800" y="406400"/>
-                    </a:cubicBezTo>
-                    <a:cubicBezTo>
-                      <a:pt x="812800" y="181951"/>
-                      <a:pt x="630849" y="0"/>
-                      <a:pt x="406400" y="0"/>
-                    </a:cubicBezTo>
-                    <a:close/>
-                  </a:path>
-                </a:pathLst>
-              </a:custGeom>
-              <a:gradFill rotWithShape="1">
-                <a:gsLst>
-                  <a:gs pos="0">
-                    <a:srgbClr val="015ECE">
-                      <a:alpha val="100000"/>
-                    </a:srgbClr>
-                  </a:gs>
-                  <a:gs pos="50000">
-                    <a:srgbClr val="0059AC">
-                      <a:alpha val="100000"/>
-                    </a:srgbClr>
-                  </a:gs>
-                  <a:gs pos="100000">
-                    <a:srgbClr val="0E314E">
-                      <a:alpha val="100000"/>
-                    </a:srgbClr>
-                  </a:gs>
-                </a:gsLst>
-                <a:lin ang="0"/>
-              </a:gradFill>
-            </p:spPr>
-            <p:txBody>
-              <a:bodyPr/>
-              <a:lstStyle/>
-              <a:p>
-                <a:endParaRPr lang="zh-CN" altLang="en-US"/>
-              </a:p>
-            </p:txBody>
-          </p:sp>
-          <p:sp>
-            <p:nvSpPr>
-              <p:cNvPr id="59" name="TextBox 59"/>
-              <p:cNvSpPr txBox="1"/>
-              <p:nvPr/>
-            </p:nvSpPr>
-            <p:spPr>
-              <a:xfrm>
-                <a:off x="76200" y="28575"/>
-                <a:ext cx="660400" cy="708025"/>
-              </a:xfrm>
-              <a:prstGeom prst="rect">
-                <a:avLst/>
-              </a:prstGeom>
-            </p:spPr>
-            <p:txBody>
-              <a:bodyPr lIns="31579" tIns="31579" rIns="31579" bIns="31579" rtlCol="0" anchor="ctr"/>
-              <a:lstStyle/>
-              <a:p>
-                <a:pPr algn="ctr">
-                  <a:lnSpc>
-                    <a:spcPts val="2940"/>
-                  </a:lnSpc>
-                </a:pPr>
-                <a:endParaRPr/>
-              </a:p>
-            </p:txBody>
-          </p:sp>
-        </p:grpSp>
-        <p:sp>
-          <p:nvSpPr>
-            <p:cNvPr id="60" name="TextBox 60"/>
-            <p:cNvSpPr txBox="1"/>
-            <p:nvPr/>
-          </p:nvSpPr>
-          <p:spPr>
-            <a:xfrm>
-              <a:off x="0" y="37161"/>
-              <a:ext cx="483237" cy="380341"/>
-            </a:xfrm>
-            <a:prstGeom prst="rect">
-              <a:avLst/>
-            </a:prstGeom>
-          </p:spPr>
-          <p:txBody>
-            <a:bodyPr lIns="0" tIns="0" rIns="0" bIns="0" rtlCol="0" anchor="t">
-              <a:spAutoFit/>
-            </a:bodyPr>
-            <a:lstStyle/>
-            <a:p>
-              <a:pPr algn="ctr">
-                <a:lnSpc>
-                  <a:spcPts val="2430"/>
-                </a:lnSpc>
-                <a:spcBef>
-                  <a:spcPct val="0"/>
-                </a:spcBef>
-              </a:pPr>
-              <a:r>
-                <a:rPr lang="en-US" sz="1735">
-                  <a:solidFill>
-                    <a:srgbClr val="FFFFFF"/>
-                  </a:solidFill>
-                  <a:latin typeface="字由点字典黑 1 Bold" panose="00020600040101010101" charset="-122"/>
-                  <a:ea typeface="字由点字典黑 1 Bold" panose="00020600040101010101" charset="-122"/>
-                  <a:cs typeface="字由点字典黑 1 Bold" panose="00020600040101010101" charset="-122"/>
-                  <a:sym typeface="字由点字典黑 1 Bold" panose="00020600040101010101" charset="-122"/>
-                </a:rPr>
-                <a:t>01</a:t>
-              </a:r>
-            </a:p>
-          </p:txBody>
-        </p:sp>
-      </p:grpSp>
-      <p:grpSp>
-        <p:nvGrpSpPr>
-          <p:cNvPr id="61" name="Group 61"/>
-          <p:cNvGrpSpPr/>
-          <p:nvPr/>
-        </p:nvGrpSpPr>
-        <p:grpSpPr>
-          <a:xfrm>
-            <a:off x="752605" y="19359436"/>
-            <a:ext cx="362428" cy="362428"/>
-            <a:chOff x="0" y="0"/>
-            <a:chExt cx="483237" cy="483237"/>
-          </a:xfrm>
-        </p:grpSpPr>
-        <p:grpSp>
-          <p:nvGrpSpPr>
-            <p:cNvPr id="62" name="Group 62"/>
-            <p:cNvGrpSpPr/>
-            <p:nvPr/>
-          </p:nvGrpSpPr>
-          <p:grpSpPr>
-            <a:xfrm>
-              <a:off x="0" y="0"/>
-              <a:ext cx="483237" cy="483237"/>
-              <a:chOff x="0" y="0"/>
-              <a:chExt cx="812800" cy="812800"/>
-            </a:xfrm>
-          </p:grpSpPr>
-          <p:sp>
-            <p:nvSpPr>
-              <p:cNvPr id="63" name="Freeform 63"/>
-              <p:cNvSpPr/>
-              <p:nvPr/>
-            </p:nvSpPr>
-            <p:spPr>
-              <a:xfrm>
-                <a:off x="0" y="0"/>
-                <a:ext cx="812800" cy="812800"/>
-              </a:xfrm>
-              <a:custGeom>
-                <a:avLst/>
-                <a:gdLst/>
-                <a:ahLst/>
-                <a:cxnLst/>
-                <a:rect l="l" t="t" r="r" b="b"/>
-                <a:pathLst>
-                  <a:path w="812800" h="812800">
-                    <a:moveTo>
-                      <a:pt x="406400" y="0"/>
-                    </a:moveTo>
-                    <a:cubicBezTo>
-                      <a:pt x="181951" y="0"/>
-                      <a:pt x="0" y="181951"/>
-                      <a:pt x="0" y="406400"/>
-                    </a:cubicBezTo>
-                    <a:cubicBezTo>
-                      <a:pt x="0" y="630849"/>
-                      <a:pt x="181951" y="812800"/>
-                      <a:pt x="406400" y="812800"/>
-                    </a:cubicBezTo>
-                    <a:cubicBezTo>
-                      <a:pt x="630849" y="812800"/>
-                      <a:pt x="812800" y="630849"/>
-                      <a:pt x="812800" y="406400"/>
-                    </a:cubicBezTo>
-                    <a:cubicBezTo>
-                      <a:pt x="812800" y="181951"/>
-                      <a:pt x="630849" y="0"/>
-                      <a:pt x="406400" y="0"/>
-                    </a:cubicBezTo>
-                    <a:close/>
-                  </a:path>
-                </a:pathLst>
-              </a:custGeom>
-              <a:gradFill rotWithShape="1">
-                <a:gsLst>
-                  <a:gs pos="0">
-                    <a:srgbClr val="015ECE">
-                      <a:alpha val="100000"/>
-                    </a:srgbClr>
-                  </a:gs>
-                  <a:gs pos="50000">
-                    <a:srgbClr val="0059AC">
-                      <a:alpha val="100000"/>
-                    </a:srgbClr>
-                  </a:gs>
-                  <a:gs pos="100000">
-                    <a:srgbClr val="0E314E">
-                      <a:alpha val="100000"/>
-                    </a:srgbClr>
-                  </a:gs>
-                </a:gsLst>
-                <a:lin ang="0"/>
-              </a:gradFill>
-            </p:spPr>
-            <p:txBody>
-              <a:bodyPr/>
-              <a:lstStyle/>
-              <a:p>
-                <a:endParaRPr lang="zh-CN" altLang="en-US"/>
-              </a:p>
-            </p:txBody>
-          </p:sp>
-          <p:sp>
-            <p:nvSpPr>
-              <p:cNvPr id="64" name="TextBox 64"/>
-              <p:cNvSpPr txBox="1"/>
-              <p:nvPr/>
-            </p:nvSpPr>
-            <p:spPr>
-              <a:xfrm>
-                <a:off x="76200" y="28575"/>
-                <a:ext cx="660400" cy="708025"/>
-              </a:xfrm>
-              <a:prstGeom prst="rect">
-                <a:avLst/>
-              </a:prstGeom>
-            </p:spPr>
-            <p:txBody>
-              <a:bodyPr lIns="31579" tIns="31579" rIns="31579" bIns="31579" rtlCol="0" anchor="ctr"/>
-              <a:lstStyle/>
-              <a:p>
-                <a:pPr algn="ctr">
-                  <a:lnSpc>
-                    <a:spcPts val="2940"/>
-                  </a:lnSpc>
-                </a:pPr>
-                <a:endParaRPr/>
-              </a:p>
-            </p:txBody>
-          </p:sp>
-        </p:grpSp>
-        <p:sp>
-          <p:nvSpPr>
-            <p:cNvPr id="65" name="TextBox 65"/>
-            <p:cNvSpPr txBox="1"/>
-            <p:nvPr/>
-          </p:nvSpPr>
-          <p:spPr>
-            <a:xfrm>
-              <a:off x="0" y="37161"/>
-              <a:ext cx="483237" cy="380341"/>
-            </a:xfrm>
-            <a:prstGeom prst="rect">
-              <a:avLst/>
-            </a:prstGeom>
-          </p:spPr>
-          <p:txBody>
-            <a:bodyPr lIns="0" tIns="0" rIns="0" bIns="0" rtlCol="0" anchor="t">
-              <a:spAutoFit/>
-            </a:bodyPr>
-            <a:lstStyle/>
-            <a:p>
-              <a:pPr algn="ctr">
-                <a:lnSpc>
-                  <a:spcPts val="2430"/>
-                </a:lnSpc>
-                <a:spcBef>
-                  <a:spcPct val="0"/>
-                </a:spcBef>
-              </a:pPr>
-              <a:r>
-                <a:rPr lang="en-US" sz="1735">
-                  <a:solidFill>
-                    <a:srgbClr val="FFFFFF"/>
-                  </a:solidFill>
-                  <a:latin typeface="字由点字典黑 1 Bold" panose="00020600040101010101" charset="-122"/>
-                  <a:ea typeface="字由点字典黑 1 Bold" panose="00020600040101010101" charset="-122"/>
+                  <a:latin typeface="黑体" panose="02010609060101010101" pitchFamily="49" charset="-122"/>
+                  <a:ea typeface="黑体" panose="02010609060101010101" pitchFamily="49" charset="-122"/>
                   <a:cs typeface="字由点字典黑 1 Bold" panose="00020600040101010101" charset="-122"/>
                   <a:sym typeface="字由点字典黑 1 Bold" panose="00020600040101010101" charset="-122"/>
                 </a:rPr>
@@ -5378,19 +5288,7 @@
               </a:lnSpc>
             </a:pPr>
             <a:r>
-              <a:rPr lang="zh-CN" altLang="en-US" sz="5000" b="1" spc="330" dirty="0">
-                <a:solidFill>
-                  <a:srgbClr val="FFFFFF"/>
-                </a:solidFill>
-                <a:latin typeface="黑体" panose="02010609060101010101" pitchFamily="49" charset="-122"/>
-                <a:ea typeface="黑体" panose="02010609060101010101" pitchFamily="49" charset="-122"/>
-                <a:cs typeface="阿里巴巴普惠体 Medium" panose="00020600040101010101" charset="-122"/>
-                <a:sym typeface="阿里巴巴普惠体 Medium" panose="00020600040101010101" charset="-122"/>
-              </a:rPr>
-              <a:t>生物医学文献智能分析</a:t>
-            </a:r>
-            <a:r>
-              <a:rPr lang="en-US" altLang="zh-CN" sz="5000" b="1" spc="330" dirty="0">
+              <a:rPr lang="en-US" altLang="zh-CN" sz="5000" b="1" spc="330" dirty="0" err="1">
                 <a:solidFill>
                   <a:srgbClr val="FFFFFF"/>
                 </a:solidFill>
@@ -5399,111 +5297,17 @@
                 <a:cs typeface="Times New Roman" panose="02020603050405020304" pitchFamily="18" charset="0"/>
                 <a:sym typeface="阿里巴巴普惠体 Medium" panose="00020600040101010101" charset="-122"/>
               </a:rPr>
-              <a:t>Agent</a:t>
-            </a:r>
-            <a:r>
-              <a:rPr lang="zh-CN" altLang="en-US" sz="5000" b="1" spc="330" dirty="0">
-                <a:solidFill>
-                  <a:srgbClr val="FFFFFF"/>
-                </a:solidFill>
-                <a:latin typeface="阿里巴巴普惠体 Medium" panose="00020600040101010101" charset="-122"/>
-                <a:ea typeface="阿里巴巴普惠体 Medium" panose="00020600040101010101" charset="-122"/>
-                <a:cs typeface="阿里巴巴普惠体 Medium" panose="00020600040101010101" charset="-122"/>
-                <a:sym typeface="阿里巴巴普惠体 Medium" panose="00020600040101010101" charset="-122"/>
-              </a:rPr>
-              <a:t> </a:t>
+              <a:t>Bioinformatics_Agent</a:t>
             </a:r>
             <a:endParaRPr lang="en-US" sz="5000" b="1" spc="330" dirty="0">
               <a:solidFill>
                 <a:srgbClr val="FFFFFF"/>
               </a:solidFill>
-              <a:latin typeface="阿里巴巴普惠体 Medium" panose="00020600040101010101" charset="-122"/>
+              <a:latin typeface="Times New Roman" panose="02020603050405020304" pitchFamily="18" charset="0"/>
               <a:ea typeface="阿里巴巴普惠体 Medium" panose="00020600040101010101" charset="-122"/>
-              <a:cs typeface="阿里巴巴普惠体 Medium" panose="00020600040101010101" charset="-122"/>
+              <a:cs typeface="Times New Roman" panose="02020603050405020304" pitchFamily="18" charset="0"/>
               <a:sym typeface="阿里巴巴普惠体 Medium" panose="00020600040101010101" charset="-122"/>
             </a:endParaRPr>
-          </a:p>
-        </p:txBody>
-      </p:sp>
-      <p:sp>
-        <p:nvSpPr>
-          <p:cNvPr id="67" name="TextBox 67"/>
-          <p:cNvSpPr txBox="1"/>
-          <p:nvPr/>
-        </p:nvSpPr>
-        <p:spPr>
-          <a:xfrm>
-            <a:off x="10175091" y="17419667"/>
-            <a:ext cx="4048064" cy="346710"/>
-          </a:xfrm>
-          <a:prstGeom prst="rect">
-            <a:avLst/>
-          </a:prstGeom>
-        </p:spPr>
-        <p:txBody>
-          <a:bodyPr lIns="0" tIns="0" rIns="0" bIns="0" rtlCol="0" anchor="t">
-            <a:spAutoFit/>
-          </a:bodyPr>
-          <a:lstStyle/>
-          <a:p>
-            <a:pPr marL="0" lvl="0" indent="0" algn="l">
-              <a:lnSpc>
-                <a:spcPts val="2880"/>
-              </a:lnSpc>
-            </a:pPr>
-            <a:r>
-              <a:rPr lang="en-US" sz="1800" spc="-27">
-                <a:solidFill>
-                  <a:srgbClr val="000000"/>
-                </a:solidFill>
-                <a:latin typeface="字由点字典黑 2 Bold" panose="00020600040101010101" charset="-122"/>
-                <a:ea typeface="字由点字典黑 2 Bold" panose="00020600040101010101" charset="-122"/>
-                <a:cs typeface="字由点字典黑 2 Bold" panose="00020600040101010101" charset="-122"/>
-                <a:sym typeface="字由点字典黑 2 Bold" panose="00020600040101010101" charset="-122"/>
-              </a:rPr>
-              <a:t>参考文献</a:t>
-            </a:r>
-          </a:p>
-        </p:txBody>
-      </p:sp>
-      <p:sp>
-        <p:nvSpPr>
-          <p:cNvPr id="68" name="TextBox 68"/>
-          <p:cNvSpPr txBox="1"/>
-          <p:nvPr/>
-        </p:nvSpPr>
-        <p:spPr>
-          <a:xfrm>
-            <a:off x="10175091" y="17897822"/>
-            <a:ext cx="4324189" cy="548005"/>
-          </a:xfrm>
-          <a:prstGeom prst="rect">
-            <a:avLst/>
-          </a:prstGeom>
-        </p:spPr>
-        <p:txBody>
-          <a:bodyPr lIns="0" tIns="0" rIns="0" bIns="0" rtlCol="0" anchor="t">
-            <a:spAutoFit/>
-          </a:bodyPr>
-          <a:lstStyle/>
-          <a:p>
-            <a:pPr marL="0" lvl="0" indent="0" algn="just">
-              <a:lnSpc>
-                <a:spcPts val="2240"/>
-              </a:lnSpc>
-            </a:pPr>
-            <a:r>
-              <a:rPr lang="en-US" sz="1400">
-                <a:solidFill>
-                  <a:srgbClr val="000000"/>
-                </a:solidFill>
-                <a:latin typeface="字由点字典黑 2 Light" panose="00020600040101010101" charset="-122"/>
-                <a:ea typeface="字由点字典黑 2 Light" panose="00020600040101010101" charset="-122"/>
-                <a:cs typeface="字由点字典黑 2 Light" panose="00020600040101010101" charset="-122"/>
-                <a:sym typeface="字由点字典黑 2 Light" panose="00020600040101010101" charset="-122"/>
-              </a:rPr>
-              <a:t>列出项目主要参考的论文、技术文档、开源项目、数据集、模型或相关资料。</a:t>
-            </a:r>
           </a:p>
         </p:txBody>
       </p:sp>
@@ -5516,7 +5320,7 @@
         <p:spPr>
           <a:xfrm>
             <a:off x="10175091" y="12084189"/>
-            <a:ext cx="4048064" cy="346710"/>
+            <a:ext cx="4048064" cy="317844"/>
           </a:xfrm>
           <a:prstGeom prst="rect">
             <a:avLst/>
@@ -5534,17 +5338,26 @@
               </a:lnSpc>
             </a:pPr>
             <a:r>
-              <a:rPr lang="en-US" sz="1800" spc="-27">
-                <a:solidFill>
-                  <a:srgbClr val="000000"/>
-                </a:solidFill>
-                <a:latin typeface="字由点字典黑 2 Bold" panose="00020600040101010101" charset="-122"/>
-                <a:ea typeface="字由点字典黑 2 Bold" panose="00020600040101010101" charset="-122"/>
+              <a:rPr lang="en-US" sz="1800" b="1" spc="-27" dirty="0" err="1">
+                <a:solidFill>
+                  <a:srgbClr val="000000"/>
+                </a:solidFill>
+                <a:latin typeface="黑体" panose="02010609060101010101" pitchFamily="49" charset="-122"/>
+                <a:ea typeface="黑体" panose="02010609060101010101" pitchFamily="49" charset="-122"/>
                 <a:cs typeface="字由点字典黑 2 Bold" panose="00020600040101010101" charset="-122"/>
                 <a:sym typeface="字由点字典黑 2 Bold" panose="00020600040101010101" charset="-122"/>
               </a:rPr>
               <a:t>总结</a:t>
             </a:r>
+            <a:endParaRPr lang="en-US" sz="1800" b="1" spc="-27" dirty="0">
+              <a:solidFill>
+                <a:srgbClr val="000000"/>
+              </a:solidFill>
+              <a:latin typeface="黑体" panose="02010609060101010101" pitchFamily="49" charset="-122"/>
+              <a:ea typeface="黑体" panose="02010609060101010101" pitchFamily="49" charset="-122"/>
+              <a:cs typeface="字由点字典黑 2 Bold" panose="00020600040101010101" charset="-122"/>
+              <a:sym typeface="字由点字典黑 2 Bold" panose="00020600040101010101" charset="-122"/>
+            </a:endParaRPr>
           </a:p>
         </p:txBody>
       </p:sp>
@@ -5557,7 +5370,7 @@
         <p:spPr>
           <a:xfrm>
             <a:off x="10175091" y="12488049"/>
-            <a:ext cx="4410690" cy="271780"/>
+            <a:ext cx="4410690" cy="3345339"/>
           </a:xfrm>
           <a:prstGeom prst="rect">
             <a:avLst/>
@@ -5569,23 +5382,302 @@
           </a:bodyPr>
           <a:lstStyle/>
           <a:p>
-            <a:pPr marL="0" lvl="0" indent="0" algn="just">
+            <a:pPr lvl="0" algn="just">
               <a:lnSpc>
                 <a:spcPts val="2240"/>
               </a:lnSpc>
             </a:pPr>
             <a:r>
-              <a:rPr lang="en-US" sz="1400">
-                <a:solidFill>
-                  <a:srgbClr val="000000"/>
-                </a:solidFill>
-                <a:latin typeface="字由点字典黑 2 Light" panose="00020600040101010101" charset="-122"/>
-                <a:ea typeface="字由点字典黑 2 Light" panose="00020600040101010101" charset="-122"/>
-                <a:cs typeface="字由点字典黑 2 Light" panose="00020600040101010101" charset="-122"/>
-                <a:sym typeface="字由点字典黑 2 Light" panose="00020600040101010101" charset="-122"/>
-              </a:rPr>
-              <a:t>概括项目完成情况、主要成果、实践价值与项目亮点。</a:t>
-            </a:r>
+              <a:rPr lang="zh-CN" altLang="en-US" sz="1400" dirty="0">
+                <a:solidFill>
+                  <a:srgbClr val="000000"/>
+                </a:solidFill>
+                <a:latin typeface="黑体" panose="02010609060101010101" pitchFamily="49" charset="-122"/>
+                <a:ea typeface="黑体" panose="02010609060101010101" pitchFamily="49" charset="-122"/>
+                <a:cs typeface="字由点字典黑 2 Light" panose="00020600040101010101" charset="-122"/>
+                <a:sym typeface="字由点字典黑 2 Light" panose="00020600040101010101" charset="-122"/>
+              </a:rPr>
+              <a:t>本项目成功构建了一款端到端的生物医学文献智能分析 </a:t>
+            </a:r>
+            <a:r>
+              <a:rPr lang="en-US" altLang="zh-CN" sz="1400" dirty="0">
+                <a:solidFill>
+                  <a:srgbClr val="000000"/>
+                </a:solidFill>
+                <a:latin typeface="Times New Roman" panose="02020603050405020304" pitchFamily="18" charset="0"/>
+                <a:ea typeface="黑体" panose="02010609060101010101" pitchFamily="49" charset="-122"/>
+                <a:cs typeface="Times New Roman" panose="02020603050405020304" pitchFamily="18" charset="0"/>
+                <a:sym typeface="字由点字典黑 2 Light" panose="00020600040101010101" charset="-122"/>
+              </a:rPr>
+              <a:t>Agent</a:t>
+            </a:r>
+            <a:r>
+              <a:rPr lang="zh-CN" altLang="en-US" sz="1400" dirty="0">
+                <a:solidFill>
+                  <a:srgbClr val="000000"/>
+                </a:solidFill>
+                <a:latin typeface="黑体" panose="02010609060101010101" pitchFamily="49" charset="-122"/>
+                <a:ea typeface="黑体" panose="02010609060101010101" pitchFamily="49" charset="-122"/>
+                <a:cs typeface="字由点字典黑 2 Light" panose="00020600040101010101" charset="-122"/>
+                <a:sym typeface="字由点字典黑 2 Light" panose="00020600040101010101" charset="-122"/>
+              </a:rPr>
+              <a:t>系统，完成了从自然语言研究问题输入到结构化文献综述报告输出的全链路自动化。</a:t>
+            </a:r>
+            <a:endParaRPr lang="en-US" altLang="zh-CN" sz="1400" dirty="0">
+              <a:solidFill>
+                <a:srgbClr val="000000"/>
+              </a:solidFill>
+              <a:latin typeface="黑体" panose="02010609060101010101" pitchFamily="49" charset="-122"/>
+              <a:ea typeface="黑体" panose="02010609060101010101" pitchFamily="49" charset="-122"/>
+              <a:cs typeface="字由点字典黑 2 Light" panose="00020600040101010101" charset="-122"/>
+              <a:sym typeface="字由点字典黑 2 Light" panose="00020600040101010101" charset="-122"/>
+            </a:endParaRPr>
+          </a:p>
+          <a:p>
+            <a:pPr lvl="0" algn="just">
+              <a:lnSpc>
+                <a:spcPts val="2240"/>
+              </a:lnSpc>
+            </a:pPr>
+            <a:endParaRPr lang="zh-CN" altLang="en-US" sz="1400" dirty="0">
+              <a:solidFill>
+                <a:srgbClr val="000000"/>
+              </a:solidFill>
+              <a:latin typeface="黑体" panose="02010609060101010101" pitchFamily="49" charset="-122"/>
+              <a:ea typeface="黑体" panose="02010609060101010101" pitchFamily="49" charset="-122"/>
+              <a:cs typeface="字由点字典黑 2 Light" panose="00020600040101010101" charset="-122"/>
+              <a:sym typeface="字由点字典黑 2 Light" panose="00020600040101010101" charset="-122"/>
+            </a:endParaRPr>
+          </a:p>
+          <a:p>
+            <a:pPr lvl="0" algn="just">
+              <a:lnSpc>
+                <a:spcPts val="2240"/>
+              </a:lnSpc>
+            </a:pPr>
+            <a:r>
+              <a:rPr lang="zh-CN" altLang="en-US" sz="1400" b="1" dirty="0">
+                <a:solidFill>
+                  <a:srgbClr val="000000"/>
+                </a:solidFill>
+                <a:latin typeface="黑体" panose="02010609060101010101" pitchFamily="49" charset="-122"/>
+                <a:ea typeface="黑体" panose="02010609060101010101" pitchFamily="49" charset="-122"/>
+                <a:cs typeface="字由点字典黑 2 Light" panose="00020600040101010101" charset="-122"/>
+                <a:sym typeface="字由点字典黑 2 Light" panose="00020600040101010101" charset="-122"/>
+              </a:rPr>
+              <a:t>项目亮点</a:t>
+            </a:r>
+            <a:r>
+              <a:rPr lang="en-US" altLang="zh-CN" sz="1400" b="1" dirty="0">
+                <a:solidFill>
+                  <a:srgbClr val="000000"/>
+                </a:solidFill>
+                <a:latin typeface="黑体" panose="02010609060101010101" pitchFamily="49" charset="-122"/>
+                <a:ea typeface="黑体" panose="02010609060101010101" pitchFamily="49" charset="-122"/>
+                <a:cs typeface="字由点字典黑 2 Light" panose="00020600040101010101" charset="-122"/>
+                <a:sym typeface="字由点字典黑 2 Light" panose="00020600040101010101" charset="-122"/>
+              </a:rPr>
+              <a:t>:</a:t>
+            </a:r>
+            <a:endParaRPr lang="zh-CN" altLang="en-US" sz="1400" b="1" dirty="0">
+              <a:solidFill>
+                <a:srgbClr val="000000"/>
+              </a:solidFill>
+              <a:latin typeface="黑体" panose="02010609060101010101" pitchFamily="49" charset="-122"/>
+              <a:ea typeface="黑体" panose="02010609060101010101" pitchFamily="49" charset="-122"/>
+              <a:cs typeface="字由点字典黑 2 Light" panose="00020600040101010101" charset="-122"/>
+              <a:sym typeface="字由点字典黑 2 Light" panose="00020600040101010101" charset="-122"/>
+            </a:endParaRPr>
+          </a:p>
+          <a:p>
+            <a:pPr lvl="0" algn="just">
+              <a:lnSpc>
+                <a:spcPts val="2240"/>
+              </a:lnSpc>
+            </a:pPr>
+            <a:r>
+              <a:rPr lang="en-US" altLang="zh-CN" sz="1400" dirty="0">
+                <a:solidFill>
+                  <a:srgbClr val="000000"/>
+                </a:solidFill>
+                <a:latin typeface="黑体" panose="02010609060101010101" pitchFamily="49" charset="-122"/>
+                <a:ea typeface="黑体" panose="02010609060101010101" pitchFamily="49" charset="-122"/>
+                <a:cs typeface="字由点字典黑 2 Light" panose="00020600040101010101" charset="-122"/>
+                <a:sym typeface="字由点字典黑 2 Light" panose="00020600040101010101" charset="-122"/>
+              </a:rPr>
+              <a:t>-</a:t>
+            </a:r>
+            <a:r>
+              <a:rPr lang="zh-CN" altLang="en-US" sz="1400" dirty="0">
+                <a:solidFill>
+                  <a:srgbClr val="000000"/>
+                </a:solidFill>
+                <a:latin typeface="黑体" panose="02010609060101010101" pitchFamily="49" charset="-122"/>
+                <a:ea typeface="黑体" panose="02010609060101010101" pitchFamily="49" charset="-122"/>
+                <a:cs typeface="字由点字典黑 2 Light" panose="00020600040101010101" charset="-122"/>
+                <a:sym typeface="字由点字典黑 2 Light" panose="00020600040101010101" charset="-122"/>
+              </a:rPr>
+              <a:t>领域垂直深耕：针对生物医学场景定制术语引擎与检索模板，优于通用文献工具。</a:t>
+            </a:r>
+          </a:p>
+          <a:p>
+            <a:pPr lvl="0" algn="just">
+              <a:lnSpc>
+                <a:spcPts val="2240"/>
+              </a:lnSpc>
+            </a:pPr>
+            <a:r>
+              <a:rPr lang="en-US" altLang="zh-CN" sz="1400" dirty="0">
+                <a:solidFill>
+                  <a:srgbClr val="000000"/>
+                </a:solidFill>
+                <a:latin typeface="黑体" panose="02010609060101010101" pitchFamily="49" charset="-122"/>
+                <a:ea typeface="黑体" panose="02010609060101010101" pitchFamily="49" charset="-122"/>
+                <a:cs typeface="字由点字典黑 2 Light" panose="00020600040101010101" charset="-122"/>
+                <a:sym typeface="字由点字典黑 2 Light" panose="00020600040101010101" charset="-122"/>
+              </a:rPr>
+              <a:t>-</a:t>
+            </a:r>
+            <a:r>
+              <a:rPr lang="zh-CN" altLang="en-US" sz="1400" dirty="0">
+                <a:solidFill>
+                  <a:srgbClr val="000000"/>
+                </a:solidFill>
+                <a:latin typeface="黑体" panose="02010609060101010101" pitchFamily="49" charset="-122"/>
+                <a:ea typeface="黑体" panose="02010609060101010101" pitchFamily="49" charset="-122"/>
+                <a:cs typeface="字由点字典黑 2 Light" panose="00020600040101010101" charset="-122"/>
+                <a:sym typeface="字由点字典黑 2 Light" panose="00020600040101010101" charset="-122"/>
+              </a:rPr>
+              <a:t>全流程透明化：</a:t>
+            </a:r>
+            <a:r>
+              <a:rPr lang="en-US" altLang="zh-CN" sz="1400" dirty="0">
+                <a:solidFill>
+                  <a:srgbClr val="000000"/>
+                </a:solidFill>
+                <a:latin typeface="Times New Roman" panose="02020603050405020304" pitchFamily="18" charset="0"/>
+                <a:ea typeface="黑体" panose="02010609060101010101" pitchFamily="49" charset="-122"/>
+                <a:cs typeface="Times New Roman" panose="02020603050405020304" pitchFamily="18" charset="0"/>
+                <a:sym typeface="字由点字典黑 2 Light" panose="00020600040101010101" charset="-122"/>
+              </a:rPr>
+              <a:t>Agent</a:t>
+            </a:r>
+            <a:r>
+              <a:rPr lang="zh-CN" altLang="en-US" sz="1400" dirty="0">
+                <a:solidFill>
+                  <a:srgbClr val="000000"/>
+                </a:solidFill>
+                <a:latin typeface="黑体" panose="02010609060101010101" pitchFamily="49" charset="-122"/>
+                <a:ea typeface="黑体" panose="02010609060101010101" pitchFamily="49" charset="-122"/>
+                <a:cs typeface="字由点字典黑 2 Light" panose="00020600040101010101" charset="-122"/>
+                <a:sym typeface="字由点字典黑 2 Light" panose="00020600040101010101" charset="-122"/>
+              </a:rPr>
+              <a:t>每一步执行过程实时可见，增强了</a:t>
+            </a:r>
+            <a:r>
+              <a:rPr lang="en-US" altLang="zh-CN" sz="1400" dirty="0">
+                <a:solidFill>
+                  <a:srgbClr val="000000"/>
+                </a:solidFill>
+                <a:latin typeface="Times New Roman" panose="02020603050405020304" pitchFamily="18" charset="0"/>
+                <a:ea typeface="黑体" panose="02010609060101010101" pitchFamily="49" charset="-122"/>
+                <a:cs typeface="Times New Roman" panose="02020603050405020304" pitchFamily="18" charset="0"/>
+                <a:sym typeface="字由点字典黑 2 Light" panose="00020600040101010101" charset="-122"/>
+              </a:rPr>
+              <a:t>AI</a:t>
+            </a:r>
+            <a:r>
+              <a:rPr lang="zh-CN" altLang="en-US" sz="1400" dirty="0">
+                <a:solidFill>
+                  <a:srgbClr val="000000"/>
+                </a:solidFill>
+                <a:latin typeface="黑体" panose="02010609060101010101" pitchFamily="49" charset="-122"/>
+                <a:ea typeface="黑体" panose="02010609060101010101" pitchFamily="49" charset="-122"/>
+                <a:cs typeface="字由点字典黑 2 Light" panose="00020600040101010101" charset="-122"/>
+                <a:sym typeface="字由点字典黑 2 Light" panose="00020600040101010101" charset="-122"/>
+              </a:rPr>
+              <a:t>辅助科研的可信度。</a:t>
+            </a:r>
+          </a:p>
+          <a:p>
+            <a:pPr lvl="0" algn="just">
+              <a:lnSpc>
+                <a:spcPts val="2240"/>
+              </a:lnSpc>
+            </a:pPr>
+            <a:r>
+              <a:rPr lang="en-US" altLang="zh-CN" sz="1400" dirty="0">
+                <a:solidFill>
+                  <a:srgbClr val="000000"/>
+                </a:solidFill>
+                <a:latin typeface="黑体" panose="02010609060101010101" pitchFamily="49" charset="-122"/>
+                <a:ea typeface="黑体" panose="02010609060101010101" pitchFamily="49" charset="-122"/>
+                <a:cs typeface="字由点字典黑 2 Light" panose="00020600040101010101" charset="-122"/>
+                <a:sym typeface="字由点字典黑 2 Light" panose="00020600040101010101" charset="-122"/>
+              </a:rPr>
+              <a:t>-</a:t>
+            </a:r>
+            <a:r>
+              <a:rPr lang="zh-CN" altLang="en-US" sz="1400" dirty="0">
+                <a:solidFill>
+                  <a:srgbClr val="000000"/>
+                </a:solidFill>
+                <a:latin typeface="黑体" panose="02010609060101010101" pitchFamily="49" charset="-122"/>
+                <a:ea typeface="黑体" panose="02010609060101010101" pitchFamily="49" charset="-122"/>
+                <a:cs typeface="字由点字典黑 2 Light" panose="00020600040101010101" charset="-122"/>
+                <a:sym typeface="字由点字典黑 2 Light" panose="00020600040101010101" charset="-122"/>
+              </a:rPr>
+              <a:t>结构化中间表示：先提取后对比的策略有效规避了</a:t>
+            </a:r>
+            <a:r>
+              <a:rPr lang="en-US" altLang="zh-CN" sz="1400" dirty="0">
+                <a:solidFill>
+                  <a:srgbClr val="000000"/>
+                </a:solidFill>
+                <a:latin typeface="Times New Roman" panose="02020603050405020304" pitchFamily="18" charset="0"/>
+                <a:ea typeface="黑体" panose="02010609060101010101" pitchFamily="49" charset="-122"/>
+                <a:cs typeface="Times New Roman" panose="02020603050405020304" pitchFamily="18" charset="0"/>
+                <a:sym typeface="字由点字典黑 2 Light" panose="00020600040101010101" charset="-122"/>
+              </a:rPr>
+              <a:t>LLM </a:t>
+            </a:r>
+            <a:r>
+              <a:rPr lang="zh-CN" altLang="en-US" sz="1400" dirty="0">
+                <a:solidFill>
+                  <a:srgbClr val="000000"/>
+                </a:solidFill>
+                <a:latin typeface="黑体" panose="02010609060101010101" pitchFamily="49" charset="-122"/>
+                <a:ea typeface="黑体" panose="02010609060101010101" pitchFamily="49" charset="-122"/>
+                <a:cs typeface="字由点字典黑 2 Light" panose="00020600040101010101" charset="-122"/>
+                <a:sym typeface="字由点字典黑 2 Light" panose="00020600040101010101" charset="-122"/>
+              </a:rPr>
+              <a:t>长文本处理中的信息遗漏。</a:t>
+            </a:r>
+            <a:endParaRPr lang="en-US" altLang="zh-CN" sz="1400" dirty="0">
+              <a:solidFill>
+                <a:srgbClr val="000000"/>
+              </a:solidFill>
+              <a:latin typeface="黑体" panose="02010609060101010101" pitchFamily="49" charset="-122"/>
+              <a:ea typeface="黑体" panose="02010609060101010101" pitchFamily="49" charset="-122"/>
+              <a:cs typeface="字由点字典黑 2 Light" panose="00020600040101010101" charset="-122"/>
+              <a:sym typeface="字由点字典黑 2 Light" panose="00020600040101010101" charset="-122"/>
+            </a:endParaRPr>
+          </a:p>
+          <a:p>
+            <a:pPr lvl="0" algn="just">
+              <a:lnSpc>
+                <a:spcPts val="2240"/>
+              </a:lnSpc>
+            </a:pPr>
+            <a:endParaRPr lang="zh-CN" altLang="en-US" sz="1400" dirty="0">
+              <a:solidFill>
+                <a:srgbClr val="000000"/>
+              </a:solidFill>
+              <a:latin typeface="黑体" panose="02010609060101010101" pitchFamily="49" charset="-122"/>
+              <a:ea typeface="黑体" panose="02010609060101010101" pitchFamily="49" charset="-122"/>
+              <a:cs typeface="字由点字典黑 2 Light" panose="00020600040101010101" charset="-122"/>
+              <a:sym typeface="字由点字典黑 2 Light" panose="00020600040101010101" charset="-122"/>
+            </a:endParaRPr>
           </a:p>
         </p:txBody>
       </p:sp>
@@ -5598,14 +5690,14 @@
         <p:spPr>
           <a:xfrm>
             <a:off x="631469" y="20602123"/>
-            <a:ext cx="3624341" cy="337185"/>
+            <a:ext cx="11649431" cy="330219"/>
           </a:xfrm>
           <a:prstGeom prst="rect">
             <a:avLst/>
           </a:prstGeom>
         </p:spPr>
         <p:txBody>
-          <a:bodyPr lIns="0" tIns="0" rIns="0" bIns="0" rtlCol="0" anchor="t">
+          <a:bodyPr wrap="square" lIns="0" tIns="0" rIns="0" bIns="0" rtlCol="0" anchor="t">
             <a:spAutoFit/>
           </a:bodyPr>
           <a:lstStyle/>
@@ -5616,16 +5708,52 @@
               </a:lnSpc>
             </a:pPr>
             <a:r>
-              <a:rPr lang="en-US" sz="1800">
+              <a:rPr lang="en-US" sz="1800" b="1" dirty="0" err="1">
                 <a:solidFill>
                   <a:srgbClr val="FFFFFF"/>
                 </a:solidFill>
-                <a:latin typeface="字由点字典黑 1" panose="00020600040101010101" charset="-122"/>
-                <a:ea typeface="字由点字典黑 1" panose="00020600040101010101" charset="-122"/>
+                <a:latin typeface="Times New Roman" panose="02020603050405020304" pitchFamily="18" charset="0"/>
+                <a:ea typeface="黑体" panose="02010609060101010101" pitchFamily="49" charset="-122"/>
+                <a:cs typeface="Times New Roman" panose="02020603050405020304" pitchFamily="18" charset="0"/>
+                <a:sym typeface="字由点字典黑 1" panose="00020600040101010101" charset="-122"/>
+              </a:rPr>
+              <a:t>Github</a:t>
+            </a:r>
+            <a:r>
+              <a:rPr lang="en-US" sz="1800" b="1" dirty="0" err="1">
+                <a:solidFill>
+                  <a:srgbClr val="FFFFFF"/>
+                </a:solidFill>
+                <a:latin typeface="黑体" panose="02010609060101010101" pitchFamily="49" charset="-122"/>
+                <a:ea typeface="黑体" panose="02010609060101010101" pitchFamily="49" charset="-122"/>
                 <a:cs typeface="字由点字典黑 1" panose="00020600040101010101" charset="-122"/>
                 <a:sym typeface="字由点字典黑 1" panose="00020600040101010101" charset="-122"/>
               </a:rPr>
-              <a:t>Github 主页：</a:t>
+              <a:t>主页</a:t>
+            </a:r>
+            <a:r>
+              <a:rPr lang="zh-CN" altLang="en-US" b="1" dirty="0">
+                <a:solidFill>
+                  <a:srgbClr val="FFFFFF"/>
+                </a:solidFill>
+                <a:latin typeface="黑体" panose="02010609060101010101" pitchFamily="49" charset="-122"/>
+                <a:ea typeface="黑体" panose="02010609060101010101" pitchFamily="49" charset="-122"/>
+                <a:cs typeface="字由点字典黑 1" panose="00020600040101010101" charset="-122"/>
+                <a:sym typeface="字由点字典黑 1" panose="00020600040101010101" charset="-122"/>
+              </a:rPr>
+              <a:t>：</a:t>
+            </a:r>
+            <a:r>
+              <a:rPr lang="en-US" sz="1800" b="1" dirty="0">
+                <a:solidFill>
+                  <a:srgbClr val="FFFFFF"/>
+                </a:solidFill>
+                <a:latin typeface="Times New Roman" panose="02020603050405020304" pitchFamily="18" charset="0"/>
+                <a:ea typeface="黑体" panose="02010609060101010101" pitchFamily="49" charset="-122"/>
+                <a:cs typeface="Times New Roman" panose="02020603050405020304" pitchFamily="18" charset="0"/>
+                <a:sym typeface="字由点字典黑 1" panose="00020600040101010101" charset="-122"/>
+              </a:rPr>
+              <a:t>https://github.com/BeatGene/Bioinformatics_Agent</a:t>
             </a:r>
           </a:p>
         </p:txBody>
@@ -5657,7 +5785,7 @@
               </a:lnSpc>
             </a:pPr>
             <a:r>
-              <a:rPr lang="en-US" sz="2295" spc="-34" dirty="0" err="1">
+              <a:rPr lang="en-US" sz="2295" b="1" spc="-34" dirty="0" err="1">
                 <a:solidFill>
                   <a:srgbClr val="FFFFFF"/>
                 </a:solidFill>
@@ -5681,7 +5809,7 @@
               <a:t> </a:t>
             </a:r>
             <a:r>
-              <a:rPr lang="en-US" sz="2295" spc="-34" dirty="0">
+              <a:rPr lang="en-US" sz="2295" b="1" spc="-34" dirty="0">
                 <a:solidFill>
                   <a:srgbClr val="FFFFFF"/>
                 </a:solidFill>
@@ -5703,7 +5831,7 @@
         </p:nvSpPr>
         <p:spPr>
           <a:xfrm>
-            <a:off x="555520" y="3476944"/>
+            <a:off x="380050" y="3477140"/>
             <a:ext cx="14239980" cy="1382814"/>
           </a:xfrm>
           <a:prstGeom prst="rect">
@@ -6090,9 +6218,9 @@
         <p:grpSpPr>
           <a:xfrm>
             <a:off x="484545" y="6131091"/>
-            <a:ext cx="4240621" cy="1032763"/>
+            <a:ext cx="4240621" cy="1884240"/>
             <a:chOff x="0" y="-76200"/>
-            <a:chExt cx="5654162" cy="1377017"/>
+            <a:chExt cx="5654162" cy="2512320"/>
           </a:xfrm>
         </p:grpSpPr>
         <p:sp>
@@ -6122,17 +6250,26 @@
                 </a:lnSpc>
               </a:pPr>
               <a:r>
-                <a:rPr lang="en-US" sz="1800" spc="-27">
+                <a:rPr lang="en-US" sz="1800" b="1" spc="-27" dirty="0" err="1">
                   <a:solidFill>
                     <a:srgbClr val="000000"/>
                   </a:solidFill>
-                  <a:latin typeface="字由点字典黑 2 Bold" panose="00020600040101010101" charset="-122"/>
-                  <a:ea typeface="字由点字典黑 2 Bold" panose="00020600040101010101" charset="-122"/>
+                  <a:latin typeface="黑体" panose="02010609060101010101" pitchFamily="49" charset="-122"/>
+                  <a:ea typeface="黑体" panose="02010609060101010101" pitchFamily="49" charset="-122"/>
                   <a:cs typeface="字由点字典黑 2 Bold" panose="00020600040101010101" charset="-122"/>
                   <a:sym typeface="字由点字典黑 2 Bold" panose="00020600040101010101" charset="-122"/>
                 </a:rPr>
                 <a:t>选题背景及意义</a:t>
               </a:r>
+              <a:endParaRPr lang="en-US" sz="1800" b="1" spc="-27" dirty="0">
+                <a:solidFill>
+                  <a:srgbClr val="000000"/>
+                </a:solidFill>
+                <a:latin typeface="黑体" panose="02010609060101010101" pitchFamily="49" charset="-122"/>
+                <a:ea typeface="黑体" panose="02010609060101010101" pitchFamily="49" charset="-122"/>
+                <a:cs typeface="字由点字典黑 2 Bold" panose="00020600040101010101" charset="-122"/>
+                <a:sym typeface="字由点字典黑 2 Bold" panose="00020600040101010101" charset="-122"/>
+              </a:endParaRPr>
             </a:p>
           </p:txBody>
         </p:sp>
@@ -6145,7 +6282,7 @@
           <p:spPr>
             <a:xfrm>
               <a:off x="0" y="592368"/>
-              <a:ext cx="5654162" cy="708449"/>
+              <a:ext cx="5654162" cy="1843752"/>
             </a:xfrm>
             <a:prstGeom prst="rect">
               <a:avLst/>
@@ -6157,80 +6294,60 @@
             </a:bodyPr>
             <a:lstStyle/>
             <a:p>
-              <a:pPr marL="0" lvl="0" indent="0" algn="just">
+              <a:pPr lvl="0" algn="just">
                 <a:lnSpc>
                   <a:spcPts val="2240"/>
                 </a:lnSpc>
               </a:pPr>
               <a:r>
-                <a:rPr lang="en-US" sz="1400" dirty="0" err="1">
+                <a:rPr lang="zh-CN" altLang="en-US" sz="1400" dirty="0">
                   <a:solidFill>
                     <a:srgbClr val="000000"/>
                   </a:solidFill>
-                  <a:latin typeface="字由点字典黑 2 Light" panose="00020600040101010101" charset="-122"/>
-                  <a:ea typeface="字由点字典黑 2 Light" panose="00020600040101010101" charset="-122"/>
+                  <a:latin typeface="黑体" panose="02010609060101010101" pitchFamily="49" charset="-122"/>
+                  <a:ea typeface="黑体" panose="02010609060101010101" pitchFamily="49" charset="-122"/>
                   <a:cs typeface="字由点字典黑 2 Light" panose="00020600040101010101" charset="-122"/>
                   <a:sym typeface="字由点字典黑 2 Light" panose="00020600040101010101" charset="-122"/>
                 </a:rPr>
-                <a:t>说明项目选题的背景、现实需求或应用痛点，阐述开展本项目的必要性与意义</a:t>
+                <a:t>生物医学文献数量庞大且增长迅速，科研人员在文献调研中面临三大痛点：全文阅读成本高、关键信息难定位、跨文献对比困难。因此，开发一款能够理解自然语言意图、自动化执行文献检索与结构化解析的</a:t>
               </a:r>
               <a:r>
-                <a:rPr lang="en-US" sz="1400" dirty="0">
+                <a:rPr lang="en-US" altLang="zh-CN" sz="1400" dirty="0">
                   <a:solidFill>
                     <a:srgbClr val="000000"/>
                   </a:solidFill>
-                  <a:latin typeface="字由点字典黑 2 Light" panose="00020600040101010101" charset="-122"/>
-                  <a:ea typeface="字由点字典黑 2 Light" panose="00020600040101010101" charset="-122"/>
+                  <a:latin typeface="Times New Roman" panose="02020603050405020304" pitchFamily="18" charset="0"/>
+                  <a:ea typeface="黑体" panose="02010609060101010101" pitchFamily="49" charset="-122"/>
+                  <a:cs typeface="Times New Roman" panose="02020603050405020304" pitchFamily="18" charset="0"/>
+                  <a:sym typeface="字由点字典黑 2 Light" panose="00020600040101010101" charset="-122"/>
+                </a:rPr>
+                <a:t>AI Agent</a:t>
+              </a:r>
+              <a:r>
+                <a:rPr lang="zh-CN" altLang="en-US" sz="1400" dirty="0">
+                  <a:solidFill>
+                    <a:srgbClr val="000000"/>
+                  </a:solidFill>
+                  <a:latin typeface="黑体" panose="02010609060101010101" pitchFamily="49" charset="-122"/>
+                  <a:ea typeface="黑体" panose="02010609060101010101" pitchFamily="49" charset="-122"/>
                   <a:cs typeface="字由点字典黑 2 Light" panose="00020600040101010101" charset="-122"/>
                   <a:sym typeface="字由点字典黑 2 Light" panose="00020600040101010101" charset="-122"/>
                 </a:rPr>
-                <a:t>。</a:t>
+                <a:t>具有切实的科研赋能价值。</a:t>
               </a:r>
+              <a:endParaRPr lang="en-US" sz="1400" dirty="0">
+                <a:solidFill>
+                  <a:srgbClr val="000000"/>
+                </a:solidFill>
+                <a:latin typeface="黑体" panose="02010609060101010101" pitchFamily="49" charset="-122"/>
+                <a:ea typeface="黑体" panose="02010609060101010101" pitchFamily="49" charset="-122"/>
+                <a:cs typeface="字由点字典黑 2 Light" panose="00020600040101010101" charset="-122"/>
+                <a:sym typeface="字由点字典黑 2 Light" panose="00020600040101010101" charset="-122"/>
+              </a:endParaRPr>
             </a:p>
           </p:txBody>
         </p:sp>
       </p:grpSp>
-      <p:sp>
-        <p:nvSpPr>
-          <p:cNvPr id="77" name="TextBox 77"/>
-          <p:cNvSpPr txBox="1"/>
-          <p:nvPr/>
-        </p:nvSpPr>
-        <p:spPr>
-          <a:xfrm>
-            <a:off x="5614106" y="15041890"/>
-            <a:ext cx="3366019" cy="271780"/>
-          </a:xfrm>
-          <a:prstGeom prst="rect">
-            <a:avLst/>
-          </a:prstGeom>
-        </p:spPr>
-        <p:txBody>
-          <a:bodyPr lIns="0" tIns="0" rIns="0" bIns="0" rtlCol="0" anchor="t">
-            <a:spAutoFit/>
-          </a:bodyPr>
-          <a:lstStyle/>
-          <a:p>
-            <a:pPr marL="0" lvl="0" indent="0" algn="ctr">
-              <a:lnSpc>
-                <a:spcPts val="2240"/>
-              </a:lnSpc>
-            </a:pPr>
-            <a:r>
-              <a:rPr lang="en-US" sz="1400">
-                <a:solidFill>
-                  <a:srgbClr val="000000"/>
-                </a:solidFill>
-                <a:latin typeface="字由点字典黑 2 Light" panose="00020600040101010101" charset="-122"/>
-                <a:ea typeface="字由点字典黑 2 Light" panose="00020600040101010101" charset="-122"/>
-                <a:cs typeface="字由点字典黑 2 Light" panose="00020600040101010101" charset="-122"/>
-                <a:sym typeface="字由点字典黑 2 Light" panose="00020600040101010101" charset="-122"/>
-              </a:rPr>
-              <a:t>【消融实验等图表】</a:t>
-            </a:r>
-          </a:p>
-        </p:txBody>
-      </p:sp>
       <p:grpSp>
         <p:nvGrpSpPr>
           <p:cNvPr id="78" name="Group 78"/>
@@ -6239,10 +6356,10 @@
         </p:nvGrpSpPr>
         <p:grpSpPr>
           <a:xfrm>
-            <a:off x="484545" y="8347811"/>
-            <a:ext cx="4170620" cy="685417"/>
-            <a:chOff x="0" y="0"/>
-            <a:chExt cx="5560827" cy="913889"/>
+            <a:off x="484545" y="8290661"/>
+            <a:ext cx="4170620" cy="2716656"/>
+            <a:chOff x="0" y="-76200"/>
+            <a:chExt cx="5560827" cy="3622206"/>
           </a:xfrm>
         </p:grpSpPr>
         <p:sp>
@@ -6254,7 +6371,7 @@
           <p:spPr>
             <a:xfrm>
               <a:off x="0" y="-76200"/>
-              <a:ext cx="5560827" cy="418253"/>
+              <a:ext cx="5560827" cy="395321"/>
             </a:xfrm>
             <a:prstGeom prst="rect">
               <a:avLst/>
@@ -6272,17 +6389,26 @@
                 </a:lnSpc>
               </a:pPr>
               <a:r>
-                <a:rPr lang="en-US" sz="1700" spc="-25">
+                <a:rPr lang="en-US" sz="1700" b="1" spc="-25" dirty="0" err="1">
                   <a:solidFill>
                     <a:srgbClr val="000000"/>
                   </a:solidFill>
-                  <a:latin typeface="字由点字典黑 2 Bold" panose="00020600040101010101" charset="-122"/>
-                  <a:ea typeface="字由点字典黑 2 Bold" panose="00020600040101010101" charset="-122"/>
+                  <a:latin typeface="黑体" panose="02010609060101010101" pitchFamily="49" charset="-122"/>
+                  <a:ea typeface="黑体" panose="02010609060101010101" pitchFamily="49" charset="-122"/>
                   <a:cs typeface="字由点字典黑 2 Bold" panose="00020600040101010101" charset="-122"/>
                   <a:sym typeface="字由点字典黑 2 Bold" panose="00020600040101010101" charset="-122"/>
                 </a:rPr>
                 <a:t>应用场景</a:t>
               </a:r>
+              <a:endParaRPr lang="en-US" sz="1700" b="1" spc="-25" dirty="0">
+                <a:solidFill>
+                  <a:srgbClr val="000000"/>
+                </a:solidFill>
+                <a:latin typeface="黑体" panose="02010609060101010101" pitchFamily="49" charset="-122"/>
+                <a:ea typeface="黑体" panose="02010609060101010101" pitchFamily="49" charset="-122"/>
+                <a:cs typeface="字由点字典黑 2 Bold" panose="00020600040101010101" charset="-122"/>
+                <a:sym typeface="字由点字典黑 2 Bold" panose="00020600040101010101" charset="-122"/>
+              </a:endParaRPr>
             </a:p>
           </p:txBody>
         </p:sp>
@@ -6295,7 +6421,7 @@
           <p:spPr>
             <a:xfrm>
               <a:off x="0" y="573741"/>
-              <a:ext cx="5560827" cy="340149"/>
+              <a:ext cx="5560827" cy="2972265"/>
             </a:xfrm>
             <a:prstGeom prst="rect">
               <a:avLst/>
@@ -6307,22 +6433,168 @@
             </a:bodyPr>
             <a:lstStyle/>
             <a:p>
-              <a:pPr marL="0" lvl="0" indent="0" algn="just">
+              <a:pPr lvl="0" algn="just">
                 <a:lnSpc>
                   <a:spcPts val="2240"/>
                 </a:lnSpc>
               </a:pPr>
               <a:r>
-                <a:rPr lang="en-US" sz="1400">
+                <a:rPr lang="en-US" altLang="zh-CN" sz="1400" dirty="0">
                   <a:solidFill>
                     <a:srgbClr val="000000"/>
                   </a:solidFill>
-                  <a:latin typeface="字由点字典黑 2 Light" panose="00020600040101010101" charset="-122"/>
-                  <a:ea typeface="字由点字典黑 2 Light" panose="00020600040101010101" charset="-122"/>
+                  <a:latin typeface="黑体" panose="02010609060101010101" pitchFamily="49" charset="-122"/>
+                  <a:ea typeface="黑体" panose="02010609060101010101" pitchFamily="49" charset="-122"/>
                   <a:cs typeface="字由点字典黑 2 Light" panose="00020600040101010101" charset="-122"/>
                   <a:sym typeface="字由点字典黑 2 Light" panose="00020600040101010101" charset="-122"/>
                 </a:rPr>
-                <a:t>项目适用的具体场景、目标用户或潜在应用方向。</a:t>
+                <a:t>-</a:t>
+              </a:r>
+              <a:r>
+                <a:rPr lang="zh-CN" altLang="en-US" sz="1400" dirty="0">
+                  <a:solidFill>
+                    <a:srgbClr val="000000"/>
+                  </a:solidFill>
+                  <a:latin typeface="黑体" panose="02010609060101010101" pitchFamily="49" charset="-122"/>
+                  <a:ea typeface="黑体" panose="02010609060101010101" pitchFamily="49" charset="-122"/>
+                  <a:cs typeface="字由点字典黑 2 Light" panose="00020600040101010101" charset="-122"/>
+                  <a:sym typeface="字由点字典黑 2 Light" panose="00020600040101010101" charset="-122"/>
+                </a:rPr>
+                <a:t>目标用户：生物医学领域科研人员、硕士</a:t>
+              </a:r>
+              <a:r>
+                <a:rPr lang="en-US" altLang="zh-CN" sz="1400" dirty="0">
+                  <a:solidFill>
+                    <a:srgbClr val="000000"/>
+                  </a:solidFill>
+                  <a:latin typeface="黑体" panose="02010609060101010101" pitchFamily="49" charset="-122"/>
+                  <a:ea typeface="黑体" panose="02010609060101010101" pitchFamily="49" charset="-122"/>
+                  <a:cs typeface="字由点字典黑 2 Light" panose="00020600040101010101" charset="-122"/>
+                  <a:sym typeface="字由点字典黑 2 Light" panose="00020600040101010101" charset="-122"/>
+                </a:rPr>
+                <a:t>/</a:t>
+              </a:r>
+              <a:r>
+                <a:rPr lang="zh-CN" altLang="en-US" sz="1400" dirty="0">
+                  <a:solidFill>
+                    <a:srgbClr val="000000"/>
+                  </a:solidFill>
+                  <a:latin typeface="黑体" panose="02010609060101010101" pitchFamily="49" charset="-122"/>
+                  <a:ea typeface="黑体" panose="02010609060101010101" pitchFamily="49" charset="-122"/>
+                  <a:cs typeface="字由点字典黑 2 Light" panose="00020600040101010101" charset="-122"/>
+                  <a:sym typeface="字由点字典黑 2 Light" panose="00020600040101010101" charset="-122"/>
+                </a:rPr>
+                <a:t>博士研究生、临床医生、药企研发人员。</a:t>
+              </a:r>
+            </a:p>
+            <a:p>
+              <a:pPr lvl="0" algn="just">
+                <a:lnSpc>
+                  <a:spcPts val="2240"/>
+                </a:lnSpc>
+              </a:pPr>
+              <a:r>
+                <a:rPr lang="en-US" altLang="zh-CN" sz="1400" dirty="0">
+                  <a:solidFill>
+                    <a:srgbClr val="000000"/>
+                  </a:solidFill>
+                  <a:latin typeface="黑体" panose="02010609060101010101" pitchFamily="49" charset="-122"/>
+                  <a:ea typeface="黑体" panose="02010609060101010101" pitchFamily="49" charset="-122"/>
+                  <a:cs typeface="字由点字典黑 2 Light" panose="00020600040101010101" charset="-122"/>
+                  <a:sym typeface="字由点字典黑 2 Light" panose="00020600040101010101" charset="-122"/>
+                </a:rPr>
+                <a:t>-</a:t>
+              </a:r>
+              <a:r>
+                <a:rPr lang="zh-CN" altLang="en-US" sz="1400" dirty="0">
+                  <a:solidFill>
+                    <a:srgbClr val="000000"/>
+                  </a:solidFill>
+                  <a:latin typeface="黑体" panose="02010609060101010101" pitchFamily="49" charset="-122"/>
+                  <a:ea typeface="黑体" panose="02010609060101010101" pitchFamily="49" charset="-122"/>
+                  <a:cs typeface="字由点字典黑 2 Light" panose="00020600040101010101" charset="-122"/>
+                  <a:sym typeface="字由点字典黑 2 Light" panose="00020600040101010101" charset="-122"/>
+                </a:rPr>
+                <a:t>典型场景：系统性文献综述撰写、临床证据快速检索与评估、新药靶点调研、</a:t>
+              </a:r>
+              <a:r>
+                <a:rPr lang="en-US" altLang="zh-CN" sz="1400" dirty="0">
+                  <a:solidFill>
+                    <a:srgbClr val="000000"/>
+                  </a:solidFill>
+                  <a:latin typeface="Times New Roman" panose="02020603050405020304" pitchFamily="18" charset="0"/>
+                  <a:ea typeface="黑体" panose="02010609060101010101" pitchFamily="49" charset="-122"/>
+                  <a:cs typeface="Times New Roman" panose="02020603050405020304" pitchFamily="18" charset="0"/>
+                  <a:sym typeface="字由点字典黑 2 Light" panose="00020600040101010101" charset="-122"/>
+                </a:rPr>
+                <a:t>Meta</a:t>
+              </a:r>
+              <a:r>
+                <a:rPr lang="zh-CN" altLang="en-US" sz="1400" dirty="0">
+                  <a:solidFill>
+                    <a:srgbClr val="000000"/>
+                  </a:solidFill>
+                  <a:latin typeface="黑体" panose="02010609060101010101" pitchFamily="49" charset="-122"/>
+                  <a:ea typeface="黑体" panose="02010609060101010101" pitchFamily="49" charset="-122"/>
+                  <a:cs typeface="字由点字典黑 2 Light" panose="00020600040101010101" charset="-122"/>
+                  <a:sym typeface="字由点字典黑 2 Light" panose="00020600040101010101" charset="-122"/>
+                </a:rPr>
+                <a:t>分析文献筛选、跨适应症治疗方案对比。</a:t>
+              </a:r>
+            </a:p>
+            <a:p>
+              <a:pPr lvl="0" algn="just">
+                <a:lnSpc>
+                  <a:spcPts val="2240"/>
+                </a:lnSpc>
+              </a:pPr>
+              <a:r>
+                <a:rPr lang="en-US" altLang="zh-CN" sz="1400" dirty="0">
+                  <a:solidFill>
+                    <a:srgbClr val="000000"/>
+                  </a:solidFill>
+                  <a:latin typeface="黑体" panose="02010609060101010101" pitchFamily="49" charset="-122"/>
+                  <a:ea typeface="黑体" panose="02010609060101010101" pitchFamily="49" charset="-122"/>
+                  <a:cs typeface="字由点字典黑 2 Light" panose="00020600040101010101" charset="-122"/>
+                  <a:sym typeface="字由点字典黑 2 Light" panose="00020600040101010101" charset="-122"/>
+                </a:rPr>
+                <a:t>-</a:t>
+              </a:r>
+              <a:r>
+                <a:rPr lang="zh-CN" altLang="en-US" sz="1400" dirty="0">
+                  <a:solidFill>
+                    <a:srgbClr val="000000"/>
+                  </a:solidFill>
+                  <a:latin typeface="黑体" panose="02010609060101010101" pitchFamily="49" charset="-122"/>
+                  <a:ea typeface="黑体" panose="02010609060101010101" pitchFamily="49" charset="-122"/>
+                  <a:cs typeface="字由点字典黑 2 Light" panose="00020600040101010101" charset="-122"/>
+                  <a:sym typeface="字由点字典黑 2 Light" panose="00020600040101010101" charset="-122"/>
+                </a:rPr>
+                <a:t>潜在应用方向：可扩展至循证医学决策支持、药物不良反应文献监测、基因</a:t>
+              </a:r>
+              <a:r>
+                <a:rPr lang="en-US" altLang="zh-CN" sz="1400" dirty="0">
+                  <a:solidFill>
+                    <a:srgbClr val="000000"/>
+                  </a:solidFill>
+                  <a:latin typeface="黑体" panose="02010609060101010101" pitchFamily="49" charset="-122"/>
+                  <a:ea typeface="黑体" panose="02010609060101010101" pitchFamily="49" charset="-122"/>
+                  <a:cs typeface="字由点字典黑 2 Light" panose="00020600040101010101" charset="-122"/>
+                  <a:sym typeface="字由点字典黑 2 Light" panose="00020600040101010101" charset="-122"/>
+                </a:rPr>
+                <a:t>-</a:t>
+              </a:r>
+              <a:r>
+                <a:rPr lang="zh-CN" altLang="en-US" sz="1400" dirty="0">
+                  <a:solidFill>
+                    <a:srgbClr val="000000"/>
+                  </a:solidFill>
+                  <a:latin typeface="黑体" panose="02010609060101010101" pitchFamily="49" charset="-122"/>
+                  <a:ea typeface="黑体" panose="02010609060101010101" pitchFamily="49" charset="-122"/>
+                  <a:cs typeface="字由点字典黑 2 Light" panose="00020600040101010101" charset="-122"/>
+                  <a:sym typeface="字由点字典黑 2 Light" panose="00020600040101010101" charset="-122"/>
+                </a:rPr>
+                <a:t>疾病关联知识图谱自动构建等</a:t>
               </a:r>
             </a:p>
           </p:txBody>
@@ -6364,31 +6636,7 @@
                 <a:cs typeface="字由点字典黑 2 Medium Italics" panose="00020600040101010101" charset="-122"/>
                 <a:sym typeface="字由点字典黑 2 Medium Italics" panose="00020600040101010101" charset="-122"/>
               </a:rPr>
-              <a:t>复旦大学</a:t>
-            </a:r>
-            <a:r>
-              <a:rPr lang="en-US" sz="2000" i="1" spc="86" dirty="0">
-                <a:solidFill>
-                  <a:srgbClr val="FFFFFF"/>
-                </a:solidFill>
-                <a:latin typeface="黑体" panose="02010609060101010101" pitchFamily="49" charset="-122"/>
-                <a:ea typeface="黑体" panose="02010609060101010101" pitchFamily="49" charset="-122"/>
-                <a:cs typeface="字由点字典黑 2 Medium Italics" panose="00020600040101010101" charset="-122"/>
-                <a:sym typeface="字由点字典黑 2 Medium Italics" panose="00020600040101010101" charset="-122"/>
-              </a:rPr>
-              <a:t>“ </a:t>
-            </a:r>
-            <a:r>
-              <a:rPr lang="en-US" sz="2000" i="1" spc="86" dirty="0" err="1">
-                <a:solidFill>
-                  <a:srgbClr val="FFFFFF"/>
-                </a:solidFill>
-                <a:latin typeface="黑体" panose="02010609060101010101" pitchFamily="49" charset="-122"/>
-                <a:ea typeface="黑体" panose="02010609060101010101" pitchFamily="49" charset="-122"/>
-                <a:cs typeface="字由点字典黑 2 Medium Italics" panose="00020600040101010101" charset="-122"/>
-                <a:sym typeface="字由点字典黑 2 Medium Italics" panose="00020600040101010101" charset="-122"/>
-              </a:rPr>
-              <a:t>未来智造（</a:t>
+              <a:t>复旦大学“未来智造（</a:t>
             </a:r>
             <a:r>
               <a:rPr lang="en-US" sz="2000" i="1" spc="86" dirty="0" err="1">
@@ -6482,10 +6730,10 @@
         </p:nvGrpSpPr>
         <p:grpSpPr>
           <a:xfrm>
-            <a:off x="5230470" y="6188241"/>
-            <a:ext cx="4412630" cy="975612"/>
-            <a:chOff x="0" y="0"/>
-            <a:chExt cx="5883506" cy="1300816"/>
+            <a:off x="5230470" y="6131091"/>
+            <a:ext cx="4412630" cy="1319983"/>
+            <a:chOff x="0" y="-76200"/>
+            <a:chExt cx="5883506" cy="1759977"/>
           </a:xfrm>
         </p:grpSpPr>
         <p:sp>
@@ -6515,17 +6763,26 @@
                 </a:lnSpc>
               </a:pPr>
               <a:r>
-                <a:rPr lang="en-US" sz="1800" spc="-27">
+                <a:rPr lang="en-US" sz="1800" b="1" spc="-27" dirty="0" err="1">
                   <a:solidFill>
                     <a:srgbClr val="000000"/>
                   </a:solidFill>
-                  <a:latin typeface="字由点字典黑 2 Bold" panose="00020600040101010101" charset="-122"/>
-                  <a:ea typeface="字由点字典黑 2 Bold" panose="00020600040101010101" charset="-122"/>
+                  <a:latin typeface="黑体" panose="02010609060101010101" pitchFamily="49" charset="-122"/>
+                  <a:ea typeface="黑体" panose="02010609060101010101" pitchFamily="49" charset="-122"/>
                   <a:cs typeface="字由点字典黑 2 Bold" panose="00020600040101010101" charset="-122"/>
                   <a:sym typeface="字由点字典黑 2 Bold" panose="00020600040101010101" charset="-122"/>
                 </a:rPr>
                 <a:t>数据来源</a:t>
               </a:r>
+              <a:endParaRPr lang="en-US" sz="1800" b="1" spc="-27" dirty="0">
+                <a:solidFill>
+                  <a:srgbClr val="000000"/>
+                </a:solidFill>
+                <a:latin typeface="黑体" panose="02010609060101010101" pitchFamily="49" charset="-122"/>
+                <a:ea typeface="黑体" panose="02010609060101010101" pitchFamily="49" charset="-122"/>
+                <a:cs typeface="字由点字典黑 2 Bold" panose="00020600040101010101" charset="-122"/>
+                <a:sym typeface="字由点字典黑 2 Bold" panose="00020600040101010101" charset="-122"/>
+              </a:endParaRPr>
             </a:p>
           </p:txBody>
         </p:sp>
@@ -6538,7 +6795,7 @@
           <p:spPr>
             <a:xfrm>
               <a:off x="0" y="592368"/>
-              <a:ext cx="5883506" cy="708449"/>
+              <a:ext cx="5883506" cy="1091409"/>
             </a:xfrm>
             <a:prstGeom prst="rect">
               <a:avLst/>
@@ -6550,23 +6807,104 @@
             </a:bodyPr>
             <a:lstStyle/>
             <a:p>
-              <a:pPr marL="0" lvl="0" indent="0" algn="just">
+              <a:pPr lvl="0" algn="just">
                 <a:lnSpc>
                   <a:spcPts val="2240"/>
                 </a:lnSpc>
               </a:pPr>
               <a:r>
-                <a:rPr lang="en-US" sz="1400">
+                <a:rPr lang="zh-CN" altLang="en-US" sz="1400" dirty="0">
                   <a:solidFill>
                     <a:srgbClr val="000000"/>
                   </a:solidFill>
-                  <a:latin typeface="字由点字典黑 2 Light" panose="00020600040101010101" charset="-122"/>
-                  <a:ea typeface="字由点字典黑 2 Light" panose="00020600040101010101" charset="-122"/>
+                  <a:latin typeface="黑体" panose="02010609060101010101" pitchFamily="49" charset="-122"/>
+                  <a:ea typeface="黑体" panose="02010609060101010101" pitchFamily="49" charset="-122"/>
                   <a:cs typeface="字由点字典黑 2 Light" panose="00020600040101010101" charset="-122"/>
                   <a:sym typeface="字由点字典黑 2 Light" panose="00020600040101010101" charset="-122"/>
                 </a:rPr>
-                <a:t>项目所使用的数据、知识库、文档、接口或其他信息来源，并简要说明数据的获取与处理方式。</a:t>
+                <a:t>项目数据以</a:t>
               </a:r>
+              <a:r>
+                <a:rPr lang="en-US" altLang="zh-CN" sz="1400" dirty="0">
+                  <a:solidFill>
+                    <a:srgbClr val="000000"/>
+                  </a:solidFill>
+                  <a:latin typeface="Times New Roman" panose="02020603050405020304" pitchFamily="18" charset="0"/>
+                  <a:ea typeface="黑体" panose="02010609060101010101" pitchFamily="49" charset="-122"/>
+                  <a:cs typeface="Times New Roman" panose="02020603050405020304" pitchFamily="18" charset="0"/>
+                  <a:sym typeface="字由点字典黑 2 Light" panose="00020600040101010101" charset="-122"/>
+                </a:rPr>
+                <a:t>PubMed</a:t>
+              </a:r>
+              <a:r>
+                <a:rPr lang="zh-CN" altLang="en-US" sz="1400" dirty="0">
+                  <a:solidFill>
+                    <a:srgbClr val="000000"/>
+                  </a:solidFill>
+                  <a:latin typeface="黑体" panose="02010609060101010101" pitchFamily="49" charset="-122"/>
+                  <a:ea typeface="黑体" panose="02010609060101010101" pitchFamily="49" charset="-122"/>
+                  <a:cs typeface="字由点字典黑 2 Light" panose="00020600040101010101" charset="-122"/>
+                  <a:sym typeface="字由点字典黑 2 Light" panose="00020600040101010101" charset="-122"/>
+                </a:rPr>
+                <a:t>学术文献数据库为核心。</a:t>
+              </a:r>
+              <a:r>
+                <a:rPr lang="en-US" altLang="zh-CN" sz="1400" dirty="0">
+                  <a:solidFill>
+                    <a:srgbClr val="000000"/>
+                  </a:solidFill>
+                  <a:latin typeface="Times New Roman" panose="02020603050405020304" pitchFamily="18" charset="0"/>
+                  <a:ea typeface="黑体" panose="02010609060101010101" pitchFamily="49" charset="-122"/>
+                  <a:cs typeface="Times New Roman" panose="02020603050405020304" pitchFamily="18" charset="0"/>
+                  <a:sym typeface="字由点字典黑 2 Light" panose="00020600040101010101" charset="-122"/>
+                </a:rPr>
+                <a:t>PDF</a:t>
+              </a:r>
+              <a:r>
+                <a:rPr lang="zh-CN" altLang="en-US" sz="1400" dirty="0">
+                  <a:solidFill>
+                    <a:srgbClr val="000000"/>
+                  </a:solidFill>
+                  <a:latin typeface="黑体" panose="02010609060101010101" pitchFamily="49" charset="-122"/>
+                  <a:ea typeface="黑体" panose="02010609060101010101" pitchFamily="49" charset="-122"/>
+                  <a:cs typeface="字由点字典黑 2 Light" panose="00020600040101010101" charset="-122"/>
+                  <a:sym typeface="字由点字典黑 2 Light" panose="00020600040101010101" charset="-122"/>
+                </a:rPr>
+                <a:t>全文解析采用</a:t>
+              </a:r>
+              <a:r>
+                <a:rPr lang="en-US" altLang="zh-CN" sz="1400" dirty="0" err="1">
+                  <a:solidFill>
+                    <a:srgbClr val="000000"/>
+                  </a:solidFill>
+                  <a:latin typeface="Times New Roman" panose="02020603050405020304" pitchFamily="18" charset="0"/>
+                  <a:ea typeface="黑体" panose="02010609060101010101" pitchFamily="49" charset="-122"/>
+                  <a:cs typeface="Times New Roman" panose="02020603050405020304" pitchFamily="18" charset="0"/>
+                  <a:sym typeface="字由点字典黑 2 Light" panose="00020600040101010101" charset="-122"/>
+                </a:rPr>
+                <a:t>MinerU+PyMuPDF</a:t>
+              </a:r>
+              <a:r>
+                <a:rPr lang="zh-CN" altLang="en-US" sz="1400" dirty="0">
+                  <a:solidFill>
+                    <a:srgbClr val="000000"/>
+                  </a:solidFill>
+                  <a:latin typeface="黑体" panose="02010609060101010101" pitchFamily="49" charset="-122"/>
+                  <a:ea typeface="黑体" panose="02010609060101010101" pitchFamily="49" charset="-122"/>
+                  <a:cs typeface="字由点字典黑 2 Light" panose="00020600040101010101" charset="-122"/>
+                  <a:sym typeface="字由点字典黑 2 Light" panose="00020600040101010101" charset="-122"/>
+                </a:rPr>
+                <a:t>双引擎方案。辅助知识层包括自建的生物医学术语词典。</a:t>
+              </a:r>
+              <a:endParaRPr lang="en-US" sz="1400" dirty="0">
+                <a:solidFill>
+                  <a:srgbClr val="000000"/>
+                </a:solidFill>
+                <a:latin typeface="黑体" panose="02010609060101010101" pitchFamily="49" charset="-122"/>
+                <a:ea typeface="黑体" panose="02010609060101010101" pitchFamily="49" charset="-122"/>
+                <a:cs typeface="字由点字典黑 2 Light" panose="00020600040101010101" charset="-122"/>
+                <a:sym typeface="字由点字典黑 2 Light" panose="00020600040101010101" charset="-122"/>
+              </a:endParaRPr>
             </a:p>
           </p:txBody>
         </p:sp>
@@ -6579,10 +6917,10 @@
         </p:nvGrpSpPr>
         <p:grpSpPr>
           <a:xfrm>
-            <a:off x="5230470" y="8332135"/>
-            <a:ext cx="4412630" cy="975612"/>
-            <a:chOff x="0" y="0"/>
-            <a:chExt cx="5883506" cy="1300816"/>
+            <a:off x="5230470" y="8274985"/>
+            <a:ext cx="4412630" cy="1317227"/>
+            <a:chOff x="0" y="-76200"/>
+            <a:chExt cx="5883506" cy="1756302"/>
           </a:xfrm>
         </p:grpSpPr>
         <p:sp>
@@ -6612,17 +6950,26 @@
                 </a:lnSpc>
               </a:pPr>
               <a:r>
-                <a:rPr lang="en-US" sz="1800" spc="-27">
+                <a:rPr lang="en-US" sz="1800" b="1" spc="-27" dirty="0" err="1">
                   <a:solidFill>
                     <a:srgbClr val="000000"/>
                   </a:solidFill>
-                  <a:latin typeface="字由点字典黑 2 Bold" panose="00020600040101010101" charset="-122"/>
-                  <a:ea typeface="字由点字典黑 2 Bold" panose="00020600040101010101" charset="-122"/>
+                  <a:latin typeface="黑体" panose="02010609060101010101" pitchFamily="49" charset="-122"/>
+                  <a:ea typeface="黑体" panose="02010609060101010101" pitchFamily="49" charset="-122"/>
                   <a:cs typeface="字由点字典黑 2 Bold" panose="00020600040101010101" charset="-122"/>
                   <a:sym typeface="字由点字典黑 2 Bold" panose="00020600040101010101" charset="-122"/>
                 </a:rPr>
                 <a:t>研究工具</a:t>
               </a:r>
+              <a:endParaRPr lang="en-US" sz="1800" b="1" spc="-27" dirty="0">
+                <a:solidFill>
+                  <a:srgbClr val="000000"/>
+                </a:solidFill>
+                <a:latin typeface="黑体" panose="02010609060101010101" pitchFamily="49" charset="-122"/>
+                <a:ea typeface="黑体" panose="02010609060101010101" pitchFamily="49" charset="-122"/>
+                <a:cs typeface="字由点字典黑 2 Bold" panose="00020600040101010101" charset="-122"/>
+                <a:sym typeface="字由点字典黑 2 Bold" panose="00020600040101010101" charset="-122"/>
+              </a:endParaRPr>
             </a:p>
           </p:txBody>
         </p:sp>
@@ -6635,7 +6982,7 @@
           <p:spPr>
             <a:xfrm>
               <a:off x="0" y="592368"/>
-              <a:ext cx="5883506" cy="708449"/>
+              <a:ext cx="5883506" cy="1087734"/>
             </a:xfrm>
             <a:prstGeom prst="rect">
               <a:avLst/>
@@ -6647,23 +6994,152 @@
             </a:bodyPr>
             <a:lstStyle/>
             <a:p>
-              <a:pPr marL="0" lvl="0" indent="0" algn="just">
+              <a:pPr lvl="0" algn="just">
                 <a:lnSpc>
                   <a:spcPts val="2240"/>
                 </a:lnSpc>
               </a:pPr>
               <a:r>
-                <a:rPr lang="en-US" sz="1400">
+                <a:rPr lang="zh-CN" altLang="en-US" sz="1400" dirty="0">
                   <a:solidFill>
                     <a:srgbClr val="000000"/>
                   </a:solidFill>
-                  <a:latin typeface="字由点字典黑 2 Light" panose="00020600040101010101" charset="-122"/>
-                  <a:ea typeface="字由点字典黑 2 Light" panose="00020600040101010101" charset="-122"/>
+                  <a:latin typeface="黑体" panose="02010609060101010101" pitchFamily="49" charset="-122"/>
+                  <a:ea typeface="黑体" panose="02010609060101010101" pitchFamily="49" charset="-122"/>
                   <a:cs typeface="字由点字典黑 2 Light" panose="00020600040101010101" charset="-122"/>
                   <a:sym typeface="字由点字典黑 2 Light" panose="00020600040101010101" charset="-122"/>
                 </a:rPr>
-                <a:t>介绍 Agent 开发和实现过程中使用的主要工具、平台、模型、框架等。</a:t>
+                <a:t>基于</a:t>
               </a:r>
+              <a:r>
+                <a:rPr lang="en-US" sz="1400" dirty="0" err="1">
+                  <a:solidFill>
+                    <a:srgbClr val="000000"/>
+                  </a:solidFill>
+                  <a:latin typeface="Times New Roman" panose="02020603050405020304" pitchFamily="18" charset="0"/>
+                  <a:ea typeface="黑体" panose="02010609060101010101" pitchFamily="49" charset="-122"/>
+                  <a:cs typeface="Times New Roman" panose="02020603050405020304" pitchFamily="18" charset="0"/>
+                  <a:sym typeface="字由点字典黑 2 Light" panose="00020600040101010101" charset="-122"/>
+                </a:rPr>
+                <a:t>LangGraph</a:t>
+              </a:r>
+              <a:r>
+                <a:rPr lang="zh-CN" altLang="en-US" sz="1400" dirty="0">
+                  <a:solidFill>
+                    <a:srgbClr val="000000"/>
+                  </a:solidFill>
+                  <a:latin typeface="黑体" panose="02010609060101010101" pitchFamily="49" charset="-122"/>
+                  <a:ea typeface="黑体" panose="02010609060101010101" pitchFamily="49" charset="-122"/>
+                  <a:cs typeface="字由点字典黑 2 Light" panose="00020600040101010101" charset="-122"/>
+                  <a:sym typeface="字由点字典黑 2 Light" panose="00020600040101010101" charset="-122"/>
+                </a:rPr>
+                <a:t>构建</a:t>
+              </a:r>
+              <a:r>
+                <a:rPr lang="en-US" altLang="zh-CN" sz="1400" dirty="0">
+                  <a:solidFill>
+                    <a:srgbClr val="000000"/>
+                  </a:solidFill>
+                  <a:latin typeface="黑体" panose="02010609060101010101" pitchFamily="49" charset="-122"/>
+                  <a:ea typeface="黑体" panose="02010609060101010101" pitchFamily="49" charset="-122"/>
+                  <a:cs typeface="字由点字典黑 2 Light" panose="00020600040101010101" charset="-122"/>
+                  <a:sym typeface="字由点字典黑 2 Light" panose="00020600040101010101" charset="-122"/>
+                </a:rPr>
+                <a:t>7</a:t>
+              </a:r>
+              <a:r>
+                <a:rPr lang="zh-CN" altLang="en-US" sz="1400" dirty="0">
+                  <a:solidFill>
+                    <a:srgbClr val="000000"/>
+                  </a:solidFill>
+                  <a:latin typeface="黑体" panose="02010609060101010101" pitchFamily="49" charset="-122"/>
+                  <a:ea typeface="黑体" panose="02010609060101010101" pitchFamily="49" charset="-122"/>
+                  <a:cs typeface="字由点字典黑 2 Light" panose="00020600040101010101" charset="-122"/>
+                  <a:sym typeface="字由点字典黑 2 Light" panose="00020600040101010101" charset="-122"/>
+                </a:rPr>
+                <a:t>节点</a:t>
+              </a:r>
+              <a:r>
+                <a:rPr lang="en-US" sz="1400" dirty="0">
+                  <a:solidFill>
+                    <a:srgbClr val="000000"/>
+                  </a:solidFill>
+                  <a:latin typeface="Times New Roman" panose="02020603050405020304" pitchFamily="18" charset="0"/>
+                  <a:ea typeface="黑体" panose="02010609060101010101" pitchFamily="49" charset="-122"/>
+                  <a:cs typeface="Times New Roman" panose="02020603050405020304" pitchFamily="18" charset="0"/>
+                  <a:sym typeface="字由点字典黑 2 Light" panose="00020600040101010101" charset="-122"/>
+                </a:rPr>
+                <a:t>Agent</a:t>
+              </a:r>
+              <a:r>
+                <a:rPr lang="zh-CN" altLang="en-US" sz="1400" dirty="0">
+                  <a:solidFill>
+                    <a:srgbClr val="000000"/>
+                  </a:solidFill>
+                  <a:latin typeface="黑体" panose="02010609060101010101" pitchFamily="49" charset="-122"/>
+                  <a:ea typeface="黑体" panose="02010609060101010101" pitchFamily="49" charset="-122"/>
+                  <a:cs typeface="字由点字典黑 2 Light" panose="00020600040101010101" charset="-122"/>
+                  <a:sym typeface="字由点字典黑 2 Light" panose="00020600040101010101" charset="-122"/>
+                </a:rPr>
+                <a:t>状态图，以大语言模型驱动任务规划、检索式生成、文献筛选、结构化提取与对比分析全流程；</a:t>
+              </a:r>
+              <a:r>
+                <a:rPr lang="en-US" sz="1400" dirty="0">
+                  <a:solidFill>
+                    <a:srgbClr val="000000"/>
+                  </a:solidFill>
+                  <a:latin typeface="Times New Roman" panose="02020603050405020304" pitchFamily="18" charset="0"/>
+                  <a:ea typeface="黑体" panose="02010609060101010101" pitchFamily="49" charset="-122"/>
+                  <a:cs typeface="Times New Roman" panose="02020603050405020304" pitchFamily="18" charset="0"/>
+                  <a:sym typeface="字由点字典黑 2 Light" panose="00020600040101010101" charset="-122"/>
+                </a:rPr>
+                <a:t>API</a:t>
+              </a:r>
+              <a:r>
+                <a:rPr lang="zh-CN" altLang="en-US" sz="1400" dirty="0">
+                  <a:solidFill>
+                    <a:srgbClr val="000000"/>
+                  </a:solidFill>
+                  <a:latin typeface="黑体" panose="02010609060101010101" pitchFamily="49" charset="-122"/>
+                  <a:ea typeface="黑体" panose="02010609060101010101" pitchFamily="49" charset="-122"/>
+                  <a:cs typeface="字由点字典黑 2 Light" panose="00020600040101010101" charset="-122"/>
+                  <a:sym typeface="字由点字典黑 2 Light" panose="00020600040101010101" charset="-122"/>
+                </a:rPr>
+                <a:t>服务采用</a:t>
+              </a:r>
+              <a:r>
+                <a:rPr lang="en-US" sz="1400" dirty="0" err="1">
+                  <a:solidFill>
+                    <a:srgbClr val="000000"/>
+                  </a:solidFill>
+                  <a:latin typeface="Times New Roman" panose="02020603050405020304" pitchFamily="18" charset="0"/>
+                  <a:ea typeface="黑体" panose="02010609060101010101" pitchFamily="49" charset="-122"/>
+                  <a:cs typeface="Times New Roman" panose="02020603050405020304" pitchFamily="18" charset="0"/>
+                  <a:sym typeface="字由点字典黑 2 Light" panose="00020600040101010101" charset="-122"/>
+                </a:rPr>
+                <a:t>FastAPI+SSE</a:t>
+              </a:r>
+              <a:r>
+                <a:rPr lang="zh-CN" altLang="en-US" sz="1400" dirty="0">
+                  <a:solidFill>
+                    <a:srgbClr val="000000"/>
+                  </a:solidFill>
+                  <a:latin typeface="黑体" panose="02010609060101010101" pitchFamily="49" charset="-122"/>
+                  <a:ea typeface="黑体" panose="02010609060101010101" pitchFamily="49" charset="-122"/>
+                  <a:cs typeface="字由点字典黑 2 Light" panose="00020600040101010101" charset="-122"/>
+                  <a:sym typeface="字由点字典黑 2 Light" panose="00020600040101010101" charset="-122"/>
+                </a:rPr>
+                <a:t>流式推送；</a:t>
+              </a:r>
+              <a:endParaRPr lang="en-US" sz="1400" dirty="0">
+                <a:solidFill>
+                  <a:srgbClr val="000000"/>
+                </a:solidFill>
+                <a:latin typeface="黑体" panose="02010609060101010101" pitchFamily="49" charset="-122"/>
+                <a:ea typeface="黑体" panose="02010609060101010101" pitchFamily="49" charset="-122"/>
+                <a:cs typeface="字由点字典黑 2 Light" panose="00020600040101010101" charset="-122"/>
+                <a:sym typeface="字由点字典黑 2 Light" panose="00020600040101010101" charset="-122"/>
+              </a:endParaRPr>
             </a:p>
           </p:txBody>
         </p:sp>
@@ -6695,7 +7171,19 @@
               </a:lnSpc>
             </a:pPr>
             <a:r>
-              <a:rPr lang="en-US" sz="2295" spc="-34">
+              <a:rPr lang="en-US" sz="2295" b="1" spc="-34" dirty="0" err="1">
+                <a:solidFill>
+                  <a:srgbClr val="FFFFFF"/>
+                </a:solidFill>
+                <a:latin typeface="黑体" panose="02010609060101010101" pitchFamily="49" charset="-122"/>
+                <a:ea typeface="黑体" panose="02010609060101010101" pitchFamily="49" charset="-122"/>
+                <a:cs typeface="字由点字典黑 2 Bold" panose="00020600040101010101" charset="-122"/>
+                <a:sym typeface="字由点字典黑 2 Bold" panose="00020600040101010101" charset="-122"/>
+              </a:rPr>
+              <a:t>引言</a:t>
+            </a:r>
+            <a:r>
+              <a:rPr lang="en-US" sz="2295" spc="-34" dirty="0">
                 <a:solidFill>
                   <a:srgbClr val="FFFFFF"/>
                 </a:solidFill>
@@ -6704,7 +7192,19 @@
                 <a:cs typeface="字由点字典黑 2 Bold" panose="00020600040101010101" charset="-122"/>
                 <a:sym typeface="字由点字典黑 2 Bold" panose="00020600040101010101" charset="-122"/>
               </a:rPr>
-              <a:t>引言 Introduction</a:t>
+              <a:t> </a:t>
+            </a:r>
+            <a:r>
+              <a:rPr lang="en-US" sz="2295" b="1" spc="-34" dirty="0">
+                <a:solidFill>
+                  <a:srgbClr val="FFFFFF"/>
+                </a:solidFill>
+                <a:latin typeface="Times New Roman" panose="02020603050405020304" pitchFamily="18" charset="0"/>
+                <a:ea typeface="字由点字典黑 2 Bold" panose="00020600040101010101" charset="-122"/>
+                <a:cs typeface="Times New Roman" panose="02020603050405020304" pitchFamily="18" charset="0"/>
+                <a:sym typeface="字由点字典黑 2 Bold" panose="00020600040101010101" charset="-122"/>
+              </a:rPr>
+              <a:t>Introduction</a:t>
             </a:r>
           </a:p>
         </p:txBody>
@@ -6736,7 +7236,19 @@
               </a:lnSpc>
             </a:pPr>
             <a:r>
-              <a:rPr lang="en-US" sz="2295" spc="-34">
+              <a:rPr lang="en-US" sz="2295" b="1" spc="-34" dirty="0" err="1">
+                <a:solidFill>
+                  <a:srgbClr val="FFFFFF"/>
+                </a:solidFill>
+                <a:latin typeface="黑体" panose="02010609060101010101" pitchFamily="49" charset="-122"/>
+                <a:ea typeface="黑体" panose="02010609060101010101" pitchFamily="49" charset="-122"/>
+                <a:cs typeface="字由点字典黑 2 Bold" panose="00020600040101010101" charset="-122"/>
+                <a:sym typeface="字由点字典黑 2 Bold" panose="00020600040101010101" charset="-122"/>
+              </a:rPr>
+              <a:t>工具</a:t>
+            </a:r>
+            <a:r>
+              <a:rPr lang="en-US" sz="2295" spc="-34" dirty="0">
                 <a:solidFill>
                   <a:srgbClr val="FFFFFF"/>
                 </a:solidFill>
@@ -6745,7 +7257,19 @@
                 <a:cs typeface="字由点字典黑 2 Bold" panose="00020600040101010101" charset="-122"/>
                 <a:sym typeface="字由点字典黑 2 Bold" panose="00020600040101010101" charset="-122"/>
               </a:rPr>
-              <a:t>工具 Tools</a:t>
+              <a:t> </a:t>
+            </a:r>
+            <a:r>
+              <a:rPr lang="en-US" sz="2295" b="1" spc="-34" dirty="0">
+                <a:solidFill>
+                  <a:srgbClr val="FFFFFF"/>
+                </a:solidFill>
+                <a:latin typeface="Times New Roman" panose="02020603050405020304" pitchFamily="18" charset="0"/>
+                <a:ea typeface="字由点字典黑 2 Bold" panose="00020600040101010101" charset="-122"/>
+                <a:cs typeface="Times New Roman" panose="02020603050405020304" pitchFamily="18" charset="0"/>
+                <a:sym typeface="字由点字典黑 2 Bold" panose="00020600040101010101" charset="-122"/>
+              </a:rPr>
+              <a:t>Tools</a:t>
             </a:r>
           </a:p>
         </p:txBody>
@@ -6759,7 +7283,7 @@
         <p:spPr>
           <a:xfrm>
             <a:off x="10175091" y="11419755"/>
-            <a:ext cx="4410690" cy="435783"/>
+            <a:ext cx="4410690" cy="421269"/>
           </a:xfrm>
           <a:prstGeom prst="rect">
             <a:avLst/>
@@ -6777,16 +7301,40 @@
               </a:lnSpc>
             </a:pPr>
             <a:r>
-              <a:rPr lang="en-US" sz="2295" spc="-34">
+              <a:rPr lang="en-US" sz="2295" b="1" spc="-34" dirty="0" err="1">
                 <a:solidFill>
                   <a:srgbClr val="FFFFFF"/>
                 </a:solidFill>
-                <a:latin typeface="字由点字典黑 2 Bold" panose="00020600040101010101" charset="-122"/>
-                <a:ea typeface="字由点字典黑 2 Bold" panose="00020600040101010101" charset="-122"/>
+                <a:latin typeface="黑体" panose="02010609060101010101" pitchFamily="49" charset="-122"/>
+                <a:ea typeface="黑体" panose="02010609060101010101" pitchFamily="49" charset="-122"/>
                 <a:cs typeface="字由点字典黑 2 Bold" panose="00020600040101010101" charset="-122"/>
                 <a:sym typeface="字由点字典黑 2 Bold" panose="00020600040101010101" charset="-122"/>
               </a:rPr>
-              <a:t>总结 Conclusion</a:t>
+              <a:t>总结</a:t>
+            </a:r>
+            <a:r>
+              <a:rPr lang="en-US" sz="2295" spc="-34" dirty="0">
+                <a:solidFill>
+                  <a:srgbClr val="FFFFFF"/>
+                </a:solidFill>
+                <a:latin typeface="黑体" panose="02010609060101010101" pitchFamily="49" charset="-122"/>
+                <a:ea typeface="黑体" panose="02010609060101010101" pitchFamily="49" charset="-122"/>
+                <a:cs typeface="字由点字典黑 2 Bold" panose="00020600040101010101" charset="-122"/>
+                <a:sym typeface="字由点字典黑 2 Bold" panose="00020600040101010101" charset="-122"/>
+              </a:rPr>
+              <a:t> </a:t>
+            </a:r>
+            <a:r>
+              <a:rPr lang="en-US" sz="2295" b="1" spc="-34" dirty="0">
+                <a:solidFill>
+                  <a:srgbClr val="FFFFFF"/>
+                </a:solidFill>
+                <a:latin typeface="Times New Roman" panose="02020603050405020304" pitchFamily="18" charset="0"/>
+                <a:ea typeface="黑体" panose="02010609060101010101" pitchFamily="49" charset="-122"/>
+                <a:cs typeface="Times New Roman" panose="02020603050405020304" pitchFamily="18" charset="0"/>
+                <a:sym typeface="字由点字典黑 2 Bold" panose="00020600040101010101" charset="-122"/>
+              </a:rPr>
+              <a:t>Conclusion</a:t>
             </a:r>
           </a:p>
         </p:txBody>
@@ -6800,7 +7348,7 @@
         <p:spPr>
           <a:xfrm>
             <a:off x="10524000" y="7951010"/>
-            <a:ext cx="3366019" cy="271780"/>
+            <a:ext cx="3366019" cy="254300"/>
           </a:xfrm>
           <a:prstGeom prst="rect">
             <a:avLst/>
@@ -6817,18 +7365,15 @@
                 <a:spcPts val="2240"/>
               </a:lnSpc>
             </a:pPr>
-            <a:r>
-              <a:rPr lang="en-US" sz="1400">
-                <a:solidFill>
-                  <a:srgbClr val="000000"/>
-                </a:solidFill>
-                <a:latin typeface="字由点字典黑 2 Light" panose="00020600040101010101" charset="-122"/>
-                <a:ea typeface="字由点字典黑 2 Light" panose="00020600040101010101" charset="-122"/>
-                <a:cs typeface="字由点字典黑 2 Light" panose="00020600040101010101" charset="-122"/>
-                <a:sym typeface="字由点字典黑 2 Light" panose="00020600040101010101" charset="-122"/>
-              </a:rPr>
-              <a:t>【项目 demo1】</a:t>
-            </a:r>
+            <a:endParaRPr lang="en-US" sz="1400" dirty="0">
+              <a:solidFill>
+                <a:srgbClr val="000000"/>
+              </a:solidFill>
+              <a:latin typeface="字由点字典黑 2 Light" panose="00020600040101010101" charset="-122"/>
+              <a:ea typeface="字由点字典黑 2 Light" panose="00020600040101010101" charset="-122"/>
+              <a:cs typeface="字由点字典黑 2 Light" panose="00020600040101010101" charset="-122"/>
+              <a:sym typeface="字由点字典黑 2 Light" panose="00020600040101010101" charset="-122"/>
+            </a:endParaRPr>
           </a:p>
         </p:txBody>
       </p:sp>
@@ -6841,7 +7386,7 @@
         <p:spPr>
           <a:xfrm>
             <a:off x="10557534" y="10692712"/>
-            <a:ext cx="3366019" cy="271780"/>
+            <a:ext cx="3366019" cy="254300"/>
           </a:xfrm>
           <a:prstGeom prst="rect">
             <a:avLst/>
@@ -6858,18 +7403,15 @@
                 <a:spcPts val="2240"/>
               </a:lnSpc>
             </a:pPr>
-            <a:r>
-              <a:rPr lang="en-US" sz="1400">
-                <a:solidFill>
-                  <a:srgbClr val="000000"/>
-                </a:solidFill>
-                <a:latin typeface="字由点字典黑 2 Light" panose="00020600040101010101" charset="-122"/>
-                <a:ea typeface="字由点字典黑 2 Light" panose="00020600040101010101" charset="-122"/>
-                <a:cs typeface="字由点字典黑 2 Light" panose="00020600040101010101" charset="-122"/>
-                <a:sym typeface="字由点字典黑 2 Light" panose="00020600040101010101" charset="-122"/>
-              </a:rPr>
-              <a:t>【项目demo2】</a:t>
-            </a:r>
+            <a:endParaRPr lang="en-US" sz="1400" dirty="0">
+              <a:solidFill>
+                <a:srgbClr val="000000"/>
+              </a:solidFill>
+              <a:latin typeface="字由点字典黑 2 Light" panose="00020600040101010101" charset="-122"/>
+              <a:ea typeface="字由点字典黑 2 Light" panose="00020600040101010101" charset="-122"/>
+              <a:cs typeface="字由点字典黑 2 Light" panose="00020600040101010101" charset="-122"/>
+              <a:sym typeface="字由点字典黑 2 Light" panose="00020600040101010101" charset="-122"/>
+            </a:endParaRPr>
           </a:p>
         </p:txBody>
       </p:sp>
@@ -6900,7 +7442,19 @@
               </a:lnSpc>
             </a:pPr>
             <a:r>
-              <a:rPr lang="en-US" sz="2295" spc="-34">
+              <a:rPr lang="en-US" sz="2295" b="1" spc="-34" dirty="0" err="1">
+                <a:solidFill>
+                  <a:srgbClr val="FFFFFF"/>
+                </a:solidFill>
+                <a:latin typeface="黑体" panose="02010609060101010101" pitchFamily="49" charset="-122"/>
+                <a:ea typeface="黑体" panose="02010609060101010101" pitchFamily="49" charset="-122"/>
+                <a:cs typeface="字由点字典黑 2 Bold" panose="00020600040101010101" charset="-122"/>
+                <a:sym typeface="字由点字典黑 2 Bold" panose="00020600040101010101" charset="-122"/>
+              </a:rPr>
+              <a:t>研究方法与实验</a:t>
+            </a:r>
+            <a:r>
+              <a:rPr lang="en-US" sz="2295" spc="-34" dirty="0">
                 <a:solidFill>
                   <a:srgbClr val="FFFFFF"/>
                 </a:solidFill>
@@ -6909,7 +7463,19 @@
                 <a:cs typeface="字由点字典黑 2 Bold" panose="00020600040101010101" charset="-122"/>
                 <a:sym typeface="字由点字典黑 2 Bold" panose="00020600040101010101" charset="-122"/>
               </a:rPr>
-              <a:t>研究方法与实验 Methods &amp; Experiments</a:t>
+              <a:t> </a:t>
+            </a:r>
+            <a:r>
+              <a:rPr lang="en-US" sz="2295" b="1" spc="-34" dirty="0">
+                <a:solidFill>
+                  <a:srgbClr val="FFFFFF"/>
+                </a:solidFill>
+                <a:latin typeface="Times New Roman" panose="02020603050405020304" pitchFamily="18" charset="0"/>
+                <a:ea typeface="字由点字典黑 2 Bold" panose="00020600040101010101" charset="-122"/>
+                <a:cs typeface="Times New Roman" panose="02020603050405020304" pitchFamily="18" charset="0"/>
+                <a:sym typeface="字由点字典黑 2 Bold" panose="00020600040101010101" charset="-122"/>
+              </a:rPr>
+              <a:t>Methods &amp; Experiments</a:t>
             </a:r>
           </a:p>
         </p:txBody>
@@ -6922,8 +7488,154 @@
         </p:nvSpPr>
         <p:spPr>
           <a:xfrm>
-            <a:off x="1262981" y="16222835"/>
-            <a:ext cx="8361455" cy="271780"/>
+            <a:off x="1087406" y="14792654"/>
+            <a:ext cx="8506166" cy="524054"/>
+          </a:xfrm>
+          <a:prstGeom prst="rect">
+            <a:avLst/>
+          </a:prstGeom>
+        </p:spPr>
+        <p:txBody>
+          <a:bodyPr wrap="square" lIns="0" tIns="0" rIns="0" bIns="0" rtlCol="0" anchor="t">
+            <a:spAutoFit/>
+          </a:bodyPr>
+          <a:lstStyle/>
+          <a:p>
+            <a:pPr lvl="0" algn="just">
+              <a:lnSpc>
+                <a:spcPts val="2240"/>
+              </a:lnSpc>
+            </a:pPr>
+            <a:r>
+              <a:rPr lang="zh-CN" altLang="en-US" sz="1400" dirty="0">
+                <a:solidFill>
+                  <a:srgbClr val="000000"/>
+                </a:solidFill>
+                <a:latin typeface="黑体" panose="02010609060101010101" pitchFamily="49" charset="-122"/>
+                <a:ea typeface="黑体" panose="02010609060101010101" pitchFamily="49" charset="-122"/>
+                <a:cs typeface="字由点字典黑 2 Light" panose="00020600040101010101" charset="-122"/>
+                <a:sym typeface="字由点字典黑 2 Light" panose="00020600040101010101" charset="-122"/>
+              </a:rPr>
+              <a:t>系统采用“规划</a:t>
+            </a:r>
+            <a:r>
+              <a:rPr lang="en-US" altLang="zh-CN" sz="1400" dirty="0">
+                <a:solidFill>
+                  <a:srgbClr val="000000"/>
+                </a:solidFill>
+                <a:latin typeface="黑体" panose="02010609060101010101" pitchFamily="49" charset="-122"/>
+                <a:ea typeface="黑体" panose="02010609060101010101" pitchFamily="49" charset="-122"/>
+                <a:cs typeface="字由点字典黑 2 Light" panose="00020600040101010101" charset="-122"/>
+                <a:sym typeface="字由点字典黑 2 Light" panose="00020600040101010101" charset="-122"/>
+              </a:rPr>
+              <a:t>—</a:t>
+            </a:r>
+            <a:r>
+              <a:rPr lang="zh-CN" altLang="en-US" sz="1400" dirty="0">
+                <a:solidFill>
+                  <a:srgbClr val="000000"/>
+                </a:solidFill>
+                <a:latin typeface="黑体" panose="02010609060101010101" pitchFamily="49" charset="-122"/>
+                <a:ea typeface="黑体" panose="02010609060101010101" pitchFamily="49" charset="-122"/>
+                <a:cs typeface="字由点字典黑 2 Light" panose="00020600040101010101" charset="-122"/>
+                <a:sym typeface="字由点字典黑 2 Light" panose="00020600040101010101" charset="-122"/>
+              </a:rPr>
+              <a:t>调度</a:t>
+            </a:r>
+            <a:r>
+              <a:rPr lang="en-US" altLang="zh-CN" sz="1400" dirty="0">
+                <a:solidFill>
+                  <a:srgbClr val="000000"/>
+                </a:solidFill>
+                <a:latin typeface="黑体" panose="02010609060101010101" pitchFamily="49" charset="-122"/>
+                <a:ea typeface="黑体" panose="02010609060101010101" pitchFamily="49" charset="-122"/>
+                <a:cs typeface="字由点字典黑 2 Light" panose="00020600040101010101" charset="-122"/>
+                <a:sym typeface="字由点字典黑 2 Light" panose="00020600040101010101" charset="-122"/>
+              </a:rPr>
+              <a:t>—</a:t>
+            </a:r>
+            <a:r>
+              <a:rPr lang="zh-CN" altLang="en-US" sz="1400" dirty="0">
+                <a:solidFill>
+                  <a:srgbClr val="000000"/>
+                </a:solidFill>
+                <a:latin typeface="黑体" panose="02010609060101010101" pitchFamily="49" charset="-122"/>
+                <a:ea typeface="黑体" panose="02010609060101010101" pitchFamily="49" charset="-122"/>
+                <a:cs typeface="字由点字典黑 2 Light" panose="00020600040101010101" charset="-122"/>
+                <a:sym typeface="字由点字典黑 2 Light" panose="00020600040101010101" charset="-122"/>
+              </a:rPr>
+              <a:t>执行</a:t>
+            </a:r>
+            <a:r>
+              <a:rPr lang="en-US" altLang="zh-CN" sz="1400" dirty="0">
+                <a:solidFill>
+                  <a:srgbClr val="000000"/>
+                </a:solidFill>
+                <a:latin typeface="黑体" panose="02010609060101010101" pitchFamily="49" charset="-122"/>
+                <a:ea typeface="黑体" panose="02010609060101010101" pitchFamily="49" charset="-122"/>
+                <a:cs typeface="字由点字典黑 2 Light" panose="00020600040101010101" charset="-122"/>
+                <a:sym typeface="字由点字典黑 2 Light" panose="00020600040101010101" charset="-122"/>
+              </a:rPr>
+              <a:t>—</a:t>
+            </a:r>
+            <a:r>
+              <a:rPr lang="zh-CN" altLang="en-US" sz="1400" dirty="0">
+                <a:solidFill>
+                  <a:srgbClr val="000000"/>
+                </a:solidFill>
+                <a:latin typeface="黑体" panose="02010609060101010101" pitchFamily="49" charset="-122"/>
+                <a:ea typeface="黑体" panose="02010609060101010101" pitchFamily="49" charset="-122"/>
+                <a:cs typeface="字由点字典黑 2 Light" panose="00020600040101010101" charset="-122"/>
+                <a:sym typeface="字由点字典黑 2 Light" panose="00020600040101010101" charset="-122"/>
+              </a:rPr>
+              <a:t>反馈”四层</a:t>
+            </a:r>
+            <a:r>
+              <a:rPr lang="en-US" altLang="zh-CN" sz="1400" dirty="0">
+                <a:solidFill>
+                  <a:srgbClr val="000000"/>
+                </a:solidFill>
+                <a:latin typeface="Times New Roman" panose="02020603050405020304" pitchFamily="18" charset="0"/>
+                <a:ea typeface="黑体" panose="02010609060101010101" pitchFamily="49" charset="-122"/>
+                <a:cs typeface="Times New Roman" panose="02020603050405020304" pitchFamily="18" charset="0"/>
+                <a:sym typeface="字由点字典黑 2 Light" panose="00020600040101010101" charset="-122"/>
+              </a:rPr>
+              <a:t>Agentic Workflow</a:t>
+            </a:r>
+            <a:r>
+              <a:rPr lang="zh-CN" altLang="en-US" sz="1400" dirty="0">
+                <a:solidFill>
+                  <a:srgbClr val="000000"/>
+                </a:solidFill>
+                <a:latin typeface="黑体" panose="02010609060101010101" pitchFamily="49" charset="-122"/>
+                <a:ea typeface="黑体" panose="02010609060101010101" pitchFamily="49" charset="-122"/>
+                <a:cs typeface="字由点字典黑 2 Light" panose="00020600040101010101" charset="-122"/>
+                <a:sym typeface="字由点字典黑 2 Light" panose="00020600040101010101" charset="-122"/>
+              </a:rPr>
+              <a:t>架构，将用户自然语言研究问题转化为结构化的多步骤文献分析流水线。</a:t>
+            </a:r>
+            <a:endParaRPr lang="en-US" sz="1400" dirty="0">
+              <a:solidFill>
+                <a:srgbClr val="000000"/>
+              </a:solidFill>
+              <a:latin typeface="黑体" panose="02010609060101010101" pitchFamily="49" charset="-122"/>
+              <a:ea typeface="黑体" panose="02010609060101010101" pitchFamily="49" charset="-122"/>
+              <a:cs typeface="字由点字典黑 2 Light" panose="00020600040101010101" charset="-122"/>
+              <a:sym typeface="字由点字典黑 2 Light" panose="00020600040101010101" charset="-122"/>
+            </a:endParaRPr>
+          </a:p>
+        </p:txBody>
+      </p:sp>
+      <p:sp>
+        <p:nvSpPr>
+          <p:cNvPr id="95" name="TextBox 95"/>
+          <p:cNvSpPr txBox="1"/>
+          <p:nvPr/>
+        </p:nvSpPr>
+        <p:spPr>
+          <a:xfrm>
+            <a:off x="932881" y="15818407"/>
+            <a:ext cx="7884809" cy="4191725"/>
           </a:xfrm>
           <a:prstGeom prst="rect">
             <a:avLst/>
@@ -6935,64 +7647,792 @@
           </a:bodyPr>
           <a:lstStyle/>
           <a:p>
-            <a:pPr marL="0" lvl="0" indent="0" algn="just">
+            <a:pPr lvl="0" algn="just">
               <a:lnSpc>
                 <a:spcPts val="2240"/>
               </a:lnSpc>
             </a:pPr>
             <a:r>
-              <a:rPr lang="en-US" sz="1400">
-                <a:solidFill>
-                  <a:srgbClr val="000000"/>
-                </a:solidFill>
-                <a:latin typeface="字由点字典黑 2 Light" panose="00020600040101010101" charset="-122"/>
-                <a:ea typeface="字由点字典黑 2 Light" panose="00020600040101010101" charset="-122"/>
-                <a:cs typeface="字由点字典黑 2 Light" panose="00020600040101010101" charset="-122"/>
-                <a:sym typeface="字由点字典黑 2 Light" panose="00020600040101010101" charset="-122"/>
-              </a:rPr>
-              <a:t>【项目方法1】简要说明项目的整体技术思路、系统架构或 Agent 工作流程。</a:t>
-            </a:r>
-          </a:p>
-        </p:txBody>
-      </p:sp>
-      <p:sp>
-        <p:nvSpPr>
-          <p:cNvPr id="95" name="TextBox 95"/>
-          <p:cNvSpPr txBox="1"/>
-          <p:nvPr/>
-        </p:nvSpPr>
-        <p:spPr>
-          <a:xfrm>
-            <a:off x="1262981" y="17178128"/>
-            <a:ext cx="7884809" cy="271780"/>
-          </a:xfrm>
-          <a:prstGeom prst="rect">
-            <a:avLst/>
-          </a:prstGeom>
-        </p:spPr>
-        <p:txBody>
-          <a:bodyPr lIns="0" tIns="0" rIns="0" bIns="0" rtlCol="0" anchor="t">
-            <a:spAutoFit/>
-          </a:bodyPr>
-          <a:lstStyle/>
-          <a:p>
-            <a:pPr marL="0" lvl="0" indent="0" algn="just">
+              <a:rPr lang="en-US" altLang="zh-CN" sz="1400" dirty="0">
+                <a:solidFill>
+                  <a:srgbClr val="000000"/>
+                </a:solidFill>
+                <a:latin typeface="黑体" panose="02010609060101010101" pitchFamily="49" charset="-122"/>
+                <a:ea typeface="黑体" panose="02010609060101010101" pitchFamily="49" charset="-122"/>
+                <a:cs typeface="字由点字典黑 2 Light" panose="00020600040101010101" charset="-122"/>
+                <a:sym typeface="字由点字典黑 2 Light" panose="00020600040101010101" charset="-122"/>
+              </a:rPr>
+              <a:t>1.</a:t>
+            </a:r>
+            <a:r>
+              <a:rPr lang="zh-CN" altLang="en-US" sz="1400" dirty="0">
+                <a:solidFill>
+                  <a:srgbClr val="000000"/>
+                </a:solidFill>
+                <a:latin typeface="黑体" panose="02010609060101010101" pitchFamily="49" charset="-122"/>
+                <a:ea typeface="黑体" panose="02010609060101010101" pitchFamily="49" charset="-122"/>
+                <a:cs typeface="字由点字典黑 2 Light" panose="00020600040101010101" charset="-122"/>
+                <a:sym typeface="字由点字典黑 2 Light" panose="00020600040101010101" charset="-122"/>
+              </a:rPr>
+              <a:t>任务规划</a:t>
+            </a:r>
+            <a:r>
+              <a:rPr lang="en-US" altLang="zh-CN" sz="1400" dirty="0">
+                <a:solidFill>
+                  <a:srgbClr val="000000"/>
+                </a:solidFill>
+                <a:latin typeface="黑体" panose="02010609060101010101" pitchFamily="49" charset="-122"/>
+                <a:ea typeface="黑体" panose="02010609060101010101" pitchFamily="49" charset="-122"/>
+                <a:cs typeface="字由点字典黑 2 Light" panose="00020600040101010101" charset="-122"/>
+                <a:sym typeface="字由点字典黑 2 Light" panose="00020600040101010101" charset="-122"/>
+              </a:rPr>
+              <a:t>(</a:t>
+            </a:r>
+            <a:r>
+              <a:rPr lang="en-US" altLang="zh-CN" sz="1400" dirty="0">
+                <a:solidFill>
+                  <a:srgbClr val="000000"/>
+                </a:solidFill>
+                <a:latin typeface="Times New Roman" panose="02020603050405020304" pitchFamily="18" charset="0"/>
+                <a:ea typeface="黑体" panose="02010609060101010101" pitchFamily="49" charset="-122"/>
+                <a:cs typeface="Times New Roman" panose="02020603050405020304" pitchFamily="18" charset="0"/>
+                <a:sym typeface="字由点字典黑 2 Light" panose="00020600040101010101" charset="-122"/>
+              </a:rPr>
+              <a:t>P</a:t>
+            </a:r>
+            <a:r>
+              <a:rPr lang="en-US" altLang="zh-CN" sz="1400" dirty="0">
+                <a:solidFill>
+                  <a:srgbClr val="000000"/>
+                </a:solidFill>
+                <a:latin typeface="黑体" panose="02010609060101010101" pitchFamily="49" charset="-122"/>
+                <a:ea typeface="黑体" panose="02010609060101010101" pitchFamily="49" charset="-122"/>
+                <a:cs typeface="字由点字典黑 2 Light" panose="00020600040101010101" charset="-122"/>
+                <a:sym typeface="字由点字典黑 2 Light" panose="00020600040101010101" charset="-122"/>
+              </a:rPr>
+              <a:t>)</a:t>
+            </a:r>
+            <a:r>
+              <a:rPr lang="zh-CN" altLang="en-US" sz="1400" dirty="0">
+                <a:solidFill>
+                  <a:srgbClr val="000000"/>
+                </a:solidFill>
+                <a:latin typeface="黑体" panose="02010609060101010101" pitchFamily="49" charset="-122"/>
+                <a:ea typeface="黑体" panose="02010609060101010101" pitchFamily="49" charset="-122"/>
+                <a:cs typeface="字由点字典黑 2 Light" panose="00020600040101010101" charset="-122"/>
+                <a:sym typeface="字由点字典黑 2 Light" panose="00020600040101010101" charset="-122"/>
+              </a:rPr>
+              <a:t>：</a:t>
+            </a:r>
+            <a:r>
+              <a:rPr lang="en-US" altLang="zh-CN" sz="1400" dirty="0">
+                <a:solidFill>
+                  <a:srgbClr val="000000"/>
+                </a:solidFill>
+                <a:latin typeface="Times New Roman" panose="02020603050405020304" pitchFamily="18" charset="0"/>
+                <a:ea typeface="黑体" panose="02010609060101010101" pitchFamily="49" charset="-122"/>
+                <a:cs typeface="Times New Roman" panose="02020603050405020304" pitchFamily="18" charset="0"/>
+                <a:sym typeface="字由点字典黑 2 Light" panose="00020600040101010101" charset="-122"/>
+              </a:rPr>
+              <a:t>LLM</a:t>
+            </a:r>
+            <a:r>
+              <a:rPr lang="zh-CN" altLang="en-US" sz="1400" dirty="0">
+                <a:solidFill>
+                  <a:srgbClr val="000000"/>
+                </a:solidFill>
+                <a:latin typeface="黑体" panose="02010609060101010101" pitchFamily="49" charset="-122"/>
+                <a:ea typeface="黑体" panose="02010609060101010101" pitchFamily="49" charset="-122"/>
+                <a:cs typeface="字由点字典黑 2 Light" panose="00020600040101010101" charset="-122"/>
+                <a:sym typeface="字由点字典黑 2 Light" panose="00020600040101010101" charset="-122"/>
+              </a:rPr>
+              <a:t>接收用户自然语言查询，将其拆解为</a:t>
+            </a:r>
+            <a:r>
+              <a:rPr lang="en-US" altLang="zh-CN" sz="1400" dirty="0">
+                <a:solidFill>
+                  <a:srgbClr val="000000"/>
+                </a:solidFill>
+                <a:latin typeface="黑体" panose="02010609060101010101" pitchFamily="49" charset="-122"/>
+                <a:ea typeface="黑体" panose="02010609060101010101" pitchFamily="49" charset="-122"/>
+                <a:cs typeface="字由点字典黑 2 Light" panose="00020600040101010101" charset="-122"/>
+                <a:sym typeface="字由点字典黑 2 Light" panose="00020600040101010101" charset="-122"/>
+              </a:rPr>
+              <a:t>4–7</a:t>
+            </a:r>
+            <a:r>
+              <a:rPr lang="zh-CN" altLang="en-US" sz="1400" dirty="0">
+                <a:solidFill>
+                  <a:srgbClr val="000000"/>
+                </a:solidFill>
+                <a:latin typeface="黑体" panose="02010609060101010101" pitchFamily="49" charset="-122"/>
+                <a:ea typeface="黑体" panose="02010609060101010101" pitchFamily="49" charset="-122"/>
+                <a:cs typeface="字由点字典黑 2 Light" panose="00020600040101010101" charset="-122"/>
+                <a:sym typeface="字由点字典黑 2 Light" panose="00020600040101010101" charset="-122"/>
+              </a:rPr>
+              <a:t>个子任务的</a:t>
+            </a:r>
+            <a:r>
+              <a:rPr lang="en-US" altLang="zh-CN" sz="1400" dirty="0">
+                <a:solidFill>
+                  <a:srgbClr val="000000"/>
+                </a:solidFill>
+                <a:latin typeface="Times New Roman" panose="02020603050405020304" pitchFamily="18" charset="0"/>
+                <a:ea typeface="黑体" panose="02010609060101010101" pitchFamily="49" charset="-122"/>
+                <a:cs typeface="Times New Roman" panose="02020603050405020304" pitchFamily="18" charset="0"/>
+                <a:sym typeface="字由点字典黑 2 Light" panose="00020600040101010101" charset="-122"/>
+              </a:rPr>
+              <a:t>DAG</a:t>
+            </a:r>
+            <a:r>
+              <a:rPr lang="zh-CN" altLang="en-US" sz="1400" dirty="0">
+                <a:solidFill>
+                  <a:srgbClr val="000000"/>
+                </a:solidFill>
+                <a:latin typeface="黑体" panose="02010609060101010101" pitchFamily="49" charset="-122"/>
+                <a:ea typeface="黑体" panose="02010609060101010101" pitchFamily="49" charset="-122"/>
+                <a:cs typeface="字由点字典黑 2 Light" panose="00020600040101010101" charset="-122"/>
+                <a:sym typeface="字由点字典黑 2 Light" panose="00020600040101010101" charset="-122"/>
+              </a:rPr>
+              <a:t>（有向无环图），子任务类型包括搜索、解析、对比和报告生成，定义任务间的依赖关系。</a:t>
+            </a:r>
+            <a:endParaRPr lang="en-US" altLang="zh-CN" sz="1400" dirty="0">
+              <a:solidFill>
+                <a:srgbClr val="000000"/>
+              </a:solidFill>
+              <a:latin typeface="黑体" panose="02010609060101010101" pitchFamily="49" charset="-122"/>
+              <a:ea typeface="黑体" panose="02010609060101010101" pitchFamily="49" charset="-122"/>
+              <a:cs typeface="字由点字典黑 2 Light" panose="00020600040101010101" charset="-122"/>
+              <a:sym typeface="字由点字典黑 2 Light" panose="00020600040101010101" charset="-122"/>
+            </a:endParaRPr>
+          </a:p>
+          <a:p>
+            <a:pPr lvl="0" algn="just">
               <a:lnSpc>
                 <a:spcPts val="2240"/>
               </a:lnSpc>
             </a:pPr>
-            <a:r>
-              <a:rPr lang="en-US" sz="1400">
-                <a:solidFill>
-                  <a:srgbClr val="000000"/>
-                </a:solidFill>
-                <a:latin typeface="字由点字典黑 2 Light" panose="00020600040101010101" charset="-122"/>
-                <a:ea typeface="字由点字典黑 2 Light" panose="00020600040101010101" charset="-122"/>
-                <a:cs typeface="字由点字典黑 2 Light" panose="00020600040101010101" charset="-122"/>
-                <a:sym typeface="字由点字典黑 2 Light" panose="00020600040101010101" charset="-122"/>
-              </a:rPr>
-              <a:t>【项目方法2】简要说明项目中的关键模块、核心算法、工具调用方式或创新设计。</a:t>
-            </a:r>
+            <a:endParaRPr lang="zh-CN" altLang="en-US" sz="1400" dirty="0">
+              <a:solidFill>
+                <a:srgbClr val="000000"/>
+              </a:solidFill>
+              <a:latin typeface="黑体" panose="02010609060101010101" pitchFamily="49" charset="-122"/>
+              <a:ea typeface="黑体" panose="02010609060101010101" pitchFamily="49" charset="-122"/>
+              <a:cs typeface="字由点字典黑 2 Light" panose="00020600040101010101" charset="-122"/>
+              <a:sym typeface="字由点字典黑 2 Light" panose="00020600040101010101" charset="-122"/>
+            </a:endParaRPr>
+          </a:p>
+          <a:p>
+            <a:pPr lvl="0" algn="just">
+              <a:lnSpc>
+                <a:spcPts val="2240"/>
+              </a:lnSpc>
+            </a:pPr>
+            <a:r>
+              <a:rPr lang="en-US" altLang="zh-CN" sz="1400" dirty="0">
+                <a:solidFill>
+                  <a:srgbClr val="000000"/>
+                </a:solidFill>
+                <a:latin typeface="黑体" panose="02010609060101010101" pitchFamily="49" charset="-122"/>
+                <a:ea typeface="黑体" panose="02010609060101010101" pitchFamily="49" charset="-122"/>
+                <a:cs typeface="字由点字典黑 2 Light" panose="00020600040101010101" charset="-122"/>
+                <a:sym typeface="字由点字典黑 2 Light" panose="00020600040101010101" charset="-122"/>
+              </a:rPr>
+              <a:t>2.</a:t>
+            </a:r>
+            <a:r>
+              <a:rPr lang="zh-CN" altLang="en-US" sz="1400" dirty="0">
+                <a:solidFill>
+                  <a:srgbClr val="000000"/>
+                </a:solidFill>
+                <a:latin typeface="黑体" panose="02010609060101010101" pitchFamily="49" charset="-122"/>
+                <a:ea typeface="黑体" panose="02010609060101010101" pitchFamily="49" charset="-122"/>
+                <a:cs typeface="字由点字典黑 2 Light" panose="00020600040101010101" charset="-122"/>
+                <a:sym typeface="字由点字典黑 2 Light" panose="00020600040101010101" charset="-122"/>
+              </a:rPr>
+              <a:t>文献检索</a:t>
+            </a:r>
+            <a:r>
+              <a:rPr lang="en-US" altLang="zh-CN" sz="1400" dirty="0">
+                <a:solidFill>
+                  <a:srgbClr val="000000"/>
+                </a:solidFill>
+                <a:latin typeface="黑体" panose="02010609060101010101" pitchFamily="49" charset="-122"/>
+                <a:ea typeface="黑体" panose="02010609060101010101" pitchFamily="49" charset="-122"/>
+                <a:cs typeface="字由点字典黑 2 Light" panose="00020600040101010101" charset="-122"/>
+                <a:sym typeface="字由点字典黑 2 Light" panose="00020600040101010101" charset="-122"/>
+              </a:rPr>
+              <a:t>(</a:t>
+            </a:r>
+            <a:r>
+              <a:rPr lang="en-US" altLang="zh-CN" sz="1400" dirty="0">
+                <a:solidFill>
+                  <a:srgbClr val="000000"/>
+                </a:solidFill>
+                <a:latin typeface="Times New Roman" panose="02020603050405020304" pitchFamily="18" charset="0"/>
+                <a:ea typeface="黑体" panose="02010609060101010101" pitchFamily="49" charset="-122"/>
+                <a:cs typeface="Times New Roman" panose="02020603050405020304" pitchFamily="18" charset="0"/>
+                <a:sym typeface="字由点字典黑 2 Light" panose="00020600040101010101" charset="-122"/>
+              </a:rPr>
+              <a:t>S</a:t>
+            </a:r>
+            <a:r>
+              <a:rPr lang="en-US" altLang="zh-CN" sz="1400" dirty="0">
+                <a:solidFill>
+                  <a:srgbClr val="000000"/>
+                </a:solidFill>
+                <a:latin typeface="黑体" panose="02010609060101010101" pitchFamily="49" charset="-122"/>
+                <a:ea typeface="黑体" panose="02010609060101010101" pitchFamily="49" charset="-122"/>
+                <a:cs typeface="字由点字典黑 2 Light" panose="00020600040101010101" charset="-122"/>
+                <a:sym typeface="字由点字典黑 2 Light" panose="00020600040101010101" charset="-122"/>
+              </a:rPr>
+              <a:t>)</a:t>
+            </a:r>
+            <a:r>
+              <a:rPr lang="zh-CN" altLang="en-US" sz="1400" dirty="0">
+                <a:solidFill>
+                  <a:srgbClr val="000000"/>
+                </a:solidFill>
+                <a:latin typeface="黑体" panose="02010609060101010101" pitchFamily="49" charset="-122"/>
+                <a:ea typeface="黑体" panose="02010609060101010101" pitchFamily="49" charset="-122"/>
+                <a:cs typeface="字由点字典黑 2 Light" panose="00020600040101010101" charset="-122"/>
+                <a:sym typeface="字由点字典黑 2 Light" panose="00020600040101010101" charset="-122"/>
+              </a:rPr>
+              <a:t>：采用三级策略构建</a:t>
+            </a:r>
+            <a:r>
+              <a:rPr lang="en-US" altLang="zh-CN" sz="1400" dirty="0">
+                <a:solidFill>
+                  <a:srgbClr val="000000"/>
+                </a:solidFill>
+                <a:latin typeface="Times New Roman" panose="02020603050405020304" pitchFamily="18" charset="0"/>
+                <a:ea typeface="黑体" panose="02010609060101010101" pitchFamily="49" charset="-122"/>
+                <a:cs typeface="Times New Roman" panose="02020603050405020304" pitchFamily="18" charset="0"/>
+                <a:sym typeface="字由点字典黑 2 Light" panose="00020600040101010101" charset="-122"/>
+              </a:rPr>
+              <a:t>PubMed</a:t>
+            </a:r>
+            <a:r>
+              <a:rPr lang="zh-CN" altLang="en-US" sz="1400" dirty="0">
+                <a:solidFill>
+                  <a:srgbClr val="000000"/>
+                </a:solidFill>
+                <a:latin typeface="黑体" panose="02010609060101010101" pitchFamily="49" charset="-122"/>
+                <a:ea typeface="黑体" panose="02010609060101010101" pitchFamily="49" charset="-122"/>
+                <a:cs typeface="字由点字典黑 2 Light" panose="00020600040101010101" charset="-122"/>
+                <a:sym typeface="字由点字典黑 2 Light" panose="00020600040101010101" charset="-122"/>
+              </a:rPr>
+              <a:t>检索式</a:t>
+            </a:r>
+            <a:endParaRPr lang="en-US" altLang="zh-CN" sz="1400" dirty="0">
+              <a:solidFill>
+                <a:srgbClr val="000000"/>
+              </a:solidFill>
+              <a:latin typeface="黑体" panose="02010609060101010101" pitchFamily="49" charset="-122"/>
+              <a:ea typeface="黑体" panose="02010609060101010101" pitchFamily="49" charset="-122"/>
+              <a:cs typeface="字由点字典黑 2 Light" panose="00020600040101010101" charset="-122"/>
+              <a:sym typeface="字由点字典黑 2 Light" panose="00020600040101010101" charset="-122"/>
+            </a:endParaRPr>
+          </a:p>
+          <a:p>
+            <a:pPr lvl="0" algn="just">
+              <a:lnSpc>
+                <a:spcPts val="2240"/>
+              </a:lnSpc>
+            </a:pPr>
+            <a:endParaRPr lang="en-US" altLang="zh-CN" sz="1400" dirty="0">
+              <a:solidFill>
+                <a:srgbClr val="000000"/>
+              </a:solidFill>
+              <a:latin typeface="黑体" panose="02010609060101010101" pitchFamily="49" charset="-122"/>
+              <a:ea typeface="黑体" panose="02010609060101010101" pitchFamily="49" charset="-122"/>
+              <a:cs typeface="字由点字典黑 2 Light" panose="00020600040101010101" charset="-122"/>
+              <a:sym typeface="字由点字典黑 2 Light" panose="00020600040101010101" charset="-122"/>
+            </a:endParaRPr>
+          </a:p>
+          <a:p>
+            <a:pPr lvl="0" algn="just">
+              <a:lnSpc>
+                <a:spcPts val="2240"/>
+              </a:lnSpc>
+            </a:pPr>
+            <a:r>
+              <a:rPr lang="en-US" altLang="zh-CN" sz="1400" dirty="0">
+                <a:solidFill>
+                  <a:srgbClr val="000000"/>
+                </a:solidFill>
+                <a:latin typeface="黑体" panose="02010609060101010101" pitchFamily="49" charset="-122"/>
+                <a:ea typeface="黑体" panose="02010609060101010101" pitchFamily="49" charset="-122"/>
+                <a:cs typeface="字由点字典黑 2 Light" panose="00020600040101010101" charset="-122"/>
+                <a:sym typeface="字由点字典黑 2 Light" panose="00020600040101010101" charset="-122"/>
+              </a:rPr>
+              <a:t>3.</a:t>
+            </a:r>
+            <a:r>
+              <a:rPr lang="en-US" altLang="zh-CN" sz="1400" dirty="0">
+                <a:solidFill>
+                  <a:srgbClr val="000000"/>
+                </a:solidFill>
+                <a:latin typeface="Times New Roman" panose="02020603050405020304" pitchFamily="18" charset="0"/>
+                <a:ea typeface="黑体" panose="02010609060101010101" pitchFamily="49" charset="-122"/>
+                <a:cs typeface="Times New Roman" panose="02020603050405020304" pitchFamily="18" charset="0"/>
+                <a:sym typeface="字由点字典黑 2 Light" panose="00020600040101010101" charset="-122"/>
+              </a:rPr>
+              <a:t>Human-in-the-Loop(R)</a:t>
+            </a:r>
+            <a:r>
+              <a:rPr lang="zh-CN" altLang="en-US" sz="1400" dirty="0">
+                <a:solidFill>
+                  <a:srgbClr val="000000"/>
+                </a:solidFill>
+                <a:latin typeface="黑体" panose="02010609060101010101" pitchFamily="49" charset="-122"/>
+                <a:ea typeface="黑体" panose="02010609060101010101" pitchFamily="49" charset="-122"/>
+                <a:cs typeface="字由点字典黑 2 Light" panose="00020600040101010101" charset="-122"/>
+                <a:sym typeface="字由点字典黑 2 Light" panose="00020600040101010101" charset="-122"/>
+              </a:rPr>
+              <a:t>：系统在检索完成后和对比分析前设置两个中断点，用户可审核检索结果、调整检索策略或手动选取文献，确保</a:t>
+            </a:r>
+            <a:r>
+              <a:rPr lang="en-US" altLang="zh-CN" sz="1400" dirty="0">
+                <a:solidFill>
+                  <a:srgbClr val="000000"/>
+                </a:solidFill>
+                <a:latin typeface="Times New Roman" panose="02020603050405020304" pitchFamily="18" charset="0"/>
+                <a:ea typeface="黑体" panose="02010609060101010101" pitchFamily="49" charset="-122"/>
+                <a:cs typeface="Times New Roman" panose="02020603050405020304" pitchFamily="18" charset="0"/>
+                <a:sym typeface="字由点字典黑 2 Light" panose="00020600040101010101" charset="-122"/>
+              </a:rPr>
+              <a:t>Agent</a:t>
+            </a:r>
+            <a:r>
+              <a:rPr lang="zh-CN" altLang="en-US" sz="1400" dirty="0">
+                <a:solidFill>
+                  <a:srgbClr val="000000"/>
+                </a:solidFill>
+                <a:latin typeface="黑体" panose="02010609060101010101" pitchFamily="49" charset="-122"/>
+                <a:ea typeface="黑体" panose="02010609060101010101" pitchFamily="49" charset="-122"/>
+                <a:cs typeface="字由点字典黑 2 Light" panose="00020600040101010101" charset="-122"/>
+                <a:sym typeface="字由点字典黑 2 Light" panose="00020600040101010101" charset="-122"/>
+              </a:rPr>
+              <a:t>行为与用户意图对齐。</a:t>
+            </a:r>
+            <a:endParaRPr lang="en-US" altLang="zh-CN" sz="1400" dirty="0">
+              <a:solidFill>
+                <a:srgbClr val="000000"/>
+              </a:solidFill>
+              <a:latin typeface="黑体" panose="02010609060101010101" pitchFamily="49" charset="-122"/>
+              <a:ea typeface="黑体" panose="02010609060101010101" pitchFamily="49" charset="-122"/>
+              <a:cs typeface="字由点字典黑 2 Light" panose="00020600040101010101" charset="-122"/>
+              <a:sym typeface="字由点字典黑 2 Light" panose="00020600040101010101" charset="-122"/>
+            </a:endParaRPr>
+          </a:p>
+          <a:p>
+            <a:pPr lvl="0" algn="just">
+              <a:lnSpc>
+                <a:spcPts val="2240"/>
+              </a:lnSpc>
+            </a:pPr>
+            <a:endParaRPr lang="zh-CN" altLang="en-US" sz="1400" dirty="0">
+              <a:solidFill>
+                <a:srgbClr val="000000"/>
+              </a:solidFill>
+              <a:latin typeface="黑体" panose="02010609060101010101" pitchFamily="49" charset="-122"/>
+              <a:ea typeface="黑体" panose="02010609060101010101" pitchFamily="49" charset="-122"/>
+              <a:cs typeface="字由点字典黑 2 Light" panose="00020600040101010101" charset="-122"/>
+              <a:sym typeface="字由点字典黑 2 Light" panose="00020600040101010101" charset="-122"/>
+            </a:endParaRPr>
+          </a:p>
+          <a:p>
+            <a:pPr lvl="0" algn="just">
+              <a:lnSpc>
+                <a:spcPts val="2240"/>
+              </a:lnSpc>
+            </a:pPr>
+            <a:r>
+              <a:rPr lang="en-US" altLang="zh-CN" sz="1400" dirty="0">
+                <a:solidFill>
+                  <a:srgbClr val="000000"/>
+                </a:solidFill>
+                <a:latin typeface="黑体" panose="02010609060101010101" pitchFamily="49" charset="-122"/>
+                <a:ea typeface="黑体" panose="02010609060101010101" pitchFamily="49" charset="-122"/>
+                <a:cs typeface="字由点字典黑 2 Light" panose="00020600040101010101" charset="-122"/>
+                <a:sym typeface="字由点字典黑 2 Light" panose="00020600040101010101" charset="-122"/>
+              </a:rPr>
+              <a:t>4.</a:t>
+            </a:r>
+            <a:r>
+              <a:rPr lang="zh-CN" altLang="en-US" sz="1400" dirty="0">
+                <a:solidFill>
+                  <a:srgbClr val="000000"/>
+                </a:solidFill>
+                <a:latin typeface="黑体" panose="02010609060101010101" pitchFamily="49" charset="-122"/>
+                <a:ea typeface="黑体" panose="02010609060101010101" pitchFamily="49" charset="-122"/>
+                <a:cs typeface="字由点字典黑 2 Light" panose="00020600040101010101" charset="-122"/>
+                <a:sym typeface="字由点字典黑 2 Light" panose="00020600040101010101" charset="-122"/>
+              </a:rPr>
+              <a:t>文献解析</a:t>
+            </a:r>
+            <a:r>
+              <a:rPr lang="en-US" altLang="zh-CN" sz="1400" dirty="0">
+                <a:solidFill>
+                  <a:srgbClr val="000000"/>
+                </a:solidFill>
+                <a:latin typeface="黑体" panose="02010609060101010101" pitchFamily="49" charset="-122"/>
+                <a:ea typeface="黑体" panose="02010609060101010101" pitchFamily="49" charset="-122"/>
+                <a:cs typeface="字由点字典黑 2 Light" panose="00020600040101010101" charset="-122"/>
+                <a:sym typeface="字由点字典黑 2 Light" panose="00020600040101010101" charset="-122"/>
+              </a:rPr>
+              <a:t>(</a:t>
+            </a:r>
+            <a:r>
+              <a:rPr lang="en-US" altLang="zh-CN" sz="1400" dirty="0">
+                <a:solidFill>
+                  <a:srgbClr val="000000"/>
+                </a:solidFill>
+                <a:latin typeface="Times New Roman" panose="02020603050405020304" pitchFamily="18" charset="0"/>
+                <a:ea typeface="黑体" panose="02010609060101010101" pitchFamily="49" charset="-122"/>
+                <a:cs typeface="Times New Roman" panose="02020603050405020304" pitchFamily="18" charset="0"/>
+                <a:sym typeface="字由点字典黑 2 Light" panose="00020600040101010101" charset="-122"/>
+              </a:rPr>
+              <a:t>A</a:t>
+            </a:r>
+            <a:r>
+              <a:rPr lang="en-US" altLang="zh-CN" sz="1400" dirty="0">
+                <a:solidFill>
+                  <a:srgbClr val="000000"/>
+                </a:solidFill>
+                <a:latin typeface="黑体" panose="02010609060101010101" pitchFamily="49" charset="-122"/>
+                <a:ea typeface="黑体" panose="02010609060101010101" pitchFamily="49" charset="-122"/>
+                <a:cs typeface="字由点字典黑 2 Light" panose="00020600040101010101" charset="-122"/>
+                <a:sym typeface="字由点字典黑 2 Light" panose="00020600040101010101" charset="-122"/>
+              </a:rPr>
+              <a:t>)</a:t>
+            </a:r>
+            <a:r>
+              <a:rPr lang="zh-CN" altLang="en-US" sz="1400" dirty="0">
+                <a:solidFill>
+                  <a:srgbClr val="000000"/>
+                </a:solidFill>
+                <a:latin typeface="黑体" panose="02010609060101010101" pitchFamily="49" charset="-122"/>
+                <a:ea typeface="黑体" panose="02010609060101010101" pitchFamily="49" charset="-122"/>
+                <a:cs typeface="字由点字典黑 2 Light" panose="00020600040101010101" charset="-122"/>
+                <a:sym typeface="字由点字典黑 2 Light" panose="00020600040101010101" charset="-122"/>
+              </a:rPr>
+              <a:t>：由内建术语引擎进行字段验证与标注。</a:t>
+            </a:r>
+            <a:endParaRPr lang="en-US" altLang="zh-CN" sz="1400" dirty="0">
+              <a:solidFill>
+                <a:srgbClr val="000000"/>
+              </a:solidFill>
+              <a:latin typeface="黑体" panose="02010609060101010101" pitchFamily="49" charset="-122"/>
+              <a:ea typeface="黑体" panose="02010609060101010101" pitchFamily="49" charset="-122"/>
+              <a:cs typeface="字由点字典黑 2 Light" panose="00020600040101010101" charset="-122"/>
+              <a:sym typeface="字由点字典黑 2 Light" panose="00020600040101010101" charset="-122"/>
+            </a:endParaRPr>
+          </a:p>
+          <a:p>
+            <a:pPr lvl="0" algn="just">
+              <a:lnSpc>
+                <a:spcPts val="2240"/>
+              </a:lnSpc>
+            </a:pPr>
+            <a:endParaRPr lang="zh-CN" altLang="en-US" sz="1400" dirty="0">
+              <a:solidFill>
+                <a:srgbClr val="000000"/>
+              </a:solidFill>
+              <a:latin typeface="黑体" panose="02010609060101010101" pitchFamily="49" charset="-122"/>
+              <a:ea typeface="黑体" panose="02010609060101010101" pitchFamily="49" charset="-122"/>
+              <a:cs typeface="字由点字典黑 2 Light" panose="00020600040101010101" charset="-122"/>
+              <a:sym typeface="字由点字典黑 2 Light" panose="00020600040101010101" charset="-122"/>
+            </a:endParaRPr>
+          </a:p>
+          <a:p>
+            <a:pPr lvl="0" algn="just">
+              <a:lnSpc>
+                <a:spcPts val="2240"/>
+              </a:lnSpc>
+            </a:pPr>
+            <a:r>
+              <a:rPr lang="en-US" altLang="zh-CN" sz="1400" dirty="0">
+                <a:solidFill>
+                  <a:srgbClr val="000000"/>
+                </a:solidFill>
+                <a:latin typeface="黑体" panose="02010609060101010101" pitchFamily="49" charset="-122"/>
+                <a:ea typeface="黑体" panose="02010609060101010101" pitchFamily="49" charset="-122"/>
+                <a:cs typeface="字由点字典黑 2 Light" panose="00020600040101010101" charset="-122"/>
+                <a:sym typeface="字由点字典黑 2 Light" panose="00020600040101010101" charset="-122"/>
+              </a:rPr>
+              <a:t>5.</a:t>
+            </a:r>
+            <a:r>
+              <a:rPr lang="zh-CN" altLang="en-US" sz="1400" dirty="0">
+                <a:solidFill>
+                  <a:srgbClr val="000000"/>
+                </a:solidFill>
+                <a:latin typeface="黑体" panose="02010609060101010101" pitchFamily="49" charset="-122"/>
+                <a:ea typeface="黑体" panose="02010609060101010101" pitchFamily="49" charset="-122"/>
+                <a:cs typeface="字由点字典黑 2 Light" panose="00020600040101010101" charset="-122"/>
+                <a:sym typeface="字由点字典黑 2 Light" panose="00020600040101010101" charset="-122"/>
+              </a:rPr>
+              <a:t>跨文献对比</a:t>
+            </a:r>
+            <a:r>
+              <a:rPr lang="en-US" altLang="zh-CN" sz="1400" dirty="0">
+                <a:solidFill>
+                  <a:srgbClr val="000000"/>
+                </a:solidFill>
+                <a:latin typeface="黑体" panose="02010609060101010101" pitchFamily="49" charset="-122"/>
+                <a:ea typeface="黑体" panose="02010609060101010101" pitchFamily="49" charset="-122"/>
+                <a:cs typeface="字由点字典黑 2 Light" panose="00020600040101010101" charset="-122"/>
+                <a:sym typeface="字由点字典黑 2 Light" panose="00020600040101010101" charset="-122"/>
+              </a:rPr>
+              <a:t>(</a:t>
+            </a:r>
+            <a:r>
+              <a:rPr lang="en-US" altLang="zh-CN" sz="1400" dirty="0">
+                <a:solidFill>
+                  <a:srgbClr val="000000"/>
+                </a:solidFill>
+                <a:latin typeface="Times New Roman" panose="02020603050405020304" pitchFamily="18" charset="0"/>
+                <a:ea typeface="黑体" panose="02010609060101010101" pitchFamily="49" charset="-122"/>
+                <a:cs typeface="Times New Roman" panose="02020603050405020304" pitchFamily="18" charset="0"/>
+                <a:sym typeface="字由点字典黑 2 Light" panose="00020600040101010101" charset="-122"/>
+              </a:rPr>
+              <a:t>C</a:t>
+            </a:r>
+            <a:r>
+              <a:rPr lang="zh-CN" altLang="en-US" sz="1400" dirty="0">
+                <a:solidFill>
+                  <a:srgbClr val="000000"/>
+                </a:solidFill>
+                <a:latin typeface="Times New Roman" panose="02020603050405020304" pitchFamily="18" charset="0"/>
+                <a:ea typeface="黑体" panose="02010609060101010101" pitchFamily="49" charset="-122"/>
+                <a:cs typeface="Times New Roman" panose="02020603050405020304" pitchFamily="18" charset="0"/>
+                <a:sym typeface="字由点字典黑 2 Light" panose="00020600040101010101" charset="-122"/>
+              </a:rPr>
+              <a:t>、</a:t>
+            </a:r>
+            <a:r>
+              <a:rPr lang="en-US" altLang="zh-CN" sz="1400" dirty="0">
+                <a:solidFill>
+                  <a:srgbClr val="000000"/>
+                </a:solidFill>
+                <a:latin typeface="Times New Roman" panose="02020603050405020304" pitchFamily="18" charset="0"/>
+                <a:ea typeface="黑体" panose="02010609060101010101" pitchFamily="49" charset="-122"/>
+                <a:cs typeface="Times New Roman" panose="02020603050405020304" pitchFamily="18" charset="0"/>
+                <a:sym typeface="字由点字典黑 2 Light" panose="00020600040101010101" charset="-122"/>
+              </a:rPr>
+              <a:t>E</a:t>
+            </a:r>
+            <a:r>
+              <a:rPr lang="en-US" altLang="zh-CN" sz="1400" dirty="0">
+                <a:solidFill>
+                  <a:srgbClr val="000000"/>
+                </a:solidFill>
+                <a:latin typeface="黑体" panose="02010609060101010101" pitchFamily="49" charset="-122"/>
+                <a:ea typeface="黑体" panose="02010609060101010101" pitchFamily="49" charset="-122"/>
+                <a:cs typeface="字由点字典黑 2 Light" panose="00020600040101010101" charset="-122"/>
+                <a:sym typeface="字由点字典黑 2 Light" panose="00020600040101010101" charset="-122"/>
+              </a:rPr>
+              <a:t>)</a:t>
+            </a:r>
+            <a:r>
+              <a:rPr lang="zh-CN" altLang="en-US" sz="1400" dirty="0">
+                <a:solidFill>
+                  <a:srgbClr val="000000"/>
+                </a:solidFill>
+                <a:latin typeface="黑体" panose="02010609060101010101" pitchFamily="49" charset="-122"/>
+                <a:ea typeface="黑体" panose="02010609060101010101" pitchFamily="49" charset="-122"/>
+                <a:cs typeface="字由点字典黑 2 Light" panose="00020600040101010101" charset="-122"/>
+                <a:sym typeface="字由点字典黑 2 Light" panose="00020600040101010101" charset="-122"/>
+              </a:rPr>
+              <a:t>：基于“先结构化，后对比”策略</a:t>
+            </a:r>
+            <a:r>
+              <a:rPr lang="en-US" altLang="zh-CN" sz="1400" dirty="0">
+                <a:solidFill>
+                  <a:srgbClr val="000000"/>
+                </a:solidFill>
+                <a:latin typeface="黑体" panose="02010609060101010101" pitchFamily="49" charset="-122"/>
+                <a:ea typeface="黑体" panose="02010609060101010101" pitchFamily="49" charset="-122"/>
+                <a:cs typeface="字由点字典黑 2 Light" panose="00020600040101010101" charset="-122"/>
+                <a:sym typeface="字由点字典黑 2 Light" panose="00020600040101010101" charset="-122"/>
+              </a:rPr>
+              <a:t>——</a:t>
+            </a:r>
+            <a:r>
+              <a:rPr lang="zh-CN" altLang="en-US" sz="1400" dirty="0">
+                <a:solidFill>
+                  <a:srgbClr val="000000"/>
+                </a:solidFill>
+                <a:latin typeface="黑体" panose="02010609060101010101" pitchFamily="49" charset="-122"/>
+                <a:ea typeface="黑体" panose="02010609060101010101" pitchFamily="49" charset="-122"/>
+                <a:cs typeface="字由点字典黑 2 Light" panose="00020600040101010101" charset="-122"/>
+                <a:sym typeface="字由点字典黑 2 Light" panose="00020600040101010101" charset="-122"/>
+              </a:rPr>
+              <a:t>将每篇文献的结构化</a:t>
+            </a:r>
+            <a:r>
+              <a:rPr lang="en-US" altLang="zh-CN" sz="1400" dirty="0">
+                <a:solidFill>
+                  <a:srgbClr val="000000"/>
+                </a:solidFill>
+                <a:latin typeface="Times New Roman" panose="02020603050405020304" pitchFamily="18" charset="0"/>
+                <a:ea typeface="黑体" panose="02010609060101010101" pitchFamily="49" charset="-122"/>
+                <a:cs typeface="Times New Roman" panose="02020603050405020304" pitchFamily="18" charset="0"/>
+                <a:sym typeface="字由点字典黑 2 Light" panose="00020600040101010101" charset="-122"/>
+              </a:rPr>
+              <a:t>JSON</a:t>
+            </a:r>
+            <a:r>
+              <a:rPr lang="zh-CN" altLang="en-US" sz="1400" dirty="0">
+                <a:solidFill>
+                  <a:srgbClr val="000000"/>
+                </a:solidFill>
+                <a:latin typeface="黑体" panose="02010609060101010101" pitchFamily="49" charset="-122"/>
+                <a:ea typeface="黑体" panose="02010609060101010101" pitchFamily="49" charset="-122"/>
+                <a:cs typeface="字由点字典黑 2 Light" panose="00020600040101010101" charset="-122"/>
+                <a:sym typeface="字由点字典黑 2 Light" panose="00020600040101010101" charset="-122"/>
+              </a:rPr>
+              <a:t>数据构建为摘要卡片</a:t>
+            </a:r>
+            <a:endParaRPr lang="en-US" altLang="zh-CN" sz="1400" dirty="0">
+              <a:solidFill>
+                <a:srgbClr val="000000"/>
+              </a:solidFill>
+              <a:latin typeface="黑体" panose="02010609060101010101" pitchFamily="49" charset="-122"/>
+              <a:ea typeface="黑体" panose="02010609060101010101" pitchFamily="49" charset="-122"/>
+              <a:cs typeface="字由点字典黑 2 Light" panose="00020600040101010101" charset="-122"/>
+              <a:sym typeface="字由点字典黑 2 Light" panose="00020600040101010101" charset="-122"/>
+            </a:endParaRPr>
+          </a:p>
+          <a:p>
+            <a:pPr lvl="0" algn="just">
+              <a:lnSpc>
+                <a:spcPts val="2240"/>
+              </a:lnSpc>
+            </a:pPr>
+            <a:endParaRPr lang="en-US" altLang="zh-CN" sz="1400" dirty="0">
+              <a:solidFill>
+                <a:srgbClr val="000000"/>
+              </a:solidFill>
+              <a:latin typeface="黑体" panose="02010609060101010101" pitchFamily="49" charset="-122"/>
+              <a:ea typeface="黑体" panose="02010609060101010101" pitchFamily="49" charset="-122"/>
+              <a:cs typeface="字由点字典黑 2 Light" panose="00020600040101010101" charset="-122"/>
+              <a:sym typeface="字由点字典黑 2 Light" panose="00020600040101010101" charset="-122"/>
+            </a:endParaRPr>
+          </a:p>
+          <a:p>
+            <a:pPr lvl="0" algn="just">
+              <a:lnSpc>
+                <a:spcPts val="2240"/>
+              </a:lnSpc>
+            </a:pPr>
+            <a:r>
+              <a:rPr lang="en-US" altLang="zh-CN" sz="1400" dirty="0">
+                <a:solidFill>
+                  <a:srgbClr val="000000"/>
+                </a:solidFill>
+                <a:latin typeface="黑体" panose="02010609060101010101" pitchFamily="49" charset="-122"/>
+                <a:ea typeface="黑体" panose="02010609060101010101" pitchFamily="49" charset="-122"/>
+                <a:cs typeface="字由点字典黑 2 Light" panose="00020600040101010101" charset="-122"/>
+                <a:sym typeface="字由点字典黑 2 Light" panose="00020600040101010101" charset="-122"/>
+              </a:rPr>
+              <a:t>6.</a:t>
+            </a:r>
+            <a:r>
+              <a:rPr lang="zh-CN" altLang="en-US" sz="1400" dirty="0">
+                <a:solidFill>
+                  <a:srgbClr val="000000"/>
+                </a:solidFill>
+                <a:latin typeface="黑体" panose="02010609060101010101" pitchFamily="49" charset="-122"/>
+                <a:ea typeface="黑体" panose="02010609060101010101" pitchFamily="49" charset="-122"/>
+                <a:cs typeface="字由点字典黑 2 Light" panose="00020600040101010101" charset="-122"/>
+                <a:sym typeface="字由点字典黑 2 Light" panose="00020600040101010101" charset="-122"/>
+              </a:rPr>
+              <a:t>报告生成</a:t>
+            </a:r>
+            <a:r>
+              <a:rPr lang="en-US" altLang="zh-CN" sz="1400" dirty="0">
+                <a:solidFill>
+                  <a:srgbClr val="000000"/>
+                </a:solidFill>
+                <a:latin typeface="黑体" panose="02010609060101010101" pitchFamily="49" charset="-122"/>
+                <a:ea typeface="黑体" panose="02010609060101010101" pitchFamily="49" charset="-122"/>
+                <a:cs typeface="字由点字典黑 2 Light" panose="00020600040101010101" charset="-122"/>
+                <a:sym typeface="字由点字典黑 2 Light" panose="00020600040101010101" charset="-122"/>
+              </a:rPr>
+              <a:t>(</a:t>
+            </a:r>
+            <a:r>
+              <a:rPr lang="en-US" altLang="zh-CN" sz="1400" dirty="0">
+                <a:solidFill>
+                  <a:srgbClr val="000000"/>
+                </a:solidFill>
+                <a:latin typeface="Times New Roman" panose="02020603050405020304" pitchFamily="18" charset="0"/>
+                <a:ea typeface="黑体" panose="02010609060101010101" pitchFamily="49" charset="-122"/>
+                <a:cs typeface="Times New Roman" panose="02020603050405020304" pitchFamily="18" charset="0"/>
+                <a:sym typeface="字由点字典黑 2 Light" panose="00020600040101010101" charset="-122"/>
+              </a:rPr>
+              <a:t>T</a:t>
+            </a:r>
+            <a:r>
+              <a:rPr lang="en-US" altLang="zh-CN" sz="1400" dirty="0">
+                <a:solidFill>
+                  <a:srgbClr val="000000"/>
+                </a:solidFill>
+                <a:latin typeface="黑体" panose="02010609060101010101" pitchFamily="49" charset="-122"/>
+                <a:ea typeface="黑体" panose="02010609060101010101" pitchFamily="49" charset="-122"/>
+                <a:cs typeface="字由点字典黑 2 Light" panose="00020600040101010101" charset="-122"/>
+                <a:sym typeface="字由点字典黑 2 Light" panose="00020600040101010101" charset="-122"/>
+              </a:rPr>
+              <a:t>)</a:t>
+            </a:r>
+            <a:r>
+              <a:rPr lang="zh-CN" altLang="en-US" sz="1400" dirty="0">
+                <a:solidFill>
+                  <a:srgbClr val="000000"/>
+                </a:solidFill>
+                <a:latin typeface="黑体" panose="02010609060101010101" pitchFamily="49" charset="-122"/>
+                <a:ea typeface="黑体" panose="02010609060101010101" pitchFamily="49" charset="-122"/>
+                <a:cs typeface="字由点字典黑 2 Light" panose="00020600040101010101" charset="-122"/>
+                <a:sym typeface="字由点字典黑 2 Light" panose="00020600040101010101" charset="-122"/>
+              </a:rPr>
+              <a:t>：</a:t>
+            </a:r>
+            <a:r>
+              <a:rPr lang="en-US" altLang="zh-CN" sz="1400" dirty="0">
+                <a:solidFill>
+                  <a:srgbClr val="000000"/>
+                </a:solidFill>
+                <a:latin typeface="黑体" panose="02010609060101010101" pitchFamily="49" charset="-122"/>
+                <a:ea typeface="黑体" panose="02010609060101010101" pitchFamily="49" charset="-122"/>
+                <a:cs typeface="字由点字典黑 2 Light" panose="00020600040101010101" charset="-122"/>
+                <a:sym typeface="字由点字典黑 2 Light" panose="00020600040101010101" charset="-122"/>
+              </a:rPr>
+              <a:t>LLM</a:t>
+            </a:r>
+            <a:r>
+              <a:rPr lang="zh-CN" altLang="en-US" sz="1400" dirty="0">
+                <a:solidFill>
+                  <a:srgbClr val="000000"/>
+                </a:solidFill>
+                <a:latin typeface="黑体" panose="02010609060101010101" pitchFamily="49" charset="-122"/>
+                <a:ea typeface="黑体" panose="02010609060101010101" pitchFamily="49" charset="-122"/>
+                <a:cs typeface="字由点字典黑 2 Light" panose="00020600040101010101" charset="-122"/>
+                <a:sym typeface="字由点字典黑 2 Light" panose="00020600040101010101" charset="-122"/>
+              </a:rPr>
+              <a:t>汇总所有结构化数据与对比分析结果，生成包含研究背景综述、文献逐篇介绍、对比分析总表、结论与建议的结构化报告</a:t>
+            </a:r>
+            <a:endParaRPr lang="en-US" sz="1400" dirty="0">
+              <a:solidFill>
+                <a:srgbClr val="000000"/>
+              </a:solidFill>
+              <a:latin typeface="黑体" panose="02010609060101010101" pitchFamily="49" charset="-122"/>
+              <a:ea typeface="黑体" panose="02010609060101010101" pitchFamily="49" charset="-122"/>
+              <a:cs typeface="字由点字典黑 2 Light" panose="00020600040101010101" charset="-122"/>
+              <a:sym typeface="字由点字典黑 2 Light" panose="00020600040101010101" charset="-122"/>
+            </a:endParaRPr>
           </a:p>
         </p:txBody>
       </p:sp>
@@ -7048,14 +8488,14 @@
       </p:sp>
       <p:sp>
         <p:nvSpPr>
-          <p:cNvPr id="97" name="TextBox 97"/>
+          <p:cNvPr id="100" name="TextBox 100"/>
           <p:cNvSpPr txBox="1"/>
           <p:nvPr/>
         </p:nvSpPr>
         <p:spPr>
           <a:xfrm>
-            <a:off x="4518571" y="20602123"/>
-            <a:ext cx="3624341" cy="337185"/>
+            <a:off x="555520" y="14306398"/>
+            <a:ext cx="933624" cy="317844"/>
           </a:xfrm>
           <a:prstGeom prst="rect">
             <a:avLst/>
@@ -7067,36 +8507,101 @@
           </a:bodyPr>
           <a:lstStyle/>
           <a:p>
-            <a:pPr marL="0" lvl="0" indent="0" algn="l">
+            <a:pPr algn="l">
               <a:lnSpc>
                 <a:spcPts val="2880"/>
               </a:lnSpc>
+              <a:spcBef>
+                <a:spcPct val="0"/>
+              </a:spcBef>
             </a:pPr>
             <a:r>
-              <a:rPr lang="en-US" sz="1800">
-                <a:solidFill>
-                  <a:srgbClr val="FFFFFF"/>
-                </a:solidFill>
-                <a:latin typeface="字由点字典黑 1" panose="00020600040101010101" charset="-122"/>
-                <a:ea typeface="字由点字典黑 1" panose="00020600040101010101" charset="-122"/>
-                <a:cs typeface="字由点字典黑 1" panose="00020600040101010101" charset="-122"/>
-                <a:sym typeface="字由点字典黑 1" panose="00020600040101010101" charset="-122"/>
-              </a:rPr>
-              <a:t>项目网站 / 论文链接（如有）：</a:t>
-            </a:r>
+              <a:rPr lang="en-US" sz="1800" b="1" spc="-26" dirty="0" err="1">
+                <a:solidFill>
+                  <a:srgbClr val="000000"/>
+                </a:solidFill>
+                <a:latin typeface="黑体" panose="02010609060101010101" pitchFamily="49" charset="-122"/>
+                <a:ea typeface="黑体" panose="02010609060101010101" pitchFamily="49" charset="-122"/>
+                <a:cs typeface="字由点字典黑 2 Bold" panose="00020600040101010101" charset="-122"/>
+                <a:sym typeface="字由点字典黑 2 Bold" panose="00020600040101010101" charset="-122"/>
+              </a:rPr>
+              <a:t>项目方法</a:t>
+            </a:r>
+            <a:endParaRPr lang="en-US" sz="1800" b="1" spc="-26" dirty="0">
+              <a:solidFill>
+                <a:srgbClr val="000000"/>
+              </a:solidFill>
+              <a:latin typeface="黑体" panose="02010609060101010101" pitchFamily="49" charset="-122"/>
+              <a:ea typeface="黑体" panose="02010609060101010101" pitchFamily="49" charset="-122"/>
+              <a:cs typeface="字由点字典黑 2 Bold" panose="00020600040101010101" charset="-122"/>
+              <a:sym typeface="字由点字典黑 2 Bold" panose="00020600040101010101" charset="-122"/>
+            </a:endParaRPr>
           </a:p>
         </p:txBody>
       </p:sp>
       <p:sp>
         <p:nvSpPr>
-          <p:cNvPr id="99" name="TextBox 99"/>
+          <p:cNvPr id="104" name="TextBox 104"/>
           <p:cNvSpPr txBox="1"/>
           <p:nvPr/>
         </p:nvSpPr>
         <p:spPr>
           <a:xfrm>
-            <a:off x="1152552" y="15041890"/>
-            <a:ext cx="3366019" cy="271780"/>
+            <a:off x="9938622" y="16250981"/>
+            <a:ext cx="1273959" cy="317844"/>
+          </a:xfrm>
+          <a:prstGeom prst="rect">
+            <a:avLst/>
+          </a:prstGeom>
+        </p:spPr>
+        <p:txBody>
+          <a:bodyPr wrap="square" lIns="0" tIns="0" rIns="0" bIns="0" rtlCol="0" anchor="t">
+            <a:spAutoFit/>
+          </a:bodyPr>
+          <a:lstStyle/>
+          <a:p>
+            <a:pPr algn="ctr">
+              <a:lnSpc>
+                <a:spcPts val="2880"/>
+              </a:lnSpc>
+              <a:spcBef>
+                <a:spcPct val="0"/>
+              </a:spcBef>
+            </a:pPr>
+            <a:r>
+              <a:rPr lang="en-US" sz="1800" b="1" dirty="0" err="1">
+                <a:solidFill>
+                  <a:srgbClr val="000000"/>
+                </a:solidFill>
+                <a:latin typeface="黑体" panose="02010609060101010101" pitchFamily="49" charset="-122"/>
+                <a:ea typeface="黑体" panose="02010609060101010101" pitchFamily="49" charset="-122"/>
+                <a:cs typeface="字由点字典黑 2 Bold" panose="00020600040101010101" charset="-122"/>
+                <a:sym typeface="字由点字典黑 2 Bold" panose="00020600040101010101" charset="-122"/>
+              </a:rPr>
+              <a:t>未来改进</a:t>
+            </a:r>
+            <a:endParaRPr lang="en-US" sz="1800" b="1" dirty="0">
+              <a:solidFill>
+                <a:srgbClr val="000000"/>
+              </a:solidFill>
+              <a:latin typeface="黑体" panose="02010609060101010101" pitchFamily="49" charset="-122"/>
+              <a:ea typeface="黑体" panose="02010609060101010101" pitchFamily="49" charset="-122"/>
+              <a:cs typeface="字由点字典黑 2 Bold" panose="00020600040101010101" charset="-122"/>
+              <a:sym typeface="字由点字典黑 2 Bold" panose="00020600040101010101" charset="-122"/>
+            </a:endParaRPr>
+          </a:p>
+        </p:txBody>
+      </p:sp>
+      <p:sp>
+        <p:nvSpPr>
+          <p:cNvPr id="105" name="TextBox 105"/>
+          <p:cNvSpPr txBox="1"/>
+          <p:nvPr/>
+        </p:nvSpPr>
+        <p:spPr>
+          <a:xfrm>
+            <a:off x="10155646" y="16663554"/>
+            <a:ext cx="4324189" cy="3063211"/>
           </a:xfrm>
           <a:prstGeom prst="rect">
             <a:avLst/>
@@ -7108,297 +8613,408 @@
           </a:bodyPr>
           <a:lstStyle/>
           <a:p>
-            <a:pPr marL="0" lvl="0" indent="0" algn="ctr">
+            <a:pPr lvl="0" algn="just">
               <a:lnSpc>
                 <a:spcPts val="2240"/>
               </a:lnSpc>
             </a:pPr>
             <a:r>
-              <a:rPr lang="en-US" sz="1400">
-                <a:solidFill>
-                  <a:srgbClr val="000000"/>
-                </a:solidFill>
-                <a:latin typeface="字由点字典黑 2 Light" panose="00020600040101010101" charset="-122"/>
-                <a:ea typeface="字由点字典黑 2 Light" panose="00020600040101010101" charset="-122"/>
-                <a:cs typeface="字由点字典黑 2 Light" panose="00020600040101010101" charset="-122"/>
-                <a:sym typeface="字由点字典黑 2 Light" panose="00020600040101010101" charset="-122"/>
-              </a:rPr>
-              <a:t>【流程图】</a:t>
-            </a:r>
+              <a:rPr lang="zh-CN" altLang="en-US" sz="1400" dirty="0">
+                <a:solidFill>
+                  <a:srgbClr val="000000"/>
+                </a:solidFill>
+                <a:latin typeface="黑体" panose="02010609060101010101" pitchFamily="49" charset="-122"/>
+                <a:ea typeface="黑体" panose="02010609060101010101" pitchFamily="49" charset="-122"/>
+                <a:cs typeface="字由点字典黑 2 Light" panose="00020600040101010101" charset="-122"/>
+                <a:sym typeface="字由点字典黑 2 Light" panose="00020600040101010101" charset="-122"/>
+              </a:rPr>
+              <a:t>方向：功能完善</a:t>
+            </a:r>
+          </a:p>
+          <a:p>
+            <a:pPr lvl="0" algn="just">
+              <a:lnSpc>
+                <a:spcPts val="2240"/>
+              </a:lnSpc>
+            </a:pPr>
+            <a:r>
+              <a:rPr lang="zh-CN" altLang="en-US" sz="1400" dirty="0">
+                <a:solidFill>
+                  <a:srgbClr val="000000"/>
+                </a:solidFill>
+                <a:latin typeface="黑体" panose="02010609060101010101" pitchFamily="49" charset="-122"/>
+                <a:ea typeface="黑体" panose="02010609060101010101" pitchFamily="49" charset="-122"/>
+                <a:cs typeface="字由点字典黑 2 Light" panose="00020600040101010101" charset="-122"/>
+                <a:sym typeface="字由点字典黑 2 Light" panose="00020600040101010101" charset="-122"/>
+              </a:rPr>
+              <a:t>具体内容</a:t>
+            </a:r>
+            <a:r>
+              <a:rPr lang="en-US" altLang="zh-CN" sz="1400" dirty="0">
+                <a:solidFill>
+                  <a:srgbClr val="000000"/>
+                </a:solidFill>
+                <a:latin typeface="黑体" panose="02010609060101010101" pitchFamily="49" charset="-122"/>
+                <a:ea typeface="黑体" panose="02010609060101010101" pitchFamily="49" charset="-122"/>
+                <a:cs typeface="字由点字典黑 2 Light" panose="00020600040101010101" charset="-122"/>
+                <a:sym typeface="字由点字典黑 2 Light" panose="00020600040101010101" charset="-122"/>
+              </a:rPr>
+              <a:t>: </a:t>
+            </a:r>
+            <a:r>
+              <a:rPr lang="zh-CN" altLang="en-US" sz="1400" dirty="0">
+                <a:solidFill>
+                  <a:srgbClr val="000000"/>
+                </a:solidFill>
+                <a:latin typeface="黑体" panose="02010609060101010101" pitchFamily="49" charset="-122"/>
+                <a:ea typeface="黑体" panose="02010609060101010101" pitchFamily="49" charset="-122"/>
+                <a:cs typeface="字由点字典黑 2 Light" panose="00020600040101010101" charset="-122"/>
+                <a:sym typeface="字由点字典黑 2 Light" panose="00020600040101010101" charset="-122"/>
+              </a:rPr>
+              <a:t>接入</a:t>
+            </a:r>
+            <a:r>
+              <a:rPr lang="en-US" altLang="zh-CN" sz="1400" dirty="0">
+                <a:solidFill>
+                  <a:srgbClr val="000000"/>
+                </a:solidFill>
+                <a:latin typeface="Times New Roman" panose="02020603050405020304" pitchFamily="18" charset="0"/>
+                <a:ea typeface="黑体" panose="02010609060101010101" pitchFamily="49" charset="-122"/>
+                <a:cs typeface="Times New Roman" panose="02020603050405020304" pitchFamily="18" charset="0"/>
+                <a:sym typeface="字由点字典黑 2 Light" panose="00020600040101010101" charset="-122"/>
+              </a:rPr>
+              <a:t>PMC</a:t>
+            </a:r>
+            <a:r>
+              <a:rPr lang="zh-CN" altLang="en-US" sz="1400" dirty="0">
+                <a:solidFill>
+                  <a:srgbClr val="000000"/>
+                </a:solidFill>
+                <a:latin typeface="黑体" panose="02010609060101010101" pitchFamily="49" charset="-122"/>
+                <a:ea typeface="黑体" panose="02010609060101010101" pitchFamily="49" charset="-122"/>
+                <a:cs typeface="字由点字典黑 2 Light" panose="00020600040101010101" charset="-122"/>
+                <a:sym typeface="字由点字典黑 2 Light" panose="00020600040101010101" charset="-122"/>
+              </a:rPr>
+              <a:t>全文</a:t>
+            </a:r>
+            <a:r>
+              <a:rPr lang="en-US" altLang="zh-CN" sz="1400" dirty="0">
+                <a:solidFill>
+                  <a:srgbClr val="000000"/>
+                </a:solidFill>
+                <a:latin typeface="Times New Roman" panose="02020603050405020304" pitchFamily="18" charset="0"/>
+                <a:ea typeface="黑体" panose="02010609060101010101" pitchFamily="49" charset="-122"/>
+                <a:cs typeface="Times New Roman" panose="02020603050405020304" pitchFamily="18" charset="0"/>
+                <a:sym typeface="字由点字典黑 2 Light" panose="00020600040101010101" charset="-122"/>
+              </a:rPr>
+              <a:t>PDF</a:t>
+            </a:r>
+            <a:r>
+              <a:rPr lang="zh-CN" altLang="en-US" sz="1400" dirty="0">
+                <a:solidFill>
+                  <a:srgbClr val="000000"/>
+                </a:solidFill>
+                <a:latin typeface="黑体" panose="02010609060101010101" pitchFamily="49" charset="-122"/>
+                <a:ea typeface="黑体" panose="02010609060101010101" pitchFamily="49" charset="-122"/>
+                <a:cs typeface="字由点字典黑 2 Light" panose="00020600040101010101" charset="-122"/>
+                <a:sym typeface="字由点字典黑 2 Light" panose="00020600040101010101" charset="-122"/>
+              </a:rPr>
+              <a:t>下载与解析流水线，实现真正的图表级原文对照；完善术语知识库（靶点</a:t>
+            </a:r>
+            <a:r>
+              <a:rPr lang="en-US" altLang="zh-CN" sz="1400" dirty="0">
+                <a:solidFill>
+                  <a:srgbClr val="000000"/>
+                </a:solidFill>
+                <a:latin typeface="黑体" panose="02010609060101010101" pitchFamily="49" charset="-122"/>
+                <a:ea typeface="黑体" panose="02010609060101010101" pitchFamily="49" charset="-122"/>
+                <a:cs typeface="字由点字典黑 2 Light" panose="00020600040101010101" charset="-122"/>
+                <a:sym typeface="字由点字典黑 2 Light" panose="00020600040101010101" charset="-122"/>
+              </a:rPr>
+              <a:t>/</a:t>
+            </a:r>
+            <a:r>
+              <a:rPr lang="zh-CN" altLang="en-US" sz="1400" dirty="0">
+                <a:solidFill>
+                  <a:srgbClr val="000000"/>
+                </a:solidFill>
+                <a:latin typeface="黑体" panose="02010609060101010101" pitchFamily="49" charset="-122"/>
+                <a:ea typeface="黑体" panose="02010609060101010101" pitchFamily="49" charset="-122"/>
+                <a:cs typeface="字由点字典黑 2 Light" panose="00020600040101010101" charset="-122"/>
+                <a:sym typeface="字由点字典黑 2 Light" panose="00020600040101010101" charset="-122"/>
+              </a:rPr>
+              <a:t>突变</a:t>
+            </a:r>
+            <a:r>
+              <a:rPr lang="en-US" altLang="zh-CN" sz="1400" dirty="0">
+                <a:solidFill>
+                  <a:srgbClr val="000000"/>
+                </a:solidFill>
+                <a:latin typeface="黑体" panose="02010609060101010101" pitchFamily="49" charset="-122"/>
+                <a:ea typeface="黑体" panose="02010609060101010101" pitchFamily="49" charset="-122"/>
+                <a:cs typeface="字由点字典黑 2 Light" panose="00020600040101010101" charset="-122"/>
+                <a:sym typeface="字由点字典黑 2 Light" panose="00020600040101010101" charset="-122"/>
+              </a:rPr>
+              <a:t>/</a:t>
+            </a:r>
+            <a:r>
+              <a:rPr lang="zh-CN" altLang="en-US" sz="1400" dirty="0">
+                <a:solidFill>
+                  <a:srgbClr val="000000"/>
+                </a:solidFill>
+                <a:latin typeface="黑体" panose="02010609060101010101" pitchFamily="49" charset="-122"/>
+                <a:ea typeface="黑体" panose="02010609060101010101" pitchFamily="49" charset="-122"/>
+                <a:cs typeface="字由点字典黑 2 Light" panose="00020600040101010101" charset="-122"/>
+                <a:sym typeface="字由点字典黑 2 Light" panose="00020600040101010101" charset="-122"/>
+              </a:rPr>
+              <a:t>药物分类词典数据填充）</a:t>
+            </a:r>
+            <a:endParaRPr lang="en-US" altLang="zh-CN" sz="1400" dirty="0">
+              <a:solidFill>
+                <a:srgbClr val="000000"/>
+              </a:solidFill>
+              <a:latin typeface="黑体" panose="02010609060101010101" pitchFamily="49" charset="-122"/>
+              <a:ea typeface="黑体" panose="02010609060101010101" pitchFamily="49" charset="-122"/>
+              <a:cs typeface="字由点字典黑 2 Light" panose="00020600040101010101" charset="-122"/>
+              <a:sym typeface="字由点字典黑 2 Light" panose="00020600040101010101" charset="-122"/>
+            </a:endParaRPr>
+          </a:p>
+          <a:p>
+            <a:pPr lvl="0" algn="just">
+              <a:lnSpc>
+                <a:spcPts val="2240"/>
+              </a:lnSpc>
+            </a:pPr>
+            <a:endParaRPr lang="zh-CN" altLang="en-US" sz="1400" dirty="0">
+              <a:solidFill>
+                <a:srgbClr val="000000"/>
+              </a:solidFill>
+              <a:latin typeface="黑体" panose="02010609060101010101" pitchFamily="49" charset="-122"/>
+              <a:ea typeface="黑体" panose="02010609060101010101" pitchFamily="49" charset="-122"/>
+              <a:cs typeface="字由点字典黑 2 Light" panose="00020600040101010101" charset="-122"/>
+              <a:sym typeface="字由点字典黑 2 Light" panose="00020600040101010101" charset="-122"/>
+            </a:endParaRPr>
+          </a:p>
+          <a:p>
+            <a:pPr lvl="0" algn="just">
+              <a:lnSpc>
+                <a:spcPts val="2240"/>
+              </a:lnSpc>
+            </a:pPr>
+            <a:r>
+              <a:rPr lang="zh-CN" altLang="en-US" sz="1400" dirty="0">
+                <a:solidFill>
+                  <a:srgbClr val="000000"/>
+                </a:solidFill>
+                <a:latin typeface="黑体" panose="02010609060101010101" pitchFamily="49" charset="-122"/>
+                <a:ea typeface="黑体" panose="02010609060101010101" pitchFamily="49" charset="-122"/>
+                <a:cs typeface="字由点字典黑 2 Light" panose="00020600040101010101" charset="-122"/>
+                <a:sym typeface="字由点字典黑 2 Light" panose="00020600040101010101" charset="-122"/>
+              </a:rPr>
+              <a:t>方向：场景拓展</a:t>
+            </a:r>
+          </a:p>
+          <a:p>
+            <a:pPr lvl="0" algn="just">
+              <a:lnSpc>
+                <a:spcPts val="2240"/>
+              </a:lnSpc>
+            </a:pPr>
+            <a:r>
+              <a:rPr lang="zh-CN" altLang="en-US" sz="1400" dirty="0">
+                <a:solidFill>
+                  <a:srgbClr val="000000"/>
+                </a:solidFill>
+                <a:latin typeface="黑体" panose="02010609060101010101" pitchFamily="49" charset="-122"/>
+                <a:ea typeface="黑体" panose="02010609060101010101" pitchFamily="49" charset="-122"/>
+                <a:cs typeface="字由点字典黑 2 Light" panose="00020600040101010101" charset="-122"/>
+                <a:sym typeface="字由点字典黑 2 Light" panose="00020600040101010101" charset="-122"/>
+              </a:rPr>
+              <a:t>具体内容：增加用户本地</a:t>
+            </a:r>
+            <a:r>
+              <a:rPr lang="en-US" altLang="zh-CN" sz="1400" dirty="0">
+                <a:solidFill>
+                  <a:srgbClr val="000000"/>
+                </a:solidFill>
+                <a:latin typeface="Times New Roman" panose="02020603050405020304" pitchFamily="18" charset="0"/>
+                <a:ea typeface="黑体" panose="02010609060101010101" pitchFamily="49" charset="-122"/>
+                <a:cs typeface="Times New Roman" panose="02020603050405020304" pitchFamily="18" charset="0"/>
+                <a:sym typeface="字由点字典黑 2 Light" panose="00020600040101010101" charset="-122"/>
+              </a:rPr>
+              <a:t>PDF</a:t>
+            </a:r>
+            <a:r>
+              <a:rPr lang="zh-CN" altLang="en-US" sz="1400" dirty="0">
+                <a:solidFill>
+                  <a:srgbClr val="000000"/>
+                </a:solidFill>
+                <a:latin typeface="黑体" panose="02010609060101010101" pitchFamily="49" charset="-122"/>
+                <a:ea typeface="黑体" panose="02010609060101010101" pitchFamily="49" charset="-122"/>
+                <a:cs typeface="字由点字典黑 2 Light" panose="00020600040101010101" charset="-122"/>
+                <a:sym typeface="字由点字典黑 2 Light" panose="00020600040101010101" charset="-122"/>
+              </a:rPr>
+              <a:t>上传解析功能</a:t>
+            </a:r>
+            <a:endParaRPr lang="en-US" altLang="zh-CN" sz="1400" dirty="0">
+              <a:solidFill>
+                <a:srgbClr val="000000"/>
+              </a:solidFill>
+              <a:latin typeface="黑体" panose="02010609060101010101" pitchFamily="49" charset="-122"/>
+              <a:ea typeface="黑体" panose="02010609060101010101" pitchFamily="49" charset="-122"/>
+              <a:cs typeface="字由点字典黑 2 Light" panose="00020600040101010101" charset="-122"/>
+              <a:sym typeface="字由点字典黑 2 Light" panose="00020600040101010101" charset="-122"/>
+            </a:endParaRPr>
+          </a:p>
+          <a:p>
+            <a:pPr lvl="0" algn="just">
+              <a:lnSpc>
+                <a:spcPts val="2240"/>
+              </a:lnSpc>
+            </a:pPr>
+            <a:endParaRPr lang="zh-CN" altLang="en-US" sz="1400" dirty="0">
+              <a:solidFill>
+                <a:srgbClr val="000000"/>
+              </a:solidFill>
+              <a:latin typeface="黑体" panose="02010609060101010101" pitchFamily="49" charset="-122"/>
+              <a:ea typeface="黑体" panose="02010609060101010101" pitchFamily="49" charset="-122"/>
+              <a:cs typeface="字由点字典黑 2 Light" panose="00020600040101010101" charset="-122"/>
+              <a:sym typeface="字由点字典黑 2 Light" panose="00020600040101010101" charset="-122"/>
+            </a:endParaRPr>
+          </a:p>
+          <a:p>
+            <a:pPr lvl="0" algn="just">
+              <a:lnSpc>
+                <a:spcPts val="2240"/>
+              </a:lnSpc>
+            </a:pPr>
+            <a:r>
+              <a:rPr lang="zh-CN" altLang="en-US" sz="1400" dirty="0">
+                <a:solidFill>
+                  <a:srgbClr val="000000"/>
+                </a:solidFill>
+                <a:latin typeface="黑体" panose="02010609060101010101" pitchFamily="49" charset="-122"/>
+                <a:ea typeface="黑体" panose="02010609060101010101" pitchFamily="49" charset="-122"/>
+                <a:cs typeface="字由点字典黑 2 Light" panose="00020600040101010101" charset="-122"/>
+                <a:sym typeface="字由点字典黑 2 Light" panose="00020600040101010101" charset="-122"/>
+              </a:rPr>
+              <a:t>方向：模型能力升级</a:t>
+            </a:r>
+          </a:p>
+          <a:p>
+            <a:pPr lvl="0" algn="just">
+              <a:lnSpc>
+                <a:spcPts val="2240"/>
+              </a:lnSpc>
+            </a:pPr>
+            <a:r>
+              <a:rPr lang="zh-CN" altLang="en-US" sz="1400" dirty="0">
+                <a:solidFill>
+                  <a:srgbClr val="000000"/>
+                </a:solidFill>
+                <a:latin typeface="黑体" panose="02010609060101010101" pitchFamily="49" charset="-122"/>
+                <a:ea typeface="黑体" panose="02010609060101010101" pitchFamily="49" charset="-122"/>
+                <a:cs typeface="字由点字典黑 2 Light" panose="00020600040101010101" charset="-122"/>
+                <a:sym typeface="字由点字典黑 2 Light" panose="00020600040101010101" charset="-122"/>
+              </a:rPr>
+              <a:t>具体内容：支持多模型切换；引入多</a:t>
+            </a:r>
+            <a:r>
+              <a:rPr lang="en-US" altLang="zh-CN" sz="1400" dirty="0">
+                <a:solidFill>
+                  <a:srgbClr val="000000"/>
+                </a:solidFill>
+                <a:latin typeface="黑体" panose="02010609060101010101" pitchFamily="49" charset="-122"/>
+                <a:ea typeface="黑体" panose="02010609060101010101" pitchFamily="49" charset="-122"/>
+                <a:cs typeface="字由点字典黑 2 Light" panose="00020600040101010101" charset="-122"/>
+                <a:sym typeface="字由点字典黑 2 Light" panose="00020600040101010101" charset="-122"/>
+              </a:rPr>
+              <a:t>Agent</a:t>
+            </a:r>
+            <a:r>
+              <a:rPr lang="zh-CN" altLang="en-US" sz="1400" dirty="0">
+                <a:solidFill>
+                  <a:srgbClr val="000000"/>
+                </a:solidFill>
+                <a:latin typeface="黑体" panose="02010609060101010101" pitchFamily="49" charset="-122"/>
+                <a:ea typeface="黑体" panose="02010609060101010101" pitchFamily="49" charset="-122"/>
+                <a:cs typeface="字由点字典黑 2 Light" panose="00020600040101010101" charset="-122"/>
+                <a:sym typeface="字由点字典黑 2 Light" panose="00020600040101010101" charset="-122"/>
+              </a:rPr>
+              <a:t>辩论机制提升分析深度</a:t>
+            </a:r>
+            <a:endParaRPr lang="en-US" sz="1400" dirty="0">
+              <a:solidFill>
+                <a:srgbClr val="000000"/>
+              </a:solidFill>
+              <a:latin typeface="黑体" panose="02010609060101010101" pitchFamily="49" charset="-122"/>
+              <a:ea typeface="黑体" panose="02010609060101010101" pitchFamily="49" charset="-122"/>
+              <a:cs typeface="字由点字典黑 2 Light" panose="00020600040101010101" charset="-122"/>
+              <a:sym typeface="字由点字典黑 2 Light" panose="00020600040101010101" charset="-122"/>
+            </a:endParaRPr>
           </a:p>
         </p:txBody>
       </p:sp>
-      <p:sp>
-        <p:nvSpPr>
-          <p:cNvPr id="100" name="TextBox 100"/>
-          <p:cNvSpPr txBox="1"/>
+      <p:pic>
+        <p:nvPicPr>
+          <p:cNvPr id="107" name="图片 106">
+            <a:extLst>
+              <a:ext uri="{FF2B5EF4-FFF2-40B4-BE49-F238E27FC236}">
+                <a16:creationId xmlns:a16="http://schemas.microsoft.com/office/drawing/2014/main" id="{E6B4B593-D257-1B11-7C36-717920040907}"/>
+              </a:ext>
+            </a:extLst>
+          </p:cNvPr>
+          <p:cNvPicPr>
+            <a:picLocks noChangeAspect="1"/>
+          </p:cNvPicPr>
           <p:nvPr/>
-        </p:nvSpPr>
+        </p:nvPicPr>
+        <p:blipFill>
+          <a:blip r:embed="rId4"/>
+          <a:stretch>
+            <a:fillRect/>
+          </a:stretch>
+        </p:blipFill>
         <p:spPr>
           <a:xfrm>
-            <a:off x="752605" y="15704674"/>
-            <a:ext cx="933624" cy="346711"/>
+            <a:off x="484545" y="12138485"/>
+            <a:ext cx="9207810" cy="2016525"/>
           </a:xfrm>
           <a:prstGeom prst="rect">
             <a:avLst/>
           </a:prstGeom>
         </p:spPr>
-        <p:txBody>
-          <a:bodyPr lIns="0" tIns="0" rIns="0" bIns="0" rtlCol="0" anchor="t">
-            <a:spAutoFit/>
-          </a:bodyPr>
-          <a:lstStyle/>
-          <a:p>
-            <a:pPr algn="l">
-              <a:lnSpc>
-                <a:spcPts val="2880"/>
-              </a:lnSpc>
-              <a:spcBef>
-                <a:spcPct val="0"/>
-              </a:spcBef>
-            </a:pPr>
-            <a:r>
-              <a:rPr lang="en-US" sz="1800" spc="-26">
-                <a:solidFill>
-                  <a:srgbClr val="000000"/>
-                </a:solidFill>
-                <a:latin typeface="字由点字典黑 2 Bold" panose="00020600040101010101" charset="-122"/>
-                <a:ea typeface="字由点字典黑 2 Bold" panose="00020600040101010101" charset="-122"/>
-                <a:cs typeface="字由点字典黑 2 Bold" panose="00020600040101010101" charset="-122"/>
-                <a:sym typeface="字由点字典黑 2 Bold" panose="00020600040101010101" charset="-122"/>
-              </a:rPr>
-              <a:t>项目方法</a:t>
-            </a:r>
-          </a:p>
-        </p:txBody>
-      </p:sp>
-      <p:sp>
-        <p:nvSpPr>
-          <p:cNvPr id="101" name="TextBox 101"/>
-          <p:cNvSpPr txBox="1"/>
+      </p:pic>
+      <p:pic>
+        <p:nvPicPr>
+          <p:cNvPr id="109" name="图片 108">
+            <a:extLst>
+              <a:ext uri="{FF2B5EF4-FFF2-40B4-BE49-F238E27FC236}">
+                <a16:creationId xmlns:a16="http://schemas.microsoft.com/office/drawing/2014/main" id="{6718FAD6-8F41-6E31-10D1-73A3DF370FF9}"/>
+              </a:ext>
+            </a:extLst>
+          </p:cNvPr>
+          <p:cNvPicPr>
+            <a:picLocks noChangeAspect="1"/>
+          </p:cNvPicPr>
           <p:nvPr/>
-        </p:nvSpPr>
+        </p:nvPicPr>
+        <p:blipFill>
+          <a:blip r:embed="rId5"/>
+          <a:stretch>
+            <a:fillRect/>
+          </a:stretch>
+        </p:blipFill>
         <p:spPr>
           <a:xfrm>
-            <a:off x="752605" y="17888297"/>
-            <a:ext cx="933624" cy="346711"/>
+            <a:off x="10116635" y="6620167"/>
+            <a:ext cx="4527601" cy="3406173"/>
           </a:xfrm>
           <a:prstGeom prst="rect">
             <a:avLst/>
           </a:prstGeom>
         </p:spPr>
-        <p:txBody>
-          <a:bodyPr lIns="0" tIns="0" rIns="0" bIns="0" rtlCol="0" anchor="t">
-            <a:spAutoFit/>
-          </a:bodyPr>
-          <a:lstStyle/>
-          <a:p>
-            <a:pPr algn="l">
-              <a:lnSpc>
-                <a:spcPts val="2880"/>
-              </a:lnSpc>
-              <a:spcBef>
-                <a:spcPct val="0"/>
-              </a:spcBef>
-            </a:pPr>
-            <a:r>
-              <a:rPr lang="en-US" sz="1800" spc="-26">
-                <a:solidFill>
-                  <a:srgbClr val="000000"/>
-                </a:solidFill>
-                <a:latin typeface="字由点字典黑 2 Bold" panose="00020600040101010101" charset="-122"/>
-                <a:ea typeface="字由点字典黑 2 Bold" panose="00020600040101010101" charset="-122"/>
-                <a:cs typeface="字由点字典黑 2 Bold" panose="00020600040101010101" charset="-122"/>
-                <a:sym typeface="字由点字典黑 2 Bold" panose="00020600040101010101" charset="-122"/>
-              </a:rPr>
-              <a:t>实验验证</a:t>
-            </a:r>
-          </a:p>
-        </p:txBody>
-      </p:sp>
-      <p:sp>
-        <p:nvSpPr>
-          <p:cNvPr id="102" name="TextBox 102"/>
-          <p:cNvSpPr txBox="1"/>
-          <p:nvPr/>
-        </p:nvSpPr>
-        <p:spPr>
-          <a:xfrm>
-            <a:off x="1262981" y="18463037"/>
-            <a:ext cx="8361455" cy="271780"/>
-          </a:xfrm>
-          <a:prstGeom prst="rect">
-            <a:avLst/>
-          </a:prstGeom>
-        </p:spPr>
-        <p:txBody>
-          <a:bodyPr lIns="0" tIns="0" rIns="0" bIns="0" rtlCol="0" anchor="t">
-            <a:spAutoFit/>
-          </a:bodyPr>
-          <a:lstStyle/>
-          <a:p>
-            <a:pPr marL="0" lvl="0" indent="0" algn="just">
-              <a:lnSpc>
-                <a:spcPts val="2240"/>
-              </a:lnSpc>
-            </a:pPr>
-            <a:r>
-              <a:rPr lang="en-US" sz="1400">
-                <a:solidFill>
-                  <a:srgbClr val="000000"/>
-                </a:solidFill>
-                <a:latin typeface="字由点字典黑 2 Light" panose="00020600040101010101" charset="-122"/>
-                <a:ea typeface="字由点字典黑 2 Light" panose="00020600040101010101" charset="-122"/>
-                <a:cs typeface="字由点字典黑 2 Light" panose="00020600040101010101" charset="-122"/>
-                <a:sym typeface="字由点字典黑 2 Light" panose="00020600040101010101" charset="-122"/>
-              </a:rPr>
-              <a:t>【实验验证1】说明项目功能测试、案例验证或系统运行效果的主要内容。</a:t>
-            </a:r>
-          </a:p>
-        </p:txBody>
-      </p:sp>
-      <p:sp>
-        <p:nvSpPr>
-          <p:cNvPr id="103" name="TextBox 103"/>
-          <p:cNvSpPr txBox="1"/>
-          <p:nvPr/>
-        </p:nvSpPr>
-        <p:spPr>
-          <a:xfrm>
-            <a:off x="1262981" y="19339815"/>
-            <a:ext cx="8380119" cy="548005"/>
-          </a:xfrm>
-          <a:prstGeom prst="rect">
-            <a:avLst/>
-          </a:prstGeom>
-        </p:spPr>
-        <p:txBody>
-          <a:bodyPr lIns="0" tIns="0" rIns="0" bIns="0" rtlCol="0" anchor="t">
-            <a:spAutoFit/>
-          </a:bodyPr>
-          <a:lstStyle/>
-          <a:p>
-            <a:pPr algn="just">
-              <a:lnSpc>
-                <a:spcPts val="2240"/>
-              </a:lnSpc>
-            </a:pPr>
-            <a:r>
-              <a:rPr lang="en-US" sz="1400">
-                <a:solidFill>
-                  <a:srgbClr val="000000"/>
-                </a:solidFill>
-                <a:latin typeface="字由点字典黑 2 Light" panose="00020600040101010101" charset="-122"/>
-                <a:ea typeface="字由点字典黑 2 Light" panose="00020600040101010101" charset="-122"/>
-                <a:cs typeface="字由点字典黑 2 Light" panose="00020600040101010101" charset="-122"/>
-                <a:sym typeface="字由点字典黑 2 Light" panose="00020600040101010101" charset="-122"/>
-              </a:rPr>
-              <a:t>【实验验证2】说明项目效果评估方式、对比实验、用户反馈或结果分析。</a:t>
-            </a:r>
-          </a:p>
-          <a:p>
-            <a:pPr marL="0" lvl="0" indent="0" algn="just">
-              <a:lnSpc>
-                <a:spcPts val="2240"/>
-              </a:lnSpc>
-            </a:pPr>
-            <a:endParaRPr lang="en-US" sz="1400">
-              <a:solidFill>
-                <a:srgbClr val="000000"/>
-              </a:solidFill>
-              <a:latin typeface="字由点字典黑 2 Light" panose="00020600040101010101" charset="-122"/>
-              <a:ea typeface="字由点字典黑 2 Light" panose="00020600040101010101" charset="-122"/>
-              <a:cs typeface="字由点字典黑 2 Light" panose="00020600040101010101" charset="-122"/>
-              <a:sym typeface="字由点字典黑 2 Light" panose="00020600040101010101" charset="-122"/>
-            </a:endParaRPr>
-          </a:p>
-        </p:txBody>
-      </p:sp>
-      <p:sp>
-        <p:nvSpPr>
-          <p:cNvPr id="104" name="TextBox 104"/>
-          <p:cNvSpPr txBox="1"/>
-          <p:nvPr/>
-        </p:nvSpPr>
-        <p:spPr>
-          <a:xfrm>
-            <a:off x="10175091" y="15209854"/>
-            <a:ext cx="914251" cy="346711"/>
-          </a:xfrm>
-          <a:prstGeom prst="rect">
-            <a:avLst/>
-          </a:prstGeom>
-        </p:spPr>
-        <p:txBody>
-          <a:bodyPr lIns="0" tIns="0" rIns="0" bIns="0" rtlCol="0" anchor="t">
-            <a:spAutoFit/>
-          </a:bodyPr>
-          <a:lstStyle/>
-          <a:p>
-            <a:pPr algn="ctr">
-              <a:lnSpc>
-                <a:spcPts val="2880"/>
-              </a:lnSpc>
-              <a:spcBef>
-                <a:spcPct val="0"/>
-              </a:spcBef>
-            </a:pPr>
-            <a:r>
-              <a:rPr lang="en-US" sz="1800">
-                <a:solidFill>
-                  <a:srgbClr val="000000"/>
-                </a:solidFill>
-                <a:latin typeface="字由点字典黑 2 Bold" panose="00020600040101010101" charset="-122"/>
-                <a:ea typeface="字由点字典黑 2 Bold" panose="00020600040101010101" charset="-122"/>
-                <a:cs typeface="字由点字典黑 2 Bold" panose="00020600040101010101" charset="-122"/>
-                <a:sym typeface="字由点字典黑 2 Bold" panose="00020600040101010101" charset="-122"/>
-              </a:rPr>
-              <a:t>未来改进</a:t>
-            </a:r>
-          </a:p>
-        </p:txBody>
-      </p:sp>
-      <p:sp>
-        <p:nvSpPr>
-          <p:cNvPr id="105" name="TextBox 105"/>
-          <p:cNvSpPr txBox="1"/>
-          <p:nvPr/>
-        </p:nvSpPr>
-        <p:spPr>
-          <a:xfrm>
-            <a:off x="10175091" y="15618946"/>
-            <a:ext cx="4324189" cy="548005"/>
-          </a:xfrm>
-          <a:prstGeom prst="rect">
-            <a:avLst/>
-          </a:prstGeom>
-        </p:spPr>
-        <p:txBody>
-          <a:bodyPr lIns="0" tIns="0" rIns="0" bIns="0" rtlCol="0" anchor="t">
-            <a:spAutoFit/>
-          </a:bodyPr>
-          <a:lstStyle/>
-          <a:p>
-            <a:pPr marL="0" lvl="0" indent="0" algn="just">
-              <a:lnSpc>
-                <a:spcPts val="2240"/>
-              </a:lnSpc>
-            </a:pPr>
-            <a:r>
-              <a:rPr lang="en-US" sz="1400">
-                <a:solidFill>
-                  <a:srgbClr val="000000"/>
-                </a:solidFill>
-                <a:latin typeface="字由点字典黑 2 Light" panose="00020600040101010101" charset="-122"/>
-                <a:ea typeface="字由点字典黑 2 Light" panose="00020600040101010101" charset="-122"/>
-                <a:cs typeface="字由点字典黑 2 Light" panose="00020600040101010101" charset="-122"/>
-                <a:sym typeface="字由点字典黑 2 Light" panose="00020600040101010101" charset="-122"/>
-              </a:rPr>
-              <a:t>说明项目仍可优化的方向，如功能完善、性能提升、场景拓展、用户体验优化等。</a:t>
-            </a:r>
-          </a:p>
-        </p:txBody>
-      </p:sp>
+      </p:pic>
     </p:spTree>
   </p:cSld>
   <p:clrMapOvr>
@@ -7693,4 +9309,319 @@
     </a:ext>
   </a:extLst>
 </a:theme>
+</file>
+
+<file path=ppt/theme/theme2.xml><?xml version="1.0" encoding="utf-8"?>
+<a:theme xmlns:a="http://schemas.openxmlformats.org/drawingml/2006/main" name="Office 主题​​">
+  <a:themeElements>
+    <a:clrScheme name="Office">
+      <a:dk1>
+        <a:sysClr val="windowText" lastClr="000000"/>
+      </a:dk1>
+      <a:lt1>
+        <a:sysClr val="window" lastClr="FFFFFF"/>
+      </a:lt1>
+      <a:dk2>
+        <a:srgbClr val="0E2841"/>
+      </a:dk2>
+      <a:lt2>
+        <a:srgbClr val="E8E8E8"/>
+      </a:lt2>
+      <a:accent1>
+        <a:srgbClr val="156082"/>
+      </a:accent1>
+      <a:accent2>
+        <a:srgbClr val="E97132"/>
+      </a:accent2>
+      <a:accent3>
+        <a:srgbClr val="196B24"/>
+      </a:accent3>
+      <a:accent4>
+        <a:srgbClr val="0F9ED5"/>
+      </a:accent4>
+      <a:accent5>
+        <a:srgbClr val="A02B93"/>
+      </a:accent5>
+      <a:accent6>
+        <a:srgbClr val="4EA72E"/>
+      </a:accent6>
+      <a:hlink>
+        <a:srgbClr val="467886"/>
+      </a:hlink>
+      <a:folHlink>
+        <a:srgbClr val="96607D"/>
+      </a:folHlink>
+    </a:clrScheme>
+    <a:fontScheme name="Office">
+      <a:majorFont>
+        <a:latin typeface="等线 Light" panose="02110004020202020204"/>
+        <a:ea typeface=""/>
+        <a:cs typeface=""/>
+        <a:font script="Jpan" typeface="游ゴシック Light"/>
+        <a:font script="Hang" typeface="맑은 고딕"/>
+        <a:font script="Hans" typeface="等线 Light"/>
+        <a:font script="Hant" typeface="新細明體"/>
+        <a:font script="Arab" typeface="Times New Roman"/>
+        <a:font script="Hebr" typeface="Times New Roman"/>
+        <a:font script="Thai" typeface="Angsana New"/>
+        <a:font script="Ethi" typeface="Nyala"/>
+        <a:font script="Beng" typeface="Vrinda"/>
+        <a:font script="Gujr" typeface="Shruti"/>
+        <a:font script="Khmr" typeface="MoolBoran"/>
+        <a:font script="Knda" typeface="Tunga"/>
+        <a:font script="Guru" typeface="Raavi"/>
+        <a:font script="Cans" typeface="Euphemia"/>
+        <a:font script="Cher" typeface="Plantagenet Cherokee"/>
+        <a:font script="Yiii" typeface="Microsoft Yi Baiti"/>
+        <a:font script="Tibt" typeface="Microsoft Himalaya"/>
+        <a:font script="Thaa" typeface="MV Boli"/>
+        <a:font script="Deva" typeface="Mangal"/>
+        <a:font script="Telu" typeface="Gautami"/>
+        <a:font script="Taml" typeface="Latha"/>
+        <a:font script="Syrc" typeface="Estrangelo Edessa"/>
+        <a:font script="Orya" typeface="Kalinga"/>
+        <a:font script="Mlym" typeface="Kartika"/>
+        <a:font script="Laoo" typeface="DokChampa"/>
+        <a:font script="Sinh" typeface="Iskoola Pota"/>
+        <a:font script="Mong" typeface="Mongolian Baiti"/>
+        <a:font script="Viet" typeface="Times New Roman"/>
+        <a:font script="Uigh" typeface="Microsoft Uighur"/>
+        <a:font script="Geor" typeface="Sylfaen"/>
+        <a:font script="Armn" typeface="Arial"/>
+        <a:font script="Bugi" typeface="Leelawadee UI"/>
+        <a:font script="Bopo" typeface="Microsoft JhengHei"/>
+        <a:font script="Java" typeface="Javanese Text"/>
+        <a:font script="Lisu" typeface="Segoe UI"/>
+        <a:font script="Mymr" typeface="Myanmar Text"/>
+        <a:font script="Nkoo" typeface="Ebrima"/>
+        <a:font script="Olck" typeface="Nirmala UI"/>
+        <a:font script="Osma" typeface="Ebrima"/>
+        <a:font script="Phag" typeface="Phagspa"/>
+        <a:font script="Syrn" typeface="Estrangelo Edessa"/>
+        <a:font script="Syrj" typeface="Estrangelo Edessa"/>
+        <a:font script="Syre" typeface="Estrangelo Edessa"/>
+        <a:font script="Sora" typeface="Nirmala UI"/>
+        <a:font script="Tale" typeface="Microsoft Tai Le"/>
+        <a:font script="Talu" typeface="Microsoft New Tai Lue"/>
+        <a:font script="Tfng" typeface="Ebrima"/>
+      </a:majorFont>
+      <a:minorFont>
+        <a:latin typeface="等线" panose="02110004020202020204"/>
+        <a:ea typeface=""/>
+        <a:cs typeface=""/>
+        <a:font script="Jpan" typeface="游ゴシック"/>
+        <a:font script="Hang" typeface="맑은 고딕"/>
+        <a:font script="Hans" typeface="等线"/>
+        <a:font script="Hant" typeface="新細明體"/>
+        <a:font script="Arab" typeface="Arial"/>
+        <a:font script="Hebr" typeface="Arial"/>
+        <a:font script="Thai" typeface="Cordia New"/>
+        <a:font script="Ethi" typeface="Nyala"/>
+        <a:font script="Beng" typeface="Vrinda"/>
+        <a:font script="Gujr" typeface="Shruti"/>
+        <a:font script="Khmr" typeface="DaunPenh"/>
+        <a:font script="Knda" typeface="Tunga"/>
+        <a:font script="Guru" typeface="Raavi"/>
+        <a:font script="Cans" typeface="Euphemia"/>
+        <a:font script="Cher" typeface="Plantagenet Cherokee"/>
+        <a:font script="Yiii" typeface="Microsoft Yi Baiti"/>
+        <a:font script="Tibt" typeface="Microsoft Himalaya"/>
+        <a:font script="Thaa" typeface="MV Boli"/>
+        <a:font script="Deva" typeface="Mangal"/>
+        <a:font script="Telu" typeface="Gautami"/>
+        <a:font script="Taml" typeface="Latha"/>
+        <a:font script="Syrc" typeface="Estrangelo Edessa"/>
+        <a:font script="Orya" typeface="Kalinga"/>
+        <a:font script="Mlym" typeface="Kartika"/>
+        <a:font script="Laoo" typeface="DokChampa"/>
+        <a:font script="Sinh" typeface="Iskoola Pota"/>
+        <a:font script="Mong" typeface="Mongolian Baiti"/>
+        <a:font script="Viet" typeface="Arial"/>
+        <a:font script="Uigh" typeface="Microsoft Uighur"/>
+        <a:font script="Geor" typeface="Sylfaen"/>
+        <a:font script="Armn" typeface="Arial"/>
+        <a:font script="Bugi" typeface="Leelawadee UI"/>
+        <a:font script="Bopo" typeface="Microsoft JhengHei"/>
+        <a:font script="Java" typeface="Javanese Text"/>
+        <a:font script="Lisu" typeface="Segoe UI"/>
+        <a:font script="Mymr" typeface="Myanmar Text"/>
+        <a:font script="Nkoo" typeface="Ebrima"/>
+        <a:font script="Olck" typeface="Nirmala UI"/>
+        <a:font script="Osma" typeface="Ebrima"/>
+        <a:font script="Phag" typeface="Phagspa"/>
+        <a:font script="Syrn" typeface="Estrangelo Edessa"/>
+        <a:font script="Syrj" typeface="Estrangelo Edessa"/>
+        <a:font script="Syre" typeface="Estrangelo Edessa"/>
+        <a:font script="Sora" typeface="Nirmala UI"/>
+        <a:font script="Tale" typeface="Microsoft Tai Le"/>
+        <a:font script="Talu" typeface="Microsoft New Tai Lue"/>
+        <a:font script="Tfng" typeface="Ebrima"/>
+      </a:minorFont>
+    </a:fontScheme>
+    <a:fmtScheme name="Office">
+      <a:fillStyleLst>
+        <a:solidFill>
+          <a:schemeClr val="phClr"/>
+        </a:solidFill>
+        <a:gradFill rotWithShape="1">
+          <a:gsLst>
+            <a:gs pos="0">
+              <a:schemeClr val="phClr">
+                <a:lumMod val="110000"/>
+                <a:satMod val="105000"/>
+                <a:tint val="67000"/>
+              </a:schemeClr>
+            </a:gs>
+            <a:gs pos="50000">
+              <a:schemeClr val="phClr">
+                <a:lumMod val="105000"/>
+                <a:satMod val="103000"/>
+                <a:tint val="73000"/>
+              </a:schemeClr>
+            </a:gs>
+            <a:gs pos="100000">
+              <a:schemeClr val="phClr">
+                <a:lumMod val="105000"/>
+                <a:satMod val="109000"/>
+                <a:tint val="81000"/>
+              </a:schemeClr>
+            </a:gs>
+          </a:gsLst>
+          <a:lin ang="5400000" scaled="0"/>
+        </a:gradFill>
+        <a:gradFill rotWithShape="1">
+          <a:gsLst>
+            <a:gs pos="0">
+              <a:schemeClr val="phClr">
+                <a:satMod val="103000"/>
+                <a:lumMod val="102000"/>
+                <a:tint val="94000"/>
+              </a:schemeClr>
+            </a:gs>
+            <a:gs pos="50000">
+              <a:schemeClr val="phClr">
+                <a:satMod val="110000"/>
+                <a:lumMod val="100000"/>
+                <a:shade val="100000"/>
+              </a:schemeClr>
+            </a:gs>
+            <a:gs pos="100000">
+              <a:schemeClr val="phClr">
+                <a:lumMod val="99000"/>
+                <a:satMod val="120000"/>
+                <a:shade val="78000"/>
+              </a:schemeClr>
+            </a:gs>
+          </a:gsLst>
+          <a:lin ang="5400000" scaled="0"/>
+        </a:gradFill>
+      </a:fillStyleLst>
+      <a:lnStyleLst>
+        <a:ln w="12700" cap="flat" cmpd="sng" algn="ctr">
+          <a:solidFill>
+            <a:schemeClr val="phClr"/>
+          </a:solidFill>
+          <a:prstDash val="solid"/>
+          <a:miter lim="800000"/>
+        </a:ln>
+        <a:ln w="19050" cap="flat" cmpd="sng" algn="ctr">
+          <a:solidFill>
+            <a:schemeClr val="phClr"/>
+          </a:solidFill>
+          <a:prstDash val="solid"/>
+          <a:miter lim="800000"/>
+        </a:ln>
+        <a:ln w="25400" cap="flat" cmpd="sng" algn="ctr">
+          <a:solidFill>
+            <a:schemeClr val="phClr"/>
+          </a:solidFill>
+          <a:prstDash val="solid"/>
+          <a:miter lim="800000"/>
+        </a:ln>
+      </a:lnStyleLst>
+      <a:effectStyleLst>
+        <a:effectStyle>
+          <a:effectLst/>
+        </a:effectStyle>
+        <a:effectStyle>
+          <a:effectLst/>
+        </a:effectStyle>
+        <a:effectStyle>
+          <a:effectLst>
+            <a:outerShdw blurRad="57150" dist="19050" dir="5400000" algn="ctr" rotWithShape="0">
+              <a:srgbClr val="000000">
+                <a:alpha val="63000"/>
+              </a:srgbClr>
+            </a:outerShdw>
+          </a:effectLst>
+        </a:effectStyle>
+      </a:effectStyleLst>
+      <a:bgFillStyleLst>
+        <a:solidFill>
+          <a:schemeClr val="phClr"/>
+        </a:solidFill>
+        <a:solidFill>
+          <a:schemeClr val="phClr">
+            <a:tint val="95000"/>
+            <a:satMod val="170000"/>
+          </a:schemeClr>
+        </a:solidFill>
+        <a:gradFill rotWithShape="1">
+          <a:gsLst>
+            <a:gs pos="0">
+              <a:schemeClr val="phClr">
+                <a:tint val="93000"/>
+                <a:satMod val="150000"/>
+                <a:shade val="98000"/>
+                <a:lumMod val="102000"/>
+              </a:schemeClr>
+            </a:gs>
+            <a:gs pos="50000">
+              <a:schemeClr val="phClr">
+                <a:tint val="98000"/>
+                <a:satMod val="130000"/>
+                <a:shade val="90000"/>
+                <a:lumMod val="103000"/>
+              </a:schemeClr>
+            </a:gs>
+            <a:gs pos="100000">
+              <a:schemeClr val="phClr">
+                <a:shade val="63000"/>
+                <a:satMod val="120000"/>
+              </a:schemeClr>
+            </a:gs>
+          </a:gsLst>
+          <a:lin ang="5400000" scaled="0"/>
+        </a:gradFill>
+      </a:bgFillStyleLst>
+    </a:fmtScheme>
+  </a:themeElements>
+  <a:objectDefaults>
+    <a:lnDef>
+      <a:spPr/>
+      <a:bodyPr/>
+      <a:lstStyle/>
+      <a:style>
+        <a:lnRef idx="2">
+          <a:schemeClr val="accent1"/>
+        </a:lnRef>
+        <a:fillRef idx="0">
+          <a:schemeClr val="accent1"/>
+        </a:fillRef>
+        <a:effectRef idx="1">
+          <a:schemeClr val="accent1"/>
+        </a:effectRef>
+        <a:fontRef idx="minor">
+          <a:schemeClr val="tx1"/>
+        </a:fontRef>
+      </a:style>
+    </a:lnDef>
+  </a:objectDefaults>
+  <a:extraClrSchemeLst/>
+  <a:extLst>
+    <a:ext uri="{05A4C25C-085E-4340-85A3-A5531E510DB2}">
+      <thm15:themeFamily xmlns:thm15="http://schemas.microsoft.com/office/thememl/2012/main" name="Office Theme" id="{2E142A2C-CD16-42D6-873A-C26D2A0506FA}" vid="{1BDDFF52-6CD6-40A5-AB3C-68EB2F1E4D0A}"/>
+    </a:ext>
+  </a:extLst>
+</a:theme>
 </file>